--- a/docs/Ricoman-New-Website.pptx
+++ b/docs/Ricoman-New-Website.pptx
@@ -17,6 +17,7 @@
     <p:sldId id="265" r:id="rId16"/>
     <p:sldId id="266" r:id="rId17"/>
     <p:sldId id="267" r:id="rId18"/>
+    <p:sldId id="268" r:id="rId19"/>
   </p:sldIdLst>
   <p:sldSz cx="12191695" cy="6858000" type="screen4x3"/>
   <p:notesSz cx="6858000" cy="9144000"/>
@@ -3496,7 +3497,7 @@
                 </a:solidFill>
                 <a:latin typeface="Calibri"/>
               </a:rPr>
-              <a:t>ROADMAP</a:t>
+              <a:t>MEASURED RESULTS</a:t>
             </a:r>
           </a:p>
           <a:p>
@@ -3515,7 +3516,7 @@
                 </a:solidFill>
                 <a:latin typeface="Calibri"/>
               </a:rPr>
-              <a:t>Where we are</a:t>
+              <a:t>Google PageSpeed — old site vs new</a:t>
             </a:r>
           </a:p>
         </p:txBody>
@@ -3566,58 +3567,14 @@
       </p:sp>
       <p:sp>
         <p:nvSpPr>
-          <p:cNvPr id="6" name="Rectangle 5"/>
-          <p:cNvSpPr/>
-          <p:nvPr/>
-        </p:nvSpPr>
-        <p:spPr>
-          <a:xfrm>
-            <a:off x="548640" y="1645920"/>
-            <a:ext cx="685800" cy="777240"/>
-          </a:xfrm>
-          <a:prstGeom prst="rect">
-            <a:avLst/>
-          </a:prstGeom>
-          <a:solidFill>
-            <a:srgbClr val="1D4ED8"/>
-          </a:solidFill>
-          <a:ln>
-            <a:noFill/>
-          </a:ln>
-          <a:effectLst/>
-        </p:spPr>
-        <p:style>
-          <a:lnRef idx="1">
-            <a:schemeClr val="accent1"/>
-          </a:lnRef>
-          <a:fillRef idx="3">
-            <a:schemeClr val="accent1"/>
-          </a:fillRef>
-          <a:effectRef idx="2">
-            <a:schemeClr val="accent1"/>
-          </a:effectRef>
-          <a:fontRef idx="minor">
-            <a:schemeClr val="lt1"/>
-          </a:fontRef>
-        </p:style>
-        <p:txBody>
-          <a:bodyPr rtlCol="0" anchor="ctr"/>
-          <a:lstStyle/>
-          <a:p>
-            <a:pPr algn="ctr"/>
-          </a:p>
-        </p:txBody>
-      </p:sp>
-      <p:sp>
-        <p:nvSpPr>
-          <p:cNvPr id="7" name="TextBox 6"/>
+          <p:cNvPr id="6" name="TextBox 5"/>
           <p:cNvSpPr txBox="1"/>
           <p:nvPr/>
         </p:nvSpPr>
         <p:spPr>
           <a:xfrm>
-            <a:off x="548640" y="1645920"/>
-            <a:ext cx="685800" cy="777240"/>
+            <a:off x="548640" y="1371600"/>
+            <a:ext cx="11155680" cy="457200"/>
           </a:xfrm>
           <a:prstGeom prst="rect">
             <a:avLst/>
@@ -3625,41 +3582,41 @@
           <a:noFill/>
         </p:spPr>
         <p:txBody>
-          <a:bodyPr wrap="square" anchor="ctr">
+          <a:bodyPr wrap="square" anchor="t">
             <a:spAutoFit/>
           </a:bodyPr>
           <a:lstStyle/>
           <a:p>
-            <a:pPr algn="ctr">
-              <a:spcBef>
-                <a:spcPts val="0"/>
-              </a:spcBef>
-              <a:spcAft>
-                <a:spcPts val="0"/>
-              </a:spcAft>
-            </a:pPr>
-            <a:r>
-              <a:rPr sz="2600" b="1">
-                <a:solidFill>
-                  <a:srgbClr val="FFFFFF"/>
-                </a:solidFill>
-                <a:latin typeface="Calibri"/>
-              </a:rPr>
-              <a:t>1</a:t>
-            </a:r>
-          </a:p>
-        </p:txBody>
-      </p:sp>
-      <p:sp>
-        <p:nvSpPr>
-          <p:cNvPr id="8" name="Rectangle 7"/>
+            <a:pPr algn="l">
+              <a:spcBef>
+                <a:spcPts val="0"/>
+              </a:spcBef>
+              <a:spcAft>
+                <a:spcPts val="0"/>
+              </a:spcAft>
+            </a:pPr>
+            <a:r>
+              <a:rPr sz="1300" b="0">
+                <a:solidFill>
+                  <a:srgbClr val="5B626D"/>
+                </a:solidFill>
+                <a:latin typeface="Calibri"/>
+              </a:rPr>
+              <a:t>Google Lighthouse performance score (0–100) and core load metrics, measured on the homepage.</a:t>
+            </a:r>
+          </a:p>
+        </p:txBody>
+      </p:sp>
+      <p:sp>
+        <p:nvSpPr>
+          <p:cNvPr id="7" name="Rectangle 6"/>
           <p:cNvSpPr/>
           <p:nvPr/>
         </p:nvSpPr>
         <p:spPr>
           <a:xfrm>
-            <a:off x="1325880" y="1645920"/>
-            <a:ext cx="10287000" cy="777240"/>
+            <a:off x="548640" y="1874519"/>
+            <a:ext cx="5394960" cy="1783080"/>
           </a:xfrm>
           <a:prstGeom prst="rect">
             <a:avLst/>
@@ -3696,14 +3653,56 @@
       </p:sp>
       <p:sp>
         <p:nvSpPr>
+          <p:cNvPr id="8" name="TextBox 7"/>
+          <p:cNvSpPr txBox="1"/>
+          <p:nvPr/>
+        </p:nvSpPr>
+        <p:spPr>
+          <a:xfrm>
+            <a:off x="548640" y="1965960"/>
+            <a:ext cx="5394960" cy="365760"/>
+          </a:xfrm>
+          <a:prstGeom prst="rect">
+            <a:avLst/>
+          </a:prstGeom>
+          <a:noFill/>
+        </p:spPr>
+        <p:txBody>
+          <a:bodyPr wrap="square" anchor="t">
+            <a:spAutoFit/>
+          </a:bodyPr>
+          <a:lstStyle/>
+          <a:p>
+            <a:pPr algn="ctr">
+              <a:spcBef>
+                <a:spcPts val="0"/>
+              </a:spcBef>
+              <a:spcAft>
+                <a:spcPts val="0"/>
+              </a:spcAft>
+            </a:pPr>
+            <a:r>
+              <a:rPr sz="1400" b="1">
+                <a:solidFill>
+                  <a:srgbClr val="0B0B0C"/>
+                </a:solidFill>
+                <a:latin typeface="Calibri"/>
+              </a:rPr>
+              <a:t>Mobile score</a:t>
+            </a:r>
+          </a:p>
+        </p:txBody>
+      </p:sp>
+      <p:sp>
+        <p:nvSpPr>
           <p:cNvPr id="9" name="TextBox 8"/>
           <p:cNvSpPr txBox="1"/>
           <p:nvPr/>
         </p:nvSpPr>
         <p:spPr>
           <a:xfrm>
-            <a:off x="1554480" y="1719072"/>
-            <a:ext cx="9875520" cy="685800"/>
+            <a:off x="914400" y="2468880"/>
+            <a:ext cx="1828800" cy="1005840"/>
           </a:xfrm>
           <a:prstGeom prst="rect">
             <a:avLst/>
@@ -3711,12 +3710,12 @@
           <a:noFill/>
         </p:spPr>
         <p:txBody>
-          <a:bodyPr wrap="square" anchor="ctr">
+          <a:bodyPr wrap="square" anchor="t">
             <a:spAutoFit/>
           </a:bodyPr>
           <a:lstStyle/>
           <a:p>
-            <a:pPr algn="l">
+            <a:pPr algn="ctr">
               <a:spcBef>
                 <a:spcPts val="0"/>
               </a:spcBef>
@@ -3725,77 +3724,75 @@
               </a:spcAft>
             </a:pPr>
             <a:r>
-              <a:rPr sz="1600" b="1">
-                <a:solidFill>
-                  <a:srgbClr val="0B0B0C"/>
-                </a:solidFill>
-                <a:latin typeface="Calibri"/>
-              </a:rPr>
-              <a:t>Recreate ricoman.com exactly on the new platform</a:t>
-            </a:r>
-          </a:p>
-          <a:p>
-            <a:pPr algn="l">
-              <a:spcBef>
-                <a:spcPts val="0"/>
-              </a:spcBef>
-              <a:spcAft>
-                <a:spcPts val="0"/>
-              </a:spcAft>
-            </a:pPr>
-            <a:r>
-              <a:rPr sz="1250" b="0">
+              <a:rPr sz="1200" b="1">
                 <a:solidFill>
                   <a:srgbClr val="5B626D"/>
                 </a:solidFill>
                 <a:latin typeface="Calibri"/>
               </a:rPr>
-              <a:t>In progress — confirming each page matches live</a:t>
-            </a:r>
-          </a:p>
-        </p:txBody>
-      </p:sp>
-      <p:sp>
-        <p:nvSpPr>
-          <p:cNvPr id="10" name="Rectangle 9"/>
-          <p:cNvSpPr/>
-          <p:nvPr/>
-        </p:nvSpPr>
-        <p:spPr>
-          <a:xfrm>
-            <a:off x="548640" y="2560320"/>
-            <a:ext cx="685800" cy="777240"/>
-          </a:xfrm>
-          <a:prstGeom prst="rect">
-            <a:avLst/>
-          </a:prstGeom>
-          <a:solidFill>
-            <a:srgbClr val="1D4ED8"/>
-          </a:solidFill>
-          <a:ln>
-            <a:noFill/>
-          </a:ln>
-          <a:effectLst/>
-        </p:spPr>
-        <p:style>
-          <a:lnRef idx="1">
-            <a:schemeClr val="accent1"/>
-          </a:lnRef>
-          <a:fillRef idx="3">
-            <a:schemeClr val="accent1"/>
-          </a:fillRef>
-          <a:effectRef idx="2">
-            <a:schemeClr val="accent1"/>
-          </a:effectRef>
-          <a:fontRef idx="minor">
-            <a:schemeClr val="lt1"/>
-          </a:fontRef>
-        </p:style>
-        <p:txBody>
-          <a:bodyPr rtlCol="0" anchor="ctr"/>
-          <a:lstStyle/>
-          <a:p>
-            <a:pPr algn="ctr"/>
+              <a:t>OLD</a:t>
+            </a:r>
+          </a:p>
+          <a:p>
+            <a:pPr algn="ctr">
+              <a:spcBef>
+                <a:spcPts val="0"/>
+              </a:spcBef>
+              <a:spcAft>
+                <a:spcPts val="0"/>
+              </a:spcAft>
+            </a:pPr>
+            <a:r>
+              <a:rPr sz="4600" b="1">
+                <a:solidFill>
+                  <a:srgbClr val="B32D2E"/>
+                </a:solidFill>
+                <a:latin typeface="Calibri"/>
+              </a:rPr>
+              <a:t>32</a:t>
+            </a:r>
+          </a:p>
+        </p:txBody>
+      </p:sp>
+      <p:sp>
+        <p:nvSpPr>
+          <p:cNvPr id="10" name="TextBox 9"/>
+          <p:cNvSpPr txBox="1"/>
+          <p:nvPr/>
+        </p:nvSpPr>
+        <p:spPr>
+          <a:xfrm>
+            <a:off x="2788920" y="2697480"/>
+            <a:ext cx="914400" cy="731520"/>
+          </a:xfrm>
+          <a:prstGeom prst="rect">
+            <a:avLst/>
+          </a:prstGeom>
+          <a:noFill/>
+        </p:spPr>
+        <p:txBody>
+          <a:bodyPr wrap="square" anchor="t">
+            <a:spAutoFit/>
+          </a:bodyPr>
+          <a:lstStyle/>
+          <a:p>
+            <a:pPr algn="ctr">
+              <a:spcBef>
+                <a:spcPts val="0"/>
+              </a:spcBef>
+              <a:spcAft>
+                <a:spcPts val="0"/>
+              </a:spcAft>
+            </a:pPr>
+            <a:r>
+              <a:rPr sz="3000" b="1">
+                <a:solidFill>
+                  <a:srgbClr val="1D4ED8"/>
+                </a:solidFill>
+                <a:latin typeface="Calibri"/>
+              </a:rPr>
+              <a:t>→</a:t>
+            </a:r>
           </a:p>
         </p:txBody>
       </p:sp>
@@ -3807,8 +3804,8 @@
         </p:nvSpPr>
         <p:spPr>
           <a:xfrm>
-            <a:off x="548640" y="2560320"/>
-            <a:ext cx="685800" cy="777240"/>
+            <a:off x="3749040" y="2468880"/>
+            <a:ext cx="1828800" cy="1005840"/>
           </a:xfrm>
           <a:prstGeom prst="rect">
             <a:avLst/>
@@ -3816,7 +3813,7 @@
           <a:noFill/>
         </p:spPr>
         <p:txBody>
-          <a:bodyPr wrap="square" anchor="ctr">
+          <a:bodyPr wrap="square" anchor="t">
             <a:spAutoFit/>
           </a:bodyPr>
           <a:lstStyle/>
@@ -3826,17 +3823,36 @@
                 <a:spcPts val="0"/>
               </a:spcBef>
               <a:spcAft>
-                <a:spcPts val="0"/>
-              </a:spcAft>
-            </a:pPr>
-            <a:r>
-              <a:rPr sz="2600" b="1">
-                <a:solidFill>
-                  <a:srgbClr val="FFFFFF"/>
-                </a:solidFill>
-                <a:latin typeface="Calibri"/>
-              </a:rPr>
-              <a:t>2</a:t>
+                <a:spcPts val="200"/>
+              </a:spcAft>
+            </a:pPr>
+            <a:r>
+              <a:rPr sz="1200" b="1">
+                <a:solidFill>
+                  <a:srgbClr val="5B626D"/>
+                </a:solidFill>
+                <a:latin typeface="Calibri"/>
+              </a:rPr>
+              <a:t>NEW</a:t>
+            </a:r>
+          </a:p>
+          <a:p>
+            <a:pPr algn="ctr">
+              <a:spcBef>
+                <a:spcPts val="0"/>
+              </a:spcBef>
+              <a:spcAft>
+                <a:spcPts val="0"/>
+              </a:spcAft>
+            </a:pPr>
+            <a:r>
+              <a:rPr sz="4600" b="1">
+                <a:solidFill>
+                  <a:srgbClr val="1A7F37"/>
+                </a:solidFill>
+                <a:latin typeface="Calibri"/>
+              </a:rPr>
+              <a:t>93</a:t>
             </a:r>
           </a:p>
         </p:txBody>
@@ -3849,8 +3865,8 @@
         </p:nvSpPr>
         <p:spPr>
           <a:xfrm>
-            <a:off x="1325880" y="2560320"/>
-            <a:ext cx="10287000" cy="777240"/>
+            <a:off x="6217920" y="1874519"/>
+            <a:ext cx="5394960" cy="1783080"/>
           </a:xfrm>
           <a:prstGeom prst="rect">
             <a:avLst/>
@@ -3893,8 +3909,8 @@
         </p:nvSpPr>
         <p:spPr>
           <a:xfrm>
-            <a:off x="1554480" y="2633472"/>
-            <a:ext cx="9875520" cy="685800"/>
+            <a:off x="6217920" y="1965960"/>
+            <a:ext cx="5394960" cy="365760"/>
           </a:xfrm>
           <a:prstGeom prst="rect">
             <a:avLst/>
@@ -3902,12 +3918,54 @@
           <a:noFill/>
         </p:spPr>
         <p:txBody>
-          <a:bodyPr wrap="square" anchor="ctr">
+          <a:bodyPr wrap="square" anchor="t">
             <a:spAutoFit/>
           </a:bodyPr>
           <a:lstStyle/>
           <a:p>
-            <a:pPr algn="l">
+            <a:pPr algn="ctr">
+              <a:spcBef>
+                <a:spcPts val="0"/>
+              </a:spcBef>
+              <a:spcAft>
+                <a:spcPts val="0"/>
+              </a:spcAft>
+            </a:pPr>
+            <a:r>
+              <a:rPr sz="1400" b="1">
+                <a:solidFill>
+                  <a:srgbClr val="0B0B0C"/>
+                </a:solidFill>
+                <a:latin typeface="Calibri"/>
+              </a:rPr>
+              <a:t>Desktop score</a:t>
+            </a:r>
+          </a:p>
+        </p:txBody>
+      </p:sp>
+      <p:sp>
+        <p:nvSpPr>
+          <p:cNvPr id="14" name="TextBox 13"/>
+          <p:cNvSpPr txBox="1"/>
+          <p:nvPr/>
+        </p:nvSpPr>
+        <p:spPr>
+          <a:xfrm>
+            <a:off x="6583680" y="2468880"/>
+            <a:ext cx="1828800" cy="1005840"/>
+          </a:xfrm>
+          <a:prstGeom prst="rect">
+            <a:avLst/>
+          </a:prstGeom>
+          <a:noFill/>
+        </p:spPr>
+        <p:txBody>
+          <a:bodyPr wrap="square" anchor="t">
+            <a:spAutoFit/>
+          </a:bodyPr>
+          <a:lstStyle/>
+          <a:p>
+            <a:pPr algn="ctr">
               <a:spcBef>
                 <a:spcPts val="0"/>
               </a:spcBef>
@@ -3916,52 +3974,155 @@
               </a:spcAft>
             </a:pPr>
             <a:r>
-              <a:rPr sz="1600" b="1">
-                <a:solidFill>
-                  <a:srgbClr val="0B0B0C"/>
-                </a:solidFill>
-                <a:latin typeface="Calibri"/>
-              </a:rPr>
-              <a:t>Check &amp; enhance SEO</a:t>
-            </a:r>
-          </a:p>
-          <a:p>
-            <a:pPr algn="l">
-              <a:spcBef>
-                <a:spcPts val="0"/>
-              </a:spcBef>
-              <a:spcAft>
-                <a:spcPts val="0"/>
-              </a:spcAft>
-            </a:pPr>
-            <a:r>
-              <a:rPr sz="1250" b="0">
+              <a:rPr sz="1200" b="1">
                 <a:solidFill>
                   <a:srgbClr val="5B626D"/>
                 </a:solidFill>
                 <a:latin typeface="Calibri"/>
               </a:rPr>
-              <a:t>Foundations + audit tooling built</a:t>
-            </a:r>
-          </a:p>
-        </p:txBody>
-      </p:sp>
-      <p:sp>
-        <p:nvSpPr>
-          <p:cNvPr id="14" name="Rectangle 13"/>
+              <a:t>OLD</a:t>
+            </a:r>
+          </a:p>
+          <a:p>
+            <a:pPr algn="ctr">
+              <a:spcBef>
+                <a:spcPts val="0"/>
+              </a:spcBef>
+              <a:spcAft>
+                <a:spcPts val="0"/>
+              </a:spcAft>
+            </a:pPr>
+            <a:r>
+              <a:rPr sz="4600" b="1">
+                <a:solidFill>
+                  <a:srgbClr val="996800"/>
+                </a:solidFill>
+                <a:latin typeface="Calibri"/>
+              </a:rPr>
+              <a:t>68</a:t>
+            </a:r>
+          </a:p>
+        </p:txBody>
+      </p:sp>
+      <p:sp>
+        <p:nvSpPr>
+          <p:cNvPr id="15" name="TextBox 14"/>
+          <p:cNvSpPr txBox="1"/>
+          <p:nvPr/>
+        </p:nvSpPr>
+        <p:spPr>
+          <a:xfrm>
+            <a:off x="8458200" y="2697480"/>
+            <a:ext cx="914400" cy="731520"/>
+          </a:xfrm>
+          <a:prstGeom prst="rect">
+            <a:avLst/>
+          </a:prstGeom>
+          <a:noFill/>
+        </p:spPr>
+        <p:txBody>
+          <a:bodyPr wrap="square" anchor="t">
+            <a:spAutoFit/>
+          </a:bodyPr>
+          <a:lstStyle/>
+          <a:p>
+            <a:pPr algn="ctr">
+              <a:spcBef>
+                <a:spcPts val="0"/>
+              </a:spcBef>
+              <a:spcAft>
+                <a:spcPts val="0"/>
+              </a:spcAft>
+            </a:pPr>
+            <a:r>
+              <a:rPr sz="3000" b="1">
+                <a:solidFill>
+                  <a:srgbClr val="1D4ED8"/>
+                </a:solidFill>
+                <a:latin typeface="Calibri"/>
+              </a:rPr>
+              <a:t>→</a:t>
+            </a:r>
+          </a:p>
+        </p:txBody>
+      </p:sp>
+      <p:sp>
+        <p:nvSpPr>
+          <p:cNvPr id="16" name="TextBox 15"/>
+          <p:cNvSpPr txBox="1"/>
+          <p:nvPr/>
+        </p:nvSpPr>
+        <p:spPr>
+          <a:xfrm>
+            <a:off x="9418320" y="2468880"/>
+            <a:ext cx="1828800" cy="1005840"/>
+          </a:xfrm>
+          <a:prstGeom prst="rect">
+            <a:avLst/>
+          </a:prstGeom>
+          <a:noFill/>
+        </p:spPr>
+        <p:txBody>
+          <a:bodyPr wrap="square" anchor="t">
+            <a:spAutoFit/>
+          </a:bodyPr>
+          <a:lstStyle/>
+          <a:p>
+            <a:pPr algn="ctr">
+              <a:spcBef>
+                <a:spcPts val="0"/>
+              </a:spcBef>
+              <a:spcAft>
+                <a:spcPts val="200"/>
+              </a:spcAft>
+            </a:pPr>
+            <a:r>
+              <a:rPr sz="1200" b="1">
+                <a:solidFill>
+                  <a:srgbClr val="5B626D"/>
+                </a:solidFill>
+                <a:latin typeface="Calibri"/>
+              </a:rPr>
+              <a:t>NEW</a:t>
+            </a:r>
+          </a:p>
+          <a:p>
+            <a:pPr algn="ctr">
+              <a:spcBef>
+                <a:spcPts val="0"/>
+              </a:spcBef>
+              <a:spcAft>
+                <a:spcPts val="0"/>
+              </a:spcAft>
+            </a:pPr>
+            <a:r>
+              <a:rPr sz="4600" b="1">
+                <a:solidFill>
+                  <a:srgbClr val="1A7F37"/>
+                </a:solidFill>
+                <a:latin typeface="Calibri"/>
+              </a:rPr>
+              <a:t>96</a:t>
+            </a:r>
+          </a:p>
+        </p:txBody>
+      </p:sp>
+      <p:sp>
+        <p:nvSpPr>
+          <p:cNvPr id="17" name="Rectangle 16"/>
           <p:cNvSpPr/>
           <p:nvPr/>
         </p:nvSpPr>
         <p:spPr>
           <a:xfrm>
-            <a:off x="548640" y="3474720"/>
-            <a:ext cx="685800" cy="777240"/>
+            <a:off x="548640" y="3886200"/>
+            <a:ext cx="6858000" cy="420624"/>
           </a:xfrm>
           <a:prstGeom prst="rect">
             <a:avLst/>
           </a:prstGeom>
           <a:solidFill>
-            <a:srgbClr val="5B626D"/>
+            <a:srgbClr val="0B0B0C"/>
           </a:solidFill>
           <a:ln>
             <a:noFill/>
@@ -3992,14 +4153,102 @@
       </p:sp>
       <p:sp>
         <p:nvSpPr>
-          <p:cNvPr id="15" name="TextBox 14"/>
+          <p:cNvPr id="18" name="Rectangle 17"/>
+          <p:cNvSpPr/>
+          <p:nvPr/>
+        </p:nvSpPr>
+        <p:spPr>
+          <a:xfrm>
+            <a:off x="7406640" y="3886200"/>
+            <a:ext cx="2103120" cy="420624"/>
+          </a:xfrm>
+          <a:prstGeom prst="rect">
+            <a:avLst/>
+          </a:prstGeom>
+          <a:solidFill>
+            <a:srgbClr val="0B0B0C"/>
+          </a:solidFill>
+          <a:ln>
+            <a:noFill/>
+          </a:ln>
+          <a:effectLst/>
+        </p:spPr>
+        <p:style>
+          <a:lnRef idx="1">
+            <a:schemeClr val="accent1"/>
+          </a:lnRef>
+          <a:fillRef idx="3">
+            <a:schemeClr val="accent1"/>
+          </a:fillRef>
+          <a:effectRef idx="2">
+            <a:schemeClr val="accent1"/>
+          </a:effectRef>
+          <a:fontRef idx="minor">
+            <a:schemeClr val="lt1"/>
+          </a:fontRef>
+        </p:style>
+        <p:txBody>
+          <a:bodyPr rtlCol="0" anchor="ctr"/>
+          <a:lstStyle/>
+          <a:p>
+            <a:pPr algn="ctr"/>
+          </a:p>
+        </p:txBody>
+      </p:sp>
+      <p:sp>
+        <p:nvSpPr>
+          <p:cNvPr id="19" name="Rectangle 18"/>
+          <p:cNvSpPr/>
+          <p:nvPr/>
+        </p:nvSpPr>
+        <p:spPr>
+          <a:xfrm>
+            <a:off x="9509760" y="3886200"/>
+            <a:ext cx="2103120" cy="420624"/>
+          </a:xfrm>
+          <a:prstGeom prst="rect">
+            <a:avLst/>
+          </a:prstGeom>
+          <a:solidFill>
+            <a:srgbClr val="0B0B0C"/>
+          </a:solidFill>
+          <a:ln>
+            <a:noFill/>
+          </a:ln>
+          <a:effectLst/>
+        </p:spPr>
+        <p:style>
+          <a:lnRef idx="1">
+            <a:schemeClr val="accent1"/>
+          </a:lnRef>
+          <a:fillRef idx="3">
+            <a:schemeClr val="accent1"/>
+          </a:fillRef>
+          <a:effectRef idx="2">
+            <a:schemeClr val="accent1"/>
+          </a:effectRef>
+          <a:fontRef idx="minor">
+            <a:schemeClr val="lt1"/>
+          </a:fontRef>
+        </p:style>
+        <p:txBody>
+          <a:bodyPr rtlCol="0" anchor="ctr"/>
+          <a:lstStyle/>
+          <a:p>
+            <a:pPr algn="ctr"/>
+          </a:p>
+        </p:txBody>
+      </p:sp>
+      <p:sp>
+        <p:nvSpPr>
+          <p:cNvPr id="20" name="TextBox 19"/>
           <p:cNvSpPr txBox="1"/>
           <p:nvPr/>
         </p:nvSpPr>
         <p:spPr>
           <a:xfrm>
-            <a:off x="548640" y="3474720"/>
-            <a:ext cx="685800" cy="777240"/>
+            <a:off x="731520" y="3886200"/>
+            <a:ext cx="6583680" cy="420624"/>
           </a:xfrm>
           <a:prstGeom prst="rect">
             <a:avLst/>
@@ -4012,36 +4261,378 @@
           </a:bodyPr>
           <a:lstStyle/>
           <a:p>
-            <a:pPr algn="ctr">
-              <a:spcBef>
-                <a:spcPts val="0"/>
-              </a:spcBef>
-              <a:spcAft>
-                <a:spcPts val="0"/>
-              </a:spcAft>
-            </a:pPr>
-            <a:r>
-              <a:rPr sz="2600" b="1">
+            <a:pPr algn="l">
+              <a:spcBef>
+                <a:spcPts val="0"/>
+              </a:spcBef>
+              <a:spcAft>
+                <a:spcPts val="0"/>
+              </a:spcAft>
+            </a:pPr>
+            <a:r>
+              <a:rPr sz="1200" b="1">
                 <a:solidFill>
                   <a:srgbClr val="FFFFFF"/>
                 </a:solidFill>
                 <a:latin typeface="Calibri"/>
               </a:rPr>
-              <a:t>3</a:t>
-            </a:r>
-          </a:p>
-        </p:txBody>
-      </p:sp>
-      <p:sp>
-        <p:nvSpPr>
-          <p:cNvPr id="16" name="Rectangle 15"/>
+              <a:t>Metric (mobile)</a:t>
+            </a:r>
+          </a:p>
+        </p:txBody>
+      </p:sp>
+      <p:sp>
+        <p:nvSpPr>
+          <p:cNvPr id="21" name="TextBox 20"/>
+          <p:cNvSpPr txBox="1"/>
+          <p:nvPr/>
+        </p:nvSpPr>
+        <p:spPr>
+          <a:xfrm>
+            <a:off x="7589520" y="3886200"/>
+            <a:ext cx="1828800" cy="420624"/>
+          </a:xfrm>
+          <a:prstGeom prst="rect">
+            <a:avLst/>
+          </a:prstGeom>
+          <a:noFill/>
+        </p:spPr>
+        <p:txBody>
+          <a:bodyPr wrap="square" anchor="ctr">
+            <a:spAutoFit/>
+          </a:bodyPr>
+          <a:lstStyle/>
+          <a:p>
+            <a:pPr algn="l">
+              <a:spcBef>
+                <a:spcPts val="0"/>
+              </a:spcBef>
+              <a:spcAft>
+                <a:spcPts val="0"/>
+              </a:spcAft>
+            </a:pPr>
+            <a:r>
+              <a:rPr sz="1200" b="1">
+                <a:solidFill>
+                  <a:srgbClr val="FFFFFF"/>
+                </a:solidFill>
+                <a:latin typeface="Calibri"/>
+              </a:rPr>
+              <a:t>Old</a:t>
+            </a:r>
+          </a:p>
+        </p:txBody>
+      </p:sp>
+      <p:sp>
+        <p:nvSpPr>
+          <p:cNvPr id="22" name="TextBox 21"/>
+          <p:cNvSpPr txBox="1"/>
+          <p:nvPr/>
+        </p:nvSpPr>
+        <p:spPr>
+          <a:xfrm>
+            <a:off x="9692640" y="3886200"/>
+            <a:ext cx="1828800" cy="420624"/>
+          </a:xfrm>
+          <a:prstGeom prst="rect">
+            <a:avLst/>
+          </a:prstGeom>
+          <a:noFill/>
+        </p:spPr>
+        <p:txBody>
+          <a:bodyPr wrap="square" anchor="ctr">
+            <a:spAutoFit/>
+          </a:bodyPr>
+          <a:lstStyle/>
+          <a:p>
+            <a:pPr algn="l">
+              <a:spcBef>
+                <a:spcPts val="0"/>
+              </a:spcBef>
+              <a:spcAft>
+                <a:spcPts val="0"/>
+              </a:spcAft>
+            </a:pPr>
+            <a:r>
+              <a:rPr sz="1200" b="1">
+                <a:solidFill>
+                  <a:srgbClr val="FFFFFF"/>
+                </a:solidFill>
+                <a:latin typeface="Calibri"/>
+              </a:rPr>
+              <a:t>New</a:t>
+            </a:r>
+          </a:p>
+        </p:txBody>
+      </p:sp>
+      <p:sp>
+        <p:nvSpPr>
+          <p:cNvPr id="23" name="Rectangle 22"/>
           <p:cNvSpPr/>
           <p:nvPr/>
         </p:nvSpPr>
         <p:spPr>
           <a:xfrm>
-            <a:off x="1325880" y="3474720"/>
-            <a:ext cx="10287000" cy="777240"/>
+            <a:off x="548640" y="4325112"/>
+            <a:ext cx="6858000" cy="420624"/>
+          </a:xfrm>
+          <a:prstGeom prst="rect">
+            <a:avLst/>
+          </a:prstGeom>
+          <a:solidFill>
+            <a:srgbClr val="FFFFFF"/>
+          </a:solidFill>
+          <a:ln>
+            <a:noFill/>
+          </a:ln>
+          <a:effectLst/>
+        </p:spPr>
+        <p:style>
+          <a:lnRef idx="1">
+            <a:schemeClr val="accent1"/>
+          </a:lnRef>
+          <a:fillRef idx="3">
+            <a:schemeClr val="accent1"/>
+          </a:fillRef>
+          <a:effectRef idx="2">
+            <a:schemeClr val="accent1"/>
+          </a:effectRef>
+          <a:fontRef idx="minor">
+            <a:schemeClr val="lt1"/>
+          </a:fontRef>
+        </p:style>
+        <p:txBody>
+          <a:bodyPr rtlCol="0" anchor="ctr"/>
+          <a:lstStyle/>
+          <a:p>
+            <a:pPr algn="ctr"/>
+          </a:p>
+        </p:txBody>
+      </p:sp>
+      <p:sp>
+        <p:nvSpPr>
+          <p:cNvPr id="24" name="Rectangle 23"/>
+          <p:cNvSpPr/>
+          <p:nvPr/>
+        </p:nvSpPr>
+        <p:spPr>
+          <a:xfrm>
+            <a:off x="7406640" y="4325112"/>
+            <a:ext cx="2103120" cy="420624"/>
+          </a:xfrm>
+          <a:prstGeom prst="rect">
+            <a:avLst/>
+          </a:prstGeom>
+          <a:solidFill>
+            <a:srgbClr val="FFFFFF"/>
+          </a:solidFill>
+          <a:ln>
+            <a:noFill/>
+          </a:ln>
+          <a:effectLst/>
+        </p:spPr>
+        <p:style>
+          <a:lnRef idx="1">
+            <a:schemeClr val="accent1"/>
+          </a:lnRef>
+          <a:fillRef idx="3">
+            <a:schemeClr val="accent1"/>
+          </a:fillRef>
+          <a:effectRef idx="2">
+            <a:schemeClr val="accent1"/>
+          </a:effectRef>
+          <a:fontRef idx="minor">
+            <a:schemeClr val="lt1"/>
+          </a:fontRef>
+        </p:style>
+        <p:txBody>
+          <a:bodyPr rtlCol="0" anchor="ctr"/>
+          <a:lstStyle/>
+          <a:p>
+            <a:pPr algn="ctr"/>
+          </a:p>
+        </p:txBody>
+      </p:sp>
+      <p:sp>
+        <p:nvSpPr>
+          <p:cNvPr id="25" name="Rectangle 24"/>
+          <p:cNvSpPr/>
+          <p:nvPr/>
+        </p:nvSpPr>
+        <p:spPr>
+          <a:xfrm>
+            <a:off x="9509760" y="4325112"/>
+            <a:ext cx="2103120" cy="420624"/>
+          </a:xfrm>
+          <a:prstGeom prst="rect">
+            <a:avLst/>
+          </a:prstGeom>
+          <a:solidFill>
+            <a:srgbClr val="FFFFFF"/>
+          </a:solidFill>
+          <a:ln>
+            <a:noFill/>
+          </a:ln>
+          <a:effectLst/>
+        </p:spPr>
+        <p:style>
+          <a:lnRef idx="1">
+            <a:schemeClr val="accent1"/>
+          </a:lnRef>
+          <a:fillRef idx="3">
+            <a:schemeClr val="accent1"/>
+          </a:fillRef>
+          <a:effectRef idx="2">
+            <a:schemeClr val="accent1"/>
+          </a:effectRef>
+          <a:fontRef idx="minor">
+            <a:schemeClr val="lt1"/>
+          </a:fontRef>
+        </p:style>
+        <p:txBody>
+          <a:bodyPr rtlCol="0" anchor="ctr"/>
+          <a:lstStyle/>
+          <a:p>
+            <a:pPr algn="ctr"/>
+          </a:p>
+        </p:txBody>
+      </p:sp>
+      <p:sp>
+        <p:nvSpPr>
+          <p:cNvPr id="26" name="TextBox 25"/>
+          <p:cNvSpPr txBox="1"/>
+          <p:nvPr/>
+        </p:nvSpPr>
+        <p:spPr>
+          <a:xfrm>
+            <a:off x="731520" y="4325112"/>
+            <a:ext cx="6583680" cy="420624"/>
+          </a:xfrm>
+          <a:prstGeom prst="rect">
+            <a:avLst/>
+          </a:prstGeom>
+          <a:noFill/>
+        </p:spPr>
+        <p:txBody>
+          <a:bodyPr wrap="square" anchor="ctr">
+            <a:spAutoFit/>
+          </a:bodyPr>
+          <a:lstStyle/>
+          <a:p>
+            <a:pPr algn="l">
+              <a:spcBef>
+                <a:spcPts val="0"/>
+              </a:spcBef>
+              <a:spcAft>
+                <a:spcPts val="0"/>
+              </a:spcAft>
+            </a:pPr>
+            <a:r>
+              <a:rPr sz="1200" b="0">
+                <a:solidFill>
+                  <a:srgbClr val="5B626D"/>
+                </a:solidFill>
+                <a:latin typeface="Calibri"/>
+              </a:rPr>
+              <a:t>Largest Contentful Paint</a:t>
+            </a:r>
+          </a:p>
+        </p:txBody>
+      </p:sp>
+      <p:sp>
+        <p:nvSpPr>
+          <p:cNvPr id="27" name="TextBox 26"/>
+          <p:cNvSpPr txBox="1"/>
+          <p:nvPr/>
+        </p:nvSpPr>
+        <p:spPr>
+          <a:xfrm>
+            <a:off x="7589520" y="4325112"/>
+            <a:ext cx="1828800" cy="420624"/>
+          </a:xfrm>
+          <a:prstGeom prst="rect">
+            <a:avLst/>
+          </a:prstGeom>
+          <a:noFill/>
+        </p:spPr>
+        <p:txBody>
+          <a:bodyPr wrap="square" anchor="ctr">
+            <a:spAutoFit/>
+          </a:bodyPr>
+          <a:lstStyle/>
+          <a:p>
+            <a:pPr algn="l">
+              <a:spcBef>
+                <a:spcPts val="0"/>
+              </a:spcBef>
+              <a:spcAft>
+                <a:spcPts val="0"/>
+              </a:spcAft>
+            </a:pPr>
+            <a:r>
+              <a:rPr sz="1200" b="0">
+                <a:solidFill>
+                  <a:srgbClr val="5B626D"/>
+                </a:solidFill>
+                <a:latin typeface="Calibri"/>
+              </a:rPr>
+              <a:t>12.4 s</a:t>
+            </a:r>
+          </a:p>
+        </p:txBody>
+      </p:sp>
+      <p:sp>
+        <p:nvSpPr>
+          <p:cNvPr id="28" name="TextBox 27"/>
+          <p:cNvSpPr txBox="1"/>
+          <p:nvPr/>
+        </p:nvSpPr>
+        <p:spPr>
+          <a:xfrm>
+            <a:off x="9692640" y="4325112"/>
+            <a:ext cx="1828800" cy="420624"/>
+          </a:xfrm>
+          <a:prstGeom prst="rect">
+            <a:avLst/>
+          </a:prstGeom>
+          <a:noFill/>
+        </p:spPr>
+        <p:txBody>
+          <a:bodyPr wrap="square" anchor="ctr">
+            <a:spAutoFit/>
+          </a:bodyPr>
+          <a:lstStyle/>
+          <a:p>
+            <a:pPr algn="l">
+              <a:spcBef>
+                <a:spcPts val="0"/>
+              </a:spcBef>
+              <a:spcAft>
+                <a:spcPts val="0"/>
+              </a:spcAft>
+            </a:pPr>
+            <a:r>
+              <a:rPr sz="1200" b="1">
+                <a:solidFill>
+                  <a:srgbClr val="1A7F37"/>
+                </a:solidFill>
+                <a:latin typeface="Calibri"/>
+              </a:rPr>
+              <a:t>2.3 s</a:t>
+            </a:r>
+          </a:p>
+        </p:txBody>
+      </p:sp>
+      <p:sp>
+        <p:nvSpPr>
+          <p:cNvPr id="29" name="Rectangle 28"/>
+          <p:cNvSpPr/>
+          <p:nvPr/>
+        </p:nvSpPr>
+        <p:spPr>
+          <a:xfrm>
+            <a:off x="548640" y="4764024"/>
+            <a:ext cx="6858000" cy="420624"/>
           </a:xfrm>
           <a:prstGeom prst="rect">
             <a:avLst/>
@@ -4078,161 +4669,14 @@
       </p:sp>
       <p:sp>
         <p:nvSpPr>
-          <p:cNvPr id="17" name="TextBox 16"/>
-          <p:cNvSpPr txBox="1"/>
-          <p:nvPr/>
-        </p:nvSpPr>
-        <p:spPr>
-          <a:xfrm>
-            <a:off x="1554480" y="3547872"/>
-            <a:ext cx="9875520" cy="685800"/>
-          </a:xfrm>
-          <a:prstGeom prst="rect">
-            <a:avLst/>
-          </a:prstGeom>
-          <a:noFill/>
-        </p:spPr>
-        <p:txBody>
-          <a:bodyPr wrap="square" anchor="ctr">
-            <a:spAutoFit/>
-          </a:bodyPr>
-          <a:lstStyle/>
-          <a:p>
-            <a:pPr algn="l">
-              <a:spcBef>
-                <a:spcPts val="0"/>
-              </a:spcBef>
-              <a:spcAft>
-                <a:spcPts val="200"/>
-              </a:spcAft>
-            </a:pPr>
-            <a:r>
-              <a:rPr sz="1600" b="1">
-                <a:solidFill>
-                  <a:srgbClr val="0B0B0C"/>
-                </a:solidFill>
-                <a:latin typeface="Calibri"/>
-              </a:rPr>
-              <a:t>Launch — migrate the new site to live</a:t>
-            </a:r>
-          </a:p>
-          <a:p>
-            <a:pPr algn="l">
-              <a:spcBef>
-                <a:spcPts val="0"/>
-              </a:spcBef>
-              <a:spcAft>
-                <a:spcPts val="0"/>
-              </a:spcAft>
-            </a:pPr>
-            <a:r>
-              <a:rPr sz="1250" b="0">
-                <a:solidFill>
-                  <a:srgbClr val="5B626D"/>
-                </a:solidFill>
-                <a:latin typeface="Calibri"/>
-              </a:rPr>
-              <a:t>Runbook prepared</a:t>
-            </a:r>
-          </a:p>
-        </p:txBody>
-      </p:sp>
-      <p:sp>
-        <p:nvSpPr>
-          <p:cNvPr id="18" name="Rectangle 17"/>
+          <p:cNvPr id="30" name="Rectangle 29"/>
           <p:cNvSpPr/>
           <p:nvPr/>
         </p:nvSpPr>
         <p:spPr>
           <a:xfrm>
-            <a:off x="548640" y="4389120"/>
-            <a:ext cx="685800" cy="777240"/>
-          </a:xfrm>
-          <a:prstGeom prst="rect">
-            <a:avLst/>
-          </a:prstGeom>
-          <a:solidFill>
-            <a:srgbClr val="1A7F37"/>
-          </a:solidFill>
-          <a:ln>
-            <a:noFill/>
-          </a:ln>
-          <a:effectLst/>
-        </p:spPr>
-        <p:style>
-          <a:lnRef idx="1">
-            <a:schemeClr val="accent1"/>
-          </a:lnRef>
-          <a:fillRef idx="3">
-            <a:schemeClr val="accent1"/>
-          </a:fillRef>
-          <a:effectRef idx="2">
-            <a:schemeClr val="accent1"/>
-          </a:effectRef>
-          <a:fontRef idx="minor">
-            <a:schemeClr val="lt1"/>
-          </a:fontRef>
-        </p:style>
-        <p:txBody>
-          <a:bodyPr rtlCol="0" anchor="ctr"/>
-          <a:lstStyle/>
-          <a:p>
-            <a:pPr algn="ctr"/>
-          </a:p>
-        </p:txBody>
-      </p:sp>
-      <p:sp>
-        <p:nvSpPr>
-          <p:cNvPr id="19" name="TextBox 18"/>
-          <p:cNvSpPr txBox="1"/>
-          <p:nvPr/>
-        </p:nvSpPr>
-        <p:spPr>
-          <a:xfrm>
-            <a:off x="548640" y="4389120"/>
-            <a:ext cx="685800" cy="777240"/>
-          </a:xfrm>
-          <a:prstGeom prst="rect">
-            <a:avLst/>
-          </a:prstGeom>
-          <a:noFill/>
-        </p:spPr>
-        <p:txBody>
-          <a:bodyPr wrap="square" anchor="ctr">
-            <a:spAutoFit/>
-          </a:bodyPr>
-          <a:lstStyle/>
-          <a:p>
-            <a:pPr algn="ctr">
-              <a:spcBef>
-                <a:spcPts val="0"/>
-              </a:spcBef>
-              <a:spcAft>
-                <a:spcPts val="0"/>
-              </a:spcAft>
-            </a:pPr>
-            <a:r>
-              <a:rPr sz="2600" b="1">
-                <a:solidFill>
-                  <a:srgbClr val="FFFFFF"/>
-                </a:solidFill>
-                <a:latin typeface="Calibri"/>
-              </a:rPr>
-              <a:t>4</a:t>
-            </a:r>
-          </a:p>
-        </p:txBody>
-      </p:sp>
-      <p:sp>
-        <p:nvSpPr>
-          <p:cNvPr id="20" name="Rectangle 19"/>
-          <p:cNvSpPr/>
-          <p:nvPr/>
-        </p:nvSpPr>
-        <p:spPr>
-          <a:xfrm>
-            <a:off x="1325880" y="4389120"/>
-            <a:ext cx="10287000" cy="777240"/>
+            <a:off x="7406640" y="4764024"/>
+            <a:ext cx="2103120" cy="420624"/>
           </a:xfrm>
           <a:prstGeom prst="rect">
             <a:avLst/>
@@ -4269,161 +4713,14 @@
       </p:sp>
       <p:sp>
         <p:nvSpPr>
-          <p:cNvPr id="21" name="TextBox 20"/>
-          <p:cNvSpPr txBox="1"/>
-          <p:nvPr/>
-        </p:nvSpPr>
-        <p:spPr>
-          <a:xfrm>
-            <a:off x="1554480" y="4462272"/>
-            <a:ext cx="9875520" cy="685800"/>
-          </a:xfrm>
-          <a:prstGeom prst="rect">
-            <a:avLst/>
-          </a:prstGeom>
-          <a:noFill/>
-        </p:spPr>
-        <p:txBody>
-          <a:bodyPr wrap="square" anchor="ctr">
-            <a:spAutoFit/>
-          </a:bodyPr>
-          <a:lstStyle/>
-          <a:p>
-            <a:pPr algn="l">
-              <a:spcBef>
-                <a:spcPts val="0"/>
-              </a:spcBef>
-              <a:spcAft>
-                <a:spcPts val="200"/>
-              </a:spcAft>
-            </a:pPr>
-            <a:r>
-              <a:rPr sz="1600" b="1">
-                <a:solidFill>
-                  <a:srgbClr val="0B0B0C"/>
-                </a:solidFill>
-                <a:latin typeface="Calibri"/>
-              </a:rPr>
-              <a:t>Feature &amp; enhanced pages</a:t>
-            </a:r>
-          </a:p>
-          <a:p>
-            <a:pPr algn="l">
-              <a:spcBef>
-                <a:spcPts val="0"/>
-              </a:spcBef>
-              <a:spcAft>
-                <a:spcPts val="0"/>
-              </a:spcAft>
-            </a:pPr>
-            <a:r>
-              <a:rPr sz="1250" b="0">
-                <a:solidFill>
-                  <a:srgbClr val="5B626D"/>
-                </a:solidFill>
-                <a:latin typeface="Calibri"/>
-              </a:rPr>
-              <a:t>Built (Casambi, Fire Safety, Trade, …)</a:t>
-            </a:r>
-          </a:p>
-        </p:txBody>
-      </p:sp>
-      <p:sp>
-        <p:nvSpPr>
-          <p:cNvPr id="22" name="Rectangle 21"/>
+          <p:cNvPr id="31" name="Rectangle 30"/>
           <p:cNvSpPr/>
           <p:nvPr/>
         </p:nvSpPr>
         <p:spPr>
           <a:xfrm>
-            <a:off x="548640" y="5303520"/>
-            <a:ext cx="685800" cy="777240"/>
-          </a:xfrm>
-          <a:prstGeom prst="rect">
-            <a:avLst/>
-          </a:prstGeom>
-          <a:solidFill>
-            <a:srgbClr val="5B626D"/>
-          </a:solidFill>
-          <a:ln>
-            <a:noFill/>
-          </a:ln>
-          <a:effectLst/>
-        </p:spPr>
-        <p:style>
-          <a:lnRef idx="1">
-            <a:schemeClr val="accent1"/>
-          </a:lnRef>
-          <a:fillRef idx="3">
-            <a:schemeClr val="accent1"/>
-          </a:fillRef>
-          <a:effectRef idx="2">
-            <a:schemeClr val="accent1"/>
-          </a:effectRef>
-          <a:fontRef idx="minor">
-            <a:schemeClr val="lt1"/>
-          </a:fontRef>
-        </p:style>
-        <p:txBody>
-          <a:bodyPr rtlCol="0" anchor="ctr"/>
-          <a:lstStyle/>
-          <a:p>
-            <a:pPr algn="ctr"/>
-          </a:p>
-        </p:txBody>
-      </p:sp>
-      <p:sp>
-        <p:nvSpPr>
-          <p:cNvPr id="23" name="TextBox 22"/>
-          <p:cNvSpPr txBox="1"/>
-          <p:nvPr/>
-        </p:nvSpPr>
-        <p:spPr>
-          <a:xfrm>
-            <a:off x="548640" y="5303520"/>
-            <a:ext cx="685800" cy="777240"/>
-          </a:xfrm>
-          <a:prstGeom prst="rect">
-            <a:avLst/>
-          </a:prstGeom>
-          <a:noFill/>
-        </p:spPr>
-        <p:txBody>
-          <a:bodyPr wrap="square" anchor="ctr">
-            <a:spAutoFit/>
-          </a:bodyPr>
-          <a:lstStyle/>
-          <a:p>
-            <a:pPr algn="ctr">
-              <a:spcBef>
-                <a:spcPts val="0"/>
-              </a:spcBef>
-              <a:spcAft>
-                <a:spcPts val="0"/>
-              </a:spcAft>
-            </a:pPr>
-            <a:r>
-              <a:rPr sz="2600" b="1">
-                <a:solidFill>
-                  <a:srgbClr val="FFFFFF"/>
-                </a:solidFill>
-                <a:latin typeface="Calibri"/>
-              </a:rPr>
-              <a:t>5</a:t>
-            </a:r>
-          </a:p>
-        </p:txBody>
-      </p:sp>
-      <p:sp>
-        <p:nvSpPr>
-          <p:cNvPr id="24" name="Rectangle 23"/>
-          <p:cNvSpPr/>
-          <p:nvPr/>
-        </p:nvSpPr>
-        <p:spPr>
-          <a:xfrm>
-            <a:off x="1325880" y="5303520"/>
-            <a:ext cx="10287000" cy="777240"/>
+            <a:off x="9509760" y="4764024"/>
+            <a:ext cx="2103120" cy="420624"/>
           </a:xfrm>
           <a:prstGeom prst="rect">
             <a:avLst/>
@@ -4460,14 +4757,14 @@
       </p:sp>
       <p:sp>
         <p:nvSpPr>
-          <p:cNvPr id="25" name="TextBox 24"/>
+          <p:cNvPr id="32" name="TextBox 31"/>
           <p:cNvSpPr txBox="1"/>
           <p:nvPr/>
         </p:nvSpPr>
         <p:spPr>
           <a:xfrm>
-            <a:off x="1554480" y="5376672"/>
-            <a:ext cx="9875520" cy="685800"/>
+            <a:off x="731520" y="4764024"/>
+            <a:ext cx="6583680" cy="420624"/>
           </a:xfrm>
           <a:prstGeom prst="rect">
             <a:avLst/>
@@ -4485,19 +4782,42 @@
                 <a:spcPts val="0"/>
               </a:spcBef>
               <a:spcAft>
-                <a:spcPts val="200"/>
-              </a:spcAft>
-            </a:pPr>
-            <a:r>
-              <a:rPr sz="1600" b="1">
-                <a:solidFill>
-                  <a:srgbClr val="0B0B0C"/>
-                </a:solidFill>
-                <a:latin typeface="Calibri"/>
-              </a:rPr>
-              <a:t>Reconnect live product data</a:t>
-            </a:r>
-          </a:p>
+                <a:spcPts val="0"/>
+              </a:spcAft>
+            </a:pPr>
+            <a:r>
+              <a:rPr sz="1200" b="0">
+                <a:solidFill>
+                  <a:srgbClr val="5B626D"/>
+                </a:solidFill>
+                <a:latin typeface="Calibri"/>
+              </a:rPr>
+              <a:t>Total Blocking Time</a:t>
+            </a:r>
+          </a:p>
+        </p:txBody>
+      </p:sp>
+      <p:sp>
+        <p:nvSpPr>
+          <p:cNvPr id="33" name="TextBox 32"/>
+          <p:cNvSpPr txBox="1"/>
+          <p:nvPr/>
+        </p:nvSpPr>
+        <p:spPr>
+          <a:xfrm>
+            <a:off x="7589520" y="4764024"/>
+            <a:ext cx="1828800" cy="420624"/>
+          </a:xfrm>
+          <a:prstGeom prst="rect">
+            <a:avLst/>
+          </a:prstGeom>
+          <a:noFill/>
+        </p:spPr>
+        <p:txBody>
+          <a:bodyPr wrap="square" anchor="ctr">
+            <a:spAutoFit/>
+          </a:bodyPr>
+          <a:lstStyle/>
           <a:p>
             <a:pPr algn="l">
               <a:spcBef>
@@ -4508,27 +4828,585 @@
               </a:spcAft>
             </a:pPr>
             <a:r>
-              <a:rPr sz="1250" b="0">
+              <a:rPr sz="1200" b="0">
                 <a:solidFill>
                   <a:srgbClr val="5B626D"/>
                 </a:solidFill>
                 <a:latin typeface="Calibri"/>
               </a:rPr>
-              <a:t>Final step, switched on last</a:t>
-            </a:r>
-          </a:p>
-        </p:txBody>
-      </p:sp>
-      <p:sp>
-        <p:nvSpPr>
-          <p:cNvPr id="26" name="TextBox 25"/>
+              <a:t>3,270 ms</a:t>
+            </a:r>
+          </a:p>
+        </p:txBody>
+      </p:sp>
+      <p:sp>
+        <p:nvSpPr>
+          <p:cNvPr id="34" name="TextBox 33"/>
           <p:cNvSpPr txBox="1"/>
           <p:nvPr/>
         </p:nvSpPr>
         <p:spPr>
           <a:xfrm>
-            <a:off x="548640" y="6400800"/>
-            <a:ext cx="7315200" cy="365760"/>
+            <a:off x="9692640" y="4764024"/>
+            <a:ext cx="1828800" cy="420624"/>
+          </a:xfrm>
+          <a:prstGeom prst="rect">
+            <a:avLst/>
+          </a:prstGeom>
+          <a:noFill/>
+        </p:spPr>
+        <p:txBody>
+          <a:bodyPr wrap="square" anchor="ctr">
+            <a:spAutoFit/>
+          </a:bodyPr>
+          <a:lstStyle/>
+          <a:p>
+            <a:pPr algn="l">
+              <a:spcBef>
+                <a:spcPts val="0"/>
+              </a:spcBef>
+              <a:spcAft>
+                <a:spcPts val="0"/>
+              </a:spcAft>
+            </a:pPr>
+            <a:r>
+              <a:rPr sz="1200" b="1">
+                <a:solidFill>
+                  <a:srgbClr val="1A7F37"/>
+                </a:solidFill>
+                <a:latin typeface="Calibri"/>
+              </a:rPr>
+              <a:t>0 ms</a:t>
+            </a:r>
+          </a:p>
+        </p:txBody>
+      </p:sp>
+      <p:sp>
+        <p:nvSpPr>
+          <p:cNvPr id="35" name="Rectangle 34"/>
+          <p:cNvSpPr/>
+          <p:nvPr/>
+        </p:nvSpPr>
+        <p:spPr>
+          <a:xfrm>
+            <a:off x="548640" y="5202936"/>
+            <a:ext cx="6858000" cy="420624"/>
+          </a:xfrm>
+          <a:prstGeom prst="rect">
+            <a:avLst/>
+          </a:prstGeom>
+          <a:solidFill>
+            <a:srgbClr val="FFFFFF"/>
+          </a:solidFill>
+          <a:ln>
+            <a:noFill/>
+          </a:ln>
+          <a:effectLst/>
+        </p:spPr>
+        <p:style>
+          <a:lnRef idx="1">
+            <a:schemeClr val="accent1"/>
+          </a:lnRef>
+          <a:fillRef idx="3">
+            <a:schemeClr val="accent1"/>
+          </a:fillRef>
+          <a:effectRef idx="2">
+            <a:schemeClr val="accent1"/>
+          </a:effectRef>
+          <a:fontRef idx="minor">
+            <a:schemeClr val="lt1"/>
+          </a:fontRef>
+        </p:style>
+        <p:txBody>
+          <a:bodyPr rtlCol="0" anchor="ctr"/>
+          <a:lstStyle/>
+          <a:p>
+            <a:pPr algn="ctr"/>
+          </a:p>
+        </p:txBody>
+      </p:sp>
+      <p:sp>
+        <p:nvSpPr>
+          <p:cNvPr id="36" name="Rectangle 35"/>
+          <p:cNvSpPr/>
+          <p:nvPr/>
+        </p:nvSpPr>
+        <p:spPr>
+          <a:xfrm>
+            <a:off x="7406640" y="5202936"/>
+            <a:ext cx="2103120" cy="420624"/>
+          </a:xfrm>
+          <a:prstGeom prst="rect">
+            <a:avLst/>
+          </a:prstGeom>
+          <a:solidFill>
+            <a:srgbClr val="FFFFFF"/>
+          </a:solidFill>
+          <a:ln>
+            <a:noFill/>
+          </a:ln>
+          <a:effectLst/>
+        </p:spPr>
+        <p:style>
+          <a:lnRef idx="1">
+            <a:schemeClr val="accent1"/>
+          </a:lnRef>
+          <a:fillRef idx="3">
+            <a:schemeClr val="accent1"/>
+          </a:fillRef>
+          <a:effectRef idx="2">
+            <a:schemeClr val="accent1"/>
+          </a:effectRef>
+          <a:fontRef idx="minor">
+            <a:schemeClr val="lt1"/>
+          </a:fontRef>
+        </p:style>
+        <p:txBody>
+          <a:bodyPr rtlCol="0" anchor="ctr"/>
+          <a:lstStyle/>
+          <a:p>
+            <a:pPr algn="ctr"/>
+          </a:p>
+        </p:txBody>
+      </p:sp>
+      <p:sp>
+        <p:nvSpPr>
+          <p:cNvPr id="37" name="Rectangle 36"/>
+          <p:cNvSpPr/>
+          <p:nvPr/>
+        </p:nvSpPr>
+        <p:spPr>
+          <a:xfrm>
+            <a:off x="9509760" y="5202936"/>
+            <a:ext cx="2103120" cy="420624"/>
+          </a:xfrm>
+          <a:prstGeom prst="rect">
+            <a:avLst/>
+          </a:prstGeom>
+          <a:solidFill>
+            <a:srgbClr val="FFFFFF"/>
+          </a:solidFill>
+          <a:ln>
+            <a:noFill/>
+          </a:ln>
+          <a:effectLst/>
+        </p:spPr>
+        <p:style>
+          <a:lnRef idx="1">
+            <a:schemeClr val="accent1"/>
+          </a:lnRef>
+          <a:fillRef idx="3">
+            <a:schemeClr val="accent1"/>
+          </a:fillRef>
+          <a:effectRef idx="2">
+            <a:schemeClr val="accent1"/>
+          </a:effectRef>
+          <a:fontRef idx="minor">
+            <a:schemeClr val="lt1"/>
+          </a:fontRef>
+        </p:style>
+        <p:txBody>
+          <a:bodyPr rtlCol="0" anchor="ctr"/>
+          <a:lstStyle/>
+          <a:p>
+            <a:pPr algn="ctr"/>
+          </a:p>
+        </p:txBody>
+      </p:sp>
+      <p:sp>
+        <p:nvSpPr>
+          <p:cNvPr id="38" name="TextBox 37"/>
+          <p:cNvSpPr txBox="1"/>
+          <p:nvPr/>
+        </p:nvSpPr>
+        <p:spPr>
+          <a:xfrm>
+            <a:off x="731520" y="5202936"/>
+            <a:ext cx="6583680" cy="420624"/>
+          </a:xfrm>
+          <a:prstGeom prst="rect">
+            <a:avLst/>
+          </a:prstGeom>
+          <a:noFill/>
+        </p:spPr>
+        <p:txBody>
+          <a:bodyPr wrap="square" anchor="ctr">
+            <a:spAutoFit/>
+          </a:bodyPr>
+          <a:lstStyle/>
+          <a:p>
+            <a:pPr algn="l">
+              <a:spcBef>
+                <a:spcPts val="0"/>
+              </a:spcBef>
+              <a:spcAft>
+                <a:spcPts val="0"/>
+              </a:spcAft>
+            </a:pPr>
+            <a:r>
+              <a:rPr sz="1200" b="0">
+                <a:solidFill>
+                  <a:srgbClr val="5B626D"/>
+                </a:solidFill>
+                <a:latin typeface="Calibri"/>
+              </a:rPr>
+              <a:t>Speed Index</a:t>
+            </a:r>
+          </a:p>
+        </p:txBody>
+      </p:sp>
+      <p:sp>
+        <p:nvSpPr>
+          <p:cNvPr id="39" name="TextBox 38"/>
+          <p:cNvSpPr txBox="1"/>
+          <p:nvPr/>
+        </p:nvSpPr>
+        <p:spPr>
+          <a:xfrm>
+            <a:off x="7589520" y="5202936"/>
+            <a:ext cx="1828800" cy="420624"/>
+          </a:xfrm>
+          <a:prstGeom prst="rect">
+            <a:avLst/>
+          </a:prstGeom>
+          <a:noFill/>
+        </p:spPr>
+        <p:txBody>
+          <a:bodyPr wrap="square" anchor="ctr">
+            <a:spAutoFit/>
+          </a:bodyPr>
+          <a:lstStyle/>
+          <a:p>
+            <a:pPr algn="l">
+              <a:spcBef>
+                <a:spcPts val="0"/>
+              </a:spcBef>
+              <a:spcAft>
+                <a:spcPts val="0"/>
+              </a:spcAft>
+            </a:pPr>
+            <a:r>
+              <a:rPr sz="1200" b="0">
+                <a:solidFill>
+                  <a:srgbClr val="5B626D"/>
+                </a:solidFill>
+                <a:latin typeface="Calibri"/>
+              </a:rPr>
+              <a:t>12.1 s</a:t>
+            </a:r>
+          </a:p>
+        </p:txBody>
+      </p:sp>
+      <p:sp>
+        <p:nvSpPr>
+          <p:cNvPr id="40" name="TextBox 39"/>
+          <p:cNvSpPr txBox="1"/>
+          <p:nvPr/>
+        </p:nvSpPr>
+        <p:spPr>
+          <a:xfrm>
+            <a:off x="9692640" y="5202936"/>
+            <a:ext cx="1828800" cy="420624"/>
+          </a:xfrm>
+          <a:prstGeom prst="rect">
+            <a:avLst/>
+          </a:prstGeom>
+          <a:noFill/>
+        </p:spPr>
+        <p:txBody>
+          <a:bodyPr wrap="square" anchor="ctr">
+            <a:spAutoFit/>
+          </a:bodyPr>
+          <a:lstStyle/>
+          <a:p>
+            <a:pPr algn="l">
+              <a:spcBef>
+                <a:spcPts val="0"/>
+              </a:spcBef>
+              <a:spcAft>
+                <a:spcPts val="0"/>
+              </a:spcAft>
+            </a:pPr>
+            <a:r>
+              <a:rPr sz="1200" b="1">
+                <a:solidFill>
+                  <a:srgbClr val="1A7F37"/>
+                </a:solidFill>
+                <a:latin typeface="Calibri"/>
+              </a:rPr>
+              <a:t>5.6 s</a:t>
+            </a:r>
+          </a:p>
+        </p:txBody>
+      </p:sp>
+      <p:sp>
+        <p:nvSpPr>
+          <p:cNvPr id="41" name="Rectangle 40"/>
+          <p:cNvSpPr/>
+          <p:nvPr/>
+        </p:nvSpPr>
+        <p:spPr>
+          <a:xfrm>
+            <a:off x="548640" y="5641848"/>
+            <a:ext cx="6858000" cy="420624"/>
+          </a:xfrm>
+          <a:prstGeom prst="rect">
+            <a:avLst/>
+          </a:prstGeom>
+          <a:solidFill>
+            <a:srgbClr val="F4F6F8"/>
+          </a:solidFill>
+          <a:ln>
+            <a:noFill/>
+          </a:ln>
+          <a:effectLst/>
+        </p:spPr>
+        <p:style>
+          <a:lnRef idx="1">
+            <a:schemeClr val="accent1"/>
+          </a:lnRef>
+          <a:fillRef idx="3">
+            <a:schemeClr val="accent1"/>
+          </a:fillRef>
+          <a:effectRef idx="2">
+            <a:schemeClr val="accent1"/>
+          </a:effectRef>
+          <a:fontRef idx="minor">
+            <a:schemeClr val="lt1"/>
+          </a:fontRef>
+        </p:style>
+        <p:txBody>
+          <a:bodyPr rtlCol="0" anchor="ctr"/>
+          <a:lstStyle/>
+          <a:p>
+            <a:pPr algn="ctr"/>
+          </a:p>
+        </p:txBody>
+      </p:sp>
+      <p:sp>
+        <p:nvSpPr>
+          <p:cNvPr id="42" name="Rectangle 41"/>
+          <p:cNvSpPr/>
+          <p:nvPr/>
+        </p:nvSpPr>
+        <p:spPr>
+          <a:xfrm>
+            <a:off x="7406640" y="5641848"/>
+            <a:ext cx="2103120" cy="420624"/>
+          </a:xfrm>
+          <a:prstGeom prst="rect">
+            <a:avLst/>
+          </a:prstGeom>
+          <a:solidFill>
+            <a:srgbClr val="F4F6F8"/>
+          </a:solidFill>
+          <a:ln>
+            <a:noFill/>
+          </a:ln>
+          <a:effectLst/>
+        </p:spPr>
+        <p:style>
+          <a:lnRef idx="1">
+            <a:schemeClr val="accent1"/>
+          </a:lnRef>
+          <a:fillRef idx="3">
+            <a:schemeClr val="accent1"/>
+          </a:fillRef>
+          <a:effectRef idx="2">
+            <a:schemeClr val="accent1"/>
+          </a:effectRef>
+          <a:fontRef idx="minor">
+            <a:schemeClr val="lt1"/>
+          </a:fontRef>
+        </p:style>
+        <p:txBody>
+          <a:bodyPr rtlCol="0" anchor="ctr"/>
+          <a:lstStyle/>
+          <a:p>
+            <a:pPr algn="ctr"/>
+          </a:p>
+        </p:txBody>
+      </p:sp>
+      <p:sp>
+        <p:nvSpPr>
+          <p:cNvPr id="43" name="Rectangle 42"/>
+          <p:cNvSpPr/>
+          <p:nvPr/>
+        </p:nvSpPr>
+        <p:spPr>
+          <a:xfrm>
+            <a:off x="9509760" y="5641848"/>
+            <a:ext cx="2103120" cy="420624"/>
+          </a:xfrm>
+          <a:prstGeom prst="rect">
+            <a:avLst/>
+          </a:prstGeom>
+          <a:solidFill>
+            <a:srgbClr val="F4F6F8"/>
+          </a:solidFill>
+          <a:ln>
+            <a:noFill/>
+          </a:ln>
+          <a:effectLst/>
+        </p:spPr>
+        <p:style>
+          <a:lnRef idx="1">
+            <a:schemeClr val="accent1"/>
+          </a:lnRef>
+          <a:fillRef idx="3">
+            <a:schemeClr val="accent1"/>
+          </a:fillRef>
+          <a:effectRef idx="2">
+            <a:schemeClr val="accent1"/>
+          </a:effectRef>
+          <a:fontRef idx="minor">
+            <a:schemeClr val="lt1"/>
+          </a:fontRef>
+        </p:style>
+        <p:txBody>
+          <a:bodyPr rtlCol="0" anchor="ctr"/>
+          <a:lstStyle/>
+          <a:p>
+            <a:pPr algn="ctr"/>
+          </a:p>
+        </p:txBody>
+      </p:sp>
+      <p:sp>
+        <p:nvSpPr>
+          <p:cNvPr id="44" name="TextBox 43"/>
+          <p:cNvSpPr txBox="1"/>
+          <p:nvPr/>
+        </p:nvSpPr>
+        <p:spPr>
+          <a:xfrm>
+            <a:off x="731520" y="5641848"/>
+            <a:ext cx="6583680" cy="420624"/>
+          </a:xfrm>
+          <a:prstGeom prst="rect">
+            <a:avLst/>
+          </a:prstGeom>
+          <a:noFill/>
+        </p:spPr>
+        <p:txBody>
+          <a:bodyPr wrap="square" anchor="ctr">
+            <a:spAutoFit/>
+          </a:bodyPr>
+          <a:lstStyle/>
+          <a:p>
+            <a:pPr algn="l">
+              <a:spcBef>
+                <a:spcPts val="0"/>
+              </a:spcBef>
+              <a:spcAft>
+                <a:spcPts val="0"/>
+              </a:spcAft>
+            </a:pPr>
+            <a:r>
+              <a:rPr sz="1200" b="0">
+                <a:solidFill>
+                  <a:srgbClr val="5B626D"/>
+                </a:solidFill>
+                <a:latin typeface="Calibri"/>
+              </a:rPr>
+              <a:t>First Contentful Paint</a:t>
+            </a:r>
+          </a:p>
+        </p:txBody>
+      </p:sp>
+      <p:sp>
+        <p:nvSpPr>
+          <p:cNvPr id="45" name="TextBox 44"/>
+          <p:cNvSpPr txBox="1"/>
+          <p:nvPr/>
+        </p:nvSpPr>
+        <p:spPr>
+          <a:xfrm>
+            <a:off x="7589520" y="5641848"/>
+            <a:ext cx="1828800" cy="420624"/>
+          </a:xfrm>
+          <a:prstGeom prst="rect">
+            <a:avLst/>
+          </a:prstGeom>
+          <a:noFill/>
+        </p:spPr>
+        <p:txBody>
+          <a:bodyPr wrap="square" anchor="ctr">
+            <a:spAutoFit/>
+          </a:bodyPr>
+          <a:lstStyle/>
+          <a:p>
+            <a:pPr algn="l">
+              <a:spcBef>
+                <a:spcPts val="0"/>
+              </a:spcBef>
+              <a:spcAft>
+                <a:spcPts val="0"/>
+              </a:spcAft>
+            </a:pPr>
+            <a:r>
+              <a:rPr sz="1200" b="0">
+                <a:solidFill>
+                  <a:srgbClr val="5B626D"/>
+                </a:solidFill>
+                <a:latin typeface="Calibri"/>
+              </a:rPr>
+              <a:t>2.8 s</a:t>
+            </a:r>
+          </a:p>
+        </p:txBody>
+      </p:sp>
+      <p:sp>
+        <p:nvSpPr>
+          <p:cNvPr id="46" name="TextBox 45"/>
+          <p:cNvSpPr txBox="1"/>
+          <p:nvPr/>
+        </p:nvSpPr>
+        <p:spPr>
+          <a:xfrm>
+            <a:off x="9692640" y="5641848"/>
+            <a:ext cx="1828800" cy="420624"/>
+          </a:xfrm>
+          <a:prstGeom prst="rect">
+            <a:avLst/>
+          </a:prstGeom>
+          <a:noFill/>
+        </p:spPr>
+        <p:txBody>
+          <a:bodyPr wrap="square" anchor="ctr">
+            <a:spAutoFit/>
+          </a:bodyPr>
+          <a:lstStyle/>
+          <a:p>
+            <a:pPr algn="l">
+              <a:spcBef>
+                <a:spcPts val="0"/>
+              </a:spcBef>
+              <a:spcAft>
+                <a:spcPts val="0"/>
+              </a:spcAft>
+            </a:pPr>
+            <a:r>
+              <a:rPr sz="1200" b="1">
+                <a:solidFill>
+                  <a:srgbClr val="1A7F37"/>
+                </a:solidFill>
+                <a:latin typeface="Calibri"/>
+              </a:rPr>
+              <a:t>1.2 s</a:t>
+            </a:r>
+          </a:p>
+        </p:txBody>
+      </p:sp>
+      <p:sp>
+        <p:nvSpPr>
+          <p:cNvPr id="47" name="TextBox 46"/>
+          <p:cNvSpPr txBox="1"/>
+          <p:nvPr/>
+        </p:nvSpPr>
+        <p:spPr>
+          <a:xfrm>
+            <a:off x="548640" y="6355080"/>
+            <a:ext cx="10972800" cy="274320"/>
           </a:xfrm>
           <a:prstGeom prst="rect">
             <a:avLst/>
@@ -4550,6 +5428,48 @@
               </a:spcAft>
             </a:pPr>
             <a:r>
+              <a:rPr sz="900" b="0">
+                <a:solidFill>
+                  <a:srgbClr val="5B626D"/>
+                </a:solidFill>
+                <a:latin typeface="Calibri"/>
+              </a:rPr>
+              <a:t>Source: Google Lighthouse (the engine behind PageSpeed Insights), homepage, Jun 2026. Lab data; field scores vary by device/network.</a:t>
+            </a:r>
+          </a:p>
+        </p:txBody>
+      </p:sp>
+      <p:sp>
+        <p:nvSpPr>
+          <p:cNvPr id="48" name="TextBox 47"/>
+          <p:cNvSpPr txBox="1"/>
+          <p:nvPr/>
+        </p:nvSpPr>
+        <p:spPr>
+          <a:xfrm>
+            <a:off x="548640" y="6400800"/>
+            <a:ext cx="7315200" cy="365760"/>
+          </a:xfrm>
+          <a:prstGeom prst="rect">
+            <a:avLst/>
+          </a:prstGeom>
+          <a:noFill/>
+        </p:spPr>
+        <p:txBody>
+          <a:bodyPr wrap="square" anchor="t">
+            <a:spAutoFit/>
+          </a:bodyPr>
+          <a:lstStyle/>
+          <a:p>
+            <a:pPr algn="l">
+              <a:spcBef>
+                <a:spcPts val="0"/>
+              </a:spcBef>
+              <a:spcAft>
+                <a:spcPts val="0"/>
+              </a:spcAft>
+            </a:pPr>
+            <a:r>
               <a:rPr sz="1000" b="0">
                 <a:solidFill>
                   <a:srgbClr val="5B626D"/>
@@ -4563,7 +5483,7 @@
       </p:sp>
       <p:sp>
         <p:nvSpPr>
-          <p:cNvPr id="27" name="TextBox 26"/>
+          <p:cNvPr id="49" name="TextBox 48"/>
           <p:cNvSpPr txBox="1"/>
           <p:nvPr/>
         </p:nvSpPr>
@@ -4746,7 +5666,7 @@
                 </a:solidFill>
                 <a:latin typeface="Calibri"/>
               </a:rPr>
-              <a:t>THE BOTTOM LINE</a:t>
+              <a:t>ROADMAP</a:t>
             </a:r>
           </a:p>
           <a:p>
@@ -4765,7 +5685,7 @@
                 </a:solidFill>
                 <a:latin typeface="Calibri"/>
               </a:rPr>
-              <a:t>Old site vs new site</a:t>
+              <a:t>Where we are</a:t>
             </a:r>
           </a:p>
         </p:txBody>
@@ -4822,52 +5742,8 @@
         </p:nvSpPr>
         <p:spPr>
           <a:xfrm>
-            <a:off x="548640" y="1417320"/>
-            <a:ext cx="5486400" cy="457200"/>
-          </a:xfrm>
-          <a:prstGeom prst="rect">
-            <a:avLst/>
-          </a:prstGeom>
-          <a:solidFill>
-            <a:srgbClr val="0B0B0C"/>
-          </a:solidFill>
-          <a:ln>
-            <a:noFill/>
-          </a:ln>
-          <a:effectLst/>
-        </p:spPr>
-        <p:style>
-          <a:lnRef idx="1">
-            <a:schemeClr val="accent1"/>
-          </a:lnRef>
-          <a:fillRef idx="3">
-            <a:schemeClr val="accent1"/>
-          </a:fillRef>
-          <a:effectRef idx="2">
-            <a:schemeClr val="accent1"/>
-          </a:effectRef>
-          <a:fontRef idx="minor">
-            <a:schemeClr val="lt1"/>
-          </a:fontRef>
-        </p:style>
-        <p:txBody>
-          <a:bodyPr rtlCol="0" anchor="ctr"/>
-          <a:lstStyle/>
-          <a:p>
-            <a:pPr algn="ctr"/>
-          </a:p>
-        </p:txBody>
-      </p:sp>
-      <p:sp>
-        <p:nvSpPr>
-          <p:cNvPr id="7" name="Rectangle 6"/>
-          <p:cNvSpPr/>
-          <p:nvPr/>
-        </p:nvSpPr>
-        <p:spPr>
-          <a:xfrm>
-            <a:off x="6126480" y="1417320"/>
-            <a:ext cx="5486400" cy="457200"/>
+            <a:off x="548640" y="1645920"/>
+            <a:ext cx="685800" cy="777240"/>
           </a:xfrm>
           <a:prstGeom prst="rect">
             <a:avLst/>
@@ -4904,14 +5780,14 @@
       </p:sp>
       <p:sp>
         <p:nvSpPr>
-          <p:cNvPr id="8" name="TextBox 7"/>
+          <p:cNvPr id="7" name="TextBox 6"/>
           <p:cNvSpPr txBox="1"/>
           <p:nvPr/>
         </p:nvSpPr>
         <p:spPr>
           <a:xfrm>
-            <a:off x="731520" y="1417320"/>
-            <a:ext cx="5120640" cy="457200"/>
+            <a:off x="548640" y="1645920"/>
+            <a:ext cx="685800" cy="777240"/>
           </a:xfrm>
           <a:prstGeom prst="rect">
             <a:avLst/>
@@ -4924,250 +5800,36 @@
           </a:bodyPr>
           <a:lstStyle/>
           <a:p>
-            <a:pPr algn="l">
-              <a:spcBef>
-                <a:spcPts val="0"/>
-              </a:spcBef>
-              <a:spcAft>
-                <a:spcPts val="0"/>
-              </a:spcAft>
-            </a:pPr>
-            <a:r>
-              <a:rPr sz="1300" b="1">
+            <a:pPr algn="ctr">
+              <a:spcBef>
+                <a:spcPts val="0"/>
+              </a:spcBef>
+              <a:spcAft>
+                <a:spcPts val="0"/>
+              </a:spcAft>
+            </a:pPr>
+            <a:r>
+              <a:rPr sz="2600" b="1">
                 <a:solidFill>
                   <a:srgbClr val="FFFFFF"/>
                 </a:solidFill>
                 <a:latin typeface="Calibri"/>
               </a:rPr>
-              <a:t>OLD SITE</a:t>
-            </a:r>
-          </a:p>
-        </p:txBody>
-      </p:sp>
-      <p:sp>
-        <p:nvSpPr>
-          <p:cNvPr id="9" name="TextBox 8"/>
-          <p:cNvSpPr txBox="1"/>
-          <p:nvPr/>
-        </p:nvSpPr>
-        <p:spPr>
-          <a:xfrm>
-            <a:off x="6309360" y="1417320"/>
-            <a:ext cx="5120640" cy="457200"/>
-          </a:xfrm>
-          <a:prstGeom prst="rect">
-            <a:avLst/>
-          </a:prstGeom>
-          <a:noFill/>
-        </p:spPr>
-        <p:txBody>
-          <a:bodyPr wrap="square" anchor="ctr">
-            <a:spAutoFit/>
-          </a:bodyPr>
-          <a:lstStyle/>
-          <a:p>
-            <a:pPr algn="l">
-              <a:spcBef>
-                <a:spcPts val="0"/>
-              </a:spcBef>
-              <a:spcAft>
-                <a:spcPts val="0"/>
-              </a:spcAft>
-            </a:pPr>
-            <a:r>
-              <a:rPr sz="1300" b="1">
-                <a:solidFill>
-                  <a:srgbClr val="FFFFFF"/>
-                </a:solidFill>
-                <a:latin typeface="Calibri"/>
-              </a:rPr>
-              <a:t>NEW SITE</a:t>
-            </a:r>
-          </a:p>
-        </p:txBody>
-      </p:sp>
-      <p:sp>
-        <p:nvSpPr>
-          <p:cNvPr id="10" name="Rectangle 9"/>
+              <a:t>1</a:t>
+            </a:r>
+          </a:p>
+        </p:txBody>
+      </p:sp>
+      <p:sp>
+        <p:nvSpPr>
+          <p:cNvPr id="8" name="Rectangle 7"/>
           <p:cNvSpPr/>
           <p:nvPr/>
         </p:nvSpPr>
         <p:spPr>
           <a:xfrm>
-            <a:off x="548640" y="1920240"/>
-            <a:ext cx="5486400" cy="512064"/>
-          </a:xfrm>
-          <a:prstGeom prst="rect">
-            <a:avLst/>
-          </a:prstGeom>
-          <a:solidFill>
-            <a:srgbClr val="FFFFFF"/>
-          </a:solidFill>
-          <a:ln>
-            <a:noFill/>
-          </a:ln>
-          <a:effectLst/>
-        </p:spPr>
-        <p:style>
-          <a:lnRef idx="1">
-            <a:schemeClr val="accent1"/>
-          </a:lnRef>
-          <a:fillRef idx="3">
-            <a:schemeClr val="accent1"/>
-          </a:fillRef>
-          <a:effectRef idx="2">
-            <a:schemeClr val="accent1"/>
-          </a:effectRef>
-          <a:fontRef idx="minor">
-            <a:schemeClr val="lt1"/>
-          </a:fontRef>
-        </p:style>
-        <p:txBody>
-          <a:bodyPr rtlCol="0" anchor="ctr"/>
-          <a:lstStyle/>
-          <a:p>
-            <a:pPr algn="ctr"/>
-          </a:p>
-        </p:txBody>
-      </p:sp>
-      <p:sp>
-        <p:nvSpPr>
-          <p:cNvPr id="11" name="Rectangle 10"/>
-          <p:cNvSpPr/>
-          <p:nvPr/>
-        </p:nvSpPr>
-        <p:spPr>
-          <a:xfrm>
-            <a:off x="6126480" y="1920240"/>
-            <a:ext cx="5486400" cy="512064"/>
-          </a:xfrm>
-          <a:prstGeom prst="rect">
-            <a:avLst/>
-          </a:prstGeom>
-          <a:solidFill>
-            <a:srgbClr val="FFFFFF"/>
-          </a:solidFill>
-          <a:ln>
-            <a:noFill/>
-          </a:ln>
-          <a:effectLst/>
-        </p:spPr>
-        <p:style>
-          <a:lnRef idx="1">
-            <a:schemeClr val="accent1"/>
-          </a:lnRef>
-          <a:fillRef idx="3">
-            <a:schemeClr val="accent1"/>
-          </a:fillRef>
-          <a:effectRef idx="2">
-            <a:schemeClr val="accent1"/>
-          </a:effectRef>
-          <a:fontRef idx="minor">
-            <a:schemeClr val="lt1"/>
-          </a:fontRef>
-        </p:style>
-        <p:txBody>
-          <a:bodyPr rtlCol="0" anchor="ctr"/>
-          <a:lstStyle/>
-          <a:p>
-            <a:pPr algn="ctr"/>
-          </a:p>
-        </p:txBody>
-      </p:sp>
-      <p:sp>
-        <p:nvSpPr>
-          <p:cNvPr id="12" name="TextBox 11"/>
-          <p:cNvSpPr txBox="1"/>
-          <p:nvPr/>
-        </p:nvSpPr>
-        <p:spPr>
-          <a:xfrm>
-            <a:off x="731520" y="1920240"/>
-            <a:ext cx="5212080" cy="512064"/>
-          </a:xfrm>
-          <a:prstGeom prst="rect">
-            <a:avLst/>
-          </a:prstGeom>
-          <a:noFill/>
-        </p:spPr>
-        <p:txBody>
-          <a:bodyPr wrap="square" anchor="ctr">
-            <a:spAutoFit/>
-          </a:bodyPr>
-          <a:lstStyle/>
-          <a:p>
-            <a:pPr algn="l">
-              <a:spcBef>
-                <a:spcPts val="0"/>
-              </a:spcBef>
-              <a:spcAft>
-                <a:spcPts val="0"/>
-              </a:spcAft>
-            </a:pPr>
-            <a:r>
-              <a:rPr sz="1200" b="0">
-                <a:solidFill>
-                  <a:srgbClr val="5B626D"/>
-                </a:solidFill>
-                <a:latin typeface="Calibri"/>
-              </a:rPr>
-              <a:t>248 GB of bloat, 91% duplicate images</a:t>
-            </a:r>
-          </a:p>
-        </p:txBody>
-      </p:sp>
-      <p:sp>
-        <p:nvSpPr>
-          <p:cNvPr id="13" name="TextBox 12"/>
-          <p:cNvSpPr txBox="1"/>
-          <p:nvPr/>
-        </p:nvSpPr>
-        <p:spPr>
-          <a:xfrm>
-            <a:off x="6309360" y="1920240"/>
-            <a:ext cx="5212080" cy="512064"/>
-          </a:xfrm>
-          <a:prstGeom prst="rect">
-            <a:avLst/>
-          </a:prstGeom>
-          <a:noFill/>
-        </p:spPr>
-        <p:txBody>
-          <a:bodyPr wrap="square" anchor="ctr">
-            <a:spAutoFit/>
-          </a:bodyPr>
-          <a:lstStyle/>
-          <a:p>
-            <a:pPr algn="l">
-              <a:spcBef>
-                <a:spcPts val="0"/>
-              </a:spcBef>
-              <a:spcAft>
-                <a:spcPts val="0"/>
-              </a:spcAft>
-            </a:pPr>
-            <a:r>
-              <a:rPr sz="1200" b="1">
-                <a:solidFill>
-                  <a:srgbClr val="16335C"/>
-                </a:solidFill>
-                <a:latin typeface="Calibri"/>
-              </a:rPr>
-              <a:t>Cleaned up, lean media library</a:t>
-            </a:r>
-          </a:p>
-        </p:txBody>
-      </p:sp>
-      <p:sp>
-        <p:nvSpPr>
-          <p:cNvPr id="14" name="Rectangle 13"/>
-          <p:cNvSpPr/>
-          <p:nvPr/>
-        </p:nvSpPr>
-        <p:spPr>
-          <a:xfrm>
-            <a:off x="548640" y="2468880"/>
-            <a:ext cx="5486400" cy="512064"/>
+            <a:off x="1325880" y="1645920"/>
+            <a:ext cx="10287000" cy="777240"/>
           </a:xfrm>
           <a:prstGeom prst="rect">
             <a:avLst/>
@@ -5204,14 +5866,161 @@
       </p:sp>
       <p:sp>
         <p:nvSpPr>
-          <p:cNvPr id="15" name="Rectangle 14"/>
+          <p:cNvPr id="9" name="TextBox 8"/>
+          <p:cNvSpPr txBox="1"/>
+          <p:nvPr/>
+        </p:nvSpPr>
+        <p:spPr>
+          <a:xfrm>
+            <a:off x="1554480" y="1719072"/>
+            <a:ext cx="9875520" cy="685800"/>
+          </a:xfrm>
+          <a:prstGeom prst="rect">
+            <a:avLst/>
+          </a:prstGeom>
+          <a:noFill/>
+        </p:spPr>
+        <p:txBody>
+          <a:bodyPr wrap="square" anchor="ctr">
+            <a:spAutoFit/>
+          </a:bodyPr>
+          <a:lstStyle/>
+          <a:p>
+            <a:pPr algn="l">
+              <a:spcBef>
+                <a:spcPts val="0"/>
+              </a:spcBef>
+              <a:spcAft>
+                <a:spcPts val="200"/>
+              </a:spcAft>
+            </a:pPr>
+            <a:r>
+              <a:rPr sz="1600" b="1">
+                <a:solidFill>
+                  <a:srgbClr val="0B0B0C"/>
+                </a:solidFill>
+                <a:latin typeface="Calibri"/>
+              </a:rPr>
+              <a:t>Recreate ricoman.com exactly on the new platform</a:t>
+            </a:r>
+          </a:p>
+          <a:p>
+            <a:pPr algn="l">
+              <a:spcBef>
+                <a:spcPts val="0"/>
+              </a:spcBef>
+              <a:spcAft>
+                <a:spcPts val="0"/>
+              </a:spcAft>
+            </a:pPr>
+            <a:r>
+              <a:rPr sz="1250" b="0">
+                <a:solidFill>
+                  <a:srgbClr val="5B626D"/>
+                </a:solidFill>
+                <a:latin typeface="Calibri"/>
+              </a:rPr>
+              <a:t>In progress — confirming each page matches live</a:t>
+            </a:r>
+          </a:p>
+        </p:txBody>
+      </p:sp>
+      <p:sp>
+        <p:nvSpPr>
+          <p:cNvPr id="10" name="Rectangle 9"/>
           <p:cNvSpPr/>
           <p:nvPr/>
         </p:nvSpPr>
         <p:spPr>
           <a:xfrm>
-            <a:off x="6126480" y="2468880"/>
-            <a:ext cx="5486400" cy="512064"/>
+            <a:off x="548640" y="2560320"/>
+            <a:ext cx="685800" cy="777240"/>
+          </a:xfrm>
+          <a:prstGeom prst="rect">
+            <a:avLst/>
+          </a:prstGeom>
+          <a:solidFill>
+            <a:srgbClr val="1D4ED8"/>
+          </a:solidFill>
+          <a:ln>
+            <a:noFill/>
+          </a:ln>
+          <a:effectLst/>
+        </p:spPr>
+        <p:style>
+          <a:lnRef idx="1">
+            <a:schemeClr val="accent1"/>
+          </a:lnRef>
+          <a:fillRef idx="3">
+            <a:schemeClr val="accent1"/>
+          </a:fillRef>
+          <a:effectRef idx="2">
+            <a:schemeClr val="accent1"/>
+          </a:effectRef>
+          <a:fontRef idx="minor">
+            <a:schemeClr val="lt1"/>
+          </a:fontRef>
+        </p:style>
+        <p:txBody>
+          <a:bodyPr rtlCol="0" anchor="ctr"/>
+          <a:lstStyle/>
+          <a:p>
+            <a:pPr algn="ctr"/>
+          </a:p>
+        </p:txBody>
+      </p:sp>
+      <p:sp>
+        <p:nvSpPr>
+          <p:cNvPr id="11" name="TextBox 10"/>
+          <p:cNvSpPr txBox="1"/>
+          <p:nvPr/>
+        </p:nvSpPr>
+        <p:spPr>
+          <a:xfrm>
+            <a:off x="548640" y="2560320"/>
+            <a:ext cx="685800" cy="777240"/>
+          </a:xfrm>
+          <a:prstGeom prst="rect">
+            <a:avLst/>
+          </a:prstGeom>
+          <a:noFill/>
+        </p:spPr>
+        <p:txBody>
+          <a:bodyPr wrap="square" anchor="ctr">
+            <a:spAutoFit/>
+          </a:bodyPr>
+          <a:lstStyle/>
+          <a:p>
+            <a:pPr algn="ctr">
+              <a:spcBef>
+                <a:spcPts val="0"/>
+              </a:spcBef>
+              <a:spcAft>
+                <a:spcPts val="0"/>
+              </a:spcAft>
+            </a:pPr>
+            <a:r>
+              <a:rPr sz="2600" b="1">
+                <a:solidFill>
+                  <a:srgbClr val="FFFFFF"/>
+                </a:solidFill>
+                <a:latin typeface="Calibri"/>
+              </a:rPr>
+              <a:t>2</a:t>
+            </a:r>
+          </a:p>
+        </p:txBody>
+      </p:sp>
+      <p:sp>
+        <p:nvSpPr>
+          <p:cNvPr id="12" name="Rectangle 11"/>
+          <p:cNvSpPr/>
+          <p:nvPr/>
+        </p:nvSpPr>
+        <p:spPr>
+          <a:xfrm>
+            <a:off x="1325880" y="2560320"/>
+            <a:ext cx="10287000" cy="777240"/>
           </a:xfrm>
           <a:prstGeom prst="rect">
             <a:avLst/>
@@ -5248,14 +6057,14 @@
       </p:sp>
       <p:sp>
         <p:nvSpPr>
-          <p:cNvPr id="16" name="TextBox 15"/>
+          <p:cNvPr id="13" name="TextBox 12"/>
           <p:cNvSpPr txBox="1"/>
           <p:nvPr/>
         </p:nvSpPr>
         <p:spPr>
           <a:xfrm>
-            <a:off x="731520" y="2468880"/>
-            <a:ext cx="5212080" cy="512064"/>
+            <a:off x="1554480" y="2633472"/>
+            <a:ext cx="9875520" cy="685800"/>
           </a:xfrm>
           <a:prstGeom prst="rect">
             <a:avLst/>
@@ -5273,79 +6082,56 @@
                 <a:spcPts val="0"/>
               </a:spcBef>
               <a:spcAft>
-                <a:spcPts val="0"/>
-              </a:spcAft>
-            </a:pPr>
-            <a:r>
-              <a:rPr sz="1200" b="0">
+                <a:spcPts val="200"/>
+              </a:spcAft>
+            </a:pPr>
+            <a:r>
+              <a:rPr sz="1600" b="1">
+                <a:solidFill>
+                  <a:srgbClr val="0B0B0C"/>
+                </a:solidFill>
+                <a:latin typeface="Calibri"/>
+              </a:rPr>
+              <a:t>Check &amp; enhance SEO</a:t>
+            </a:r>
+          </a:p>
+          <a:p>
+            <a:pPr algn="l">
+              <a:spcBef>
+                <a:spcPts val="0"/>
+              </a:spcBef>
+              <a:spcAft>
+                <a:spcPts val="0"/>
+              </a:spcAft>
+            </a:pPr>
+            <a:r>
+              <a:rPr sz="1250" b="0">
                 <a:solidFill>
                   <a:srgbClr val="5B626D"/>
                 </a:solidFill>
                 <a:latin typeface="Calibri"/>
               </a:rPr>
-              <a:t>Backups failing since ~Oct 2025</a:t>
-            </a:r>
-          </a:p>
-        </p:txBody>
-      </p:sp>
-      <p:sp>
-        <p:nvSpPr>
-          <p:cNvPr id="17" name="TextBox 16"/>
-          <p:cNvSpPr txBox="1"/>
-          <p:nvPr/>
-        </p:nvSpPr>
-        <p:spPr>
-          <a:xfrm>
-            <a:off x="6309360" y="2468880"/>
-            <a:ext cx="5212080" cy="512064"/>
-          </a:xfrm>
-          <a:prstGeom prst="rect">
-            <a:avLst/>
-          </a:prstGeom>
-          <a:noFill/>
-        </p:spPr>
-        <p:txBody>
-          <a:bodyPr wrap="square" anchor="ctr">
-            <a:spAutoFit/>
-          </a:bodyPr>
-          <a:lstStyle/>
-          <a:p>
-            <a:pPr algn="l">
-              <a:spcBef>
-                <a:spcPts val="0"/>
-              </a:spcBef>
-              <a:spcAft>
-                <a:spcPts val="0"/>
-              </a:spcAft>
-            </a:pPr>
-            <a:r>
-              <a:rPr sz="1200" b="1">
-                <a:solidFill>
-                  <a:srgbClr val="16335C"/>
-                </a:solidFill>
-                <a:latin typeface="Calibri"/>
-              </a:rPr>
-              <a:t>Reliable, fast backups</a:t>
-            </a:r>
-          </a:p>
-        </p:txBody>
-      </p:sp>
-      <p:sp>
-        <p:nvSpPr>
-          <p:cNvPr id="18" name="Rectangle 17"/>
+              <a:t>Foundations + audit tooling built</a:t>
+            </a:r>
+          </a:p>
+        </p:txBody>
+      </p:sp>
+      <p:sp>
+        <p:nvSpPr>
+          <p:cNvPr id="14" name="Rectangle 13"/>
           <p:cNvSpPr/>
           <p:nvPr/>
         </p:nvSpPr>
         <p:spPr>
           <a:xfrm>
-            <a:off x="548640" y="3017520"/>
-            <a:ext cx="5486400" cy="512064"/>
+            <a:off x="548640" y="3474720"/>
+            <a:ext cx="685800" cy="777240"/>
           </a:xfrm>
           <a:prstGeom prst="rect">
             <a:avLst/>
           </a:prstGeom>
           <a:solidFill>
-            <a:srgbClr val="FFFFFF"/>
+            <a:srgbClr val="5B626D"/>
           </a:solidFill>
           <a:ln>
             <a:noFill/>
@@ -5376,58 +6162,14 @@
       </p:sp>
       <p:sp>
         <p:nvSpPr>
-          <p:cNvPr id="19" name="Rectangle 18"/>
-          <p:cNvSpPr/>
-          <p:nvPr/>
-        </p:nvSpPr>
-        <p:spPr>
-          <a:xfrm>
-            <a:off x="6126480" y="3017520"/>
-            <a:ext cx="5486400" cy="512064"/>
-          </a:xfrm>
-          <a:prstGeom prst="rect">
-            <a:avLst/>
-          </a:prstGeom>
-          <a:solidFill>
-            <a:srgbClr val="FFFFFF"/>
-          </a:solidFill>
-          <a:ln>
-            <a:noFill/>
-          </a:ln>
-          <a:effectLst/>
-        </p:spPr>
-        <p:style>
-          <a:lnRef idx="1">
-            <a:schemeClr val="accent1"/>
-          </a:lnRef>
-          <a:fillRef idx="3">
-            <a:schemeClr val="accent1"/>
-          </a:fillRef>
-          <a:effectRef idx="2">
-            <a:schemeClr val="accent1"/>
-          </a:effectRef>
-          <a:fontRef idx="minor">
-            <a:schemeClr val="lt1"/>
-          </a:fontRef>
-        </p:style>
-        <p:txBody>
-          <a:bodyPr rtlCol="0" anchor="ctr"/>
-          <a:lstStyle/>
-          <a:p>
-            <a:pPr algn="ctr"/>
-          </a:p>
-        </p:txBody>
-      </p:sp>
-      <p:sp>
-        <p:nvSpPr>
-          <p:cNvPr id="20" name="TextBox 19"/>
+          <p:cNvPr id="15" name="TextBox 14"/>
           <p:cNvSpPr txBox="1"/>
           <p:nvPr/>
         </p:nvSpPr>
         <p:spPr>
           <a:xfrm>
-            <a:off x="731520" y="3017520"/>
-            <a:ext cx="5212080" cy="512064"/>
+            <a:off x="548640" y="3474720"/>
+            <a:ext cx="685800" cy="777240"/>
           </a:xfrm>
           <a:prstGeom prst="rect">
             <a:avLst/>
@@ -5440,78 +6182,36 @@
           </a:bodyPr>
           <a:lstStyle/>
           <a:p>
-            <a:pPr algn="l">
-              <a:spcBef>
-                <a:spcPts val="0"/>
-              </a:spcBef>
-              <a:spcAft>
-                <a:spcPts val="0"/>
-              </a:spcAft>
-            </a:pPr>
-            <a:r>
-              <a:rPr sz="1200" b="0">
-                <a:solidFill>
-                  <a:srgbClr val="5B626D"/>
-                </a:solidFill>
-                <a:latin typeface="Calibri"/>
-              </a:rPr>
-              <a:t>Higher, growing hosting cost</a:t>
-            </a:r>
-          </a:p>
-        </p:txBody>
-      </p:sp>
-      <p:sp>
-        <p:nvSpPr>
-          <p:cNvPr id="21" name="TextBox 20"/>
-          <p:cNvSpPr txBox="1"/>
-          <p:nvPr/>
-        </p:nvSpPr>
-        <p:spPr>
-          <a:xfrm>
-            <a:off x="6309360" y="3017520"/>
-            <a:ext cx="5212080" cy="512064"/>
-          </a:xfrm>
-          <a:prstGeom prst="rect">
-            <a:avLst/>
-          </a:prstGeom>
-          <a:noFill/>
-        </p:spPr>
-        <p:txBody>
-          <a:bodyPr wrap="square" anchor="ctr">
-            <a:spAutoFit/>
-          </a:bodyPr>
-          <a:lstStyle/>
-          <a:p>
-            <a:pPr algn="l">
-              <a:spcBef>
-                <a:spcPts val="0"/>
-              </a:spcBef>
-              <a:spcAft>
-                <a:spcPts val="0"/>
-              </a:spcAft>
-            </a:pPr>
-            <a:r>
-              <a:rPr sz="1200" b="1">
-                <a:solidFill>
-                  <a:srgbClr val="16335C"/>
-                </a:solidFill>
-                <a:latin typeface="Calibri"/>
-              </a:rPr>
-              <a:t>Lower, predictable hosting cost</a:t>
-            </a:r>
-          </a:p>
-        </p:txBody>
-      </p:sp>
-      <p:sp>
-        <p:nvSpPr>
-          <p:cNvPr id="22" name="Rectangle 21"/>
+            <a:pPr algn="ctr">
+              <a:spcBef>
+                <a:spcPts val="0"/>
+              </a:spcBef>
+              <a:spcAft>
+                <a:spcPts val="0"/>
+              </a:spcAft>
+            </a:pPr>
+            <a:r>
+              <a:rPr sz="2600" b="1">
+                <a:solidFill>
+                  <a:srgbClr val="FFFFFF"/>
+                </a:solidFill>
+                <a:latin typeface="Calibri"/>
+              </a:rPr>
+              <a:t>3</a:t>
+            </a:r>
+          </a:p>
+        </p:txBody>
+      </p:sp>
+      <p:sp>
+        <p:nvSpPr>
+          <p:cNvPr id="16" name="Rectangle 15"/>
           <p:cNvSpPr/>
           <p:nvPr/>
         </p:nvSpPr>
         <p:spPr>
           <a:xfrm>
-            <a:off x="548640" y="3566160"/>
-            <a:ext cx="5486400" cy="512064"/>
+            <a:off x="1325880" y="3474720"/>
+            <a:ext cx="10287000" cy="777240"/>
           </a:xfrm>
           <a:prstGeom prst="rect">
             <a:avLst/>
@@ -5548,14 +6248,161 @@
       </p:sp>
       <p:sp>
         <p:nvSpPr>
-          <p:cNvPr id="23" name="Rectangle 22"/>
+          <p:cNvPr id="17" name="TextBox 16"/>
+          <p:cNvSpPr txBox="1"/>
+          <p:nvPr/>
+        </p:nvSpPr>
+        <p:spPr>
+          <a:xfrm>
+            <a:off x="1554480" y="3547872"/>
+            <a:ext cx="9875520" cy="685800"/>
+          </a:xfrm>
+          <a:prstGeom prst="rect">
+            <a:avLst/>
+          </a:prstGeom>
+          <a:noFill/>
+        </p:spPr>
+        <p:txBody>
+          <a:bodyPr wrap="square" anchor="ctr">
+            <a:spAutoFit/>
+          </a:bodyPr>
+          <a:lstStyle/>
+          <a:p>
+            <a:pPr algn="l">
+              <a:spcBef>
+                <a:spcPts val="0"/>
+              </a:spcBef>
+              <a:spcAft>
+                <a:spcPts val="200"/>
+              </a:spcAft>
+            </a:pPr>
+            <a:r>
+              <a:rPr sz="1600" b="1">
+                <a:solidFill>
+                  <a:srgbClr val="0B0B0C"/>
+                </a:solidFill>
+                <a:latin typeface="Calibri"/>
+              </a:rPr>
+              <a:t>Launch — migrate the new site to live</a:t>
+            </a:r>
+          </a:p>
+          <a:p>
+            <a:pPr algn="l">
+              <a:spcBef>
+                <a:spcPts val="0"/>
+              </a:spcBef>
+              <a:spcAft>
+                <a:spcPts val="0"/>
+              </a:spcAft>
+            </a:pPr>
+            <a:r>
+              <a:rPr sz="1250" b="0">
+                <a:solidFill>
+                  <a:srgbClr val="5B626D"/>
+                </a:solidFill>
+                <a:latin typeface="Calibri"/>
+              </a:rPr>
+              <a:t>Runbook prepared</a:t>
+            </a:r>
+          </a:p>
+        </p:txBody>
+      </p:sp>
+      <p:sp>
+        <p:nvSpPr>
+          <p:cNvPr id="18" name="Rectangle 17"/>
           <p:cNvSpPr/>
           <p:nvPr/>
         </p:nvSpPr>
         <p:spPr>
           <a:xfrm>
-            <a:off x="6126480" y="3566160"/>
-            <a:ext cx="5486400" cy="512064"/>
+            <a:off x="548640" y="4389120"/>
+            <a:ext cx="685800" cy="777240"/>
+          </a:xfrm>
+          <a:prstGeom prst="rect">
+            <a:avLst/>
+          </a:prstGeom>
+          <a:solidFill>
+            <a:srgbClr val="1A7F37"/>
+          </a:solidFill>
+          <a:ln>
+            <a:noFill/>
+          </a:ln>
+          <a:effectLst/>
+        </p:spPr>
+        <p:style>
+          <a:lnRef idx="1">
+            <a:schemeClr val="accent1"/>
+          </a:lnRef>
+          <a:fillRef idx="3">
+            <a:schemeClr val="accent1"/>
+          </a:fillRef>
+          <a:effectRef idx="2">
+            <a:schemeClr val="accent1"/>
+          </a:effectRef>
+          <a:fontRef idx="minor">
+            <a:schemeClr val="lt1"/>
+          </a:fontRef>
+        </p:style>
+        <p:txBody>
+          <a:bodyPr rtlCol="0" anchor="ctr"/>
+          <a:lstStyle/>
+          <a:p>
+            <a:pPr algn="ctr"/>
+          </a:p>
+        </p:txBody>
+      </p:sp>
+      <p:sp>
+        <p:nvSpPr>
+          <p:cNvPr id="19" name="TextBox 18"/>
+          <p:cNvSpPr txBox="1"/>
+          <p:nvPr/>
+        </p:nvSpPr>
+        <p:spPr>
+          <a:xfrm>
+            <a:off x="548640" y="4389120"/>
+            <a:ext cx="685800" cy="777240"/>
+          </a:xfrm>
+          <a:prstGeom prst="rect">
+            <a:avLst/>
+          </a:prstGeom>
+          <a:noFill/>
+        </p:spPr>
+        <p:txBody>
+          <a:bodyPr wrap="square" anchor="ctr">
+            <a:spAutoFit/>
+          </a:bodyPr>
+          <a:lstStyle/>
+          <a:p>
+            <a:pPr algn="ctr">
+              <a:spcBef>
+                <a:spcPts val="0"/>
+              </a:spcBef>
+              <a:spcAft>
+                <a:spcPts val="0"/>
+              </a:spcAft>
+            </a:pPr>
+            <a:r>
+              <a:rPr sz="2600" b="1">
+                <a:solidFill>
+                  <a:srgbClr val="FFFFFF"/>
+                </a:solidFill>
+                <a:latin typeface="Calibri"/>
+              </a:rPr>
+              <a:t>4</a:t>
+            </a:r>
+          </a:p>
+        </p:txBody>
+      </p:sp>
+      <p:sp>
+        <p:nvSpPr>
+          <p:cNvPr id="20" name="Rectangle 19"/>
+          <p:cNvSpPr/>
+          <p:nvPr/>
+        </p:nvSpPr>
+        <p:spPr>
+          <a:xfrm>
+            <a:off x="1325880" y="4389120"/>
+            <a:ext cx="10287000" cy="777240"/>
           </a:xfrm>
           <a:prstGeom prst="rect">
             <a:avLst/>
@@ -5592,14 +6439,14 @@
       </p:sp>
       <p:sp>
         <p:nvSpPr>
-          <p:cNvPr id="24" name="TextBox 23"/>
+          <p:cNvPr id="21" name="TextBox 20"/>
           <p:cNvSpPr txBox="1"/>
           <p:nvPr/>
         </p:nvSpPr>
         <p:spPr>
           <a:xfrm>
-            <a:off x="731520" y="3566160"/>
-            <a:ext cx="5212080" cy="512064"/>
+            <a:off x="1554480" y="4462272"/>
+            <a:ext cx="9875520" cy="685800"/>
           </a:xfrm>
           <a:prstGeom prst="rect">
             <a:avLst/>
@@ -5617,79 +6464,56 @@
                 <a:spcPts val="0"/>
               </a:spcBef>
               <a:spcAft>
-                <a:spcPts val="0"/>
-              </a:spcAft>
-            </a:pPr>
-            <a:r>
-              <a:rPr sz="1200" b="0">
+                <a:spcPts val="200"/>
+              </a:spcAft>
+            </a:pPr>
+            <a:r>
+              <a:rPr sz="1600" b="1">
+                <a:solidFill>
+                  <a:srgbClr val="0B0B0C"/>
+                </a:solidFill>
+                <a:latin typeface="Calibri"/>
+              </a:rPr>
+              <a:t>Feature &amp; enhanced pages</a:t>
+            </a:r>
+          </a:p>
+          <a:p>
+            <a:pPr algn="l">
+              <a:spcBef>
+                <a:spcPts val="0"/>
+              </a:spcBef>
+              <a:spcAft>
+                <a:spcPts val="0"/>
+              </a:spcAft>
+            </a:pPr>
+            <a:r>
+              <a:rPr sz="1250" b="0">
                 <a:solidFill>
                   <a:srgbClr val="5B626D"/>
                 </a:solidFill>
                 <a:latin typeface="Calibri"/>
               </a:rPr>
-              <a:t>Changes needed a developer</a:t>
-            </a:r>
-          </a:p>
-        </p:txBody>
-      </p:sp>
-      <p:sp>
-        <p:nvSpPr>
-          <p:cNvPr id="25" name="TextBox 24"/>
-          <p:cNvSpPr txBox="1"/>
-          <p:nvPr/>
-        </p:nvSpPr>
-        <p:spPr>
-          <a:xfrm>
-            <a:off x="6309360" y="3566160"/>
-            <a:ext cx="5212080" cy="512064"/>
-          </a:xfrm>
-          <a:prstGeom prst="rect">
-            <a:avLst/>
-          </a:prstGeom>
-          <a:noFill/>
-        </p:spPr>
-        <p:txBody>
-          <a:bodyPr wrap="square" anchor="ctr">
-            <a:spAutoFit/>
-          </a:bodyPr>
-          <a:lstStyle/>
-          <a:p>
-            <a:pPr algn="l">
-              <a:spcBef>
-                <a:spcPts val="0"/>
-              </a:spcBef>
-              <a:spcAft>
-                <a:spcPts val="0"/>
-              </a:spcAft>
-            </a:pPr>
-            <a:r>
-              <a:rPr sz="1200" b="1">
-                <a:solidFill>
-                  <a:srgbClr val="16335C"/>
-                </a:solidFill>
-                <a:latin typeface="Calibri"/>
-              </a:rPr>
-              <a:t>Team edits products &amp; pages themselves</a:t>
-            </a:r>
-          </a:p>
-        </p:txBody>
-      </p:sp>
-      <p:sp>
-        <p:nvSpPr>
-          <p:cNvPr id="26" name="Rectangle 25"/>
+              <a:t>Built (Casambi, Fire Safety, Trade, …)</a:t>
+            </a:r>
+          </a:p>
+        </p:txBody>
+      </p:sp>
+      <p:sp>
+        <p:nvSpPr>
+          <p:cNvPr id="22" name="Rectangle 21"/>
           <p:cNvSpPr/>
           <p:nvPr/>
         </p:nvSpPr>
         <p:spPr>
           <a:xfrm>
-            <a:off x="548640" y="4114800"/>
-            <a:ext cx="5486400" cy="512064"/>
+            <a:off x="548640" y="5303520"/>
+            <a:ext cx="685800" cy="777240"/>
           </a:xfrm>
           <a:prstGeom prst="rect">
             <a:avLst/>
           </a:prstGeom>
           <a:solidFill>
-            <a:srgbClr val="FFFFFF"/>
+            <a:srgbClr val="5B626D"/>
           </a:solidFill>
           <a:ln>
             <a:noFill/>
@@ -5720,58 +6544,14 @@
       </p:sp>
       <p:sp>
         <p:nvSpPr>
-          <p:cNvPr id="27" name="Rectangle 26"/>
-          <p:cNvSpPr/>
-          <p:nvPr/>
-        </p:nvSpPr>
-        <p:spPr>
-          <a:xfrm>
-            <a:off x="6126480" y="4114800"/>
-            <a:ext cx="5486400" cy="512064"/>
-          </a:xfrm>
-          <a:prstGeom prst="rect">
-            <a:avLst/>
-          </a:prstGeom>
-          <a:solidFill>
-            <a:srgbClr val="FFFFFF"/>
-          </a:solidFill>
-          <a:ln>
-            <a:noFill/>
-          </a:ln>
-          <a:effectLst/>
-        </p:spPr>
-        <p:style>
-          <a:lnRef idx="1">
-            <a:schemeClr val="accent1"/>
-          </a:lnRef>
-          <a:fillRef idx="3">
-            <a:schemeClr val="accent1"/>
-          </a:fillRef>
-          <a:effectRef idx="2">
-            <a:schemeClr val="accent1"/>
-          </a:effectRef>
-          <a:fontRef idx="minor">
-            <a:schemeClr val="lt1"/>
-          </a:fontRef>
-        </p:style>
-        <p:txBody>
-          <a:bodyPr rtlCol="0" anchor="ctr"/>
-          <a:lstStyle/>
-          <a:p>
-            <a:pPr algn="ctr"/>
-          </a:p>
-        </p:txBody>
-      </p:sp>
-      <p:sp>
-        <p:nvSpPr>
-          <p:cNvPr id="28" name="TextBox 27"/>
+          <p:cNvPr id="23" name="TextBox 22"/>
           <p:cNvSpPr txBox="1"/>
           <p:nvPr/>
         </p:nvSpPr>
         <p:spPr>
           <a:xfrm>
-            <a:off x="731520" y="4114800"/>
-            <a:ext cx="5212080" cy="512064"/>
+            <a:off x="548640" y="5303520"/>
+            <a:ext cx="685800" cy="777240"/>
           </a:xfrm>
           <a:prstGeom prst="rect">
             <a:avLst/>
@@ -5784,78 +6564,36 @@
           </a:bodyPr>
           <a:lstStyle/>
           <a:p>
-            <a:pPr algn="l">
-              <a:spcBef>
-                <a:spcPts val="0"/>
-              </a:spcBef>
-              <a:spcAft>
-                <a:spcPts val="0"/>
-              </a:spcAft>
-            </a:pPr>
-            <a:r>
-              <a:rPr sz="1200" b="0">
-                <a:solidFill>
-                  <a:srgbClr val="5B626D"/>
-                </a:solidFill>
-                <a:latin typeface="Calibri"/>
-              </a:rPr>
-              <a:t>A brochure</a:t>
-            </a:r>
-          </a:p>
-        </p:txBody>
-      </p:sp>
-      <p:sp>
-        <p:nvSpPr>
-          <p:cNvPr id="29" name="TextBox 28"/>
-          <p:cNvSpPr txBox="1"/>
-          <p:nvPr/>
-        </p:nvSpPr>
-        <p:spPr>
-          <a:xfrm>
-            <a:off x="6309360" y="4114800"/>
-            <a:ext cx="5212080" cy="512064"/>
-          </a:xfrm>
-          <a:prstGeom prst="rect">
-            <a:avLst/>
-          </a:prstGeom>
-          <a:noFill/>
-        </p:spPr>
-        <p:txBody>
-          <a:bodyPr wrap="square" anchor="ctr">
-            <a:spAutoFit/>
-          </a:bodyPr>
-          <a:lstStyle/>
-          <a:p>
-            <a:pPr algn="l">
-              <a:spcBef>
-                <a:spcPts val="0"/>
-              </a:spcBef>
-              <a:spcAft>
-                <a:spcPts val="0"/>
-              </a:spcAft>
-            </a:pPr>
-            <a:r>
-              <a:rPr sz="1200" b="1">
-                <a:solidFill>
-                  <a:srgbClr val="16335C"/>
-                </a:solidFill>
-                <a:latin typeface="Calibri"/>
-              </a:rPr>
-              <a:t>Captures leads + builds its own SEO</a:t>
-            </a:r>
-          </a:p>
-        </p:txBody>
-      </p:sp>
-      <p:sp>
-        <p:nvSpPr>
-          <p:cNvPr id="30" name="Rectangle 29"/>
+            <a:pPr algn="ctr">
+              <a:spcBef>
+                <a:spcPts val="0"/>
+              </a:spcBef>
+              <a:spcAft>
+                <a:spcPts val="0"/>
+              </a:spcAft>
+            </a:pPr>
+            <a:r>
+              <a:rPr sz="2600" b="1">
+                <a:solidFill>
+                  <a:srgbClr val="FFFFFF"/>
+                </a:solidFill>
+                <a:latin typeface="Calibri"/>
+              </a:rPr>
+              <a:t>5</a:t>
+            </a:r>
+          </a:p>
+        </p:txBody>
+      </p:sp>
+      <p:sp>
+        <p:nvSpPr>
+          <p:cNvPr id="24" name="Rectangle 23"/>
           <p:cNvSpPr/>
           <p:nvPr/>
         </p:nvSpPr>
         <p:spPr>
           <a:xfrm>
-            <a:off x="548640" y="4663440"/>
-            <a:ext cx="5486400" cy="512064"/>
+            <a:off x="1325880" y="5303520"/>
+            <a:ext cx="10287000" cy="777240"/>
           </a:xfrm>
           <a:prstGeom prst="rect">
             <a:avLst/>
@@ -5892,58 +6630,14 @@
       </p:sp>
       <p:sp>
         <p:nvSpPr>
-          <p:cNvPr id="31" name="Rectangle 30"/>
-          <p:cNvSpPr/>
-          <p:nvPr/>
-        </p:nvSpPr>
-        <p:spPr>
-          <a:xfrm>
-            <a:off x="6126480" y="4663440"/>
-            <a:ext cx="5486400" cy="512064"/>
-          </a:xfrm>
-          <a:prstGeom prst="rect">
-            <a:avLst/>
-          </a:prstGeom>
-          <a:solidFill>
-            <a:srgbClr val="F4F6F8"/>
-          </a:solidFill>
-          <a:ln>
-            <a:noFill/>
-          </a:ln>
-          <a:effectLst/>
-        </p:spPr>
-        <p:style>
-          <a:lnRef idx="1">
-            <a:schemeClr val="accent1"/>
-          </a:lnRef>
-          <a:fillRef idx="3">
-            <a:schemeClr val="accent1"/>
-          </a:fillRef>
-          <a:effectRef idx="2">
-            <a:schemeClr val="accent1"/>
-          </a:effectRef>
-          <a:fontRef idx="minor">
-            <a:schemeClr val="lt1"/>
-          </a:fontRef>
-        </p:style>
-        <p:txBody>
-          <a:bodyPr rtlCol="0" anchor="ctr"/>
-          <a:lstStyle/>
-          <a:p>
-            <a:pPr algn="ctr"/>
-          </a:p>
-        </p:txBody>
-      </p:sp>
-      <p:sp>
-        <p:nvSpPr>
-          <p:cNvPr id="32" name="TextBox 31"/>
+          <p:cNvPr id="25" name="TextBox 24"/>
           <p:cNvSpPr txBox="1"/>
           <p:nvPr/>
         </p:nvSpPr>
         <p:spPr>
           <a:xfrm>
-            <a:off x="731520" y="4663440"/>
-            <a:ext cx="5212080" cy="512064"/>
+            <a:off x="1554480" y="5376672"/>
+            <a:ext cx="9875520" cy="685800"/>
           </a:xfrm>
           <a:prstGeom prst="rect">
             <a:avLst/>
@@ -5961,410 +6655,43 @@
                 <a:spcPts val="0"/>
               </a:spcBef>
               <a:spcAft>
-                <a:spcPts val="0"/>
-              </a:spcAft>
-            </a:pPr>
-            <a:r>
-              <a:rPr sz="1200" b="0">
+                <a:spcPts val="200"/>
+              </a:spcAft>
+            </a:pPr>
+            <a:r>
+              <a:rPr sz="1600" b="1">
+                <a:solidFill>
+                  <a:srgbClr val="0B0B0C"/>
+                </a:solidFill>
+                <a:latin typeface="Calibri"/>
+              </a:rPr>
+              <a:t>Reconnect live product data</a:t>
+            </a:r>
+          </a:p>
+          <a:p>
+            <a:pPr algn="l">
+              <a:spcBef>
+                <a:spcPts val="0"/>
+              </a:spcBef>
+              <a:spcAft>
+                <a:spcPts val="0"/>
+              </a:spcAft>
+            </a:pPr>
+            <a:r>
+              <a:rPr sz="1250" b="0">
                 <a:solidFill>
                   <a:srgbClr val="5B626D"/>
                 </a:solidFill>
                 <a:latin typeface="Calibri"/>
               </a:rPr>
-              <a:t>No BIM / specifier capture</a:t>
-            </a:r>
-          </a:p>
-        </p:txBody>
-      </p:sp>
-      <p:sp>
-        <p:nvSpPr>
-          <p:cNvPr id="33" name="TextBox 32"/>
-          <p:cNvSpPr txBox="1"/>
-          <p:nvPr/>
-        </p:nvSpPr>
-        <p:spPr>
-          <a:xfrm>
-            <a:off x="6309360" y="4663440"/>
-            <a:ext cx="5212080" cy="512064"/>
-          </a:xfrm>
-          <a:prstGeom prst="rect">
-            <a:avLst/>
-          </a:prstGeom>
-          <a:noFill/>
-        </p:spPr>
-        <p:txBody>
-          <a:bodyPr wrap="square" anchor="ctr">
-            <a:spAutoFit/>
-          </a:bodyPr>
-          <a:lstStyle/>
-          <a:p>
-            <a:pPr algn="l">
-              <a:spcBef>
-                <a:spcPts val="0"/>
-              </a:spcBef>
-              <a:spcAft>
-                <a:spcPts val="0"/>
-              </a:spcAft>
-            </a:pPr>
-            <a:r>
-              <a:rPr sz="1200" b="1">
-                <a:solidFill>
-                  <a:srgbClr val="16335C"/>
-                </a:solidFill>
-                <a:latin typeface="Calibri"/>
-              </a:rPr>
-              <a:t>"Download BIM file" sends marketing a warm lead</a:t>
-            </a:r>
-          </a:p>
-        </p:txBody>
-      </p:sp>
-      <p:sp>
-        <p:nvSpPr>
-          <p:cNvPr id="34" name="Rectangle 33"/>
-          <p:cNvSpPr/>
-          <p:nvPr/>
-        </p:nvSpPr>
-        <p:spPr>
-          <a:xfrm>
-            <a:off x="548640" y="5212080"/>
-            <a:ext cx="5486400" cy="512064"/>
-          </a:xfrm>
-          <a:prstGeom prst="rect">
-            <a:avLst/>
-          </a:prstGeom>
-          <a:solidFill>
-            <a:srgbClr val="FFFFFF"/>
-          </a:solidFill>
-          <a:ln>
-            <a:noFill/>
-          </a:ln>
-          <a:effectLst/>
-        </p:spPr>
-        <p:style>
-          <a:lnRef idx="1">
-            <a:schemeClr val="accent1"/>
-          </a:lnRef>
-          <a:fillRef idx="3">
-            <a:schemeClr val="accent1"/>
-          </a:fillRef>
-          <a:effectRef idx="2">
-            <a:schemeClr val="accent1"/>
-          </a:effectRef>
-          <a:fontRef idx="minor">
-            <a:schemeClr val="lt1"/>
-          </a:fontRef>
-        </p:style>
-        <p:txBody>
-          <a:bodyPr rtlCol="0" anchor="ctr"/>
-          <a:lstStyle/>
-          <a:p>
-            <a:pPr algn="ctr"/>
-          </a:p>
-        </p:txBody>
-      </p:sp>
-      <p:sp>
-        <p:nvSpPr>
-          <p:cNvPr id="35" name="Rectangle 34"/>
-          <p:cNvSpPr/>
-          <p:nvPr/>
-        </p:nvSpPr>
-        <p:spPr>
-          <a:xfrm>
-            <a:off x="6126480" y="5212080"/>
-            <a:ext cx="5486400" cy="512064"/>
-          </a:xfrm>
-          <a:prstGeom prst="rect">
-            <a:avLst/>
-          </a:prstGeom>
-          <a:solidFill>
-            <a:srgbClr val="FFFFFF"/>
-          </a:solidFill>
-          <a:ln>
-            <a:noFill/>
-          </a:ln>
-          <a:effectLst/>
-        </p:spPr>
-        <p:style>
-          <a:lnRef idx="1">
-            <a:schemeClr val="accent1"/>
-          </a:lnRef>
-          <a:fillRef idx="3">
-            <a:schemeClr val="accent1"/>
-          </a:fillRef>
-          <a:effectRef idx="2">
-            <a:schemeClr val="accent1"/>
-          </a:effectRef>
-          <a:fontRef idx="minor">
-            <a:schemeClr val="lt1"/>
-          </a:fontRef>
-        </p:style>
-        <p:txBody>
-          <a:bodyPr rtlCol="0" anchor="ctr"/>
-          <a:lstStyle/>
-          <a:p>
-            <a:pPr algn="ctr"/>
-          </a:p>
-        </p:txBody>
-      </p:sp>
-      <p:sp>
-        <p:nvSpPr>
-          <p:cNvPr id="36" name="TextBox 35"/>
-          <p:cNvSpPr txBox="1"/>
-          <p:nvPr/>
-        </p:nvSpPr>
-        <p:spPr>
-          <a:xfrm>
-            <a:off x="731520" y="5212080"/>
-            <a:ext cx="5212080" cy="512064"/>
-          </a:xfrm>
-          <a:prstGeom prst="rect">
-            <a:avLst/>
-          </a:prstGeom>
-          <a:noFill/>
-        </p:spPr>
-        <p:txBody>
-          <a:bodyPr wrap="square" anchor="ctr">
-            <a:spAutoFit/>
-          </a:bodyPr>
-          <a:lstStyle/>
-          <a:p>
-            <a:pPr algn="l">
-              <a:spcBef>
-                <a:spcPts val="0"/>
-              </a:spcBef>
-              <a:spcAft>
-                <a:spcPts val="0"/>
-              </a:spcAft>
-            </a:pPr>
-            <a:r>
-              <a:rPr sz="1200" b="0">
-                <a:solidFill>
-                  <a:srgbClr val="5B626D"/>
-                </a:solidFill>
-                <a:latin typeface="Calibri"/>
-              </a:rPr>
-              <a:t>Bespoke quotes = lots of back-and-forth</a:t>
-            </a:r>
-          </a:p>
-        </p:txBody>
-      </p:sp>
-      <p:sp>
-        <p:nvSpPr>
-          <p:cNvPr id="37" name="TextBox 36"/>
-          <p:cNvSpPr txBox="1"/>
-          <p:nvPr/>
-        </p:nvSpPr>
-        <p:spPr>
-          <a:xfrm>
-            <a:off x="6309360" y="5212080"/>
-            <a:ext cx="5212080" cy="512064"/>
-          </a:xfrm>
-          <a:prstGeom prst="rect">
-            <a:avLst/>
-          </a:prstGeom>
-          <a:noFill/>
-        </p:spPr>
-        <p:txBody>
-          <a:bodyPr wrap="square" anchor="ctr">
-            <a:spAutoFit/>
-          </a:bodyPr>
-          <a:lstStyle/>
-          <a:p>
-            <a:pPr algn="l">
-              <a:spcBef>
-                <a:spcPts val="0"/>
-              </a:spcBef>
-              <a:spcAft>
-                <a:spcPts val="0"/>
-              </a:spcAft>
-            </a:pPr>
-            <a:r>
-              <a:rPr sz="1200" b="1">
-                <a:solidFill>
-                  <a:srgbClr val="16335C"/>
-                </a:solidFill>
-                <a:latin typeface="Calibri"/>
-              </a:rPr>
-              <a:t>Flow+ Designer = ready-to-quote scheme</a:t>
-            </a:r>
-          </a:p>
-        </p:txBody>
-      </p:sp>
-      <p:sp>
-        <p:nvSpPr>
-          <p:cNvPr id="38" name="Rectangle 37"/>
-          <p:cNvSpPr/>
-          <p:nvPr/>
-        </p:nvSpPr>
-        <p:spPr>
-          <a:xfrm>
-            <a:off x="548640" y="5760720"/>
-            <a:ext cx="5486400" cy="512064"/>
-          </a:xfrm>
-          <a:prstGeom prst="rect">
-            <a:avLst/>
-          </a:prstGeom>
-          <a:solidFill>
-            <a:srgbClr val="F4F6F8"/>
-          </a:solidFill>
-          <a:ln>
-            <a:noFill/>
-          </a:ln>
-          <a:effectLst/>
-        </p:spPr>
-        <p:style>
-          <a:lnRef idx="1">
-            <a:schemeClr val="accent1"/>
-          </a:lnRef>
-          <a:fillRef idx="3">
-            <a:schemeClr val="accent1"/>
-          </a:fillRef>
-          <a:effectRef idx="2">
-            <a:schemeClr val="accent1"/>
-          </a:effectRef>
-          <a:fontRef idx="minor">
-            <a:schemeClr val="lt1"/>
-          </a:fontRef>
-        </p:style>
-        <p:txBody>
-          <a:bodyPr rtlCol="0" anchor="ctr"/>
-          <a:lstStyle/>
-          <a:p>
-            <a:pPr algn="ctr"/>
-          </a:p>
-        </p:txBody>
-      </p:sp>
-      <p:sp>
-        <p:nvSpPr>
-          <p:cNvPr id="39" name="Rectangle 38"/>
-          <p:cNvSpPr/>
-          <p:nvPr/>
-        </p:nvSpPr>
-        <p:spPr>
-          <a:xfrm>
-            <a:off x="6126480" y="5760720"/>
-            <a:ext cx="5486400" cy="512064"/>
-          </a:xfrm>
-          <a:prstGeom prst="rect">
-            <a:avLst/>
-          </a:prstGeom>
-          <a:solidFill>
-            <a:srgbClr val="F4F6F8"/>
-          </a:solidFill>
-          <a:ln>
-            <a:noFill/>
-          </a:ln>
-          <a:effectLst/>
-        </p:spPr>
-        <p:style>
-          <a:lnRef idx="1">
-            <a:schemeClr val="accent1"/>
-          </a:lnRef>
-          <a:fillRef idx="3">
-            <a:schemeClr val="accent1"/>
-          </a:fillRef>
-          <a:effectRef idx="2">
-            <a:schemeClr val="accent1"/>
-          </a:effectRef>
-          <a:fontRef idx="minor">
-            <a:schemeClr val="lt1"/>
-          </a:fontRef>
-        </p:style>
-        <p:txBody>
-          <a:bodyPr rtlCol="0" anchor="ctr"/>
-          <a:lstStyle/>
-          <a:p>
-            <a:pPr algn="ctr"/>
-          </a:p>
-        </p:txBody>
-      </p:sp>
-      <p:sp>
-        <p:nvSpPr>
-          <p:cNvPr id="40" name="TextBox 39"/>
-          <p:cNvSpPr txBox="1"/>
-          <p:nvPr/>
-        </p:nvSpPr>
-        <p:spPr>
-          <a:xfrm>
-            <a:off x="731520" y="5760720"/>
-            <a:ext cx="5212080" cy="512064"/>
-          </a:xfrm>
-          <a:prstGeom prst="rect">
-            <a:avLst/>
-          </a:prstGeom>
-          <a:noFill/>
-        </p:spPr>
-        <p:txBody>
-          <a:bodyPr wrap="square" anchor="ctr">
-            <a:spAutoFit/>
-          </a:bodyPr>
-          <a:lstStyle/>
-          <a:p>
-            <a:pPr algn="l">
-              <a:spcBef>
-                <a:spcPts val="0"/>
-              </a:spcBef>
-              <a:spcAft>
-                <a:spcPts val="0"/>
-              </a:spcAft>
-            </a:pPr>
-            <a:r>
-              <a:rPr sz="1200" b="0">
-                <a:solidFill>
-                  <a:srgbClr val="5B626D"/>
-                </a:solidFill>
-                <a:latin typeface="Calibri"/>
-              </a:rPr>
-              <a:t>Slower, page-builder overhead</a:t>
-            </a:r>
-          </a:p>
-        </p:txBody>
-      </p:sp>
-      <p:sp>
-        <p:nvSpPr>
-          <p:cNvPr id="41" name="TextBox 40"/>
-          <p:cNvSpPr txBox="1"/>
-          <p:nvPr/>
-        </p:nvSpPr>
-        <p:spPr>
-          <a:xfrm>
-            <a:off x="6309360" y="5760720"/>
-            <a:ext cx="5212080" cy="512064"/>
-          </a:xfrm>
-          <a:prstGeom prst="rect">
-            <a:avLst/>
-          </a:prstGeom>
-          <a:noFill/>
-        </p:spPr>
-        <p:txBody>
-          <a:bodyPr wrap="square" anchor="ctr">
-            <a:spAutoFit/>
-          </a:bodyPr>
-          <a:lstStyle/>
-          <a:p>
-            <a:pPr algn="l">
-              <a:spcBef>
-                <a:spcPts val="0"/>
-              </a:spcBef>
-              <a:spcAft>
-                <a:spcPts val="0"/>
-              </a:spcAft>
-            </a:pPr>
-            <a:r>
-              <a:rPr sz="1200" b="1">
-                <a:solidFill>
-                  <a:srgbClr val="16335C"/>
-                </a:solidFill>
-                <a:latin typeface="Calibri"/>
-              </a:rPr>
-              <a:t>Fast, modern, search-friendly</a:t>
-            </a:r>
-          </a:p>
-        </p:txBody>
-      </p:sp>
-      <p:sp>
-        <p:nvSpPr>
-          <p:cNvPr id="42" name="TextBox 41"/>
+              <a:t>Final step, switched on last</a:t>
+            </a:r>
+          </a:p>
+        </p:txBody>
+      </p:sp>
+      <p:sp>
+        <p:nvSpPr>
+          <p:cNvPr id="26" name="TextBox 25"/>
           <p:cNvSpPr txBox="1"/>
           <p:nvPr/>
         </p:nvSpPr>
@@ -6406,7 +6733,7 @@
       </p:sp>
       <p:sp>
         <p:nvSpPr>
-          <p:cNvPr id="43" name="TextBox 42"/>
+          <p:cNvPr id="27" name="TextBox 26"/>
           <p:cNvSpPr txBox="1"/>
           <p:nvPr/>
         </p:nvSpPr>
@@ -6441,7 +6768,7 @@
                 </a:solidFill>
                 <a:latin typeface="Calibri"/>
               </a:rPr>
-              <a:t>11</a:t>
+              <a:t>12</a:t>
             </a:r>
           </a:p>
         </p:txBody>
@@ -6455,6 +6782,1849 @@
 </file>
 
 <file path=ppt/slides/slide12.xml><?xml version="1.0" encoding="utf-8"?>
+<p:sld xmlns:a="http://schemas.openxmlformats.org/drawingml/2006/main" xmlns:p="http://schemas.openxmlformats.org/presentationml/2006/main" xmlns:r="http://schemas.openxmlformats.org/officeDocument/2006/relationships">
+  <p:cSld>
+    <p:spTree>
+      <p:nvGrpSpPr>
+        <p:cNvPr id="1" name=""/>
+        <p:cNvGrpSpPr/>
+        <p:nvPr/>
+      </p:nvGrpSpPr>
+      <p:grpSpPr/>
+      <p:sp>
+        <p:nvSpPr>
+          <p:cNvPr id="2" name="Rectangle 1"/>
+          <p:cNvSpPr/>
+          <p:nvPr/>
+        </p:nvSpPr>
+        <p:spPr>
+          <a:xfrm>
+            <a:off x="0" y="0"/>
+            <a:ext cx="12191695" cy="1234440"/>
+          </a:xfrm>
+          <a:prstGeom prst="rect">
+            <a:avLst/>
+          </a:prstGeom>
+          <a:solidFill>
+            <a:srgbClr val="FFFFFF"/>
+          </a:solidFill>
+          <a:ln>
+            <a:noFill/>
+          </a:ln>
+          <a:effectLst/>
+        </p:spPr>
+        <p:style>
+          <a:lnRef idx="1">
+            <a:schemeClr val="accent1"/>
+          </a:lnRef>
+          <a:fillRef idx="3">
+            <a:schemeClr val="accent1"/>
+          </a:fillRef>
+          <a:effectRef idx="2">
+            <a:schemeClr val="accent1"/>
+          </a:effectRef>
+          <a:fontRef idx="minor">
+            <a:schemeClr val="lt1"/>
+          </a:fontRef>
+        </p:style>
+        <p:txBody>
+          <a:bodyPr rtlCol="0" anchor="ctr"/>
+          <a:lstStyle/>
+          <a:p>
+            <a:pPr algn="ctr"/>
+          </a:p>
+        </p:txBody>
+      </p:sp>
+      <p:sp>
+        <p:nvSpPr>
+          <p:cNvPr id="3" name="Rectangle 2"/>
+          <p:cNvSpPr/>
+          <p:nvPr/>
+        </p:nvSpPr>
+        <p:spPr>
+          <a:xfrm>
+            <a:off x="0" y="0"/>
+            <a:ext cx="201168" cy="1234440"/>
+          </a:xfrm>
+          <a:prstGeom prst="rect">
+            <a:avLst/>
+          </a:prstGeom>
+          <a:solidFill>
+            <a:srgbClr val="1D4ED8"/>
+          </a:solidFill>
+          <a:ln>
+            <a:noFill/>
+          </a:ln>
+          <a:effectLst/>
+        </p:spPr>
+        <p:style>
+          <a:lnRef idx="1">
+            <a:schemeClr val="accent1"/>
+          </a:lnRef>
+          <a:fillRef idx="3">
+            <a:schemeClr val="accent1"/>
+          </a:fillRef>
+          <a:effectRef idx="2">
+            <a:schemeClr val="accent1"/>
+          </a:effectRef>
+          <a:fontRef idx="minor">
+            <a:schemeClr val="lt1"/>
+          </a:fontRef>
+        </p:style>
+        <p:txBody>
+          <a:bodyPr rtlCol="0" anchor="ctr"/>
+          <a:lstStyle/>
+          <a:p>
+            <a:pPr algn="ctr"/>
+          </a:p>
+        </p:txBody>
+      </p:sp>
+      <p:sp>
+        <p:nvSpPr>
+          <p:cNvPr id="4" name="TextBox 3"/>
+          <p:cNvSpPr txBox="1"/>
+          <p:nvPr/>
+        </p:nvSpPr>
+        <p:spPr>
+          <a:xfrm>
+            <a:off x="548640" y="164592"/>
+            <a:ext cx="10972800" cy="1005840"/>
+          </a:xfrm>
+          <a:prstGeom prst="rect">
+            <a:avLst/>
+          </a:prstGeom>
+          <a:noFill/>
+        </p:spPr>
+        <p:txBody>
+          <a:bodyPr wrap="square" anchor="t">
+            <a:spAutoFit/>
+          </a:bodyPr>
+          <a:lstStyle/>
+          <a:p>
+            <a:pPr algn="l">
+              <a:spcBef>
+                <a:spcPts val="0"/>
+              </a:spcBef>
+              <a:spcAft>
+                <a:spcPts val="200"/>
+              </a:spcAft>
+            </a:pPr>
+            <a:r>
+              <a:rPr sz="1300" b="1">
+                <a:solidFill>
+                  <a:srgbClr val="1D4ED8"/>
+                </a:solidFill>
+                <a:latin typeface="Calibri"/>
+              </a:rPr>
+              <a:t>THE BOTTOM LINE</a:t>
+            </a:r>
+          </a:p>
+          <a:p>
+            <a:pPr algn="l">
+              <a:spcBef>
+                <a:spcPts val="0"/>
+              </a:spcBef>
+              <a:spcAft>
+                <a:spcPts val="0"/>
+              </a:spcAft>
+            </a:pPr>
+            <a:r>
+              <a:rPr sz="2800" b="1">
+                <a:solidFill>
+                  <a:srgbClr val="0B0B0C"/>
+                </a:solidFill>
+                <a:latin typeface="Calibri"/>
+              </a:rPr>
+              <a:t>Old site vs new site</a:t>
+            </a:r>
+          </a:p>
+        </p:txBody>
+      </p:sp>
+      <p:sp>
+        <p:nvSpPr>
+          <p:cNvPr id="5" name="Rectangle 4"/>
+          <p:cNvSpPr/>
+          <p:nvPr/>
+        </p:nvSpPr>
+        <p:spPr>
+          <a:xfrm>
+            <a:off x="548640" y="1097280"/>
+            <a:ext cx="11064240" cy="25400"/>
+          </a:xfrm>
+          <a:prstGeom prst="rect">
+            <a:avLst/>
+          </a:prstGeom>
+          <a:solidFill>
+            <a:srgbClr val="F4F6F8"/>
+          </a:solidFill>
+          <a:ln>
+            <a:noFill/>
+          </a:ln>
+          <a:effectLst/>
+        </p:spPr>
+        <p:style>
+          <a:lnRef idx="1">
+            <a:schemeClr val="accent1"/>
+          </a:lnRef>
+          <a:fillRef idx="3">
+            <a:schemeClr val="accent1"/>
+          </a:fillRef>
+          <a:effectRef idx="2">
+            <a:schemeClr val="accent1"/>
+          </a:effectRef>
+          <a:fontRef idx="minor">
+            <a:schemeClr val="lt1"/>
+          </a:fontRef>
+        </p:style>
+        <p:txBody>
+          <a:bodyPr rtlCol="0" anchor="ctr"/>
+          <a:lstStyle/>
+          <a:p>
+            <a:pPr algn="ctr"/>
+          </a:p>
+        </p:txBody>
+      </p:sp>
+      <p:sp>
+        <p:nvSpPr>
+          <p:cNvPr id="6" name="Rectangle 5"/>
+          <p:cNvSpPr/>
+          <p:nvPr/>
+        </p:nvSpPr>
+        <p:spPr>
+          <a:xfrm>
+            <a:off x="548640" y="1417320"/>
+            <a:ext cx="5486400" cy="457200"/>
+          </a:xfrm>
+          <a:prstGeom prst="rect">
+            <a:avLst/>
+          </a:prstGeom>
+          <a:solidFill>
+            <a:srgbClr val="0B0B0C"/>
+          </a:solidFill>
+          <a:ln>
+            <a:noFill/>
+          </a:ln>
+          <a:effectLst/>
+        </p:spPr>
+        <p:style>
+          <a:lnRef idx="1">
+            <a:schemeClr val="accent1"/>
+          </a:lnRef>
+          <a:fillRef idx="3">
+            <a:schemeClr val="accent1"/>
+          </a:fillRef>
+          <a:effectRef idx="2">
+            <a:schemeClr val="accent1"/>
+          </a:effectRef>
+          <a:fontRef idx="minor">
+            <a:schemeClr val="lt1"/>
+          </a:fontRef>
+        </p:style>
+        <p:txBody>
+          <a:bodyPr rtlCol="0" anchor="ctr"/>
+          <a:lstStyle/>
+          <a:p>
+            <a:pPr algn="ctr"/>
+          </a:p>
+        </p:txBody>
+      </p:sp>
+      <p:sp>
+        <p:nvSpPr>
+          <p:cNvPr id="7" name="Rectangle 6"/>
+          <p:cNvSpPr/>
+          <p:nvPr/>
+        </p:nvSpPr>
+        <p:spPr>
+          <a:xfrm>
+            <a:off x="6126480" y="1417320"/>
+            <a:ext cx="5486400" cy="457200"/>
+          </a:xfrm>
+          <a:prstGeom prst="rect">
+            <a:avLst/>
+          </a:prstGeom>
+          <a:solidFill>
+            <a:srgbClr val="1D4ED8"/>
+          </a:solidFill>
+          <a:ln>
+            <a:noFill/>
+          </a:ln>
+          <a:effectLst/>
+        </p:spPr>
+        <p:style>
+          <a:lnRef idx="1">
+            <a:schemeClr val="accent1"/>
+          </a:lnRef>
+          <a:fillRef idx="3">
+            <a:schemeClr val="accent1"/>
+          </a:fillRef>
+          <a:effectRef idx="2">
+            <a:schemeClr val="accent1"/>
+          </a:effectRef>
+          <a:fontRef idx="minor">
+            <a:schemeClr val="lt1"/>
+          </a:fontRef>
+        </p:style>
+        <p:txBody>
+          <a:bodyPr rtlCol="0" anchor="ctr"/>
+          <a:lstStyle/>
+          <a:p>
+            <a:pPr algn="ctr"/>
+          </a:p>
+        </p:txBody>
+      </p:sp>
+      <p:sp>
+        <p:nvSpPr>
+          <p:cNvPr id="8" name="TextBox 7"/>
+          <p:cNvSpPr txBox="1"/>
+          <p:nvPr/>
+        </p:nvSpPr>
+        <p:spPr>
+          <a:xfrm>
+            <a:off x="731520" y="1417320"/>
+            <a:ext cx="5120640" cy="457200"/>
+          </a:xfrm>
+          <a:prstGeom prst="rect">
+            <a:avLst/>
+          </a:prstGeom>
+          <a:noFill/>
+        </p:spPr>
+        <p:txBody>
+          <a:bodyPr wrap="square" anchor="ctr">
+            <a:spAutoFit/>
+          </a:bodyPr>
+          <a:lstStyle/>
+          <a:p>
+            <a:pPr algn="l">
+              <a:spcBef>
+                <a:spcPts val="0"/>
+              </a:spcBef>
+              <a:spcAft>
+                <a:spcPts val="0"/>
+              </a:spcAft>
+            </a:pPr>
+            <a:r>
+              <a:rPr sz="1300" b="1">
+                <a:solidFill>
+                  <a:srgbClr val="FFFFFF"/>
+                </a:solidFill>
+                <a:latin typeface="Calibri"/>
+              </a:rPr>
+              <a:t>OLD SITE</a:t>
+            </a:r>
+          </a:p>
+        </p:txBody>
+      </p:sp>
+      <p:sp>
+        <p:nvSpPr>
+          <p:cNvPr id="9" name="TextBox 8"/>
+          <p:cNvSpPr txBox="1"/>
+          <p:nvPr/>
+        </p:nvSpPr>
+        <p:spPr>
+          <a:xfrm>
+            <a:off x="6309360" y="1417320"/>
+            <a:ext cx="5120640" cy="457200"/>
+          </a:xfrm>
+          <a:prstGeom prst="rect">
+            <a:avLst/>
+          </a:prstGeom>
+          <a:noFill/>
+        </p:spPr>
+        <p:txBody>
+          <a:bodyPr wrap="square" anchor="ctr">
+            <a:spAutoFit/>
+          </a:bodyPr>
+          <a:lstStyle/>
+          <a:p>
+            <a:pPr algn="l">
+              <a:spcBef>
+                <a:spcPts val="0"/>
+              </a:spcBef>
+              <a:spcAft>
+                <a:spcPts val="0"/>
+              </a:spcAft>
+            </a:pPr>
+            <a:r>
+              <a:rPr sz="1300" b="1">
+                <a:solidFill>
+                  <a:srgbClr val="FFFFFF"/>
+                </a:solidFill>
+                <a:latin typeface="Calibri"/>
+              </a:rPr>
+              <a:t>NEW SITE</a:t>
+            </a:r>
+          </a:p>
+        </p:txBody>
+      </p:sp>
+      <p:sp>
+        <p:nvSpPr>
+          <p:cNvPr id="10" name="Rectangle 9"/>
+          <p:cNvSpPr/>
+          <p:nvPr/>
+        </p:nvSpPr>
+        <p:spPr>
+          <a:xfrm>
+            <a:off x="548640" y="1920240"/>
+            <a:ext cx="5486400" cy="512064"/>
+          </a:xfrm>
+          <a:prstGeom prst="rect">
+            <a:avLst/>
+          </a:prstGeom>
+          <a:solidFill>
+            <a:srgbClr val="FFFFFF"/>
+          </a:solidFill>
+          <a:ln>
+            <a:noFill/>
+          </a:ln>
+          <a:effectLst/>
+        </p:spPr>
+        <p:style>
+          <a:lnRef idx="1">
+            <a:schemeClr val="accent1"/>
+          </a:lnRef>
+          <a:fillRef idx="3">
+            <a:schemeClr val="accent1"/>
+          </a:fillRef>
+          <a:effectRef idx="2">
+            <a:schemeClr val="accent1"/>
+          </a:effectRef>
+          <a:fontRef idx="minor">
+            <a:schemeClr val="lt1"/>
+          </a:fontRef>
+        </p:style>
+        <p:txBody>
+          <a:bodyPr rtlCol="0" anchor="ctr"/>
+          <a:lstStyle/>
+          <a:p>
+            <a:pPr algn="ctr"/>
+          </a:p>
+        </p:txBody>
+      </p:sp>
+      <p:sp>
+        <p:nvSpPr>
+          <p:cNvPr id="11" name="Rectangle 10"/>
+          <p:cNvSpPr/>
+          <p:nvPr/>
+        </p:nvSpPr>
+        <p:spPr>
+          <a:xfrm>
+            <a:off x="6126480" y="1920240"/>
+            <a:ext cx="5486400" cy="512064"/>
+          </a:xfrm>
+          <a:prstGeom prst="rect">
+            <a:avLst/>
+          </a:prstGeom>
+          <a:solidFill>
+            <a:srgbClr val="FFFFFF"/>
+          </a:solidFill>
+          <a:ln>
+            <a:noFill/>
+          </a:ln>
+          <a:effectLst/>
+        </p:spPr>
+        <p:style>
+          <a:lnRef idx="1">
+            <a:schemeClr val="accent1"/>
+          </a:lnRef>
+          <a:fillRef idx="3">
+            <a:schemeClr val="accent1"/>
+          </a:fillRef>
+          <a:effectRef idx="2">
+            <a:schemeClr val="accent1"/>
+          </a:effectRef>
+          <a:fontRef idx="minor">
+            <a:schemeClr val="lt1"/>
+          </a:fontRef>
+        </p:style>
+        <p:txBody>
+          <a:bodyPr rtlCol="0" anchor="ctr"/>
+          <a:lstStyle/>
+          <a:p>
+            <a:pPr algn="ctr"/>
+          </a:p>
+        </p:txBody>
+      </p:sp>
+      <p:sp>
+        <p:nvSpPr>
+          <p:cNvPr id="12" name="TextBox 11"/>
+          <p:cNvSpPr txBox="1"/>
+          <p:nvPr/>
+        </p:nvSpPr>
+        <p:spPr>
+          <a:xfrm>
+            <a:off x="731520" y="1920240"/>
+            <a:ext cx="5212080" cy="512064"/>
+          </a:xfrm>
+          <a:prstGeom prst="rect">
+            <a:avLst/>
+          </a:prstGeom>
+          <a:noFill/>
+        </p:spPr>
+        <p:txBody>
+          <a:bodyPr wrap="square" anchor="ctr">
+            <a:spAutoFit/>
+          </a:bodyPr>
+          <a:lstStyle/>
+          <a:p>
+            <a:pPr algn="l">
+              <a:spcBef>
+                <a:spcPts val="0"/>
+              </a:spcBef>
+              <a:spcAft>
+                <a:spcPts val="0"/>
+              </a:spcAft>
+            </a:pPr>
+            <a:r>
+              <a:rPr sz="1200" b="0">
+                <a:solidFill>
+                  <a:srgbClr val="5B626D"/>
+                </a:solidFill>
+                <a:latin typeface="Calibri"/>
+              </a:rPr>
+              <a:t>248 GB of bloat, 91% duplicate images</a:t>
+            </a:r>
+          </a:p>
+        </p:txBody>
+      </p:sp>
+      <p:sp>
+        <p:nvSpPr>
+          <p:cNvPr id="13" name="TextBox 12"/>
+          <p:cNvSpPr txBox="1"/>
+          <p:nvPr/>
+        </p:nvSpPr>
+        <p:spPr>
+          <a:xfrm>
+            <a:off x="6309360" y="1920240"/>
+            <a:ext cx="5212080" cy="512064"/>
+          </a:xfrm>
+          <a:prstGeom prst="rect">
+            <a:avLst/>
+          </a:prstGeom>
+          <a:noFill/>
+        </p:spPr>
+        <p:txBody>
+          <a:bodyPr wrap="square" anchor="ctr">
+            <a:spAutoFit/>
+          </a:bodyPr>
+          <a:lstStyle/>
+          <a:p>
+            <a:pPr algn="l">
+              <a:spcBef>
+                <a:spcPts val="0"/>
+              </a:spcBef>
+              <a:spcAft>
+                <a:spcPts val="0"/>
+              </a:spcAft>
+            </a:pPr>
+            <a:r>
+              <a:rPr sz="1200" b="1">
+                <a:solidFill>
+                  <a:srgbClr val="16335C"/>
+                </a:solidFill>
+                <a:latin typeface="Calibri"/>
+              </a:rPr>
+              <a:t>Cleaned up, lean media library</a:t>
+            </a:r>
+          </a:p>
+        </p:txBody>
+      </p:sp>
+      <p:sp>
+        <p:nvSpPr>
+          <p:cNvPr id="14" name="Rectangle 13"/>
+          <p:cNvSpPr/>
+          <p:nvPr/>
+        </p:nvSpPr>
+        <p:spPr>
+          <a:xfrm>
+            <a:off x="548640" y="2468880"/>
+            <a:ext cx="5486400" cy="512064"/>
+          </a:xfrm>
+          <a:prstGeom prst="rect">
+            <a:avLst/>
+          </a:prstGeom>
+          <a:solidFill>
+            <a:srgbClr val="F4F6F8"/>
+          </a:solidFill>
+          <a:ln>
+            <a:noFill/>
+          </a:ln>
+          <a:effectLst/>
+        </p:spPr>
+        <p:style>
+          <a:lnRef idx="1">
+            <a:schemeClr val="accent1"/>
+          </a:lnRef>
+          <a:fillRef idx="3">
+            <a:schemeClr val="accent1"/>
+          </a:fillRef>
+          <a:effectRef idx="2">
+            <a:schemeClr val="accent1"/>
+          </a:effectRef>
+          <a:fontRef idx="minor">
+            <a:schemeClr val="lt1"/>
+          </a:fontRef>
+        </p:style>
+        <p:txBody>
+          <a:bodyPr rtlCol="0" anchor="ctr"/>
+          <a:lstStyle/>
+          <a:p>
+            <a:pPr algn="ctr"/>
+          </a:p>
+        </p:txBody>
+      </p:sp>
+      <p:sp>
+        <p:nvSpPr>
+          <p:cNvPr id="15" name="Rectangle 14"/>
+          <p:cNvSpPr/>
+          <p:nvPr/>
+        </p:nvSpPr>
+        <p:spPr>
+          <a:xfrm>
+            <a:off x="6126480" y="2468880"/>
+            <a:ext cx="5486400" cy="512064"/>
+          </a:xfrm>
+          <a:prstGeom prst="rect">
+            <a:avLst/>
+          </a:prstGeom>
+          <a:solidFill>
+            <a:srgbClr val="F4F6F8"/>
+          </a:solidFill>
+          <a:ln>
+            <a:noFill/>
+          </a:ln>
+          <a:effectLst/>
+        </p:spPr>
+        <p:style>
+          <a:lnRef idx="1">
+            <a:schemeClr val="accent1"/>
+          </a:lnRef>
+          <a:fillRef idx="3">
+            <a:schemeClr val="accent1"/>
+          </a:fillRef>
+          <a:effectRef idx="2">
+            <a:schemeClr val="accent1"/>
+          </a:effectRef>
+          <a:fontRef idx="minor">
+            <a:schemeClr val="lt1"/>
+          </a:fontRef>
+        </p:style>
+        <p:txBody>
+          <a:bodyPr rtlCol="0" anchor="ctr"/>
+          <a:lstStyle/>
+          <a:p>
+            <a:pPr algn="ctr"/>
+          </a:p>
+        </p:txBody>
+      </p:sp>
+      <p:sp>
+        <p:nvSpPr>
+          <p:cNvPr id="16" name="TextBox 15"/>
+          <p:cNvSpPr txBox="1"/>
+          <p:nvPr/>
+        </p:nvSpPr>
+        <p:spPr>
+          <a:xfrm>
+            <a:off x="731520" y="2468880"/>
+            <a:ext cx="5212080" cy="512064"/>
+          </a:xfrm>
+          <a:prstGeom prst="rect">
+            <a:avLst/>
+          </a:prstGeom>
+          <a:noFill/>
+        </p:spPr>
+        <p:txBody>
+          <a:bodyPr wrap="square" anchor="ctr">
+            <a:spAutoFit/>
+          </a:bodyPr>
+          <a:lstStyle/>
+          <a:p>
+            <a:pPr algn="l">
+              <a:spcBef>
+                <a:spcPts val="0"/>
+              </a:spcBef>
+              <a:spcAft>
+                <a:spcPts val="0"/>
+              </a:spcAft>
+            </a:pPr>
+            <a:r>
+              <a:rPr sz="1200" b="0">
+                <a:solidFill>
+                  <a:srgbClr val="5B626D"/>
+                </a:solidFill>
+                <a:latin typeface="Calibri"/>
+              </a:rPr>
+              <a:t>Backups failing since ~Oct 2025</a:t>
+            </a:r>
+          </a:p>
+        </p:txBody>
+      </p:sp>
+      <p:sp>
+        <p:nvSpPr>
+          <p:cNvPr id="17" name="TextBox 16"/>
+          <p:cNvSpPr txBox="1"/>
+          <p:nvPr/>
+        </p:nvSpPr>
+        <p:spPr>
+          <a:xfrm>
+            <a:off x="6309360" y="2468880"/>
+            <a:ext cx="5212080" cy="512064"/>
+          </a:xfrm>
+          <a:prstGeom prst="rect">
+            <a:avLst/>
+          </a:prstGeom>
+          <a:noFill/>
+        </p:spPr>
+        <p:txBody>
+          <a:bodyPr wrap="square" anchor="ctr">
+            <a:spAutoFit/>
+          </a:bodyPr>
+          <a:lstStyle/>
+          <a:p>
+            <a:pPr algn="l">
+              <a:spcBef>
+                <a:spcPts val="0"/>
+              </a:spcBef>
+              <a:spcAft>
+                <a:spcPts val="0"/>
+              </a:spcAft>
+            </a:pPr>
+            <a:r>
+              <a:rPr sz="1200" b="1">
+                <a:solidFill>
+                  <a:srgbClr val="16335C"/>
+                </a:solidFill>
+                <a:latin typeface="Calibri"/>
+              </a:rPr>
+              <a:t>Reliable, fast backups</a:t>
+            </a:r>
+          </a:p>
+        </p:txBody>
+      </p:sp>
+      <p:sp>
+        <p:nvSpPr>
+          <p:cNvPr id="18" name="Rectangle 17"/>
+          <p:cNvSpPr/>
+          <p:nvPr/>
+        </p:nvSpPr>
+        <p:spPr>
+          <a:xfrm>
+            <a:off x="548640" y="3017520"/>
+            <a:ext cx="5486400" cy="512064"/>
+          </a:xfrm>
+          <a:prstGeom prst="rect">
+            <a:avLst/>
+          </a:prstGeom>
+          <a:solidFill>
+            <a:srgbClr val="FFFFFF"/>
+          </a:solidFill>
+          <a:ln>
+            <a:noFill/>
+          </a:ln>
+          <a:effectLst/>
+        </p:spPr>
+        <p:style>
+          <a:lnRef idx="1">
+            <a:schemeClr val="accent1"/>
+          </a:lnRef>
+          <a:fillRef idx="3">
+            <a:schemeClr val="accent1"/>
+          </a:fillRef>
+          <a:effectRef idx="2">
+            <a:schemeClr val="accent1"/>
+          </a:effectRef>
+          <a:fontRef idx="minor">
+            <a:schemeClr val="lt1"/>
+          </a:fontRef>
+        </p:style>
+        <p:txBody>
+          <a:bodyPr rtlCol="0" anchor="ctr"/>
+          <a:lstStyle/>
+          <a:p>
+            <a:pPr algn="ctr"/>
+          </a:p>
+        </p:txBody>
+      </p:sp>
+      <p:sp>
+        <p:nvSpPr>
+          <p:cNvPr id="19" name="Rectangle 18"/>
+          <p:cNvSpPr/>
+          <p:nvPr/>
+        </p:nvSpPr>
+        <p:spPr>
+          <a:xfrm>
+            <a:off x="6126480" y="3017520"/>
+            <a:ext cx="5486400" cy="512064"/>
+          </a:xfrm>
+          <a:prstGeom prst="rect">
+            <a:avLst/>
+          </a:prstGeom>
+          <a:solidFill>
+            <a:srgbClr val="FFFFFF"/>
+          </a:solidFill>
+          <a:ln>
+            <a:noFill/>
+          </a:ln>
+          <a:effectLst/>
+        </p:spPr>
+        <p:style>
+          <a:lnRef idx="1">
+            <a:schemeClr val="accent1"/>
+          </a:lnRef>
+          <a:fillRef idx="3">
+            <a:schemeClr val="accent1"/>
+          </a:fillRef>
+          <a:effectRef idx="2">
+            <a:schemeClr val="accent1"/>
+          </a:effectRef>
+          <a:fontRef idx="minor">
+            <a:schemeClr val="lt1"/>
+          </a:fontRef>
+        </p:style>
+        <p:txBody>
+          <a:bodyPr rtlCol="0" anchor="ctr"/>
+          <a:lstStyle/>
+          <a:p>
+            <a:pPr algn="ctr"/>
+          </a:p>
+        </p:txBody>
+      </p:sp>
+      <p:sp>
+        <p:nvSpPr>
+          <p:cNvPr id="20" name="TextBox 19"/>
+          <p:cNvSpPr txBox="1"/>
+          <p:nvPr/>
+        </p:nvSpPr>
+        <p:spPr>
+          <a:xfrm>
+            <a:off x="731520" y="3017520"/>
+            <a:ext cx="5212080" cy="512064"/>
+          </a:xfrm>
+          <a:prstGeom prst="rect">
+            <a:avLst/>
+          </a:prstGeom>
+          <a:noFill/>
+        </p:spPr>
+        <p:txBody>
+          <a:bodyPr wrap="square" anchor="ctr">
+            <a:spAutoFit/>
+          </a:bodyPr>
+          <a:lstStyle/>
+          <a:p>
+            <a:pPr algn="l">
+              <a:spcBef>
+                <a:spcPts val="0"/>
+              </a:spcBef>
+              <a:spcAft>
+                <a:spcPts val="0"/>
+              </a:spcAft>
+            </a:pPr>
+            <a:r>
+              <a:rPr sz="1200" b="0">
+                <a:solidFill>
+                  <a:srgbClr val="5B626D"/>
+                </a:solidFill>
+                <a:latin typeface="Calibri"/>
+              </a:rPr>
+              <a:t>Higher, growing hosting cost</a:t>
+            </a:r>
+          </a:p>
+        </p:txBody>
+      </p:sp>
+      <p:sp>
+        <p:nvSpPr>
+          <p:cNvPr id="21" name="TextBox 20"/>
+          <p:cNvSpPr txBox="1"/>
+          <p:nvPr/>
+        </p:nvSpPr>
+        <p:spPr>
+          <a:xfrm>
+            <a:off x="6309360" y="3017520"/>
+            <a:ext cx="5212080" cy="512064"/>
+          </a:xfrm>
+          <a:prstGeom prst="rect">
+            <a:avLst/>
+          </a:prstGeom>
+          <a:noFill/>
+        </p:spPr>
+        <p:txBody>
+          <a:bodyPr wrap="square" anchor="ctr">
+            <a:spAutoFit/>
+          </a:bodyPr>
+          <a:lstStyle/>
+          <a:p>
+            <a:pPr algn="l">
+              <a:spcBef>
+                <a:spcPts val="0"/>
+              </a:spcBef>
+              <a:spcAft>
+                <a:spcPts val="0"/>
+              </a:spcAft>
+            </a:pPr>
+            <a:r>
+              <a:rPr sz="1200" b="1">
+                <a:solidFill>
+                  <a:srgbClr val="16335C"/>
+                </a:solidFill>
+                <a:latin typeface="Calibri"/>
+              </a:rPr>
+              <a:t>Lower, predictable hosting cost</a:t>
+            </a:r>
+          </a:p>
+        </p:txBody>
+      </p:sp>
+      <p:sp>
+        <p:nvSpPr>
+          <p:cNvPr id="22" name="Rectangle 21"/>
+          <p:cNvSpPr/>
+          <p:nvPr/>
+        </p:nvSpPr>
+        <p:spPr>
+          <a:xfrm>
+            <a:off x="548640" y="3566160"/>
+            <a:ext cx="5486400" cy="512064"/>
+          </a:xfrm>
+          <a:prstGeom prst="rect">
+            <a:avLst/>
+          </a:prstGeom>
+          <a:solidFill>
+            <a:srgbClr val="F4F6F8"/>
+          </a:solidFill>
+          <a:ln>
+            <a:noFill/>
+          </a:ln>
+          <a:effectLst/>
+        </p:spPr>
+        <p:style>
+          <a:lnRef idx="1">
+            <a:schemeClr val="accent1"/>
+          </a:lnRef>
+          <a:fillRef idx="3">
+            <a:schemeClr val="accent1"/>
+          </a:fillRef>
+          <a:effectRef idx="2">
+            <a:schemeClr val="accent1"/>
+          </a:effectRef>
+          <a:fontRef idx="minor">
+            <a:schemeClr val="lt1"/>
+          </a:fontRef>
+        </p:style>
+        <p:txBody>
+          <a:bodyPr rtlCol="0" anchor="ctr"/>
+          <a:lstStyle/>
+          <a:p>
+            <a:pPr algn="ctr"/>
+          </a:p>
+        </p:txBody>
+      </p:sp>
+      <p:sp>
+        <p:nvSpPr>
+          <p:cNvPr id="23" name="Rectangle 22"/>
+          <p:cNvSpPr/>
+          <p:nvPr/>
+        </p:nvSpPr>
+        <p:spPr>
+          <a:xfrm>
+            <a:off x="6126480" y="3566160"/>
+            <a:ext cx="5486400" cy="512064"/>
+          </a:xfrm>
+          <a:prstGeom prst="rect">
+            <a:avLst/>
+          </a:prstGeom>
+          <a:solidFill>
+            <a:srgbClr val="F4F6F8"/>
+          </a:solidFill>
+          <a:ln>
+            <a:noFill/>
+          </a:ln>
+          <a:effectLst/>
+        </p:spPr>
+        <p:style>
+          <a:lnRef idx="1">
+            <a:schemeClr val="accent1"/>
+          </a:lnRef>
+          <a:fillRef idx="3">
+            <a:schemeClr val="accent1"/>
+          </a:fillRef>
+          <a:effectRef idx="2">
+            <a:schemeClr val="accent1"/>
+          </a:effectRef>
+          <a:fontRef idx="minor">
+            <a:schemeClr val="lt1"/>
+          </a:fontRef>
+        </p:style>
+        <p:txBody>
+          <a:bodyPr rtlCol="0" anchor="ctr"/>
+          <a:lstStyle/>
+          <a:p>
+            <a:pPr algn="ctr"/>
+          </a:p>
+        </p:txBody>
+      </p:sp>
+      <p:sp>
+        <p:nvSpPr>
+          <p:cNvPr id="24" name="TextBox 23"/>
+          <p:cNvSpPr txBox="1"/>
+          <p:nvPr/>
+        </p:nvSpPr>
+        <p:spPr>
+          <a:xfrm>
+            <a:off x="731520" y="3566160"/>
+            <a:ext cx="5212080" cy="512064"/>
+          </a:xfrm>
+          <a:prstGeom prst="rect">
+            <a:avLst/>
+          </a:prstGeom>
+          <a:noFill/>
+        </p:spPr>
+        <p:txBody>
+          <a:bodyPr wrap="square" anchor="ctr">
+            <a:spAutoFit/>
+          </a:bodyPr>
+          <a:lstStyle/>
+          <a:p>
+            <a:pPr algn="l">
+              <a:spcBef>
+                <a:spcPts val="0"/>
+              </a:spcBef>
+              <a:spcAft>
+                <a:spcPts val="0"/>
+              </a:spcAft>
+            </a:pPr>
+            <a:r>
+              <a:rPr sz="1200" b="0">
+                <a:solidFill>
+                  <a:srgbClr val="5B626D"/>
+                </a:solidFill>
+                <a:latin typeface="Calibri"/>
+              </a:rPr>
+              <a:t>Changes needed a developer</a:t>
+            </a:r>
+          </a:p>
+        </p:txBody>
+      </p:sp>
+      <p:sp>
+        <p:nvSpPr>
+          <p:cNvPr id="25" name="TextBox 24"/>
+          <p:cNvSpPr txBox="1"/>
+          <p:nvPr/>
+        </p:nvSpPr>
+        <p:spPr>
+          <a:xfrm>
+            <a:off x="6309360" y="3566160"/>
+            <a:ext cx="5212080" cy="512064"/>
+          </a:xfrm>
+          <a:prstGeom prst="rect">
+            <a:avLst/>
+          </a:prstGeom>
+          <a:noFill/>
+        </p:spPr>
+        <p:txBody>
+          <a:bodyPr wrap="square" anchor="ctr">
+            <a:spAutoFit/>
+          </a:bodyPr>
+          <a:lstStyle/>
+          <a:p>
+            <a:pPr algn="l">
+              <a:spcBef>
+                <a:spcPts val="0"/>
+              </a:spcBef>
+              <a:spcAft>
+                <a:spcPts val="0"/>
+              </a:spcAft>
+            </a:pPr>
+            <a:r>
+              <a:rPr sz="1200" b="1">
+                <a:solidFill>
+                  <a:srgbClr val="16335C"/>
+                </a:solidFill>
+                <a:latin typeface="Calibri"/>
+              </a:rPr>
+              <a:t>Team edits products &amp; pages themselves</a:t>
+            </a:r>
+          </a:p>
+        </p:txBody>
+      </p:sp>
+      <p:sp>
+        <p:nvSpPr>
+          <p:cNvPr id="26" name="Rectangle 25"/>
+          <p:cNvSpPr/>
+          <p:nvPr/>
+        </p:nvSpPr>
+        <p:spPr>
+          <a:xfrm>
+            <a:off x="548640" y="4114800"/>
+            <a:ext cx="5486400" cy="512064"/>
+          </a:xfrm>
+          <a:prstGeom prst="rect">
+            <a:avLst/>
+          </a:prstGeom>
+          <a:solidFill>
+            <a:srgbClr val="FFFFFF"/>
+          </a:solidFill>
+          <a:ln>
+            <a:noFill/>
+          </a:ln>
+          <a:effectLst/>
+        </p:spPr>
+        <p:style>
+          <a:lnRef idx="1">
+            <a:schemeClr val="accent1"/>
+          </a:lnRef>
+          <a:fillRef idx="3">
+            <a:schemeClr val="accent1"/>
+          </a:fillRef>
+          <a:effectRef idx="2">
+            <a:schemeClr val="accent1"/>
+          </a:effectRef>
+          <a:fontRef idx="minor">
+            <a:schemeClr val="lt1"/>
+          </a:fontRef>
+        </p:style>
+        <p:txBody>
+          <a:bodyPr rtlCol="0" anchor="ctr"/>
+          <a:lstStyle/>
+          <a:p>
+            <a:pPr algn="ctr"/>
+          </a:p>
+        </p:txBody>
+      </p:sp>
+      <p:sp>
+        <p:nvSpPr>
+          <p:cNvPr id="27" name="Rectangle 26"/>
+          <p:cNvSpPr/>
+          <p:nvPr/>
+        </p:nvSpPr>
+        <p:spPr>
+          <a:xfrm>
+            <a:off x="6126480" y="4114800"/>
+            <a:ext cx="5486400" cy="512064"/>
+          </a:xfrm>
+          <a:prstGeom prst="rect">
+            <a:avLst/>
+          </a:prstGeom>
+          <a:solidFill>
+            <a:srgbClr val="FFFFFF"/>
+          </a:solidFill>
+          <a:ln>
+            <a:noFill/>
+          </a:ln>
+          <a:effectLst/>
+        </p:spPr>
+        <p:style>
+          <a:lnRef idx="1">
+            <a:schemeClr val="accent1"/>
+          </a:lnRef>
+          <a:fillRef idx="3">
+            <a:schemeClr val="accent1"/>
+          </a:fillRef>
+          <a:effectRef idx="2">
+            <a:schemeClr val="accent1"/>
+          </a:effectRef>
+          <a:fontRef idx="minor">
+            <a:schemeClr val="lt1"/>
+          </a:fontRef>
+        </p:style>
+        <p:txBody>
+          <a:bodyPr rtlCol="0" anchor="ctr"/>
+          <a:lstStyle/>
+          <a:p>
+            <a:pPr algn="ctr"/>
+          </a:p>
+        </p:txBody>
+      </p:sp>
+      <p:sp>
+        <p:nvSpPr>
+          <p:cNvPr id="28" name="TextBox 27"/>
+          <p:cNvSpPr txBox="1"/>
+          <p:nvPr/>
+        </p:nvSpPr>
+        <p:spPr>
+          <a:xfrm>
+            <a:off x="731520" y="4114800"/>
+            <a:ext cx="5212080" cy="512064"/>
+          </a:xfrm>
+          <a:prstGeom prst="rect">
+            <a:avLst/>
+          </a:prstGeom>
+          <a:noFill/>
+        </p:spPr>
+        <p:txBody>
+          <a:bodyPr wrap="square" anchor="ctr">
+            <a:spAutoFit/>
+          </a:bodyPr>
+          <a:lstStyle/>
+          <a:p>
+            <a:pPr algn="l">
+              <a:spcBef>
+                <a:spcPts val="0"/>
+              </a:spcBef>
+              <a:spcAft>
+                <a:spcPts val="0"/>
+              </a:spcAft>
+            </a:pPr>
+            <a:r>
+              <a:rPr sz="1200" b="0">
+                <a:solidFill>
+                  <a:srgbClr val="5B626D"/>
+                </a:solidFill>
+                <a:latin typeface="Calibri"/>
+              </a:rPr>
+              <a:t>A brochure</a:t>
+            </a:r>
+          </a:p>
+        </p:txBody>
+      </p:sp>
+      <p:sp>
+        <p:nvSpPr>
+          <p:cNvPr id="29" name="TextBox 28"/>
+          <p:cNvSpPr txBox="1"/>
+          <p:nvPr/>
+        </p:nvSpPr>
+        <p:spPr>
+          <a:xfrm>
+            <a:off x="6309360" y="4114800"/>
+            <a:ext cx="5212080" cy="512064"/>
+          </a:xfrm>
+          <a:prstGeom prst="rect">
+            <a:avLst/>
+          </a:prstGeom>
+          <a:noFill/>
+        </p:spPr>
+        <p:txBody>
+          <a:bodyPr wrap="square" anchor="ctr">
+            <a:spAutoFit/>
+          </a:bodyPr>
+          <a:lstStyle/>
+          <a:p>
+            <a:pPr algn="l">
+              <a:spcBef>
+                <a:spcPts val="0"/>
+              </a:spcBef>
+              <a:spcAft>
+                <a:spcPts val="0"/>
+              </a:spcAft>
+            </a:pPr>
+            <a:r>
+              <a:rPr sz="1200" b="1">
+                <a:solidFill>
+                  <a:srgbClr val="16335C"/>
+                </a:solidFill>
+                <a:latin typeface="Calibri"/>
+              </a:rPr>
+              <a:t>Captures leads + builds its own SEO</a:t>
+            </a:r>
+          </a:p>
+        </p:txBody>
+      </p:sp>
+      <p:sp>
+        <p:nvSpPr>
+          <p:cNvPr id="30" name="Rectangle 29"/>
+          <p:cNvSpPr/>
+          <p:nvPr/>
+        </p:nvSpPr>
+        <p:spPr>
+          <a:xfrm>
+            <a:off x="548640" y="4663440"/>
+            <a:ext cx="5486400" cy="512064"/>
+          </a:xfrm>
+          <a:prstGeom prst="rect">
+            <a:avLst/>
+          </a:prstGeom>
+          <a:solidFill>
+            <a:srgbClr val="F4F6F8"/>
+          </a:solidFill>
+          <a:ln>
+            <a:noFill/>
+          </a:ln>
+          <a:effectLst/>
+        </p:spPr>
+        <p:style>
+          <a:lnRef idx="1">
+            <a:schemeClr val="accent1"/>
+          </a:lnRef>
+          <a:fillRef idx="3">
+            <a:schemeClr val="accent1"/>
+          </a:fillRef>
+          <a:effectRef idx="2">
+            <a:schemeClr val="accent1"/>
+          </a:effectRef>
+          <a:fontRef idx="minor">
+            <a:schemeClr val="lt1"/>
+          </a:fontRef>
+        </p:style>
+        <p:txBody>
+          <a:bodyPr rtlCol="0" anchor="ctr"/>
+          <a:lstStyle/>
+          <a:p>
+            <a:pPr algn="ctr"/>
+          </a:p>
+        </p:txBody>
+      </p:sp>
+      <p:sp>
+        <p:nvSpPr>
+          <p:cNvPr id="31" name="Rectangle 30"/>
+          <p:cNvSpPr/>
+          <p:nvPr/>
+        </p:nvSpPr>
+        <p:spPr>
+          <a:xfrm>
+            <a:off x="6126480" y="4663440"/>
+            <a:ext cx="5486400" cy="512064"/>
+          </a:xfrm>
+          <a:prstGeom prst="rect">
+            <a:avLst/>
+          </a:prstGeom>
+          <a:solidFill>
+            <a:srgbClr val="F4F6F8"/>
+          </a:solidFill>
+          <a:ln>
+            <a:noFill/>
+          </a:ln>
+          <a:effectLst/>
+        </p:spPr>
+        <p:style>
+          <a:lnRef idx="1">
+            <a:schemeClr val="accent1"/>
+          </a:lnRef>
+          <a:fillRef idx="3">
+            <a:schemeClr val="accent1"/>
+          </a:fillRef>
+          <a:effectRef idx="2">
+            <a:schemeClr val="accent1"/>
+          </a:effectRef>
+          <a:fontRef idx="minor">
+            <a:schemeClr val="lt1"/>
+          </a:fontRef>
+        </p:style>
+        <p:txBody>
+          <a:bodyPr rtlCol="0" anchor="ctr"/>
+          <a:lstStyle/>
+          <a:p>
+            <a:pPr algn="ctr"/>
+          </a:p>
+        </p:txBody>
+      </p:sp>
+      <p:sp>
+        <p:nvSpPr>
+          <p:cNvPr id="32" name="TextBox 31"/>
+          <p:cNvSpPr txBox="1"/>
+          <p:nvPr/>
+        </p:nvSpPr>
+        <p:spPr>
+          <a:xfrm>
+            <a:off x="731520" y="4663440"/>
+            <a:ext cx="5212080" cy="512064"/>
+          </a:xfrm>
+          <a:prstGeom prst="rect">
+            <a:avLst/>
+          </a:prstGeom>
+          <a:noFill/>
+        </p:spPr>
+        <p:txBody>
+          <a:bodyPr wrap="square" anchor="ctr">
+            <a:spAutoFit/>
+          </a:bodyPr>
+          <a:lstStyle/>
+          <a:p>
+            <a:pPr algn="l">
+              <a:spcBef>
+                <a:spcPts val="0"/>
+              </a:spcBef>
+              <a:spcAft>
+                <a:spcPts val="0"/>
+              </a:spcAft>
+            </a:pPr>
+            <a:r>
+              <a:rPr sz="1200" b="0">
+                <a:solidFill>
+                  <a:srgbClr val="5B626D"/>
+                </a:solidFill>
+                <a:latin typeface="Calibri"/>
+              </a:rPr>
+              <a:t>No BIM / specifier capture</a:t>
+            </a:r>
+          </a:p>
+        </p:txBody>
+      </p:sp>
+      <p:sp>
+        <p:nvSpPr>
+          <p:cNvPr id="33" name="TextBox 32"/>
+          <p:cNvSpPr txBox="1"/>
+          <p:nvPr/>
+        </p:nvSpPr>
+        <p:spPr>
+          <a:xfrm>
+            <a:off x="6309360" y="4663440"/>
+            <a:ext cx="5212080" cy="512064"/>
+          </a:xfrm>
+          <a:prstGeom prst="rect">
+            <a:avLst/>
+          </a:prstGeom>
+          <a:noFill/>
+        </p:spPr>
+        <p:txBody>
+          <a:bodyPr wrap="square" anchor="ctr">
+            <a:spAutoFit/>
+          </a:bodyPr>
+          <a:lstStyle/>
+          <a:p>
+            <a:pPr algn="l">
+              <a:spcBef>
+                <a:spcPts val="0"/>
+              </a:spcBef>
+              <a:spcAft>
+                <a:spcPts val="0"/>
+              </a:spcAft>
+            </a:pPr>
+            <a:r>
+              <a:rPr sz="1200" b="1">
+                <a:solidFill>
+                  <a:srgbClr val="16335C"/>
+                </a:solidFill>
+                <a:latin typeface="Calibri"/>
+              </a:rPr>
+              <a:t>"Download BIM file" sends marketing a warm lead</a:t>
+            </a:r>
+          </a:p>
+        </p:txBody>
+      </p:sp>
+      <p:sp>
+        <p:nvSpPr>
+          <p:cNvPr id="34" name="Rectangle 33"/>
+          <p:cNvSpPr/>
+          <p:nvPr/>
+        </p:nvSpPr>
+        <p:spPr>
+          <a:xfrm>
+            <a:off x="548640" y="5212080"/>
+            <a:ext cx="5486400" cy="512064"/>
+          </a:xfrm>
+          <a:prstGeom prst="rect">
+            <a:avLst/>
+          </a:prstGeom>
+          <a:solidFill>
+            <a:srgbClr val="FFFFFF"/>
+          </a:solidFill>
+          <a:ln>
+            <a:noFill/>
+          </a:ln>
+          <a:effectLst/>
+        </p:spPr>
+        <p:style>
+          <a:lnRef idx="1">
+            <a:schemeClr val="accent1"/>
+          </a:lnRef>
+          <a:fillRef idx="3">
+            <a:schemeClr val="accent1"/>
+          </a:fillRef>
+          <a:effectRef idx="2">
+            <a:schemeClr val="accent1"/>
+          </a:effectRef>
+          <a:fontRef idx="minor">
+            <a:schemeClr val="lt1"/>
+          </a:fontRef>
+        </p:style>
+        <p:txBody>
+          <a:bodyPr rtlCol="0" anchor="ctr"/>
+          <a:lstStyle/>
+          <a:p>
+            <a:pPr algn="ctr"/>
+          </a:p>
+        </p:txBody>
+      </p:sp>
+      <p:sp>
+        <p:nvSpPr>
+          <p:cNvPr id="35" name="Rectangle 34"/>
+          <p:cNvSpPr/>
+          <p:nvPr/>
+        </p:nvSpPr>
+        <p:spPr>
+          <a:xfrm>
+            <a:off x="6126480" y="5212080"/>
+            <a:ext cx="5486400" cy="512064"/>
+          </a:xfrm>
+          <a:prstGeom prst="rect">
+            <a:avLst/>
+          </a:prstGeom>
+          <a:solidFill>
+            <a:srgbClr val="FFFFFF"/>
+          </a:solidFill>
+          <a:ln>
+            <a:noFill/>
+          </a:ln>
+          <a:effectLst/>
+        </p:spPr>
+        <p:style>
+          <a:lnRef idx="1">
+            <a:schemeClr val="accent1"/>
+          </a:lnRef>
+          <a:fillRef idx="3">
+            <a:schemeClr val="accent1"/>
+          </a:fillRef>
+          <a:effectRef idx="2">
+            <a:schemeClr val="accent1"/>
+          </a:effectRef>
+          <a:fontRef idx="minor">
+            <a:schemeClr val="lt1"/>
+          </a:fontRef>
+        </p:style>
+        <p:txBody>
+          <a:bodyPr rtlCol="0" anchor="ctr"/>
+          <a:lstStyle/>
+          <a:p>
+            <a:pPr algn="ctr"/>
+          </a:p>
+        </p:txBody>
+      </p:sp>
+      <p:sp>
+        <p:nvSpPr>
+          <p:cNvPr id="36" name="TextBox 35"/>
+          <p:cNvSpPr txBox="1"/>
+          <p:nvPr/>
+        </p:nvSpPr>
+        <p:spPr>
+          <a:xfrm>
+            <a:off x="731520" y="5212080"/>
+            <a:ext cx="5212080" cy="512064"/>
+          </a:xfrm>
+          <a:prstGeom prst="rect">
+            <a:avLst/>
+          </a:prstGeom>
+          <a:noFill/>
+        </p:spPr>
+        <p:txBody>
+          <a:bodyPr wrap="square" anchor="ctr">
+            <a:spAutoFit/>
+          </a:bodyPr>
+          <a:lstStyle/>
+          <a:p>
+            <a:pPr algn="l">
+              <a:spcBef>
+                <a:spcPts val="0"/>
+              </a:spcBef>
+              <a:spcAft>
+                <a:spcPts val="0"/>
+              </a:spcAft>
+            </a:pPr>
+            <a:r>
+              <a:rPr sz="1200" b="0">
+                <a:solidFill>
+                  <a:srgbClr val="5B626D"/>
+                </a:solidFill>
+                <a:latin typeface="Calibri"/>
+              </a:rPr>
+              <a:t>Bespoke quotes = lots of back-and-forth</a:t>
+            </a:r>
+          </a:p>
+        </p:txBody>
+      </p:sp>
+      <p:sp>
+        <p:nvSpPr>
+          <p:cNvPr id="37" name="TextBox 36"/>
+          <p:cNvSpPr txBox="1"/>
+          <p:nvPr/>
+        </p:nvSpPr>
+        <p:spPr>
+          <a:xfrm>
+            <a:off x="6309360" y="5212080"/>
+            <a:ext cx="5212080" cy="512064"/>
+          </a:xfrm>
+          <a:prstGeom prst="rect">
+            <a:avLst/>
+          </a:prstGeom>
+          <a:noFill/>
+        </p:spPr>
+        <p:txBody>
+          <a:bodyPr wrap="square" anchor="ctr">
+            <a:spAutoFit/>
+          </a:bodyPr>
+          <a:lstStyle/>
+          <a:p>
+            <a:pPr algn="l">
+              <a:spcBef>
+                <a:spcPts val="0"/>
+              </a:spcBef>
+              <a:spcAft>
+                <a:spcPts val="0"/>
+              </a:spcAft>
+            </a:pPr>
+            <a:r>
+              <a:rPr sz="1200" b="1">
+                <a:solidFill>
+                  <a:srgbClr val="16335C"/>
+                </a:solidFill>
+                <a:latin typeface="Calibri"/>
+              </a:rPr>
+              <a:t>Flow+ Designer = ready-to-quote scheme</a:t>
+            </a:r>
+          </a:p>
+        </p:txBody>
+      </p:sp>
+      <p:sp>
+        <p:nvSpPr>
+          <p:cNvPr id="38" name="Rectangle 37"/>
+          <p:cNvSpPr/>
+          <p:nvPr/>
+        </p:nvSpPr>
+        <p:spPr>
+          <a:xfrm>
+            <a:off x="548640" y="5760720"/>
+            <a:ext cx="5486400" cy="512064"/>
+          </a:xfrm>
+          <a:prstGeom prst="rect">
+            <a:avLst/>
+          </a:prstGeom>
+          <a:solidFill>
+            <a:srgbClr val="F4F6F8"/>
+          </a:solidFill>
+          <a:ln>
+            <a:noFill/>
+          </a:ln>
+          <a:effectLst/>
+        </p:spPr>
+        <p:style>
+          <a:lnRef idx="1">
+            <a:schemeClr val="accent1"/>
+          </a:lnRef>
+          <a:fillRef idx="3">
+            <a:schemeClr val="accent1"/>
+          </a:fillRef>
+          <a:effectRef idx="2">
+            <a:schemeClr val="accent1"/>
+          </a:effectRef>
+          <a:fontRef idx="minor">
+            <a:schemeClr val="lt1"/>
+          </a:fontRef>
+        </p:style>
+        <p:txBody>
+          <a:bodyPr rtlCol="0" anchor="ctr"/>
+          <a:lstStyle/>
+          <a:p>
+            <a:pPr algn="ctr"/>
+          </a:p>
+        </p:txBody>
+      </p:sp>
+      <p:sp>
+        <p:nvSpPr>
+          <p:cNvPr id="39" name="Rectangle 38"/>
+          <p:cNvSpPr/>
+          <p:nvPr/>
+        </p:nvSpPr>
+        <p:spPr>
+          <a:xfrm>
+            <a:off x="6126480" y="5760720"/>
+            <a:ext cx="5486400" cy="512064"/>
+          </a:xfrm>
+          <a:prstGeom prst="rect">
+            <a:avLst/>
+          </a:prstGeom>
+          <a:solidFill>
+            <a:srgbClr val="F4F6F8"/>
+          </a:solidFill>
+          <a:ln>
+            <a:noFill/>
+          </a:ln>
+          <a:effectLst/>
+        </p:spPr>
+        <p:style>
+          <a:lnRef idx="1">
+            <a:schemeClr val="accent1"/>
+          </a:lnRef>
+          <a:fillRef idx="3">
+            <a:schemeClr val="accent1"/>
+          </a:fillRef>
+          <a:effectRef idx="2">
+            <a:schemeClr val="accent1"/>
+          </a:effectRef>
+          <a:fontRef idx="minor">
+            <a:schemeClr val="lt1"/>
+          </a:fontRef>
+        </p:style>
+        <p:txBody>
+          <a:bodyPr rtlCol="0" anchor="ctr"/>
+          <a:lstStyle/>
+          <a:p>
+            <a:pPr algn="ctr"/>
+          </a:p>
+        </p:txBody>
+      </p:sp>
+      <p:sp>
+        <p:nvSpPr>
+          <p:cNvPr id="40" name="TextBox 39"/>
+          <p:cNvSpPr txBox="1"/>
+          <p:nvPr/>
+        </p:nvSpPr>
+        <p:spPr>
+          <a:xfrm>
+            <a:off x="731520" y="5760720"/>
+            <a:ext cx="5212080" cy="512064"/>
+          </a:xfrm>
+          <a:prstGeom prst="rect">
+            <a:avLst/>
+          </a:prstGeom>
+          <a:noFill/>
+        </p:spPr>
+        <p:txBody>
+          <a:bodyPr wrap="square" anchor="ctr">
+            <a:spAutoFit/>
+          </a:bodyPr>
+          <a:lstStyle/>
+          <a:p>
+            <a:pPr algn="l">
+              <a:spcBef>
+                <a:spcPts val="0"/>
+              </a:spcBef>
+              <a:spcAft>
+                <a:spcPts val="0"/>
+              </a:spcAft>
+            </a:pPr>
+            <a:r>
+              <a:rPr sz="1200" b="0">
+                <a:solidFill>
+                  <a:srgbClr val="5B626D"/>
+                </a:solidFill>
+                <a:latin typeface="Calibri"/>
+              </a:rPr>
+              <a:t>Slower, page-builder overhead</a:t>
+            </a:r>
+          </a:p>
+        </p:txBody>
+      </p:sp>
+      <p:sp>
+        <p:nvSpPr>
+          <p:cNvPr id="41" name="TextBox 40"/>
+          <p:cNvSpPr txBox="1"/>
+          <p:nvPr/>
+        </p:nvSpPr>
+        <p:spPr>
+          <a:xfrm>
+            <a:off x="6309360" y="5760720"/>
+            <a:ext cx="5212080" cy="512064"/>
+          </a:xfrm>
+          <a:prstGeom prst="rect">
+            <a:avLst/>
+          </a:prstGeom>
+          <a:noFill/>
+        </p:spPr>
+        <p:txBody>
+          <a:bodyPr wrap="square" anchor="ctr">
+            <a:spAutoFit/>
+          </a:bodyPr>
+          <a:lstStyle/>
+          <a:p>
+            <a:pPr algn="l">
+              <a:spcBef>
+                <a:spcPts val="0"/>
+              </a:spcBef>
+              <a:spcAft>
+                <a:spcPts val="0"/>
+              </a:spcAft>
+            </a:pPr>
+            <a:r>
+              <a:rPr sz="1200" b="1">
+                <a:solidFill>
+                  <a:srgbClr val="16335C"/>
+                </a:solidFill>
+                <a:latin typeface="Calibri"/>
+              </a:rPr>
+              <a:t>Fast, modern, search-friendly</a:t>
+            </a:r>
+          </a:p>
+        </p:txBody>
+      </p:sp>
+      <p:sp>
+        <p:nvSpPr>
+          <p:cNvPr id="42" name="TextBox 41"/>
+          <p:cNvSpPr txBox="1"/>
+          <p:nvPr/>
+        </p:nvSpPr>
+        <p:spPr>
+          <a:xfrm>
+            <a:off x="548640" y="6400800"/>
+            <a:ext cx="7315200" cy="365760"/>
+          </a:xfrm>
+          <a:prstGeom prst="rect">
+            <a:avLst/>
+          </a:prstGeom>
+          <a:noFill/>
+        </p:spPr>
+        <p:txBody>
+          <a:bodyPr wrap="square" anchor="t">
+            <a:spAutoFit/>
+          </a:bodyPr>
+          <a:lstStyle/>
+          <a:p>
+            <a:pPr algn="l">
+              <a:spcBef>
+                <a:spcPts val="0"/>
+              </a:spcBef>
+              <a:spcAft>
+                <a:spcPts val="0"/>
+              </a:spcAft>
+            </a:pPr>
+            <a:r>
+              <a:rPr sz="1000" b="0">
+                <a:solidFill>
+                  <a:srgbClr val="5B626D"/>
+                </a:solidFill>
+                <a:latin typeface="Calibri"/>
+              </a:rPr>
+              <a:t>Ricoman — the new website</a:t>
+            </a:r>
+          </a:p>
+        </p:txBody>
+      </p:sp>
+      <p:sp>
+        <p:nvSpPr>
+          <p:cNvPr id="43" name="TextBox 42"/>
+          <p:cNvSpPr txBox="1"/>
+          <p:nvPr/>
+        </p:nvSpPr>
+        <p:spPr>
+          <a:xfrm>
+            <a:off x="10789920" y="6400800"/>
+            <a:ext cx="914400" cy="365760"/>
+          </a:xfrm>
+          <a:prstGeom prst="rect">
+            <a:avLst/>
+          </a:prstGeom>
+          <a:noFill/>
+        </p:spPr>
+        <p:txBody>
+          <a:bodyPr wrap="square" anchor="t">
+            <a:spAutoFit/>
+          </a:bodyPr>
+          <a:lstStyle/>
+          <a:p>
+            <a:pPr algn="r">
+              <a:spcBef>
+                <a:spcPts val="0"/>
+              </a:spcBef>
+              <a:spcAft>
+                <a:spcPts val="0"/>
+              </a:spcAft>
+            </a:pPr>
+            <a:r>
+              <a:rPr sz="1000" b="1">
+                <a:solidFill>
+                  <a:srgbClr val="5B626D"/>
+                </a:solidFill>
+                <a:latin typeface="Calibri"/>
+              </a:rPr>
+              <a:t>11</a:t>
+            </a:r>
+          </a:p>
+        </p:txBody>
+      </p:sp>
+    </p:spTree>
+  </p:cSld>
+  <p:clrMapOvr>
+    <a:masterClrMapping/>
+  </p:clrMapOvr>
+</p:sld>
+</file>
+
+<file path=ppt/slides/slide13.xml><?xml version="1.0" encoding="utf-8"?>
 <p:sld xmlns:a="http://schemas.openxmlformats.org/drawingml/2006/main" xmlns:p="http://schemas.openxmlformats.org/presentationml/2006/main" xmlns:r="http://schemas.openxmlformats.org/officeDocument/2006/relationships">
   <p:cSld>
     <p:spTree>

--- a/docs/Ricoman-New-Website.pptx
+++ b/docs/Ricoman-New-Website.pptx
@@ -18,6 +18,7 @@
     <p:sldId id="266" r:id="rId17"/>
     <p:sldId id="267" r:id="rId18"/>
     <p:sldId id="268" r:id="rId19"/>
+    <p:sldId id="269" r:id="rId20"/>
   </p:sldIdLst>
   <p:sldSz cx="12191695" cy="6858000" type="screen4x3"/>
   <p:notesSz cx="6858000" cy="9144000"/>
@@ -5666,7 +5667,7 @@
                 </a:solidFill>
                 <a:latin typeface="Calibri"/>
               </a:rPr>
-              <a:t>ROADMAP</a:t>
+              <a:t>MEASURED RESULTS</a:t>
             </a:r>
           </a:p>
           <a:p>
@@ -5685,7 +5686,7 @@
                 </a:solidFill>
                 <a:latin typeface="Calibri"/>
               </a:rPr>
-              <a:t>Where we are</a:t>
+              <a:t>What those PageSpeed numbers mean</a:t>
             </a:r>
           </a:p>
         </p:txBody>
@@ -5736,14 +5737,100 @@
       </p:sp>
       <p:sp>
         <p:nvSpPr>
-          <p:cNvPr id="6" name="Rectangle 5"/>
+          <p:cNvPr id="6" name="TextBox 5"/>
+          <p:cNvSpPr txBox="1"/>
+          <p:nvPr/>
+        </p:nvSpPr>
+        <p:spPr>
+          <a:xfrm>
+            <a:off x="548640" y="1371600"/>
+            <a:ext cx="11155680" cy="457200"/>
+          </a:xfrm>
+          <a:prstGeom prst="rect">
+            <a:avLst/>
+          </a:prstGeom>
+          <a:noFill/>
+        </p:spPr>
+        <p:txBody>
+          <a:bodyPr wrap="square" anchor="t">
+            <a:spAutoFit/>
+          </a:bodyPr>
+          <a:lstStyle/>
+          <a:p>
+            <a:pPr algn="l">
+              <a:spcBef>
+                <a:spcPts val="0"/>
+              </a:spcBef>
+              <a:spcAft>
+                <a:spcPts val="0"/>
+              </a:spcAft>
+            </a:pPr>
+            <a:r>
+              <a:rPr sz="1300" b="0">
+                <a:solidFill>
+                  <a:srgbClr val="5B626D"/>
+                </a:solidFill>
+                <a:latin typeface="Calibri"/>
+              </a:rPr>
+              <a:t>In plain English — what each measure is, and what changed.</a:t>
+            </a:r>
+          </a:p>
+        </p:txBody>
+      </p:sp>
+      <p:sp>
+        <p:nvSpPr>
+          <p:cNvPr id="7" name="Rectangle 6"/>
           <p:cNvSpPr/>
           <p:nvPr/>
         </p:nvSpPr>
         <p:spPr>
           <a:xfrm>
-            <a:off x="548640" y="1645920"/>
-            <a:ext cx="685800" cy="777240"/>
+            <a:off x="548640" y="1874519"/>
+            <a:ext cx="11064240" cy="713232"/>
+          </a:xfrm>
+          <a:prstGeom prst="rect">
+            <a:avLst/>
+          </a:prstGeom>
+          <a:solidFill>
+            <a:srgbClr val="F4F6F8"/>
+          </a:solidFill>
+          <a:ln>
+            <a:noFill/>
+          </a:ln>
+          <a:effectLst/>
+        </p:spPr>
+        <p:style>
+          <a:lnRef idx="1">
+            <a:schemeClr val="accent1"/>
+          </a:lnRef>
+          <a:fillRef idx="3">
+            <a:schemeClr val="accent1"/>
+          </a:fillRef>
+          <a:effectRef idx="2">
+            <a:schemeClr val="accent1"/>
+          </a:effectRef>
+          <a:fontRef idx="minor">
+            <a:schemeClr val="lt1"/>
+          </a:fontRef>
+        </p:style>
+        <p:txBody>
+          <a:bodyPr rtlCol="0" anchor="ctr"/>
+          <a:lstStyle/>
+          <a:p>
+            <a:pPr algn="ctr"/>
+          </a:p>
+        </p:txBody>
+      </p:sp>
+      <p:sp>
+        <p:nvSpPr>
+          <p:cNvPr id="8" name="Rectangle 7"/>
+          <p:cNvSpPr/>
+          <p:nvPr/>
+        </p:nvSpPr>
+        <p:spPr>
+          <a:xfrm>
+            <a:off x="548640" y="1874519"/>
+            <a:ext cx="91440" cy="713232"/>
           </a:xfrm>
           <a:prstGeom prst="rect">
             <a:avLst/>
@@ -5780,14 +5867,14 @@
       </p:sp>
       <p:sp>
         <p:nvSpPr>
-          <p:cNvPr id="7" name="TextBox 6"/>
+          <p:cNvPr id="9" name="TextBox 8"/>
           <p:cNvSpPr txBox="1"/>
           <p:nvPr/>
         </p:nvSpPr>
         <p:spPr>
           <a:xfrm>
-            <a:off x="548640" y="1645920"/>
-            <a:ext cx="685800" cy="777240"/>
+            <a:off x="777240" y="1874519"/>
+            <a:ext cx="2743200" cy="713232"/>
           </a:xfrm>
           <a:prstGeom prst="rect">
             <a:avLst/>
@@ -5800,36 +5887,97 @@
           </a:bodyPr>
           <a:lstStyle/>
           <a:p>
-            <a:pPr algn="ctr">
-              <a:spcBef>
-                <a:spcPts val="0"/>
-              </a:spcBef>
-              <a:spcAft>
-                <a:spcPts val="0"/>
-              </a:spcAft>
-            </a:pPr>
-            <a:r>
-              <a:rPr sz="2600" b="1">
-                <a:solidFill>
-                  <a:srgbClr val="FFFFFF"/>
-                </a:solidFill>
-                <a:latin typeface="Calibri"/>
-              </a:rPr>
-              <a:t>1</a:t>
-            </a:r>
-          </a:p>
-        </p:txBody>
-      </p:sp>
-      <p:sp>
-        <p:nvSpPr>
-          <p:cNvPr id="8" name="Rectangle 7"/>
+            <a:pPr algn="l">
+              <a:spcBef>
+                <a:spcPts val="0"/>
+              </a:spcBef>
+              <a:spcAft>
+                <a:spcPts val="100"/>
+              </a:spcAft>
+            </a:pPr>
+            <a:r>
+              <a:rPr sz="1300" b="1">
+                <a:solidFill>
+                  <a:srgbClr val="0B0B0C"/>
+                </a:solidFill>
+                <a:latin typeface="Calibri"/>
+              </a:rPr>
+              <a:t>Score /100</a:t>
+            </a:r>
+          </a:p>
+          <a:p>
+            <a:pPr algn="l">
+              <a:spcBef>
+                <a:spcPts val="0"/>
+              </a:spcBef>
+              <a:spcAft>
+                <a:spcPts val="0"/>
+              </a:spcAft>
+            </a:pPr>
+            <a:r>
+              <a:rPr sz="1200" b="1">
+                <a:solidFill>
+                  <a:srgbClr val="1A7F37"/>
+                </a:solidFill>
+                <a:latin typeface="Calibri"/>
+              </a:rPr>
+              <a:t>32 → 93 (mobile)</a:t>
+            </a:r>
+          </a:p>
+        </p:txBody>
+      </p:sp>
+      <p:sp>
+        <p:nvSpPr>
+          <p:cNvPr id="10" name="TextBox 9"/>
+          <p:cNvSpPr txBox="1"/>
+          <p:nvPr/>
+        </p:nvSpPr>
+        <p:spPr>
+          <a:xfrm>
+            <a:off x="3657600" y="1874519"/>
+            <a:ext cx="7772400" cy="713232"/>
+          </a:xfrm>
+          <a:prstGeom prst="rect">
+            <a:avLst/>
+          </a:prstGeom>
+          <a:noFill/>
+        </p:spPr>
+        <p:txBody>
+          <a:bodyPr wrap="square" anchor="ctr">
+            <a:spAutoFit/>
+          </a:bodyPr>
+          <a:lstStyle/>
+          <a:p>
+            <a:pPr algn="l">
+              <a:spcBef>
+                <a:spcPts val="0"/>
+              </a:spcBef>
+              <a:spcAft>
+                <a:spcPts val="0"/>
+              </a:spcAft>
+            </a:pPr>
+            <a:r>
+              <a:rPr sz="1250" b="0">
+                <a:solidFill>
+                  <a:srgbClr val="16335C"/>
+                </a:solidFill>
+                <a:latin typeface="Calibri"/>
+              </a:rPr>
+              <a:t>A speed exam mark. 32 is a fail; 93 is a top grade. Google uses this mark to help decide search rankings.</a:t>
+            </a:r>
+          </a:p>
+        </p:txBody>
+      </p:sp>
+      <p:sp>
+        <p:nvSpPr>
+          <p:cNvPr id="11" name="Rectangle 10"/>
           <p:cNvSpPr/>
           <p:nvPr/>
         </p:nvSpPr>
         <p:spPr>
           <a:xfrm>
-            <a:off x="1325880" y="1645920"/>
-            <a:ext cx="10287000" cy="777240"/>
+            <a:off x="548640" y="2651759"/>
+            <a:ext cx="11064240" cy="713232"/>
           </a:xfrm>
           <a:prstGeom prst="rect">
             <a:avLst/>
@@ -5866,75 +6014,14 @@
       </p:sp>
       <p:sp>
         <p:nvSpPr>
-          <p:cNvPr id="9" name="TextBox 8"/>
-          <p:cNvSpPr txBox="1"/>
-          <p:nvPr/>
-        </p:nvSpPr>
-        <p:spPr>
-          <a:xfrm>
-            <a:off x="1554480" y="1719072"/>
-            <a:ext cx="9875520" cy="685800"/>
-          </a:xfrm>
-          <a:prstGeom prst="rect">
-            <a:avLst/>
-          </a:prstGeom>
-          <a:noFill/>
-        </p:spPr>
-        <p:txBody>
-          <a:bodyPr wrap="square" anchor="ctr">
-            <a:spAutoFit/>
-          </a:bodyPr>
-          <a:lstStyle/>
-          <a:p>
-            <a:pPr algn="l">
-              <a:spcBef>
-                <a:spcPts val="0"/>
-              </a:spcBef>
-              <a:spcAft>
-                <a:spcPts val="200"/>
-              </a:spcAft>
-            </a:pPr>
-            <a:r>
-              <a:rPr sz="1600" b="1">
-                <a:solidFill>
-                  <a:srgbClr val="0B0B0C"/>
-                </a:solidFill>
-                <a:latin typeface="Calibri"/>
-              </a:rPr>
-              <a:t>Recreate ricoman.com exactly on the new platform</a:t>
-            </a:r>
-          </a:p>
-          <a:p>
-            <a:pPr algn="l">
-              <a:spcBef>
-                <a:spcPts val="0"/>
-              </a:spcBef>
-              <a:spcAft>
-                <a:spcPts val="0"/>
-              </a:spcAft>
-            </a:pPr>
-            <a:r>
-              <a:rPr sz="1250" b="0">
-                <a:solidFill>
-                  <a:srgbClr val="5B626D"/>
-                </a:solidFill>
-                <a:latin typeface="Calibri"/>
-              </a:rPr>
-              <a:t>In progress — confirming each page matches live</a:t>
-            </a:r>
-          </a:p>
-        </p:txBody>
-      </p:sp>
-      <p:sp>
-        <p:nvSpPr>
-          <p:cNvPr id="10" name="Rectangle 9"/>
+          <p:cNvPr id="12" name="Rectangle 11"/>
           <p:cNvSpPr/>
           <p:nvPr/>
         </p:nvSpPr>
         <p:spPr>
           <a:xfrm>
-            <a:off x="548640" y="2560320"/>
-            <a:ext cx="685800" cy="777240"/>
+            <a:off x="548640" y="2651759"/>
+            <a:ext cx="91440" cy="713232"/>
           </a:xfrm>
           <a:prstGeom prst="rect">
             <a:avLst/>
@@ -5971,14 +6058,14 @@
       </p:sp>
       <p:sp>
         <p:nvSpPr>
-          <p:cNvPr id="11" name="TextBox 10"/>
+          <p:cNvPr id="13" name="TextBox 12"/>
           <p:cNvSpPr txBox="1"/>
           <p:nvPr/>
         </p:nvSpPr>
         <p:spPr>
           <a:xfrm>
-            <a:off x="548640" y="2560320"/>
-            <a:ext cx="685800" cy="777240"/>
+            <a:off x="777240" y="2651759"/>
+            <a:ext cx="2743200" cy="713232"/>
           </a:xfrm>
           <a:prstGeom prst="rect">
             <a:avLst/>
@@ -5991,36 +6078,97 @@
           </a:bodyPr>
           <a:lstStyle/>
           <a:p>
-            <a:pPr algn="ctr">
-              <a:spcBef>
-                <a:spcPts val="0"/>
-              </a:spcBef>
-              <a:spcAft>
-                <a:spcPts val="0"/>
-              </a:spcAft>
-            </a:pPr>
-            <a:r>
-              <a:rPr sz="2600" b="1">
-                <a:solidFill>
-                  <a:srgbClr val="FFFFFF"/>
-                </a:solidFill>
-                <a:latin typeface="Calibri"/>
-              </a:rPr>
-              <a:t>2</a:t>
-            </a:r>
-          </a:p>
-        </p:txBody>
-      </p:sp>
-      <p:sp>
-        <p:nvSpPr>
-          <p:cNvPr id="12" name="Rectangle 11"/>
+            <a:pPr algn="l">
+              <a:spcBef>
+                <a:spcPts val="0"/>
+              </a:spcBef>
+              <a:spcAft>
+                <a:spcPts val="100"/>
+              </a:spcAft>
+            </a:pPr>
+            <a:r>
+              <a:rPr sz="1300" b="1">
+                <a:solidFill>
+                  <a:srgbClr val="0B0B0C"/>
+                </a:solidFill>
+                <a:latin typeface="Calibri"/>
+              </a:rPr>
+              <a:t>Main image appears</a:t>
+            </a:r>
+          </a:p>
+          <a:p>
+            <a:pPr algn="l">
+              <a:spcBef>
+                <a:spcPts val="0"/>
+              </a:spcBef>
+              <a:spcAft>
+                <a:spcPts val="0"/>
+              </a:spcAft>
+            </a:pPr>
+            <a:r>
+              <a:rPr sz="1200" b="1">
+                <a:solidFill>
+                  <a:srgbClr val="1A7F37"/>
+                </a:solidFill>
+                <a:latin typeface="Calibri"/>
+              </a:rPr>
+              <a:t>12.4s → 2.3s</a:t>
+            </a:r>
+          </a:p>
+        </p:txBody>
+      </p:sp>
+      <p:sp>
+        <p:nvSpPr>
+          <p:cNvPr id="14" name="TextBox 13"/>
+          <p:cNvSpPr txBox="1"/>
+          <p:nvPr/>
+        </p:nvSpPr>
+        <p:spPr>
+          <a:xfrm>
+            <a:off x="3657600" y="2651759"/>
+            <a:ext cx="7772400" cy="713232"/>
+          </a:xfrm>
+          <a:prstGeom prst="rect">
+            <a:avLst/>
+          </a:prstGeom>
+          <a:noFill/>
+        </p:spPr>
+        <p:txBody>
+          <a:bodyPr wrap="square" anchor="ctr">
+            <a:spAutoFit/>
+          </a:bodyPr>
+          <a:lstStyle/>
+          <a:p>
+            <a:pPr algn="l">
+              <a:spcBef>
+                <a:spcPts val="0"/>
+              </a:spcBef>
+              <a:spcAft>
+                <a:spcPts val="0"/>
+              </a:spcAft>
+            </a:pPr>
+            <a:r>
+              <a:rPr sz="1250" b="0">
+                <a:solidFill>
+                  <a:srgbClr val="16335C"/>
+                </a:solidFill>
+                <a:latin typeface="Calibri"/>
+              </a:rPr>
+              <a:t>How long before the main content shows on a phone. It took over 12 seconds; now about 2. Most people won't wait past 3.</a:t>
+            </a:r>
+          </a:p>
+        </p:txBody>
+      </p:sp>
+      <p:sp>
+        <p:nvSpPr>
+          <p:cNvPr id="15" name="Rectangle 14"/>
           <p:cNvSpPr/>
           <p:nvPr/>
         </p:nvSpPr>
         <p:spPr>
           <a:xfrm>
-            <a:off x="1325880" y="2560320"/>
-            <a:ext cx="10287000" cy="777240"/>
+            <a:off x="548640" y="3428999"/>
+            <a:ext cx="11064240" cy="713232"/>
           </a:xfrm>
           <a:prstGeom prst="rect">
             <a:avLst/>
@@ -6057,81 +6205,20 @@
       </p:sp>
       <p:sp>
         <p:nvSpPr>
-          <p:cNvPr id="13" name="TextBox 12"/>
-          <p:cNvSpPr txBox="1"/>
-          <p:nvPr/>
-        </p:nvSpPr>
-        <p:spPr>
-          <a:xfrm>
-            <a:off x="1554480" y="2633472"/>
-            <a:ext cx="9875520" cy="685800"/>
-          </a:xfrm>
-          <a:prstGeom prst="rect">
-            <a:avLst/>
-          </a:prstGeom>
-          <a:noFill/>
-        </p:spPr>
-        <p:txBody>
-          <a:bodyPr wrap="square" anchor="ctr">
-            <a:spAutoFit/>
-          </a:bodyPr>
-          <a:lstStyle/>
-          <a:p>
-            <a:pPr algn="l">
-              <a:spcBef>
-                <a:spcPts val="0"/>
-              </a:spcBef>
-              <a:spcAft>
-                <a:spcPts val="200"/>
-              </a:spcAft>
-            </a:pPr>
-            <a:r>
-              <a:rPr sz="1600" b="1">
-                <a:solidFill>
-                  <a:srgbClr val="0B0B0C"/>
-                </a:solidFill>
-                <a:latin typeface="Calibri"/>
-              </a:rPr>
-              <a:t>Check &amp; enhance SEO</a:t>
-            </a:r>
-          </a:p>
-          <a:p>
-            <a:pPr algn="l">
-              <a:spcBef>
-                <a:spcPts val="0"/>
-              </a:spcBef>
-              <a:spcAft>
-                <a:spcPts val="0"/>
-              </a:spcAft>
-            </a:pPr>
-            <a:r>
-              <a:rPr sz="1250" b="0">
-                <a:solidFill>
-                  <a:srgbClr val="5B626D"/>
-                </a:solidFill>
-                <a:latin typeface="Calibri"/>
-              </a:rPr>
-              <a:t>Foundations + audit tooling built</a:t>
-            </a:r>
-          </a:p>
-        </p:txBody>
-      </p:sp>
-      <p:sp>
-        <p:nvSpPr>
-          <p:cNvPr id="14" name="Rectangle 13"/>
+          <p:cNvPr id="16" name="Rectangle 15"/>
           <p:cNvSpPr/>
           <p:nvPr/>
         </p:nvSpPr>
         <p:spPr>
           <a:xfrm>
-            <a:off x="548640" y="3474720"/>
-            <a:ext cx="685800" cy="777240"/>
+            <a:off x="548640" y="3428999"/>
+            <a:ext cx="91440" cy="713232"/>
           </a:xfrm>
           <a:prstGeom prst="rect">
             <a:avLst/>
           </a:prstGeom>
           <a:solidFill>
-            <a:srgbClr val="5B626D"/>
+            <a:srgbClr val="1D4ED8"/>
           </a:solidFill>
           <a:ln>
             <a:noFill/>
@@ -6162,14 +6249,14 @@
       </p:sp>
       <p:sp>
         <p:nvSpPr>
-          <p:cNvPr id="15" name="TextBox 14"/>
+          <p:cNvPr id="17" name="TextBox 16"/>
           <p:cNvSpPr txBox="1"/>
           <p:nvPr/>
         </p:nvSpPr>
         <p:spPr>
           <a:xfrm>
-            <a:off x="548640" y="3474720"/>
-            <a:ext cx="685800" cy="777240"/>
+            <a:off x="777240" y="3428999"/>
+            <a:ext cx="2743200" cy="713232"/>
           </a:xfrm>
           <a:prstGeom prst="rect">
             <a:avLst/>
@@ -6182,36 +6269,97 @@
           </a:bodyPr>
           <a:lstStyle/>
           <a:p>
-            <a:pPr algn="ctr">
-              <a:spcBef>
-                <a:spcPts val="0"/>
-              </a:spcBef>
-              <a:spcAft>
-                <a:spcPts val="0"/>
-              </a:spcAft>
-            </a:pPr>
-            <a:r>
-              <a:rPr sz="2600" b="1">
-                <a:solidFill>
-                  <a:srgbClr val="FFFFFF"/>
-                </a:solidFill>
-                <a:latin typeface="Calibri"/>
-              </a:rPr>
-              <a:t>3</a:t>
-            </a:r>
-          </a:p>
-        </p:txBody>
-      </p:sp>
-      <p:sp>
-        <p:nvSpPr>
-          <p:cNvPr id="16" name="Rectangle 15"/>
+            <a:pPr algn="l">
+              <a:spcBef>
+                <a:spcPts val="0"/>
+              </a:spcBef>
+              <a:spcAft>
+                <a:spcPts val="100"/>
+              </a:spcAft>
+            </a:pPr>
+            <a:r>
+              <a:rPr sz="1300" b="1">
+                <a:solidFill>
+                  <a:srgbClr val="0B0B0C"/>
+                </a:solidFill>
+                <a:latin typeface="Calibri"/>
+              </a:rPr>
+              <a:t>Page responds to taps</a:t>
+            </a:r>
+          </a:p>
+          <a:p>
+            <a:pPr algn="l">
+              <a:spcBef>
+                <a:spcPts val="0"/>
+              </a:spcBef>
+              <a:spcAft>
+                <a:spcPts val="0"/>
+              </a:spcAft>
+            </a:pPr>
+            <a:r>
+              <a:rPr sz="1200" b="1">
+                <a:solidFill>
+                  <a:srgbClr val="1A7F37"/>
+                </a:solidFill>
+                <a:latin typeface="Calibri"/>
+              </a:rPr>
+              <a:t>3.3s → instant</a:t>
+            </a:r>
+          </a:p>
+        </p:txBody>
+      </p:sp>
+      <p:sp>
+        <p:nvSpPr>
+          <p:cNvPr id="18" name="TextBox 17"/>
+          <p:cNvSpPr txBox="1"/>
+          <p:nvPr/>
+        </p:nvSpPr>
+        <p:spPr>
+          <a:xfrm>
+            <a:off x="3657600" y="3428999"/>
+            <a:ext cx="7772400" cy="713232"/>
+          </a:xfrm>
+          <a:prstGeom prst="rect">
+            <a:avLst/>
+          </a:prstGeom>
+          <a:noFill/>
+        </p:spPr>
+        <p:txBody>
+          <a:bodyPr wrap="square" anchor="ctr">
+            <a:spAutoFit/>
+          </a:bodyPr>
+          <a:lstStyle/>
+          <a:p>
+            <a:pPr algn="l">
+              <a:spcBef>
+                <a:spcPts val="0"/>
+              </a:spcBef>
+              <a:spcAft>
+                <a:spcPts val="0"/>
+              </a:spcAft>
+            </a:pPr>
+            <a:r>
+              <a:rPr sz="1250" b="0">
+                <a:solidFill>
+                  <a:srgbClr val="16335C"/>
+                </a:solidFill>
+                <a:latin typeface="Calibri"/>
+              </a:rPr>
+              <a:t>How long the page is frozen and ignores taps while loading. It used to lock up for ~3 seconds; now it reacts straight away.</a:t>
+            </a:r>
+          </a:p>
+        </p:txBody>
+      </p:sp>
+      <p:sp>
+        <p:nvSpPr>
+          <p:cNvPr id="19" name="Rectangle 18"/>
           <p:cNvSpPr/>
           <p:nvPr/>
         </p:nvSpPr>
         <p:spPr>
           <a:xfrm>
-            <a:off x="1325880" y="3474720"/>
-            <a:ext cx="10287000" cy="777240"/>
+            <a:off x="548640" y="4206239"/>
+            <a:ext cx="11064240" cy="713232"/>
           </a:xfrm>
           <a:prstGeom prst="rect">
             <a:avLst/>
@@ -6248,81 +6396,20 @@
       </p:sp>
       <p:sp>
         <p:nvSpPr>
-          <p:cNvPr id="17" name="TextBox 16"/>
-          <p:cNvSpPr txBox="1"/>
-          <p:nvPr/>
-        </p:nvSpPr>
-        <p:spPr>
-          <a:xfrm>
-            <a:off x="1554480" y="3547872"/>
-            <a:ext cx="9875520" cy="685800"/>
-          </a:xfrm>
-          <a:prstGeom prst="rect">
-            <a:avLst/>
-          </a:prstGeom>
-          <a:noFill/>
-        </p:spPr>
-        <p:txBody>
-          <a:bodyPr wrap="square" anchor="ctr">
-            <a:spAutoFit/>
-          </a:bodyPr>
-          <a:lstStyle/>
-          <a:p>
-            <a:pPr algn="l">
-              <a:spcBef>
-                <a:spcPts val="0"/>
-              </a:spcBef>
-              <a:spcAft>
-                <a:spcPts val="200"/>
-              </a:spcAft>
-            </a:pPr>
-            <a:r>
-              <a:rPr sz="1600" b="1">
-                <a:solidFill>
-                  <a:srgbClr val="0B0B0C"/>
-                </a:solidFill>
-                <a:latin typeface="Calibri"/>
-              </a:rPr>
-              <a:t>Launch — migrate the new site to live</a:t>
-            </a:r>
-          </a:p>
-          <a:p>
-            <a:pPr algn="l">
-              <a:spcBef>
-                <a:spcPts val="0"/>
-              </a:spcBef>
-              <a:spcAft>
-                <a:spcPts val="0"/>
-              </a:spcAft>
-            </a:pPr>
-            <a:r>
-              <a:rPr sz="1250" b="0">
-                <a:solidFill>
-                  <a:srgbClr val="5B626D"/>
-                </a:solidFill>
-                <a:latin typeface="Calibri"/>
-              </a:rPr>
-              <a:t>Runbook prepared</a:t>
-            </a:r>
-          </a:p>
-        </p:txBody>
-      </p:sp>
-      <p:sp>
-        <p:nvSpPr>
-          <p:cNvPr id="18" name="Rectangle 17"/>
+          <p:cNvPr id="20" name="Rectangle 19"/>
           <p:cNvSpPr/>
           <p:nvPr/>
         </p:nvSpPr>
         <p:spPr>
           <a:xfrm>
-            <a:off x="548640" y="4389120"/>
-            <a:ext cx="685800" cy="777240"/>
+            <a:off x="548640" y="4206239"/>
+            <a:ext cx="91440" cy="713232"/>
           </a:xfrm>
           <a:prstGeom prst="rect">
             <a:avLst/>
           </a:prstGeom>
           <a:solidFill>
-            <a:srgbClr val="1A7F37"/>
+            <a:srgbClr val="1D4ED8"/>
           </a:solidFill>
           <a:ln>
             <a:noFill/>
@@ -6353,14 +6440,14 @@
       </p:sp>
       <p:sp>
         <p:nvSpPr>
-          <p:cNvPr id="19" name="TextBox 18"/>
+          <p:cNvPr id="21" name="TextBox 20"/>
           <p:cNvSpPr txBox="1"/>
           <p:nvPr/>
         </p:nvSpPr>
         <p:spPr>
           <a:xfrm>
-            <a:off x="548640" y="4389120"/>
-            <a:ext cx="685800" cy="777240"/>
+            <a:off x="777240" y="4206239"/>
+            <a:ext cx="2743200" cy="713232"/>
           </a:xfrm>
           <a:prstGeom prst="rect">
             <a:avLst/>
@@ -6373,36 +6460,97 @@
           </a:bodyPr>
           <a:lstStyle/>
           <a:p>
-            <a:pPr algn="ctr">
-              <a:spcBef>
-                <a:spcPts val="0"/>
-              </a:spcBef>
-              <a:spcAft>
-                <a:spcPts val="0"/>
-              </a:spcAft>
-            </a:pPr>
-            <a:r>
-              <a:rPr sz="2600" b="1">
-                <a:solidFill>
-                  <a:srgbClr val="FFFFFF"/>
-                </a:solidFill>
-                <a:latin typeface="Calibri"/>
-              </a:rPr>
-              <a:t>4</a:t>
-            </a:r>
-          </a:p>
-        </p:txBody>
-      </p:sp>
-      <p:sp>
-        <p:nvSpPr>
-          <p:cNvPr id="20" name="Rectangle 19"/>
+            <a:pPr algn="l">
+              <a:spcBef>
+                <a:spcPts val="0"/>
+              </a:spcBef>
+              <a:spcAft>
+                <a:spcPts val="100"/>
+              </a:spcAft>
+            </a:pPr>
+            <a:r>
+              <a:rPr sz="1300" b="1">
+                <a:solidFill>
+                  <a:srgbClr val="0B0B0C"/>
+                </a:solidFill>
+                <a:latin typeface="Calibri"/>
+              </a:rPr>
+              <a:t>Page looks finished</a:t>
+            </a:r>
+          </a:p>
+          <a:p>
+            <a:pPr algn="l">
+              <a:spcBef>
+                <a:spcPts val="0"/>
+              </a:spcBef>
+              <a:spcAft>
+                <a:spcPts val="0"/>
+              </a:spcAft>
+            </a:pPr>
+            <a:r>
+              <a:rPr sz="1200" b="1">
+                <a:solidFill>
+                  <a:srgbClr val="1A7F37"/>
+                </a:solidFill>
+                <a:latin typeface="Calibri"/>
+              </a:rPr>
+              <a:t>12.1s → 5.6s</a:t>
+            </a:r>
+          </a:p>
+        </p:txBody>
+      </p:sp>
+      <p:sp>
+        <p:nvSpPr>
+          <p:cNvPr id="22" name="TextBox 21"/>
+          <p:cNvSpPr txBox="1"/>
+          <p:nvPr/>
+        </p:nvSpPr>
+        <p:spPr>
+          <a:xfrm>
+            <a:off x="3657600" y="4206239"/>
+            <a:ext cx="7772400" cy="713232"/>
+          </a:xfrm>
+          <a:prstGeom prst="rect">
+            <a:avLst/>
+          </a:prstGeom>
+          <a:noFill/>
+        </p:spPr>
+        <p:txBody>
+          <a:bodyPr wrap="square" anchor="ctr">
+            <a:spAutoFit/>
+          </a:bodyPr>
+          <a:lstStyle/>
+          <a:p>
+            <a:pPr algn="l">
+              <a:spcBef>
+                <a:spcPts val="0"/>
+              </a:spcBef>
+              <a:spcAft>
+                <a:spcPts val="0"/>
+              </a:spcAft>
+            </a:pPr>
+            <a:r>
+              <a:rPr sz="1250" b="0">
+                <a:solidFill>
+                  <a:srgbClr val="16335C"/>
+                </a:solidFill>
+                <a:latin typeface="Calibri"/>
+              </a:rPr>
+              <a:t>How quickly the page visually fills in and looks done — now less than half the time.</a:t>
+            </a:r>
+          </a:p>
+        </p:txBody>
+      </p:sp>
+      <p:sp>
+        <p:nvSpPr>
+          <p:cNvPr id="23" name="Rectangle 22"/>
           <p:cNvSpPr/>
           <p:nvPr/>
         </p:nvSpPr>
         <p:spPr>
           <a:xfrm>
-            <a:off x="1325880" y="4389120"/>
-            <a:ext cx="10287000" cy="777240"/>
+            <a:off x="548640" y="4983479"/>
+            <a:ext cx="11064240" cy="713232"/>
           </a:xfrm>
           <a:prstGeom prst="rect">
             <a:avLst/>
@@ -6439,81 +6587,20 @@
       </p:sp>
       <p:sp>
         <p:nvSpPr>
-          <p:cNvPr id="21" name="TextBox 20"/>
-          <p:cNvSpPr txBox="1"/>
-          <p:nvPr/>
-        </p:nvSpPr>
-        <p:spPr>
-          <a:xfrm>
-            <a:off x="1554480" y="4462272"/>
-            <a:ext cx="9875520" cy="685800"/>
-          </a:xfrm>
-          <a:prstGeom prst="rect">
-            <a:avLst/>
-          </a:prstGeom>
-          <a:noFill/>
-        </p:spPr>
-        <p:txBody>
-          <a:bodyPr wrap="square" anchor="ctr">
-            <a:spAutoFit/>
-          </a:bodyPr>
-          <a:lstStyle/>
-          <a:p>
-            <a:pPr algn="l">
-              <a:spcBef>
-                <a:spcPts val="0"/>
-              </a:spcBef>
-              <a:spcAft>
-                <a:spcPts val="200"/>
-              </a:spcAft>
-            </a:pPr>
-            <a:r>
-              <a:rPr sz="1600" b="1">
-                <a:solidFill>
-                  <a:srgbClr val="0B0B0C"/>
-                </a:solidFill>
-                <a:latin typeface="Calibri"/>
-              </a:rPr>
-              <a:t>Feature &amp; enhanced pages</a:t>
-            </a:r>
-          </a:p>
-          <a:p>
-            <a:pPr algn="l">
-              <a:spcBef>
-                <a:spcPts val="0"/>
-              </a:spcBef>
-              <a:spcAft>
-                <a:spcPts val="0"/>
-              </a:spcAft>
-            </a:pPr>
-            <a:r>
-              <a:rPr sz="1250" b="0">
-                <a:solidFill>
-                  <a:srgbClr val="5B626D"/>
-                </a:solidFill>
-                <a:latin typeface="Calibri"/>
-              </a:rPr>
-              <a:t>Built (Casambi, Fire Safety, Trade, …)</a:t>
-            </a:r>
-          </a:p>
-        </p:txBody>
-      </p:sp>
-      <p:sp>
-        <p:nvSpPr>
-          <p:cNvPr id="22" name="Rectangle 21"/>
+          <p:cNvPr id="24" name="Rectangle 23"/>
           <p:cNvSpPr/>
           <p:nvPr/>
         </p:nvSpPr>
         <p:spPr>
           <a:xfrm>
-            <a:off x="548640" y="5303520"/>
-            <a:ext cx="685800" cy="777240"/>
+            <a:off x="548640" y="4983479"/>
+            <a:ext cx="91440" cy="713232"/>
           </a:xfrm>
           <a:prstGeom prst="rect">
             <a:avLst/>
           </a:prstGeom>
           <a:solidFill>
-            <a:srgbClr val="5B626D"/>
+            <a:srgbClr val="1D4ED8"/>
           </a:solidFill>
           <a:ln>
             <a:noFill/>
@@ -6544,14 +6631,14 @@
       </p:sp>
       <p:sp>
         <p:nvSpPr>
-          <p:cNvPr id="23" name="TextBox 22"/>
+          <p:cNvPr id="25" name="TextBox 24"/>
           <p:cNvSpPr txBox="1"/>
           <p:nvPr/>
         </p:nvSpPr>
         <p:spPr>
           <a:xfrm>
-            <a:off x="548640" y="5303520"/>
-            <a:ext cx="685800" cy="777240"/>
+            <a:off x="777240" y="4983479"/>
+            <a:ext cx="2743200" cy="713232"/>
           </a:xfrm>
           <a:prstGeom prst="rect">
             <a:avLst/>
@@ -6564,42 +6651,103 @@
           </a:bodyPr>
           <a:lstStyle/>
           <a:p>
-            <a:pPr algn="ctr">
-              <a:spcBef>
-                <a:spcPts val="0"/>
-              </a:spcBef>
-              <a:spcAft>
-                <a:spcPts val="0"/>
-              </a:spcAft>
-            </a:pPr>
-            <a:r>
-              <a:rPr sz="2600" b="1">
-                <a:solidFill>
-                  <a:srgbClr val="FFFFFF"/>
-                </a:solidFill>
-                <a:latin typeface="Calibri"/>
-              </a:rPr>
-              <a:t>5</a:t>
-            </a:r>
-          </a:p>
-        </p:txBody>
-      </p:sp>
-      <p:sp>
-        <p:nvSpPr>
-          <p:cNvPr id="24" name="Rectangle 23"/>
+            <a:pPr algn="l">
+              <a:spcBef>
+                <a:spcPts val="0"/>
+              </a:spcBef>
+              <a:spcAft>
+                <a:spcPts val="100"/>
+              </a:spcAft>
+            </a:pPr>
+            <a:r>
+              <a:rPr sz="1300" b="1">
+                <a:solidFill>
+                  <a:srgbClr val="0B0B0C"/>
+                </a:solidFill>
+                <a:latin typeface="Calibri"/>
+              </a:rPr>
+              <a:t>You see something</a:t>
+            </a:r>
+          </a:p>
+          <a:p>
+            <a:pPr algn="l">
+              <a:spcBef>
+                <a:spcPts val="0"/>
+              </a:spcBef>
+              <a:spcAft>
+                <a:spcPts val="0"/>
+              </a:spcAft>
+            </a:pPr>
+            <a:r>
+              <a:rPr sz="1200" b="1">
+                <a:solidFill>
+                  <a:srgbClr val="1A7F37"/>
+                </a:solidFill>
+                <a:latin typeface="Calibri"/>
+              </a:rPr>
+              <a:t>2.8s → 1.2s</a:t>
+            </a:r>
+          </a:p>
+        </p:txBody>
+      </p:sp>
+      <p:sp>
+        <p:nvSpPr>
+          <p:cNvPr id="26" name="TextBox 25"/>
+          <p:cNvSpPr txBox="1"/>
+          <p:nvPr/>
+        </p:nvSpPr>
+        <p:spPr>
+          <a:xfrm>
+            <a:off x="3657600" y="4983479"/>
+            <a:ext cx="7772400" cy="713232"/>
+          </a:xfrm>
+          <a:prstGeom prst="rect">
+            <a:avLst/>
+          </a:prstGeom>
+          <a:noFill/>
+        </p:spPr>
+        <p:txBody>
+          <a:bodyPr wrap="square" anchor="ctr">
+            <a:spAutoFit/>
+          </a:bodyPr>
+          <a:lstStyle/>
+          <a:p>
+            <a:pPr algn="l">
+              <a:spcBef>
+                <a:spcPts val="0"/>
+              </a:spcBef>
+              <a:spcAft>
+                <a:spcPts val="0"/>
+              </a:spcAft>
+            </a:pPr>
+            <a:r>
+              <a:rPr sz="1250" b="0">
+                <a:solidFill>
+                  <a:srgbClr val="16335C"/>
+                </a:solidFill>
+                <a:latin typeface="Calibri"/>
+              </a:rPr>
+              <a:t>How soon anything at all appears on screen, so it doesn't feel blank.</a:t>
+            </a:r>
+          </a:p>
+        </p:txBody>
+      </p:sp>
+      <p:sp>
+        <p:nvSpPr>
+          <p:cNvPr id="27" name="Rectangle 26"/>
           <p:cNvSpPr/>
           <p:nvPr/>
         </p:nvSpPr>
         <p:spPr>
           <a:xfrm>
-            <a:off x="1325880" y="5303520"/>
-            <a:ext cx="10287000" cy="777240"/>
+            <a:off x="548640" y="5897880"/>
+            <a:ext cx="11064240" cy="566928"/>
           </a:xfrm>
           <a:prstGeom prst="rect">
             <a:avLst/>
           </a:prstGeom>
           <a:solidFill>
-            <a:srgbClr val="F4F6F8"/>
+            <a:srgbClr val="16335C"/>
           </a:solidFill>
           <a:ln>
             <a:noFill/>
@@ -6630,14 +6778,14 @@
       </p:sp>
       <p:sp>
         <p:nvSpPr>
-          <p:cNvPr id="25" name="TextBox 24"/>
+          <p:cNvPr id="28" name="TextBox 27"/>
           <p:cNvSpPr txBox="1"/>
           <p:nvPr/>
         </p:nvSpPr>
         <p:spPr>
           <a:xfrm>
-            <a:off x="1554480" y="5376672"/>
-            <a:ext cx="9875520" cy="685800"/>
+            <a:off x="777240" y="5897880"/>
+            <a:ext cx="10607040" cy="566928"/>
           </a:xfrm>
           <a:prstGeom prst="rect">
             <a:avLst/>
@@ -6655,43 +6803,24 @@
                 <a:spcPts val="0"/>
               </a:spcBef>
               <a:spcAft>
-                <a:spcPts val="200"/>
-              </a:spcAft>
-            </a:pPr>
-            <a:r>
-              <a:rPr sz="1600" b="1">
-                <a:solidFill>
-                  <a:srgbClr val="0B0B0C"/>
-                </a:solidFill>
-                <a:latin typeface="Calibri"/>
-              </a:rPr>
-              <a:t>Reconnect live product data</a:t>
-            </a:r>
-          </a:p>
-          <a:p>
-            <a:pPr algn="l">
-              <a:spcBef>
-                <a:spcPts val="0"/>
-              </a:spcBef>
-              <a:spcAft>
-                <a:spcPts val="0"/>
-              </a:spcAft>
-            </a:pPr>
-            <a:r>
-              <a:rPr sz="1250" b="0">
-                <a:solidFill>
-                  <a:srgbClr val="5B626D"/>
-                </a:solidFill>
-                <a:latin typeface="Calibri"/>
-              </a:rPr>
-              <a:t>Final step, switched on last</a:t>
-            </a:r>
-          </a:p>
-        </p:txBody>
-      </p:sp>
-      <p:sp>
-        <p:nvSpPr>
-          <p:cNvPr id="26" name="TextBox 25"/>
+                <a:spcPts val="0"/>
+              </a:spcAft>
+            </a:pPr>
+            <a:r>
+              <a:rPr sz="1250" b="1">
+                <a:solidFill>
+                  <a:srgbClr val="FFFFFF"/>
+                </a:solidFill>
+                <a:latin typeface="Calibri"/>
+              </a:rPr>
+              <a:t>Bottom line: the old site was slow enough on phones to push visitors away; the new one loads fast and stays responsive — which means better Google rankings and more enquiries.</a:t>
+            </a:r>
+          </a:p>
+        </p:txBody>
+      </p:sp>
+      <p:sp>
+        <p:nvSpPr>
+          <p:cNvPr id="29" name="TextBox 28"/>
           <p:cNvSpPr txBox="1"/>
           <p:nvPr/>
         </p:nvSpPr>
@@ -6733,7 +6862,7 @@
       </p:sp>
       <p:sp>
         <p:nvSpPr>
-          <p:cNvPr id="27" name="TextBox 26"/>
+          <p:cNvPr id="30" name="TextBox 29"/>
           <p:cNvSpPr txBox="1"/>
           <p:nvPr/>
         </p:nvSpPr>
@@ -6768,7 +6897,7 @@
                 </a:solidFill>
                 <a:latin typeface="Calibri"/>
               </a:rPr>
-              <a:t>12</a:t>
+              <a:t>11</a:t>
             </a:r>
           </a:p>
         </p:txBody>
@@ -6916,7 +7045,7 @@
                 </a:solidFill>
                 <a:latin typeface="Calibri"/>
               </a:rPr>
-              <a:t>THE BOTTOM LINE</a:t>
+              <a:t>ROADMAP</a:t>
             </a:r>
           </a:p>
           <a:p>
@@ -6935,7 +7064,7 @@
                 </a:solidFill>
                 <a:latin typeface="Calibri"/>
               </a:rPr>
-              <a:t>Old site vs new site</a:t>
+              <a:t>Where we are</a:t>
             </a:r>
           </a:p>
         </p:txBody>
@@ -6992,52 +7121,8 @@
         </p:nvSpPr>
         <p:spPr>
           <a:xfrm>
-            <a:off x="548640" y="1417320"/>
-            <a:ext cx="5486400" cy="457200"/>
-          </a:xfrm>
-          <a:prstGeom prst="rect">
-            <a:avLst/>
-          </a:prstGeom>
-          <a:solidFill>
-            <a:srgbClr val="0B0B0C"/>
-          </a:solidFill>
-          <a:ln>
-            <a:noFill/>
-          </a:ln>
-          <a:effectLst/>
-        </p:spPr>
-        <p:style>
-          <a:lnRef idx="1">
-            <a:schemeClr val="accent1"/>
-          </a:lnRef>
-          <a:fillRef idx="3">
-            <a:schemeClr val="accent1"/>
-          </a:fillRef>
-          <a:effectRef idx="2">
-            <a:schemeClr val="accent1"/>
-          </a:effectRef>
-          <a:fontRef idx="minor">
-            <a:schemeClr val="lt1"/>
-          </a:fontRef>
-        </p:style>
-        <p:txBody>
-          <a:bodyPr rtlCol="0" anchor="ctr"/>
-          <a:lstStyle/>
-          <a:p>
-            <a:pPr algn="ctr"/>
-          </a:p>
-        </p:txBody>
-      </p:sp>
-      <p:sp>
-        <p:nvSpPr>
-          <p:cNvPr id="7" name="Rectangle 6"/>
-          <p:cNvSpPr/>
-          <p:nvPr/>
-        </p:nvSpPr>
-        <p:spPr>
-          <a:xfrm>
-            <a:off x="6126480" y="1417320"/>
-            <a:ext cx="5486400" cy="457200"/>
+            <a:off x="548640" y="1645920"/>
+            <a:ext cx="685800" cy="777240"/>
           </a:xfrm>
           <a:prstGeom prst="rect">
             <a:avLst/>
@@ -7074,14 +7159,14 @@
       </p:sp>
       <p:sp>
         <p:nvSpPr>
-          <p:cNvPr id="8" name="TextBox 7"/>
+          <p:cNvPr id="7" name="TextBox 6"/>
           <p:cNvSpPr txBox="1"/>
           <p:nvPr/>
         </p:nvSpPr>
         <p:spPr>
           <a:xfrm>
-            <a:off x="731520" y="1417320"/>
-            <a:ext cx="5120640" cy="457200"/>
+            <a:off x="548640" y="1645920"/>
+            <a:ext cx="685800" cy="777240"/>
           </a:xfrm>
           <a:prstGeom prst="rect">
             <a:avLst/>
@@ -7094,250 +7179,36 @@
           </a:bodyPr>
           <a:lstStyle/>
           <a:p>
-            <a:pPr algn="l">
-              <a:spcBef>
-                <a:spcPts val="0"/>
-              </a:spcBef>
-              <a:spcAft>
-                <a:spcPts val="0"/>
-              </a:spcAft>
-            </a:pPr>
-            <a:r>
-              <a:rPr sz="1300" b="1">
+            <a:pPr algn="ctr">
+              <a:spcBef>
+                <a:spcPts val="0"/>
+              </a:spcBef>
+              <a:spcAft>
+                <a:spcPts val="0"/>
+              </a:spcAft>
+            </a:pPr>
+            <a:r>
+              <a:rPr sz="2600" b="1">
                 <a:solidFill>
                   <a:srgbClr val="FFFFFF"/>
                 </a:solidFill>
                 <a:latin typeface="Calibri"/>
               </a:rPr>
-              <a:t>OLD SITE</a:t>
-            </a:r>
-          </a:p>
-        </p:txBody>
-      </p:sp>
-      <p:sp>
-        <p:nvSpPr>
-          <p:cNvPr id="9" name="TextBox 8"/>
-          <p:cNvSpPr txBox="1"/>
-          <p:nvPr/>
-        </p:nvSpPr>
-        <p:spPr>
-          <a:xfrm>
-            <a:off x="6309360" y="1417320"/>
-            <a:ext cx="5120640" cy="457200"/>
-          </a:xfrm>
-          <a:prstGeom prst="rect">
-            <a:avLst/>
-          </a:prstGeom>
-          <a:noFill/>
-        </p:spPr>
-        <p:txBody>
-          <a:bodyPr wrap="square" anchor="ctr">
-            <a:spAutoFit/>
-          </a:bodyPr>
-          <a:lstStyle/>
-          <a:p>
-            <a:pPr algn="l">
-              <a:spcBef>
-                <a:spcPts val="0"/>
-              </a:spcBef>
-              <a:spcAft>
-                <a:spcPts val="0"/>
-              </a:spcAft>
-            </a:pPr>
-            <a:r>
-              <a:rPr sz="1300" b="1">
-                <a:solidFill>
-                  <a:srgbClr val="FFFFFF"/>
-                </a:solidFill>
-                <a:latin typeface="Calibri"/>
-              </a:rPr>
-              <a:t>NEW SITE</a:t>
-            </a:r>
-          </a:p>
-        </p:txBody>
-      </p:sp>
-      <p:sp>
-        <p:nvSpPr>
-          <p:cNvPr id="10" name="Rectangle 9"/>
+              <a:t>1</a:t>
+            </a:r>
+          </a:p>
+        </p:txBody>
+      </p:sp>
+      <p:sp>
+        <p:nvSpPr>
+          <p:cNvPr id="8" name="Rectangle 7"/>
           <p:cNvSpPr/>
           <p:nvPr/>
         </p:nvSpPr>
         <p:spPr>
           <a:xfrm>
-            <a:off x="548640" y="1920240"/>
-            <a:ext cx="5486400" cy="512064"/>
-          </a:xfrm>
-          <a:prstGeom prst="rect">
-            <a:avLst/>
-          </a:prstGeom>
-          <a:solidFill>
-            <a:srgbClr val="FFFFFF"/>
-          </a:solidFill>
-          <a:ln>
-            <a:noFill/>
-          </a:ln>
-          <a:effectLst/>
-        </p:spPr>
-        <p:style>
-          <a:lnRef idx="1">
-            <a:schemeClr val="accent1"/>
-          </a:lnRef>
-          <a:fillRef idx="3">
-            <a:schemeClr val="accent1"/>
-          </a:fillRef>
-          <a:effectRef idx="2">
-            <a:schemeClr val="accent1"/>
-          </a:effectRef>
-          <a:fontRef idx="minor">
-            <a:schemeClr val="lt1"/>
-          </a:fontRef>
-        </p:style>
-        <p:txBody>
-          <a:bodyPr rtlCol="0" anchor="ctr"/>
-          <a:lstStyle/>
-          <a:p>
-            <a:pPr algn="ctr"/>
-          </a:p>
-        </p:txBody>
-      </p:sp>
-      <p:sp>
-        <p:nvSpPr>
-          <p:cNvPr id="11" name="Rectangle 10"/>
-          <p:cNvSpPr/>
-          <p:nvPr/>
-        </p:nvSpPr>
-        <p:spPr>
-          <a:xfrm>
-            <a:off x="6126480" y="1920240"/>
-            <a:ext cx="5486400" cy="512064"/>
-          </a:xfrm>
-          <a:prstGeom prst="rect">
-            <a:avLst/>
-          </a:prstGeom>
-          <a:solidFill>
-            <a:srgbClr val="FFFFFF"/>
-          </a:solidFill>
-          <a:ln>
-            <a:noFill/>
-          </a:ln>
-          <a:effectLst/>
-        </p:spPr>
-        <p:style>
-          <a:lnRef idx="1">
-            <a:schemeClr val="accent1"/>
-          </a:lnRef>
-          <a:fillRef idx="3">
-            <a:schemeClr val="accent1"/>
-          </a:fillRef>
-          <a:effectRef idx="2">
-            <a:schemeClr val="accent1"/>
-          </a:effectRef>
-          <a:fontRef idx="minor">
-            <a:schemeClr val="lt1"/>
-          </a:fontRef>
-        </p:style>
-        <p:txBody>
-          <a:bodyPr rtlCol="0" anchor="ctr"/>
-          <a:lstStyle/>
-          <a:p>
-            <a:pPr algn="ctr"/>
-          </a:p>
-        </p:txBody>
-      </p:sp>
-      <p:sp>
-        <p:nvSpPr>
-          <p:cNvPr id="12" name="TextBox 11"/>
-          <p:cNvSpPr txBox="1"/>
-          <p:nvPr/>
-        </p:nvSpPr>
-        <p:spPr>
-          <a:xfrm>
-            <a:off x="731520" y="1920240"/>
-            <a:ext cx="5212080" cy="512064"/>
-          </a:xfrm>
-          <a:prstGeom prst="rect">
-            <a:avLst/>
-          </a:prstGeom>
-          <a:noFill/>
-        </p:spPr>
-        <p:txBody>
-          <a:bodyPr wrap="square" anchor="ctr">
-            <a:spAutoFit/>
-          </a:bodyPr>
-          <a:lstStyle/>
-          <a:p>
-            <a:pPr algn="l">
-              <a:spcBef>
-                <a:spcPts val="0"/>
-              </a:spcBef>
-              <a:spcAft>
-                <a:spcPts val="0"/>
-              </a:spcAft>
-            </a:pPr>
-            <a:r>
-              <a:rPr sz="1200" b="0">
-                <a:solidFill>
-                  <a:srgbClr val="5B626D"/>
-                </a:solidFill>
-                <a:latin typeface="Calibri"/>
-              </a:rPr>
-              <a:t>248 GB of bloat, 91% duplicate images</a:t>
-            </a:r>
-          </a:p>
-        </p:txBody>
-      </p:sp>
-      <p:sp>
-        <p:nvSpPr>
-          <p:cNvPr id="13" name="TextBox 12"/>
-          <p:cNvSpPr txBox="1"/>
-          <p:nvPr/>
-        </p:nvSpPr>
-        <p:spPr>
-          <a:xfrm>
-            <a:off x="6309360" y="1920240"/>
-            <a:ext cx="5212080" cy="512064"/>
-          </a:xfrm>
-          <a:prstGeom prst="rect">
-            <a:avLst/>
-          </a:prstGeom>
-          <a:noFill/>
-        </p:spPr>
-        <p:txBody>
-          <a:bodyPr wrap="square" anchor="ctr">
-            <a:spAutoFit/>
-          </a:bodyPr>
-          <a:lstStyle/>
-          <a:p>
-            <a:pPr algn="l">
-              <a:spcBef>
-                <a:spcPts val="0"/>
-              </a:spcBef>
-              <a:spcAft>
-                <a:spcPts val="0"/>
-              </a:spcAft>
-            </a:pPr>
-            <a:r>
-              <a:rPr sz="1200" b="1">
-                <a:solidFill>
-                  <a:srgbClr val="16335C"/>
-                </a:solidFill>
-                <a:latin typeface="Calibri"/>
-              </a:rPr>
-              <a:t>Cleaned up, lean media library</a:t>
-            </a:r>
-          </a:p>
-        </p:txBody>
-      </p:sp>
-      <p:sp>
-        <p:nvSpPr>
-          <p:cNvPr id="14" name="Rectangle 13"/>
-          <p:cNvSpPr/>
-          <p:nvPr/>
-        </p:nvSpPr>
-        <p:spPr>
-          <a:xfrm>
-            <a:off x="548640" y="2468880"/>
-            <a:ext cx="5486400" cy="512064"/>
+            <a:off x="1325880" y="1645920"/>
+            <a:ext cx="10287000" cy="777240"/>
           </a:xfrm>
           <a:prstGeom prst="rect">
             <a:avLst/>
@@ -7374,14 +7245,161 @@
       </p:sp>
       <p:sp>
         <p:nvSpPr>
-          <p:cNvPr id="15" name="Rectangle 14"/>
+          <p:cNvPr id="9" name="TextBox 8"/>
+          <p:cNvSpPr txBox="1"/>
+          <p:nvPr/>
+        </p:nvSpPr>
+        <p:spPr>
+          <a:xfrm>
+            <a:off x="1554480" y="1719072"/>
+            <a:ext cx="9875520" cy="685800"/>
+          </a:xfrm>
+          <a:prstGeom prst="rect">
+            <a:avLst/>
+          </a:prstGeom>
+          <a:noFill/>
+        </p:spPr>
+        <p:txBody>
+          <a:bodyPr wrap="square" anchor="ctr">
+            <a:spAutoFit/>
+          </a:bodyPr>
+          <a:lstStyle/>
+          <a:p>
+            <a:pPr algn="l">
+              <a:spcBef>
+                <a:spcPts val="0"/>
+              </a:spcBef>
+              <a:spcAft>
+                <a:spcPts val="200"/>
+              </a:spcAft>
+            </a:pPr>
+            <a:r>
+              <a:rPr sz="1600" b="1">
+                <a:solidFill>
+                  <a:srgbClr val="0B0B0C"/>
+                </a:solidFill>
+                <a:latin typeface="Calibri"/>
+              </a:rPr>
+              <a:t>Recreate ricoman.com exactly on the new platform</a:t>
+            </a:r>
+          </a:p>
+          <a:p>
+            <a:pPr algn="l">
+              <a:spcBef>
+                <a:spcPts val="0"/>
+              </a:spcBef>
+              <a:spcAft>
+                <a:spcPts val="0"/>
+              </a:spcAft>
+            </a:pPr>
+            <a:r>
+              <a:rPr sz="1250" b="0">
+                <a:solidFill>
+                  <a:srgbClr val="5B626D"/>
+                </a:solidFill>
+                <a:latin typeface="Calibri"/>
+              </a:rPr>
+              <a:t>In progress — confirming each page matches live</a:t>
+            </a:r>
+          </a:p>
+        </p:txBody>
+      </p:sp>
+      <p:sp>
+        <p:nvSpPr>
+          <p:cNvPr id="10" name="Rectangle 9"/>
           <p:cNvSpPr/>
           <p:nvPr/>
         </p:nvSpPr>
         <p:spPr>
           <a:xfrm>
-            <a:off x="6126480" y="2468880"/>
-            <a:ext cx="5486400" cy="512064"/>
+            <a:off x="548640" y="2560320"/>
+            <a:ext cx="685800" cy="777240"/>
+          </a:xfrm>
+          <a:prstGeom prst="rect">
+            <a:avLst/>
+          </a:prstGeom>
+          <a:solidFill>
+            <a:srgbClr val="1D4ED8"/>
+          </a:solidFill>
+          <a:ln>
+            <a:noFill/>
+          </a:ln>
+          <a:effectLst/>
+        </p:spPr>
+        <p:style>
+          <a:lnRef idx="1">
+            <a:schemeClr val="accent1"/>
+          </a:lnRef>
+          <a:fillRef idx="3">
+            <a:schemeClr val="accent1"/>
+          </a:fillRef>
+          <a:effectRef idx="2">
+            <a:schemeClr val="accent1"/>
+          </a:effectRef>
+          <a:fontRef idx="minor">
+            <a:schemeClr val="lt1"/>
+          </a:fontRef>
+        </p:style>
+        <p:txBody>
+          <a:bodyPr rtlCol="0" anchor="ctr"/>
+          <a:lstStyle/>
+          <a:p>
+            <a:pPr algn="ctr"/>
+          </a:p>
+        </p:txBody>
+      </p:sp>
+      <p:sp>
+        <p:nvSpPr>
+          <p:cNvPr id="11" name="TextBox 10"/>
+          <p:cNvSpPr txBox="1"/>
+          <p:nvPr/>
+        </p:nvSpPr>
+        <p:spPr>
+          <a:xfrm>
+            <a:off x="548640" y="2560320"/>
+            <a:ext cx="685800" cy="777240"/>
+          </a:xfrm>
+          <a:prstGeom prst="rect">
+            <a:avLst/>
+          </a:prstGeom>
+          <a:noFill/>
+        </p:spPr>
+        <p:txBody>
+          <a:bodyPr wrap="square" anchor="ctr">
+            <a:spAutoFit/>
+          </a:bodyPr>
+          <a:lstStyle/>
+          <a:p>
+            <a:pPr algn="ctr">
+              <a:spcBef>
+                <a:spcPts val="0"/>
+              </a:spcBef>
+              <a:spcAft>
+                <a:spcPts val="0"/>
+              </a:spcAft>
+            </a:pPr>
+            <a:r>
+              <a:rPr sz="2600" b="1">
+                <a:solidFill>
+                  <a:srgbClr val="FFFFFF"/>
+                </a:solidFill>
+                <a:latin typeface="Calibri"/>
+              </a:rPr>
+              <a:t>2</a:t>
+            </a:r>
+          </a:p>
+        </p:txBody>
+      </p:sp>
+      <p:sp>
+        <p:nvSpPr>
+          <p:cNvPr id="12" name="Rectangle 11"/>
+          <p:cNvSpPr/>
+          <p:nvPr/>
+        </p:nvSpPr>
+        <p:spPr>
+          <a:xfrm>
+            <a:off x="1325880" y="2560320"/>
+            <a:ext cx="10287000" cy="777240"/>
           </a:xfrm>
           <a:prstGeom prst="rect">
             <a:avLst/>
@@ -7418,14 +7436,14 @@
       </p:sp>
       <p:sp>
         <p:nvSpPr>
-          <p:cNvPr id="16" name="TextBox 15"/>
+          <p:cNvPr id="13" name="TextBox 12"/>
           <p:cNvSpPr txBox="1"/>
           <p:nvPr/>
         </p:nvSpPr>
         <p:spPr>
           <a:xfrm>
-            <a:off x="731520" y="2468880"/>
-            <a:ext cx="5212080" cy="512064"/>
+            <a:off x="1554480" y="2633472"/>
+            <a:ext cx="9875520" cy="685800"/>
           </a:xfrm>
           <a:prstGeom prst="rect">
             <a:avLst/>
@@ -7443,79 +7461,56 @@
                 <a:spcPts val="0"/>
               </a:spcBef>
               <a:spcAft>
-                <a:spcPts val="0"/>
-              </a:spcAft>
-            </a:pPr>
-            <a:r>
-              <a:rPr sz="1200" b="0">
+                <a:spcPts val="200"/>
+              </a:spcAft>
+            </a:pPr>
+            <a:r>
+              <a:rPr sz="1600" b="1">
+                <a:solidFill>
+                  <a:srgbClr val="0B0B0C"/>
+                </a:solidFill>
+                <a:latin typeface="Calibri"/>
+              </a:rPr>
+              <a:t>Check &amp; enhance SEO</a:t>
+            </a:r>
+          </a:p>
+          <a:p>
+            <a:pPr algn="l">
+              <a:spcBef>
+                <a:spcPts val="0"/>
+              </a:spcBef>
+              <a:spcAft>
+                <a:spcPts val="0"/>
+              </a:spcAft>
+            </a:pPr>
+            <a:r>
+              <a:rPr sz="1250" b="0">
                 <a:solidFill>
                   <a:srgbClr val="5B626D"/>
                 </a:solidFill>
                 <a:latin typeface="Calibri"/>
               </a:rPr>
-              <a:t>Backups failing since ~Oct 2025</a:t>
-            </a:r>
-          </a:p>
-        </p:txBody>
-      </p:sp>
-      <p:sp>
-        <p:nvSpPr>
-          <p:cNvPr id="17" name="TextBox 16"/>
-          <p:cNvSpPr txBox="1"/>
-          <p:nvPr/>
-        </p:nvSpPr>
-        <p:spPr>
-          <a:xfrm>
-            <a:off x="6309360" y="2468880"/>
-            <a:ext cx="5212080" cy="512064"/>
-          </a:xfrm>
-          <a:prstGeom prst="rect">
-            <a:avLst/>
-          </a:prstGeom>
-          <a:noFill/>
-        </p:spPr>
-        <p:txBody>
-          <a:bodyPr wrap="square" anchor="ctr">
-            <a:spAutoFit/>
-          </a:bodyPr>
-          <a:lstStyle/>
-          <a:p>
-            <a:pPr algn="l">
-              <a:spcBef>
-                <a:spcPts val="0"/>
-              </a:spcBef>
-              <a:spcAft>
-                <a:spcPts val="0"/>
-              </a:spcAft>
-            </a:pPr>
-            <a:r>
-              <a:rPr sz="1200" b="1">
-                <a:solidFill>
-                  <a:srgbClr val="16335C"/>
-                </a:solidFill>
-                <a:latin typeface="Calibri"/>
-              </a:rPr>
-              <a:t>Reliable, fast backups</a:t>
-            </a:r>
-          </a:p>
-        </p:txBody>
-      </p:sp>
-      <p:sp>
-        <p:nvSpPr>
-          <p:cNvPr id="18" name="Rectangle 17"/>
+              <a:t>Foundations + audit tooling built</a:t>
+            </a:r>
+          </a:p>
+        </p:txBody>
+      </p:sp>
+      <p:sp>
+        <p:nvSpPr>
+          <p:cNvPr id="14" name="Rectangle 13"/>
           <p:cNvSpPr/>
           <p:nvPr/>
         </p:nvSpPr>
         <p:spPr>
           <a:xfrm>
-            <a:off x="548640" y="3017520"/>
-            <a:ext cx="5486400" cy="512064"/>
+            <a:off x="548640" y="3474720"/>
+            <a:ext cx="685800" cy="777240"/>
           </a:xfrm>
           <a:prstGeom prst="rect">
             <a:avLst/>
           </a:prstGeom>
           <a:solidFill>
-            <a:srgbClr val="FFFFFF"/>
+            <a:srgbClr val="5B626D"/>
           </a:solidFill>
           <a:ln>
             <a:noFill/>
@@ -7546,58 +7541,14 @@
       </p:sp>
       <p:sp>
         <p:nvSpPr>
-          <p:cNvPr id="19" name="Rectangle 18"/>
-          <p:cNvSpPr/>
-          <p:nvPr/>
-        </p:nvSpPr>
-        <p:spPr>
-          <a:xfrm>
-            <a:off x="6126480" y="3017520"/>
-            <a:ext cx="5486400" cy="512064"/>
-          </a:xfrm>
-          <a:prstGeom prst="rect">
-            <a:avLst/>
-          </a:prstGeom>
-          <a:solidFill>
-            <a:srgbClr val="FFFFFF"/>
-          </a:solidFill>
-          <a:ln>
-            <a:noFill/>
-          </a:ln>
-          <a:effectLst/>
-        </p:spPr>
-        <p:style>
-          <a:lnRef idx="1">
-            <a:schemeClr val="accent1"/>
-          </a:lnRef>
-          <a:fillRef idx="3">
-            <a:schemeClr val="accent1"/>
-          </a:fillRef>
-          <a:effectRef idx="2">
-            <a:schemeClr val="accent1"/>
-          </a:effectRef>
-          <a:fontRef idx="minor">
-            <a:schemeClr val="lt1"/>
-          </a:fontRef>
-        </p:style>
-        <p:txBody>
-          <a:bodyPr rtlCol="0" anchor="ctr"/>
-          <a:lstStyle/>
-          <a:p>
-            <a:pPr algn="ctr"/>
-          </a:p>
-        </p:txBody>
-      </p:sp>
-      <p:sp>
-        <p:nvSpPr>
-          <p:cNvPr id="20" name="TextBox 19"/>
+          <p:cNvPr id="15" name="TextBox 14"/>
           <p:cNvSpPr txBox="1"/>
           <p:nvPr/>
         </p:nvSpPr>
         <p:spPr>
           <a:xfrm>
-            <a:off x="731520" y="3017520"/>
-            <a:ext cx="5212080" cy="512064"/>
+            <a:off x="548640" y="3474720"/>
+            <a:ext cx="685800" cy="777240"/>
           </a:xfrm>
           <a:prstGeom prst="rect">
             <a:avLst/>
@@ -7610,78 +7561,36 @@
           </a:bodyPr>
           <a:lstStyle/>
           <a:p>
-            <a:pPr algn="l">
-              <a:spcBef>
-                <a:spcPts val="0"/>
-              </a:spcBef>
-              <a:spcAft>
-                <a:spcPts val="0"/>
-              </a:spcAft>
-            </a:pPr>
-            <a:r>
-              <a:rPr sz="1200" b="0">
-                <a:solidFill>
-                  <a:srgbClr val="5B626D"/>
-                </a:solidFill>
-                <a:latin typeface="Calibri"/>
-              </a:rPr>
-              <a:t>Higher, growing hosting cost</a:t>
-            </a:r>
-          </a:p>
-        </p:txBody>
-      </p:sp>
-      <p:sp>
-        <p:nvSpPr>
-          <p:cNvPr id="21" name="TextBox 20"/>
-          <p:cNvSpPr txBox="1"/>
-          <p:nvPr/>
-        </p:nvSpPr>
-        <p:spPr>
-          <a:xfrm>
-            <a:off x="6309360" y="3017520"/>
-            <a:ext cx="5212080" cy="512064"/>
-          </a:xfrm>
-          <a:prstGeom prst="rect">
-            <a:avLst/>
-          </a:prstGeom>
-          <a:noFill/>
-        </p:spPr>
-        <p:txBody>
-          <a:bodyPr wrap="square" anchor="ctr">
-            <a:spAutoFit/>
-          </a:bodyPr>
-          <a:lstStyle/>
-          <a:p>
-            <a:pPr algn="l">
-              <a:spcBef>
-                <a:spcPts val="0"/>
-              </a:spcBef>
-              <a:spcAft>
-                <a:spcPts val="0"/>
-              </a:spcAft>
-            </a:pPr>
-            <a:r>
-              <a:rPr sz="1200" b="1">
-                <a:solidFill>
-                  <a:srgbClr val="16335C"/>
-                </a:solidFill>
-                <a:latin typeface="Calibri"/>
-              </a:rPr>
-              <a:t>Lower, predictable hosting cost</a:t>
-            </a:r>
-          </a:p>
-        </p:txBody>
-      </p:sp>
-      <p:sp>
-        <p:nvSpPr>
-          <p:cNvPr id="22" name="Rectangle 21"/>
+            <a:pPr algn="ctr">
+              <a:spcBef>
+                <a:spcPts val="0"/>
+              </a:spcBef>
+              <a:spcAft>
+                <a:spcPts val="0"/>
+              </a:spcAft>
+            </a:pPr>
+            <a:r>
+              <a:rPr sz="2600" b="1">
+                <a:solidFill>
+                  <a:srgbClr val="FFFFFF"/>
+                </a:solidFill>
+                <a:latin typeface="Calibri"/>
+              </a:rPr>
+              <a:t>3</a:t>
+            </a:r>
+          </a:p>
+        </p:txBody>
+      </p:sp>
+      <p:sp>
+        <p:nvSpPr>
+          <p:cNvPr id="16" name="Rectangle 15"/>
           <p:cNvSpPr/>
           <p:nvPr/>
         </p:nvSpPr>
         <p:spPr>
           <a:xfrm>
-            <a:off x="548640" y="3566160"/>
-            <a:ext cx="5486400" cy="512064"/>
+            <a:off x="1325880" y="3474720"/>
+            <a:ext cx="10287000" cy="777240"/>
           </a:xfrm>
           <a:prstGeom prst="rect">
             <a:avLst/>
@@ -7718,14 +7627,161 @@
       </p:sp>
       <p:sp>
         <p:nvSpPr>
-          <p:cNvPr id="23" name="Rectangle 22"/>
+          <p:cNvPr id="17" name="TextBox 16"/>
+          <p:cNvSpPr txBox="1"/>
+          <p:nvPr/>
+        </p:nvSpPr>
+        <p:spPr>
+          <a:xfrm>
+            <a:off x="1554480" y="3547872"/>
+            <a:ext cx="9875520" cy="685800"/>
+          </a:xfrm>
+          <a:prstGeom prst="rect">
+            <a:avLst/>
+          </a:prstGeom>
+          <a:noFill/>
+        </p:spPr>
+        <p:txBody>
+          <a:bodyPr wrap="square" anchor="ctr">
+            <a:spAutoFit/>
+          </a:bodyPr>
+          <a:lstStyle/>
+          <a:p>
+            <a:pPr algn="l">
+              <a:spcBef>
+                <a:spcPts val="0"/>
+              </a:spcBef>
+              <a:spcAft>
+                <a:spcPts val="200"/>
+              </a:spcAft>
+            </a:pPr>
+            <a:r>
+              <a:rPr sz="1600" b="1">
+                <a:solidFill>
+                  <a:srgbClr val="0B0B0C"/>
+                </a:solidFill>
+                <a:latin typeface="Calibri"/>
+              </a:rPr>
+              <a:t>Launch — migrate the new site to live</a:t>
+            </a:r>
+          </a:p>
+          <a:p>
+            <a:pPr algn="l">
+              <a:spcBef>
+                <a:spcPts val="0"/>
+              </a:spcBef>
+              <a:spcAft>
+                <a:spcPts val="0"/>
+              </a:spcAft>
+            </a:pPr>
+            <a:r>
+              <a:rPr sz="1250" b="0">
+                <a:solidFill>
+                  <a:srgbClr val="5B626D"/>
+                </a:solidFill>
+                <a:latin typeface="Calibri"/>
+              </a:rPr>
+              <a:t>Runbook prepared</a:t>
+            </a:r>
+          </a:p>
+        </p:txBody>
+      </p:sp>
+      <p:sp>
+        <p:nvSpPr>
+          <p:cNvPr id="18" name="Rectangle 17"/>
           <p:cNvSpPr/>
           <p:nvPr/>
         </p:nvSpPr>
         <p:spPr>
           <a:xfrm>
-            <a:off x="6126480" y="3566160"/>
-            <a:ext cx="5486400" cy="512064"/>
+            <a:off x="548640" y="4389120"/>
+            <a:ext cx="685800" cy="777240"/>
+          </a:xfrm>
+          <a:prstGeom prst="rect">
+            <a:avLst/>
+          </a:prstGeom>
+          <a:solidFill>
+            <a:srgbClr val="1A7F37"/>
+          </a:solidFill>
+          <a:ln>
+            <a:noFill/>
+          </a:ln>
+          <a:effectLst/>
+        </p:spPr>
+        <p:style>
+          <a:lnRef idx="1">
+            <a:schemeClr val="accent1"/>
+          </a:lnRef>
+          <a:fillRef idx="3">
+            <a:schemeClr val="accent1"/>
+          </a:fillRef>
+          <a:effectRef idx="2">
+            <a:schemeClr val="accent1"/>
+          </a:effectRef>
+          <a:fontRef idx="minor">
+            <a:schemeClr val="lt1"/>
+          </a:fontRef>
+        </p:style>
+        <p:txBody>
+          <a:bodyPr rtlCol="0" anchor="ctr"/>
+          <a:lstStyle/>
+          <a:p>
+            <a:pPr algn="ctr"/>
+          </a:p>
+        </p:txBody>
+      </p:sp>
+      <p:sp>
+        <p:nvSpPr>
+          <p:cNvPr id="19" name="TextBox 18"/>
+          <p:cNvSpPr txBox="1"/>
+          <p:nvPr/>
+        </p:nvSpPr>
+        <p:spPr>
+          <a:xfrm>
+            <a:off x="548640" y="4389120"/>
+            <a:ext cx="685800" cy="777240"/>
+          </a:xfrm>
+          <a:prstGeom prst="rect">
+            <a:avLst/>
+          </a:prstGeom>
+          <a:noFill/>
+        </p:spPr>
+        <p:txBody>
+          <a:bodyPr wrap="square" anchor="ctr">
+            <a:spAutoFit/>
+          </a:bodyPr>
+          <a:lstStyle/>
+          <a:p>
+            <a:pPr algn="ctr">
+              <a:spcBef>
+                <a:spcPts val="0"/>
+              </a:spcBef>
+              <a:spcAft>
+                <a:spcPts val="0"/>
+              </a:spcAft>
+            </a:pPr>
+            <a:r>
+              <a:rPr sz="2600" b="1">
+                <a:solidFill>
+                  <a:srgbClr val="FFFFFF"/>
+                </a:solidFill>
+                <a:latin typeface="Calibri"/>
+              </a:rPr>
+              <a:t>4</a:t>
+            </a:r>
+          </a:p>
+        </p:txBody>
+      </p:sp>
+      <p:sp>
+        <p:nvSpPr>
+          <p:cNvPr id="20" name="Rectangle 19"/>
+          <p:cNvSpPr/>
+          <p:nvPr/>
+        </p:nvSpPr>
+        <p:spPr>
+          <a:xfrm>
+            <a:off x="1325880" y="4389120"/>
+            <a:ext cx="10287000" cy="777240"/>
           </a:xfrm>
           <a:prstGeom prst="rect">
             <a:avLst/>
@@ -7762,14 +7818,14 @@
       </p:sp>
       <p:sp>
         <p:nvSpPr>
-          <p:cNvPr id="24" name="TextBox 23"/>
+          <p:cNvPr id="21" name="TextBox 20"/>
           <p:cNvSpPr txBox="1"/>
           <p:nvPr/>
         </p:nvSpPr>
         <p:spPr>
           <a:xfrm>
-            <a:off x="731520" y="3566160"/>
-            <a:ext cx="5212080" cy="512064"/>
+            <a:off x="1554480" y="4462272"/>
+            <a:ext cx="9875520" cy="685800"/>
           </a:xfrm>
           <a:prstGeom prst="rect">
             <a:avLst/>
@@ -7787,79 +7843,56 @@
                 <a:spcPts val="0"/>
               </a:spcBef>
               <a:spcAft>
-                <a:spcPts val="0"/>
-              </a:spcAft>
-            </a:pPr>
-            <a:r>
-              <a:rPr sz="1200" b="0">
+                <a:spcPts val="200"/>
+              </a:spcAft>
+            </a:pPr>
+            <a:r>
+              <a:rPr sz="1600" b="1">
+                <a:solidFill>
+                  <a:srgbClr val="0B0B0C"/>
+                </a:solidFill>
+                <a:latin typeface="Calibri"/>
+              </a:rPr>
+              <a:t>Feature &amp; enhanced pages</a:t>
+            </a:r>
+          </a:p>
+          <a:p>
+            <a:pPr algn="l">
+              <a:spcBef>
+                <a:spcPts val="0"/>
+              </a:spcBef>
+              <a:spcAft>
+                <a:spcPts val="0"/>
+              </a:spcAft>
+            </a:pPr>
+            <a:r>
+              <a:rPr sz="1250" b="0">
                 <a:solidFill>
                   <a:srgbClr val="5B626D"/>
                 </a:solidFill>
                 <a:latin typeface="Calibri"/>
               </a:rPr>
-              <a:t>Changes needed a developer</a:t>
-            </a:r>
-          </a:p>
-        </p:txBody>
-      </p:sp>
-      <p:sp>
-        <p:nvSpPr>
-          <p:cNvPr id="25" name="TextBox 24"/>
-          <p:cNvSpPr txBox="1"/>
-          <p:nvPr/>
-        </p:nvSpPr>
-        <p:spPr>
-          <a:xfrm>
-            <a:off x="6309360" y="3566160"/>
-            <a:ext cx="5212080" cy="512064"/>
-          </a:xfrm>
-          <a:prstGeom prst="rect">
-            <a:avLst/>
-          </a:prstGeom>
-          <a:noFill/>
-        </p:spPr>
-        <p:txBody>
-          <a:bodyPr wrap="square" anchor="ctr">
-            <a:spAutoFit/>
-          </a:bodyPr>
-          <a:lstStyle/>
-          <a:p>
-            <a:pPr algn="l">
-              <a:spcBef>
-                <a:spcPts val="0"/>
-              </a:spcBef>
-              <a:spcAft>
-                <a:spcPts val="0"/>
-              </a:spcAft>
-            </a:pPr>
-            <a:r>
-              <a:rPr sz="1200" b="1">
-                <a:solidFill>
-                  <a:srgbClr val="16335C"/>
-                </a:solidFill>
-                <a:latin typeface="Calibri"/>
-              </a:rPr>
-              <a:t>Team edits products &amp; pages themselves</a:t>
-            </a:r>
-          </a:p>
-        </p:txBody>
-      </p:sp>
-      <p:sp>
-        <p:nvSpPr>
-          <p:cNvPr id="26" name="Rectangle 25"/>
+              <a:t>Built (Casambi, Fire Safety, Trade, …)</a:t>
+            </a:r>
+          </a:p>
+        </p:txBody>
+      </p:sp>
+      <p:sp>
+        <p:nvSpPr>
+          <p:cNvPr id="22" name="Rectangle 21"/>
           <p:cNvSpPr/>
           <p:nvPr/>
         </p:nvSpPr>
         <p:spPr>
           <a:xfrm>
-            <a:off x="548640" y="4114800"/>
-            <a:ext cx="5486400" cy="512064"/>
+            <a:off x="548640" y="5303520"/>
+            <a:ext cx="685800" cy="777240"/>
           </a:xfrm>
           <a:prstGeom prst="rect">
             <a:avLst/>
           </a:prstGeom>
           <a:solidFill>
-            <a:srgbClr val="FFFFFF"/>
+            <a:srgbClr val="5B626D"/>
           </a:solidFill>
           <a:ln>
             <a:noFill/>
@@ -7890,58 +7923,14 @@
       </p:sp>
       <p:sp>
         <p:nvSpPr>
-          <p:cNvPr id="27" name="Rectangle 26"/>
-          <p:cNvSpPr/>
-          <p:nvPr/>
-        </p:nvSpPr>
-        <p:spPr>
-          <a:xfrm>
-            <a:off x="6126480" y="4114800"/>
-            <a:ext cx="5486400" cy="512064"/>
-          </a:xfrm>
-          <a:prstGeom prst="rect">
-            <a:avLst/>
-          </a:prstGeom>
-          <a:solidFill>
-            <a:srgbClr val="FFFFFF"/>
-          </a:solidFill>
-          <a:ln>
-            <a:noFill/>
-          </a:ln>
-          <a:effectLst/>
-        </p:spPr>
-        <p:style>
-          <a:lnRef idx="1">
-            <a:schemeClr val="accent1"/>
-          </a:lnRef>
-          <a:fillRef idx="3">
-            <a:schemeClr val="accent1"/>
-          </a:fillRef>
-          <a:effectRef idx="2">
-            <a:schemeClr val="accent1"/>
-          </a:effectRef>
-          <a:fontRef idx="minor">
-            <a:schemeClr val="lt1"/>
-          </a:fontRef>
-        </p:style>
-        <p:txBody>
-          <a:bodyPr rtlCol="0" anchor="ctr"/>
-          <a:lstStyle/>
-          <a:p>
-            <a:pPr algn="ctr"/>
-          </a:p>
-        </p:txBody>
-      </p:sp>
-      <p:sp>
-        <p:nvSpPr>
-          <p:cNvPr id="28" name="TextBox 27"/>
+          <p:cNvPr id="23" name="TextBox 22"/>
           <p:cNvSpPr txBox="1"/>
           <p:nvPr/>
         </p:nvSpPr>
         <p:spPr>
           <a:xfrm>
-            <a:off x="731520" y="4114800"/>
-            <a:ext cx="5212080" cy="512064"/>
+            <a:off x="548640" y="5303520"/>
+            <a:ext cx="685800" cy="777240"/>
           </a:xfrm>
           <a:prstGeom prst="rect">
             <a:avLst/>
@@ -7954,78 +7943,36 @@
           </a:bodyPr>
           <a:lstStyle/>
           <a:p>
-            <a:pPr algn="l">
-              <a:spcBef>
-                <a:spcPts val="0"/>
-              </a:spcBef>
-              <a:spcAft>
-                <a:spcPts val="0"/>
-              </a:spcAft>
-            </a:pPr>
-            <a:r>
-              <a:rPr sz="1200" b="0">
-                <a:solidFill>
-                  <a:srgbClr val="5B626D"/>
-                </a:solidFill>
-                <a:latin typeface="Calibri"/>
-              </a:rPr>
-              <a:t>A brochure</a:t>
-            </a:r>
-          </a:p>
-        </p:txBody>
-      </p:sp>
-      <p:sp>
-        <p:nvSpPr>
-          <p:cNvPr id="29" name="TextBox 28"/>
-          <p:cNvSpPr txBox="1"/>
-          <p:nvPr/>
-        </p:nvSpPr>
-        <p:spPr>
-          <a:xfrm>
-            <a:off x="6309360" y="4114800"/>
-            <a:ext cx="5212080" cy="512064"/>
-          </a:xfrm>
-          <a:prstGeom prst="rect">
-            <a:avLst/>
-          </a:prstGeom>
-          <a:noFill/>
-        </p:spPr>
-        <p:txBody>
-          <a:bodyPr wrap="square" anchor="ctr">
-            <a:spAutoFit/>
-          </a:bodyPr>
-          <a:lstStyle/>
-          <a:p>
-            <a:pPr algn="l">
-              <a:spcBef>
-                <a:spcPts val="0"/>
-              </a:spcBef>
-              <a:spcAft>
-                <a:spcPts val="0"/>
-              </a:spcAft>
-            </a:pPr>
-            <a:r>
-              <a:rPr sz="1200" b="1">
-                <a:solidFill>
-                  <a:srgbClr val="16335C"/>
-                </a:solidFill>
-                <a:latin typeface="Calibri"/>
-              </a:rPr>
-              <a:t>Captures leads + builds its own SEO</a:t>
-            </a:r>
-          </a:p>
-        </p:txBody>
-      </p:sp>
-      <p:sp>
-        <p:nvSpPr>
-          <p:cNvPr id="30" name="Rectangle 29"/>
+            <a:pPr algn="ctr">
+              <a:spcBef>
+                <a:spcPts val="0"/>
+              </a:spcBef>
+              <a:spcAft>
+                <a:spcPts val="0"/>
+              </a:spcAft>
+            </a:pPr>
+            <a:r>
+              <a:rPr sz="2600" b="1">
+                <a:solidFill>
+                  <a:srgbClr val="FFFFFF"/>
+                </a:solidFill>
+                <a:latin typeface="Calibri"/>
+              </a:rPr>
+              <a:t>5</a:t>
+            </a:r>
+          </a:p>
+        </p:txBody>
+      </p:sp>
+      <p:sp>
+        <p:nvSpPr>
+          <p:cNvPr id="24" name="Rectangle 23"/>
           <p:cNvSpPr/>
           <p:nvPr/>
         </p:nvSpPr>
         <p:spPr>
           <a:xfrm>
-            <a:off x="548640" y="4663440"/>
-            <a:ext cx="5486400" cy="512064"/>
+            <a:off x="1325880" y="5303520"/>
+            <a:ext cx="10287000" cy="777240"/>
           </a:xfrm>
           <a:prstGeom prst="rect">
             <a:avLst/>
@@ -8062,58 +8009,14 @@
       </p:sp>
       <p:sp>
         <p:nvSpPr>
-          <p:cNvPr id="31" name="Rectangle 30"/>
-          <p:cNvSpPr/>
-          <p:nvPr/>
-        </p:nvSpPr>
-        <p:spPr>
-          <a:xfrm>
-            <a:off x="6126480" y="4663440"/>
-            <a:ext cx="5486400" cy="512064"/>
-          </a:xfrm>
-          <a:prstGeom prst="rect">
-            <a:avLst/>
-          </a:prstGeom>
-          <a:solidFill>
-            <a:srgbClr val="F4F6F8"/>
-          </a:solidFill>
-          <a:ln>
-            <a:noFill/>
-          </a:ln>
-          <a:effectLst/>
-        </p:spPr>
-        <p:style>
-          <a:lnRef idx="1">
-            <a:schemeClr val="accent1"/>
-          </a:lnRef>
-          <a:fillRef idx="3">
-            <a:schemeClr val="accent1"/>
-          </a:fillRef>
-          <a:effectRef idx="2">
-            <a:schemeClr val="accent1"/>
-          </a:effectRef>
-          <a:fontRef idx="minor">
-            <a:schemeClr val="lt1"/>
-          </a:fontRef>
-        </p:style>
-        <p:txBody>
-          <a:bodyPr rtlCol="0" anchor="ctr"/>
-          <a:lstStyle/>
-          <a:p>
-            <a:pPr algn="ctr"/>
-          </a:p>
-        </p:txBody>
-      </p:sp>
-      <p:sp>
-        <p:nvSpPr>
-          <p:cNvPr id="32" name="TextBox 31"/>
+          <p:cNvPr id="25" name="TextBox 24"/>
           <p:cNvSpPr txBox="1"/>
           <p:nvPr/>
         </p:nvSpPr>
         <p:spPr>
           <a:xfrm>
-            <a:off x="731520" y="4663440"/>
-            <a:ext cx="5212080" cy="512064"/>
+            <a:off x="1554480" y="5376672"/>
+            <a:ext cx="9875520" cy="685800"/>
           </a:xfrm>
           <a:prstGeom prst="rect">
             <a:avLst/>
@@ -8131,410 +8034,43 @@
                 <a:spcPts val="0"/>
               </a:spcBef>
               <a:spcAft>
-                <a:spcPts val="0"/>
-              </a:spcAft>
-            </a:pPr>
-            <a:r>
-              <a:rPr sz="1200" b="0">
+                <a:spcPts val="200"/>
+              </a:spcAft>
+            </a:pPr>
+            <a:r>
+              <a:rPr sz="1600" b="1">
+                <a:solidFill>
+                  <a:srgbClr val="0B0B0C"/>
+                </a:solidFill>
+                <a:latin typeface="Calibri"/>
+              </a:rPr>
+              <a:t>Reconnect live product data</a:t>
+            </a:r>
+          </a:p>
+          <a:p>
+            <a:pPr algn="l">
+              <a:spcBef>
+                <a:spcPts val="0"/>
+              </a:spcBef>
+              <a:spcAft>
+                <a:spcPts val="0"/>
+              </a:spcAft>
+            </a:pPr>
+            <a:r>
+              <a:rPr sz="1250" b="0">
                 <a:solidFill>
                   <a:srgbClr val="5B626D"/>
                 </a:solidFill>
                 <a:latin typeface="Calibri"/>
               </a:rPr>
-              <a:t>No BIM / specifier capture</a:t>
-            </a:r>
-          </a:p>
-        </p:txBody>
-      </p:sp>
-      <p:sp>
-        <p:nvSpPr>
-          <p:cNvPr id="33" name="TextBox 32"/>
-          <p:cNvSpPr txBox="1"/>
-          <p:nvPr/>
-        </p:nvSpPr>
-        <p:spPr>
-          <a:xfrm>
-            <a:off x="6309360" y="4663440"/>
-            <a:ext cx="5212080" cy="512064"/>
-          </a:xfrm>
-          <a:prstGeom prst="rect">
-            <a:avLst/>
-          </a:prstGeom>
-          <a:noFill/>
-        </p:spPr>
-        <p:txBody>
-          <a:bodyPr wrap="square" anchor="ctr">
-            <a:spAutoFit/>
-          </a:bodyPr>
-          <a:lstStyle/>
-          <a:p>
-            <a:pPr algn="l">
-              <a:spcBef>
-                <a:spcPts val="0"/>
-              </a:spcBef>
-              <a:spcAft>
-                <a:spcPts val="0"/>
-              </a:spcAft>
-            </a:pPr>
-            <a:r>
-              <a:rPr sz="1200" b="1">
-                <a:solidFill>
-                  <a:srgbClr val="16335C"/>
-                </a:solidFill>
-                <a:latin typeface="Calibri"/>
-              </a:rPr>
-              <a:t>"Download BIM file" sends marketing a warm lead</a:t>
-            </a:r>
-          </a:p>
-        </p:txBody>
-      </p:sp>
-      <p:sp>
-        <p:nvSpPr>
-          <p:cNvPr id="34" name="Rectangle 33"/>
-          <p:cNvSpPr/>
-          <p:nvPr/>
-        </p:nvSpPr>
-        <p:spPr>
-          <a:xfrm>
-            <a:off x="548640" y="5212080"/>
-            <a:ext cx="5486400" cy="512064"/>
-          </a:xfrm>
-          <a:prstGeom prst="rect">
-            <a:avLst/>
-          </a:prstGeom>
-          <a:solidFill>
-            <a:srgbClr val="FFFFFF"/>
-          </a:solidFill>
-          <a:ln>
-            <a:noFill/>
-          </a:ln>
-          <a:effectLst/>
-        </p:spPr>
-        <p:style>
-          <a:lnRef idx="1">
-            <a:schemeClr val="accent1"/>
-          </a:lnRef>
-          <a:fillRef idx="3">
-            <a:schemeClr val="accent1"/>
-          </a:fillRef>
-          <a:effectRef idx="2">
-            <a:schemeClr val="accent1"/>
-          </a:effectRef>
-          <a:fontRef idx="minor">
-            <a:schemeClr val="lt1"/>
-          </a:fontRef>
-        </p:style>
-        <p:txBody>
-          <a:bodyPr rtlCol="0" anchor="ctr"/>
-          <a:lstStyle/>
-          <a:p>
-            <a:pPr algn="ctr"/>
-          </a:p>
-        </p:txBody>
-      </p:sp>
-      <p:sp>
-        <p:nvSpPr>
-          <p:cNvPr id="35" name="Rectangle 34"/>
-          <p:cNvSpPr/>
-          <p:nvPr/>
-        </p:nvSpPr>
-        <p:spPr>
-          <a:xfrm>
-            <a:off x="6126480" y="5212080"/>
-            <a:ext cx="5486400" cy="512064"/>
-          </a:xfrm>
-          <a:prstGeom prst="rect">
-            <a:avLst/>
-          </a:prstGeom>
-          <a:solidFill>
-            <a:srgbClr val="FFFFFF"/>
-          </a:solidFill>
-          <a:ln>
-            <a:noFill/>
-          </a:ln>
-          <a:effectLst/>
-        </p:spPr>
-        <p:style>
-          <a:lnRef idx="1">
-            <a:schemeClr val="accent1"/>
-          </a:lnRef>
-          <a:fillRef idx="3">
-            <a:schemeClr val="accent1"/>
-          </a:fillRef>
-          <a:effectRef idx="2">
-            <a:schemeClr val="accent1"/>
-          </a:effectRef>
-          <a:fontRef idx="minor">
-            <a:schemeClr val="lt1"/>
-          </a:fontRef>
-        </p:style>
-        <p:txBody>
-          <a:bodyPr rtlCol="0" anchor="ctr"/>
-          <a:lstStyle/>
-          <a:p>
-            <a:pPr algn="ctr"/>
-          </a:p>
-        </p:txBody>
-      </p:sp>
-      <p:sp>
-        <p:nvSpPr>
-          <p:cNvPr id="36" name="TextBox 35"/>
-          <p:cNvSpPr txBox="1"/>
-          <p:nvPr/>
-        </p:nvSpPr>
-        <p:spPr>
-          <a:xfrm>
-            <a:off x="731520" y="5212080"/>
-            <a:ext cx="5212080" cy="512064"/>
-          </a:xfrm>
-          <a:prstGeom prst="rect">
-            <a:avLst/>
-          </a:prstGeom>
-          <a:noFill/>
-        </p:spPr>
-        <p:txBody>
-          <a:bodyPr wrap="square" anchor="ctr">
-            <a:spAutoFit/>
-          </a:bodyPr>
-          <a:lstStyle/>
-          <a:p>
-            <a:pPr algn="l">
-              <a:spcBef>
-                <a:spcPts val="0"/>
-              </a:spcBef>
-              <a:spcAft>
-                <a:spcPts val="0"/>
-              </a:spcAft>
-            </a:pPr>
-            <a:r>
-              <a:rPr sz="1200" b="0">
-                <a:solidFill>
-                  <a:srgbClr val="5B626D"/>
-                </a:solidFill>
-                <a:latin typeface="Calibri"/>
-              </a:rPr>
-              <a:t>Bespoke quotes = lots of back-and-forth</a:t>
-            </a:r>
-          </a:p>
-        </p:txBody>
-      </p:sp>
-      <p:sp>
-        <p:nvSpPr>
-          <p:cNvPr id="37" name="TextBox 36"/>
-          <p:cNvSpPr txBox="1"/>
-          <p:nvPr/>
-        </p:nvSpPr>
-        <p:spPr>
-          <a:xfrm>
-            <a:off x="6309360" y="5212080"/>
-            <a:ext cx="5212080" cy="512064"/>
-          </a:xfrm>
-          <a:prstGeom prst="rect">
-            <a:avLst/>
-          </a:prstGeom>
-          <a:noFill/>
-        </p:spPr>
-        <p:txBody>
-          <a:bodyPr wrap="square" anchor="ctr">
-            <a:spAutoFit/>
-          </a:bodyPr>
-          <a:lstStyle/>
-          <a:p>
-            <a:pPr algn="l">
-              <a:spcBef>
-                <a:spcPts val="0"/>
-              </a:spcBef>
-              <a:spcAft>
-                <a:spcPts val="0"/>
-              </a:spcAft>
-            </a:pPr>
-            <a:r>
-              <a:rPr sz="1200" b="1">
-                <a:solidFill>
-                  <a:srgbClr val="16335C"/>
-                </a:solidFill>
-                <a:latin typeface="Calibri"/>
-              </a:rPr>
-              <a:t>Flow+ Designer = ready-to-quote scheme</a:t>
-            </a:r>
-          </a:p>
-        </p:txBody>
-      </p:sp>
-      <p:sp>
-        <p:nvSpPr>
-          <p:cNvPr id="38" name="Rectangle 37"/>
-          <p:cNvSpPr/>
-          <p:nvPr/>
-        </p:nvSpPr>
-        <p:spPr>
-          <a:xfrm>
-            <a:off x="548640" y="5760720"/>
-            <a:ext cx="5486400" cy="512064"/>
-          </a:xfrm>
-          <a:prstGeom prst="rect">
-            <a:avLst/>
-          </a:prstGeom>
-          <a:solidFill>
-            <a:srgbClr val="F4F6F8"/>
-          </a:solidFill>
-          <a:ln>
-            <a:noFill/>
-          </a:ln>
-          <a:effectLst/>
-        </p:spPr>
-        <p:style>
-          <a:lnRef idx="1">
-            <a:schemeClr val="accent1"/>
-          </a:lnRef>
-          <a:fillRef idx="3">
-            <a:schemeClr val="accent1"/>
-          </a:fillRef>
-          <a:effectRef idx="2">
-            <a:schemeClr val="accent1"/>
-          </a:effectRef>
-          <a:fontRef idx="minor">
-            <a:schemeClr val="lt1"/>
-          </a:fontRef>
-        </p:style>
-        <p:txBody>
-          <a:bodyPr rtlCol="0" anchor="ctr"/>
-          <a:lstStyle/>
-          <a:p>
-            <a:pPr algn="ctr"/>
-          </a:p>
-        </p:txBody>
-      </p:sp>
-      <p:sp>
-        <p:nvSpPr>
-          <p:cNvPr id="39" name="Rectangle 38"/>
-          <p:cNvSpPr/>
-          <p:nvPr/>
-        </p:nvSpPr>
-        <p:spPr>
-          <a:xfrm>
-            <a:off x="6126480" y="5760720"/>
-            <a:ext cx="5486400" cy="512064"/>
-          </a:xfrm>
-          <a:prstGeom prst="rect">
-            <a:avLst/>
-          </a:prstGeom>
-          <a:solidFill>
-            <a:srgbClr val="F4F6F8"/>
-          </a:solidFill>
-          <a:ln>
-            <a:noFill/>
-          </a:ln>
-          <a:effectLst/>
-        </p:spPr>
-        <p:style>
-          <a:lnRef idx="1">
-            <a:schemeClr val="accent1"/>
-          </a:lnRef>
-          <a:fillRef idx="3">
-            <a:schemeClr val="accent1"/>
-          </a:fillRef>
-          <a:effectRef idx="2">
-            <a:schemeClr val="accent1"/>
-          </a:effectRef>
-          <a:fontRef idx="minor">
-            <a:schemeClr val="lt1"/>
-          </a:fontRef>
-        </p:style>
-        <p:txBody>
-          <a:bodyPr rtlCol="0" anchor="ctr"/>
-          <a:lstStyle/>
-          <a:p>
-            <a:pPr algn="ctr"/>
-          </a:p>
-        </p:txBody>
-      </p:sp>
-      <p:sp>
-        <p:nvSpPr>
-          <p:cNvPr id="40" name="TextBox 39"/>
-          <p:cNvSpPr txBox="1"/>
-          <p:nvPr/>
-        </p:nvSpPr>
-        <p:spPr>
-          <a:xfrm>
-            <a:off x="731520" y="5760720"/>
-            <a:ext cx="5212080" cy="512064"/>
-          </a:xfrm>
-          <a:prstGeom prst="rect">
-            <a:avLst/>
-          </a:prstGeom>
-          <a:noFill/>
-        </p:spPr>
-        <p:txBody>
-          <a:bodyPr wrap="square" anchor="ctr">
-            <a:spAutoFit/>
-          </a:bodyPr>
-          <a:lstStyle/>
-          <a:p>
-            <a:pPr algn="l">
-              <a:spcBef>
-                <a:spcPts val="0"/>
-              </a:spcBef>
-              <a:spcAft>
-                <a:spcPts val="0"/>
-              </a:spcAft>
-            </a:pPr>
-            <a:r>
-              <a:rPr sz="1200" b="0">
-                <a:solidFill>
-                  <a:srgbClr val="5B626D"/>
-                </a:solidFill>
-                <a:latin typeface="Calibri"/>
-              </a:rPr>
-              <a:t>Slower, page-builder overhead</a:t>
-            </a:r>
-          </a:p>
-        </p:txBody>
-      </p:sp>
-      <p:sp>
-        <p:nvSpPr>
-          <p:cNvPr id="41" name="TextBox 40"/>
-          <p:cNvSpPr txBox="1"/>
-          <p:nvPr/>
-        </p:nvSpPr>
-        <p:spPr>
-          <a:xfrm>
-            <a:off x="6309360" y="5760720"/>
-            <a:ext cx="5212080" cy="512064"/>
-          </a:xfrm>
-          <a:prstGeom prst="rect">
-            <a:avLst/>
-          </a:prstGeom>
-          <a:noFill/>
-        </p:spPr>
-        <p:txBody>
-          <a:bodyPr wrap="square" anchor="ctr">
-            <a:spAutoFit/>
-          </a:bodyPr>
-          <a:lstStyle/>
-          <a:p>
-            <a:pPr algn="l">
-              <a:spcBef>
-                <a:spcPts val="0"/>
-              </a:spcBef>
-              <a:spcAft>
-                <a:spcPts val="0"/>
-              </a:spcAft>
-            </a:pPr>
-            <a:r>
-              <a:rPr sz="1200" b="1">
-                <a:solidFill>
-                  <a:srgbClr val="16335C"/>
-                </a:solidFill>
-                <a:latin typeface="Calibri"/>
-              </a:rPr>
-              <a:t>Fast, modern, search-friendly</a:t>
-            </a:r>
-          </a:p>
-        </p:txBody>
-      </p:sp>
-      <p:sp>
-        <p:nvSpPr>
-          <p:cNvPr id="42" name="TextBox 41"/>
+              <a:t>Final step, switched on last</a:t>
+            </a:r>
+          </a:p>
+        </p:txBody>
+      </p:sp>
+      <p:sp>
+        <p:nvSpPr>
+          <p:cNvPr id="26" name="TextBox 25"/>
           <p:cNvSpPr txBox="1"/>
           <p:nvPr/>
         </p:nvSpPr>
@@ -8576,7 +8112,7 @@
       </p:sp>
       <p:sp>
         <p:nvSpPr>
-          <p:cNvPr id="43" name="TextBox 42"/>
+          <p:cNvPr id="27" name="TextBox 26"/>
           <p:cNvSpPr txBox="1"/>
           <p:nvPr/>
         </p:nvSpPr>
@@ -8611,7 +8147,7 @@
                 </a:solidFill>
                 <a:latin typeface="Calibri"/>
               </a:rPr>
-              <a:t>11</a:t>
+              <a:t>12</a:t>
             </a:r>
           </a:p>
         </p:txBody>
@@ -8625,6 +8161,1849 @@
 </file>
 
 <file path=ppt/slides/slide13.xml><?xml version="1.0" encoding="utf-8"?>
+<p:sld xmlns:a="http://schemas.openxmlformats.org/drawingml/2006/main" xmlns:p="http://schemas.openxmlformats.org/presentationml/2006/main" xmlns:r="http://schemas.openxmlformats.org/officeDocument/2006/relationships">
+  <p:cSld>
+    <p:spTree>
+      <p:nvGrpSpPr>
+        <p:cNvPr id="1" name=""/>
+        <p:cNvGrpSpPr/>
+        <p:nvPr/>
+      </p:nvGrpSpPr>
+      <p:grpSpPr/>
+      <p:sp>
+        <p:nvSpPr>
+          <p:cNvPr id="2" name="Rectangle 1"/>
+          <p:cNvSpPr/>
+          <p:nvPr/>
+        </p:nvSpPr>
+        <p:spPr>
+          <a:xfrm>
+            <a:off x="0" y="0"/>
+            <a:ext cx="12191695" cy="1234440"/>
+          </a:xfrm>
+          <a:prstGeom prst="rect">
+            <a:avLst/>
+          </a:prstGeom>
+          <a:solidFill>
+            <a:srgbClr val="FFFFFF"/>
+          </a:solidFill>
+          <a:ln>
+            <a:noFill/>
+          </a:ln>
+          <a:effectLst/>
+        </p:spPr>
+        <p:style>
+          <a:lnRef idx="1">
+            <a:schemeClr val="accent1"/>
+          </a:lnRef>
+          <a:fillRef idx="3">
+            <a:schemeClr val="accent1"/>
+          </a:fillRef>
+          <a:effectRef idx="2">
+            <a:schemeClr val="accent1"/>
+          </a:effectRef>
+          <a:fontRef idx="minor">
+            <a:schemeClr val="lt1"/>
+          </a:fontRef>
+        </p:style>
+        <p:txBody>
+          <a:bodyPr rtlCol="0" anchor="ctr"/>
+          <a:lstStyle/>
+          <a:p>
+            <a:pPr algn="ctr"/>
+          </a:p>
+        </p:txBody>
+      </p:sp>
+      <p:sp>
+        <p:nvSpPr>
+          <p:cNvPr id="3" name="Rectangle 2"/>
+          <p:cNvSpPr/>
+          <p:nvPr/>
+        </p:nvSpPr>
+        <p:spPr>
+          <a:xfrm>
+            <a:off x="0" y="0"/>
+            <a:ext cx="201168" cy="1234440"/>
+          </a:xfrm>
+          <a:prstGeom prst="rect">
+            <a:avLst/>
+          </a:prstGeom>
+          <a:solidFill>
+            <a:srgbClr val="1D4ED8"/>
+          </a:solidFill>
+          <a:ln>
+            <a:noFill/>
+          </a:ln>
+          <a:effectLst/>
+        </p:spPr>
+        <p:style>
+          <a:lnRef idx="1">
+            <a:schemeClr val="accent1"/>
+          </a:lnRef>
+          <a:fillRef idx="3">
+            <a:schemeClr val="accent1"/>
+          </a:fillRef>
+          <a:effectRef idx="2">
+            <a:schemeClr val="accent1"/>
+          </a:effectRef>
+          <a:fontRef idx="minor">
+            <a:schemeClr val="lt1"/>
+          </a:fontRef>
+        </p:style>
+        <p:txBody>
+          <a:bodyPr rtlCol="0" anchor="ctr"/>
+          <a:lstStyle/>
+          <a:p>
+            <a:pPr algn="ctr"/>
+          </a:p>
+        </p:txBody>
+      </p:sp>
+      <p:sp>
+        <p:nvSpPr>
+          <p:cNvPr id="4" name="TextBox 3"/>
+          <p:cNvSpPr txBox="1"/>
+          <p:nvPr/>
+        </p:nvSpPr>
+        <p:spPr>
+          <a:xfrm>
+            <a:off x="548640" y="164592"/>
+            <a:ext cx="10972800" cy="1005840"/>
+          </a:xfrm>
+          <a:prstGeom prst="rect">
+            <a:avLst/>
+          </a:prstGeom>
+          <a:noFill/>
+        </p:spPr>
+        <p:txBody>
+          <a:bodyPr wrap="square" anchor="t">
+            <a:spAutoFit/>
+          </a:bodyPr>
+          <a:lstStyle/>
+          <a:p>
+            <a:pPr algn="l">
+              <a:spcBef>
+                <a:spcPts val="0"/>
+              </a:spcBef>
+              <a:spcAft>
+                <a:spcPts val="200"/>
+              </a:spcAft>
+            </a:pPr>
+            <a:r>
+              <a:rPr sz="1300" b="1">
+                <a:solidFill>
+                  <a:srgbClr val="1D4ED8"/>
+                </a:solidFill>
+                <a:latin typeface="Calibri"/>
+              </a:rPr>
+              <a:t>THE BOTTOM LINE</a:t>
+            </a:r>
+          </a:p>
+          <a:p>
+            <a:pPr algn="l">
+              <a:spcBef>
+                <a:spcPts val="0"/>
+              </a:spcBef>
+              <a:spcAft>
+                <a:spcPts val="0"/>
+              </a:spcAft>
+            </a:pPr>
+            <a:r>
+              <a:rPr sz="2800" b="1">
+                <a:solidFill>
+                  <a:srgbClr val="0B0B0C"/>
+                </a:solidFill>
+                <a:latin typeface="Calibri"/>
+              </a:rPr>
+              <a:t>Old site vs new site</a:t>
+            </a:r>
+          </a:p>
+        </p:txBody>
+      </p:sp>
+      <p:sp>
+        <p:nvSpPr>
+          <p:cNvPr id="5" name="Rectangle 4"/>
+          <p:cNvSpPr/>
+          <p:nvPr/>
+        </p:nvSpPr>
+        <p:spPr>
+          <a:xfrm>
+            <a:off x="548640" y="1097280"/>
+            <a:ext cx="11064240" cy="25400"/>
+          </a:xfrm>
+          <a:prstGeom prst="rect">
+            <a:avLst/>
+          </a:prstGeom>
+          <a:solidFill>
+            <a:srgbClr val="F4F6F8"/>
+          </a:solidFill>
+          <a:ln>
+            <a:noFill/>
+          </a:ln>
+          <a:effectLst/>
+        </p:spPr>
+        <p:style>
+          <a:lnRef idx="1">
+            <a:schemeClr val="accent1"/>
+          </a:lnRef>
+          <a:fillRef idx="3">
+            <a:schemeClr val="accent1"/>
+          </a:fillRef>
+          <a:effectRef idx="2">
+            <a:schemeClr val="accent1"/>
+          </a:effectRef>
+          <a:fontRef idx="minor">
+            <a:schemeClr val="lt1"/>
+          </a:fontRef>
+        </p:style>
+        <p:txBody>
+          <a:bodyPr rtlCol="0" anchor="ctr"/>
+          <a:lstStyle/>
+          <a:p>
+            <a:pPr algn="ctr"/>
+          </a:p>
+        </p:txBody>
+      </p:sp>
+      <p:sp>
+        <p:nvSpPr>
+          <p:cNvPr id="6" name="Rectangle 5"/>
+          <p:cNvSpPr/>
+          <p:nvPr/>
+        </p:nvSpPr>
+        <p:spPr>
+          <a:xfrm>
+            <a:off x="548640" y="1417320"/>
+            <a:ext cx="5486400" cy="457200"/>
+          </a:xfrm>
+          <a:prstGeom prst="rect">
+            <a:avLst/>
+          </a:prstGeom>
+          <a:solidFill>
+            <a:srgbClr val="0B0B0C"/>
+          </a:solidFill>
+          <a:ln>
+            <a:noFill/>
+          </a:ln>
+          <a:effectLst/>
+        </p:spPr>
+        <p:style>
+          <a:lnRef idx="1">
+            <a:schemeClr val="accent1"/>
+          </a:lnRef>
+          <a:fillRef idx="3">
+            <a:schemeClr val="accent1"/>
+          </a:fillRef>
+          <a:effectRef idx="2">
+            <a:schemeClr val="accent1"/>
+          </a:effectRef>
+          <a:fontRef idx="minor">
+            <a:schemeClr val="lt1"/>
+          </a:fontRef>
+        </p:style>
+        <p:txBody>
+          <a:bodyPr rtlCol="0" anchor="ctr"/>
+          <a:lstStyle/>
+          <a:p>
+            <a:pPr algn="ctr"/>
+          </a:p>
+        </p:txBody>
+      </p:sp>
+      <p:sp>
+        <p:nvSpPr>
+          <p:cNvPr id="7" name="Rectangle 6"/>
+          <p:cNvSpPr/>
+          <p:nvPr/>
+        </p:nvSpPr>
+        <p:spPr>
+          <a:xfrm>
+            <a:off x="6126480" y="1417320"/>
+            <a:ext cx="5486400" cy="457200"/>
+          </a:xfrm>
+          <a:prstGeom prst="rect">
+            <a:avLst/>
+          </a:prstGeom>
+          <a:solidFill>
+            <a:srgbClr val="1D4ED8"/>
+          </a:solidFill>
+          <a:ln>
+            <a:noFill/>
+          </a:ln>
+          <a:effectLst/>
+        </p:spPr>
+        <p:style>
+          <a:lnRef idx="1">
+            <a:schemeClr val="accent1"/>
+          </a:lnRef>
+          <a:fillRef idx="3">
+            <a:schemeClr val="accent1"/>
+          </a:fillRef>
+          <a:effectRef idx="2">
+            <a:schemeClr val="accent1"/>
+          </a:effectRef>
+          <a:fontRef idx="minor">
+            <a:schemeClr val="lt1"/>
+          </a:fontRef>
+        </p:style>
+        <p:txBody>
+          <a:bodyPr rtlCol="0" anchor="ctr"/>
+          <a:lstStyle/>
+          <a:p>
+            <a:pPr algn="ctr"/>
+          </a:p>
+        </p:txBody>
+      </p:sp>
+      <p:sp>
+        <p:nvSpPr>
+          <p:cNvPr id="8" name="TextBox 7"/>
+          <p:cNvSpPr txBox="1"/>
+          <p:nvPr/>
+        </p:nvSpPr>
+        <p:spPr>
+          <a:xfrm>
+            <a:off x="731520" y="1417320"/>
+            <a:ext cx="5120640" cy="457200"/>
+          </a:xfrm>
+          <a:prstGeom prst="rect">
+            <a:avLst/>
+          </a:prstGeom>
+          <a:noFill/>
+        </p:spPr>
+        <p:txBody>
+          <a:bodyPr wrap="square" anchor="ctr">
+            <a:spAutoFit/>
+          </a:bodyPr>
+          <a:lstStyle/>
+          <a:p>
+            <a:pPr algn="l">
+              <a:spcBef>
+                <a:spcPts val="0"/>
+              </a:spcBef>
+              <a:spcAft>
+                <a:spcPts val="0"/>
+              </a:spcAft>
+            </a:pPr>
+            <a:r>
+              <a:rPr sz="1300" b="1">
+                <a:solidFill>
+                  <a:srgbClr val="FFFFFF"/>
+                </a:solidFill>
+                <a:latin typeface="Calibri"/>
+              </a:rPr>
+              <a:t>OLD SITE</a:t>
+            </a:r>
+          </a:p>
+        </p:txBody>
+      </p:sp>
+      <p:sp>
+        <p:nvSpPr>
+          <p:cNvPr id="9" name="TextBox 8"/>
+          <p:cNvSpPr txBox="1"/>
+          <p:nvPr/>
+        </p:nvSpPr>
+        <p:spPr>
+          <a:xfrm>
+            <a:off x="6309360" y="1417320"/>
+            <a:ext cx="5120640" cy="457200"/>
+          </a:xfrm>
+          <a:prstGeom prst="rect">
+            <a:avLst/>
+          </a:prstGeom>
+          <a:noFill/>
+        </p:spPr>
+        <p:txBody>
+          <a:bodyPr wrap="square" anchor="ctr">
+            <a:spAutoFit/>
+          </a:bodyPr>
+          <a:lstStyle/>
+          <a:p>
+            <a:pPr algn="l">
+              <a:spcBef>
+                <a:spcPts val="0"/>
+              </a:spcBef>
+              <a:spcAft>
+                <a:spcPts val="0"/>
+              </a:spcAft>
+            </a:pPr>
+            <a:r>
+              <a:rPr sz="1300" b="1">
+                <a:solidFill>
+                  <a:srgbClr val="FFFFFF"/>
+                </a:solidFill>
+                <a:latin typeface="Calibri"/>
+              </a:rPr>
+              <a:t>NEW SITE</a:t>
+            </a:r>
+          </a:p>
+        </p:txBody>
+      </p:sp>
+      <p:sp>
+        <p:nvSpPr>
+          <p:cNvPr id="10" name="Rectangle 9"/>
+          <p:cNvSpPr/>
+          <p:nvPr/>
+        </p:nvSpPr>
+        <p:spPr>
+          <a:xfrm>
+            <a:off x="548640" y="1920240"/>
+            <a:ext cx="5486400" cy="512064"/>
+          </a:xfrm>
+          <a:prstGeom prst="rect">
+            <a:avLst/>
+          </a:prstGeom>
+          <a:solidFill>
+            <a:srgbClr val="FFFFFF"/>
+          </a:solidFill>
+          <a:ln>
+            <a:noFill/>
+          </a:ln>
+          <a:effectLst/>
+        </p:spPr>
+        <p:style>
+          <a:lnRef idx="1">
+            <a:schemeClr val="accent1"/>
+          </a:lnRef>
+          <a:fillRef idx="3">
+            <a:schemeClr val="accent1"/>
+          </a:fillRef>
+          <a:effectRef idx="2">
+            <a:schemeClr val="accent1"/>
+          </a:effectRef>
+          <a:fontRef idx="minor">
+            <a:schemeClr val="lt1"/>
+          </a:fontRef>
+        </p:style>
+        <p:txBody>
+          <a:bodyPr rtlCol="0" anchor="ctr"/>
+          <a:lstStyle/>
+          <a:p>
+            <a:pPr algn="ctr"/>
+          </a:p>
+        </p:txBody>
+      </p:sp>
+      <p:sp>
+        <p:nvSpPr>
+          <p:cNvPr id="11" name="Rectangle 10"/>
+          <p:cNvSpPr/>
+          <p:nvPr/>
+        </p:nvSpPr>
+        <p:spPr>
+          <a:xfrm>
+            <a:off x="6126480" y="1920240"/>
+            <a:ext cx="5486400" cy="512064"/>
+          </a:xfrm>
+          <a:prstGeom prst="rect">
+            <a:avLst/>
+          </a:prstGeom>
+          <a:solidFill>
+            <a:srgbClr val="FFFFFF"/>
+          </a:solidFill>
+          <a:ln>
+            <a:noFill/>
+          </a:ln>
+          <a:effectLst/>
+        </p:spPr>
+        <p:style>
+          <a:lnRef idx="1">
+            <a:schemeClr val="accent1"/>
+          </a:lnRef>
+          <a:fillRef idx="3">
+            <a:schemeClr val="accent1"/>
+          </a:fillRef>
+          <a:effectRef idx="2">
+            <a:schemeClr val="accent1"/>
+          </a:effectRef>
+          <a:fontRef idx="minor">
+            <a:schemeClr val="lt1"/>
+          </a:fontRef>
+        </p:style>
+        <p:txBody>
+          <a:bodyPr rtlCol="0" anchor="ctr"/>
+          <a:lstStyle/>
+          <a:p>
+            <a:pPr algn="ctr"/>
+          </a:p>
+        </p:txBody>
+      </p:sp>
+      <p:sp>
+        <p:nvSpPr>
+          <p:cNvPr id="12" name="TextBox 11"/>
+          <p:cNvSpPr txBox="1"/>
+          <p:nvPr/>
+        </p:nvSpPr>
+        <p:spPr>
+          <a:xfrm>
+            <a:off x="731520" y="1920240"/>
+            <a:ext cx="5212080" cy="512064"/>
+          </a:xfrm>
+          <a:prstGeom prst="rect">
+            <a:avLst/>
+          </a:prstGeom>
+          <a:noFill/>
+        </p:spPr>
+        <p:txBody>
+          <a:bodyPr wrap="square" anchor="ctr">
+            <a:spAutoFit/>
+          </a:bodyPr>
+          <a:lstStyle/>
+          <a:p>
+            <a:pPr algn="l">
+              <a:spcBef>
+                <a:spcPts val="0"/>
+              </a:spcBef>
+              <a:spcAft>
+                <a:spcPts val="0"/>
+              </a:spcAft>
+            </a:pPr>
+            <a:r>
+              <a:rPr sz="1200" b="0">
+                <a:solidFill>
+                  <a:srgbClr val="5B626D"/>
+                </a:solidFill>
+                <a:latin typeface="Calibri"/>
+              </a:rPr>
+              <a:t>248 GB of bloat, 91% duplicate images</a:t>
+            </a:r>
+          </a:p>
+        </p:txBody>
+      </p:sp>
+      <p:sp>
+        <p:nvSpPr>
+          <p:cNvPr id="13" name="TextBox 12"/>
+          <p:cNvSpPr txBox="1"/>
+          <p:nvPr/>
+        </p:nvSpPr>
+        <p:spPr>
+          <a:xfrm>
+            <a:off x="6309360" y="1920240"/>
+            <a:ext cx="5212080" cy="512064"/>
+          </a:xfrm>
+          <a:prstGeom prst="rect">
+            <a:avLst/>
+          </a:prstGeom>
+          <a:noFill/>
+        </p:spPr>
+        <p:txBody>
+          <a:bodyPr wrap="square" anchor="ctr">
+            <a:spAutoFit/>
+          </a:bodyPr>
+          <a:lstStyle/>
+          <a:p>
+            <a:pPr algn="l">
+              <a:spcBef>
+                <a:spcPts val="0"/>
+              </a:spcBef>
+              <a:spcAft>
+                <a:spcPts val="0"/>
+              </a:spcAft>
+            </a:pPr>
+            <a:r>
+              <a:rPr sz="1200" b="1">
+                <a:solidFill>
+                  <a:srgbClr val="16335C"/>
+                </a:solidFill>
+                <a:latin typeface="Calibri"/>
+              </a:rPr>
+              <a:t>Cleaned up, lean media library</a:t>
+            </a:r>
+          </a:p>
+        </p:txBody>
+      </p:sp>
+      <p:sp>
+        <p:nvSpPr>
+          <p:cNvPr id="14" name="Rectangle 13"/>
+          <p:cNvSpPr/>
+          <p:nvPr/>
+        </p:nvSpPr>
+        <p:spPr>
+          <a:xfrm>
+            <a:off x="548640" y="2468880"/>
+            <a:ext cx="5486400" cy="512064"/>
+          </a:xfrm>
+          <a:prstGeom prst="rect">
+            <a:avLst/>
+          </a:prstGeom>
+          <a:solidFill>
+            <a:srgbClr val="F4F6F8"/>
+          </a:solidFill>
+          <a:ln>
+            <a:noFill/>
+          </a:ln>
+          <a:effectLst/>
+        </p:spPr>
+        <p:style>
+          <a:lnRef idx="1">
+            <a:schemeClr val="accent1"/>
+          </a:lnRef>
+          <a:fillRef idx="3">
+            <a:schemeClr val="accent1"/>
+          </a:fillRef>
+          <a:effectRef idx="2">
+            <a:schemeClr val="accent1"/>
+          </a:effectRef>
+          <a:fontRef idx="minor">
+            <a:schemeClr val="lt1"/>
+          </a:fontRef>
+        </p:style>
+        <p:txBody>
+          <a:bodyPr rtlCol="0" anchor="ctr"/>
+          <a:lstStyle/>
+          <a:p>
+            <a:pPr algn="ctr"/>
+          </a:p>
+        </p:txBody>
+      </p:sp>
+      <p:sp>
+        <p:nvSpPr>
+          <p:cNvPr id="15" name="Rectangle 14"/>
+          <p:cNvSpPr/>
+          <p:nvPr/>
+        </p:nvSpPr>
+        <p:spPr>
+          <a:xfrm>
+            <a:off x="6126480" y="2468880"/>
+            <a:ext cx="5486400" cy="512064"/>
+          </a:xfrm>
+          <a:prstGeom prst="rect">
+            <a:avLst/>
+          </a:prstGeom>
+          <a:solidFill>
+            <a:srgbClr val="F4F6F8"/>
+          </a:solidFill>
+          <a:ln>
+            <a:noFill/>
+          </a:ln>
+          <a:effectLst/>
+        </p:spPr>
+        <p:style>
+          <a:lnRef idx="1">
+            <a:schemeClr val="accent1"/>
+          </a:lnRef>
+          <a:fillRef idx="3">
+            <a:schemeClr val="accent1"/>
+          </a:fillRef>
+          <a:effectRef idx="2">
+            <a:schemeClr val="accent1"/>
+          </a:effectRef>
+          <a:fontRef idx="minor">
+            <a:schemeClr val="lt1"/>
+          </a:fontRef>
+        </p:style>
+        <p:txBody>
+          <a:bodyPr rtlCol="0" anchor="ctr"/>
+          <a:lstStyle/>
+          <a:p>
+            <a:pPr algn="ctr"/>
+          </a:p>
+        </p:txBody>
+      </p:sp>
+      <p:sp>
+        <p:nvSpPr>
+          <p:cNvPr id="16" name="TextBox 15"/>
+          <p:cNvSpPr txBox="1"/>
+          <p:nvPr/>
+        </p:nvSpPr>
+        <p:spPr>
+          <a:xfrm>
+            <a:off x="731520" y="2468880"/>
+            <a:ext cx="5212080" cy="512064"/>
+          </a:xfrm>
+          <a:prstGeom prst="rect">
+            <a:avLst/>
+          </a:prstGeom>
+          <a:noFill/>
+        </p:spPr>
+        <p:txBody>
+          <a:bodyPr wrap="square" anchor="ctr">
+            <a:spAutoFit/>
+          </a:bodyPr>
+          <a:lstStyle/>
+          <a:p>
+            <a:pPr algn="l">
+              <a:spcBef>
+                <a:spcPts val="0"/>
+              </a:spcBef>
+              <a:spcAft>
+                <a:spcPts val="0"/>
+              </a:spcAft>
+            </a:pPr>
+            <a:r>
+              <a:rPr sz="1200" b="0">
+                <a:solidFill>
+                  <a:srgbClr val="5B626D"/>
+                </a:solidFill>
+                <a:latin typeface="Calibri"/>
+              </a:rPr>
+              <a:t>Backups failing since ~Oct 2025</a:t>
+            </a:r>
+          </a:p>
+        </p:txBody>
+      </p:sp>
+      <p:sp>
+        <p:nvSpPr>
+          <p:cNvPr id="17" name="TextBox 16"/>
+          <p:cNvSpPr txBox="1"/>
+          <p:nvPr/>
+        </p:nvSpPr>
+        <p:spPr>
+          <a:xfrm>
+            <a:off x="6309360" y="2468880"/>
+            <a:ext cx="5212080" cy="512064"/>
+          </a:xfrm>
+          <a:prstGeom prst="rect">
+            <a:avLst/>
+          </a:prstGeom>
+          <a:noFill/>
+        </p:spPr>
+        <p:txBody>
+          <a:bodyPr wrap="square" anchor="ctr">
+            <a:spAutoFit/>
+          </a:bodyPr>
+          <a:lstStyle/>
+          <a:p>
+            <a:pPr algn="l">
+              <a:spcBef>
+                <a:spcPts val="0"/>
+              </a:spcBef>
+              <a:spcAft>
+                <a:spcPts val="0"/>
+              </a:spcAft>
+            </a:pPr>
+            <a:r>
+              <a:rPr sz="1200" b="1">
+                <a:solidFill>
+                  <a:srgbClr val="16335C"/>
+                </a:solidFill>
+                <a:latin typeface="Calibri"/>
+              </a:rPr>
+              <a:t>Reliable, fast backups</a:t>
+            </a:r>
+          </a:p>
+        </p:txBody>
+      </p:sp>
+      <p:sp>
+        <p:nvSpPr>
+          <p:cNvPr id="18" name="Rectangle 17"/>
+          <p:cNvSpPr/>
+          <p:nvPr/>
+        </p:nvSpPr>
+        <p:spPr>
+          <a:xfrm>
+            <a:off x="548640" y="3017520"/>
+            <a:ext cx="5486400" cy="512064"/>
+          </a:xfrm>
+          <a:prstGeom prst="rect">
+            <a:avLst/>
+          </a:prstGeom>
+          <a:solidFill>
+            <a:srgbClr val="FFFFFF"/>
+          </a:solidFill>
+          <a:ln>
+            <a:noFill/>
+          </a:ln>
+          <a:effectLst/>
+        </p:spPr>
+        <p:style>
+          <a:lnRef idx="1">
+            <a:schemeClr val="accent1"/>
+          </a:lnRef>
+          <a:fillRef idx="3">
+            <a:schemeClr val="accent1"/>
+          </a:fillRef>
+          <a:effectRef idx="2">
+            <a:schemeClr val="accent1"/>
+          </a:effectRef>
+          <a:fontRef idx="minor">
+            <a:schemeClr val="lt1"/>
+          </a:fontRef>
+        </p:style>
+        <p:txBody>
+          <a:bodyPr rtlCol="0" anchor="ctr"/>
+          <a:lstStyle/>
+          <a:p>
+            <a:pPr algn="ctr"/>
+          </a:p>
+        </p:txBody>
+      </p:sp>
+      <p:sp>
+        <p:nvSpPr>
+          <p:cNvPr id="19" name="Rectangle 18"/>
+          <p:cNvSpPr/>
+          <p:nvPr/>
+        </p:nvSpPr>
+        <p:spPr>
+          <a:xfrm>
+            <a:off x="6126480" y="3017520"/>
+            <a:ext cx="5486400" cy="512064"/>
+          </a:xfrm>
+          <a:prstGeom prst="rect">
+            <a:avLst/>
+          </a:prstGeom>
+          <a:solidFill>
+            <a:srgbClr val="FFFFFF"/>
+          </a:solidFill>
+          <a:ln>
+            <a:noFill/>
+          </a:ln>
+          <a:effectLst/>
+        </p:spPr>
+        <p:style>
+          <a:lnRef idx="1">
+            <a:schemeClr val="accent1"/>
+          </a:lnRef>
+          <a:fillRef idx="3">
+            <a:schemeClr val="accent1"/>
+          </a:fillRef>
+          <a:effectRef idx="2">
+            <a:schemeClr val="accent1"/>
+          </a:effectRef>
+          <a:fontRef idx="minor">
+            <a:schemeClr val="lt1"/>
+          </a:fontRef>
+        </p:style>
+        <p:txBody>
+          <a:bodyPr rtlCol="0" anchor="ctr"/>
+          <a:lstStyle/>
+          <a:p>
+            <a:pPr algn="ctr"/>
+          </a:p>
+        </p:txBody>
+      </p:sp>
+      <p:sp>
+        <p:nvSpPr>
+          <p:cNvPr id="20" name="TextBox 19"/>
+          <p:cNvSpPr txBox="1"/>
+          <p:nvPr/>
+        </p:nvSpPr>
+        <p:spPr>
+          <a:xfrm>
+            <a:off x="731520" y="3017520"/>
+            <a:ext cx="5212080" cy="512064"/>
+          </a:xfrm>
+          <a:prstGeom prst="rect">
+            <a:avLst/>
+          </a:prstGeom>
+          <a:noFill/>
+        </p:spPr>
+        <p:txBody>
+          <a:bodyPr wrap="square" anchor="ctr">
+            <a:spAutoFit/>
+          </a:bodyPr>
+          <a:lstStyle/>
+          <a:p>
+            <a:pPr algn="l">
+              <a:spcBef>
+                <a:spcPts val="0"/>
+              </a:spcBef>
+              <a:spcAft>
+                <a:spcPts val="0"/>
+              </a:spcAft>
+            </a:pPr>
+            <a:r>
+              <a:rPr sz="1200" b="0">
+                <a:solidFill>
+                  <a:srgbClr val="5B626D"/>
+                </a:solidFill>
+                <a:latin typeface="Calibri"/>
+              </a:rPr>
+              <a:t>Higher, growing hosting cost</a:t>
+            </a:r>
+          </a:p>
+        </p:txBody>
+      </p:sp>
+      <p:sp>
+        <p:nvSpPr>
+          <p:cNvPr id="21" name="TextBox 20"/>
+          <p:cNvSpPr txBox="1"/>
+          <p:nvPr/>
+        </p:nvSpPr>
+        <p:spPr>
+          <a:xfrm>
+            <a:off x="6309360" y="3017520"/>
+            <a:ext cx="5212080" cy="512064"/>
+          </a:xfrm>
+          <a:prstGeom prst="rect">
+            <a:avLst/>
+          </a:prstGeom>
+          <a:noFill/>
+        </p:spPr>
+        <p:txBody>
+          <a:bodyPr wrap="square" anchor="ctr">
+            <a:spAutoFit/>
+          </a:bodyPr>
+          <a:lstStyle/>
+          <a:p>
+            <a:pPr algn="l">
+              <a:spcBef>
+                <a:spcPts val="0"/>
+              </a:spcBef>
+              <a:spcAft>
+                <a:spcPts val="0"/>
+              </a:spcAft>
+            </a:pPr>
+            <a:r>
+              <a:rPr sz="1200" b="1">
+                <a:solidFill>
+                  <a:srgbClr val="16335C"/>
+                </a:solidFill>
+                <a:latin typeface="Calibri"/>
+              </a:rPr>
+              <a:t>Lower, predictable hosting cost</a:t>
+            </a:r>
+          </a:p>
+        </p:txBody>
+      </p:sp>
+      <p:sp>
+        <p:nvSpPr>
+          <p:cNvPr id="22" name="Rectangle 21"/>
+          <p:cNvSpPr/>
+          <p:nvPr/>
+        </p:nvSpPr>
+        <p:spPr>
+          <a:xfrm>
+            <a:off x="548640" y="3566160"/>
+            <a:ext cx="5486400" cy="512064"/>
+          </a:xfrm>
+          <a:prstGeom prst="rect">
+            <a:avLst/>
+          </a:prstGeom>
+          <a:solidFill>
+            <a:srgbClr val="F4F6F8"/>
+          </a:solidFill>
+          <a:ln>
+            <a:noFill/>
+          </a:ln>
+          <a:effectLst/>
+        </p:spPr>
+        <p:style>
+          <a:lnRef idx="1">
+            <a:schemeClr val="accent1"/>
+          </a:lnRef>
+          <a:fillRef idx="3">
+            <a:schemeClr val="accent1"/>
+          </a:fillRef>
+          <a:effectRef idx="2">
+            <a:schemeClr val="accent1"/>
+          </a:effectRef>
+          <a:fontRef idx="minor">
+            <a:schemeClr val="lt1"/>
+          </a:fontRef>
+        </p:style>
+        <p:txBody>
+          <a:bodyPr rtlCol="0" anchor="ctr"/>
+          <a:lstStyle/>
+          <a:p>
+            <a:pPr algn="ctr"/>
+          </a:p>
+        </p:txBody>
+      </p:sp>
+      <p:sp>
+        <p:nvSpPr>
+          <p:cNvPr id="23" name="Rectangle 22"/>
+          <p:cNvSpPr/>
+          <p:nvPr/>
+        </p:nvSpPr>
+        <p:spPr>
+          <a:xfrm>
+            <a:off x="6126480" y="3566160"/>
+            <a:ext cx="5486400" cy="512064"/>
+          </a:xfrm>
+          <a:prstGeom prst="rect">
+            <a:avLst/>
+          </a:prstGeom>
+          <a:solidFill>
+            <a:srgbClr val="F4F6F8"/>
+          </a:solidFill>
+          <a:ln>
+            <a:noFill/>
+          </a:ln>
+          <a:effectLst/>
+        </p:spPr>
+        <p:style>
+          <a:lnRef idx="1">
+            <a:schemeClr val="accent1"/>
+          </a:lnRef>
+          <a:fillRef idx="3">
+            <a:schemeClr val="accent1"/>
+          </a:fillRef>
+          <a:effectRef idx="2">
+            <a:schemeClr val="accent1"/>
+          </a:effectRef>
+          <a:fontRef idx="minor">
+            <a:schemeClr val="lt1"/>
+          </a:fontRef>
+        </p:style>
+        <p:txBody>
+          <a:bodyPr rtlCol="0" anchor="ctr"/>
+          <a:lstStyle/>
+          <a:p>
+            <a:pPr algn="ctr"/>
+          </a:p>
+        </p:txBody>
+      </p:sp>
+      <p:sp>
+        <p:nvSpPr>
+          <p:cNvPr id="24" name="TextBox 23"/>
+          <p:cNvSpPr txBox="1"/>
+          <p:nvPr/>
+        </p:nvSpPr>
+        <p:spPr>
+          <a:xfrm>
+            <a:off x="731520" y="3566160"/>
+            <a:ext cx="5212080" cy="512064"/>
+          </a:xfrm>
+          <a:prstGeom prst="rect">
+            <a:avLst/>
+          </a:prstGeom>
+          <a:noFill/>
+        </p:spPr>
+        <p:txBody>
+          <a:bodyPr wrap="square" anchor="ctr">
+            <a:spAutoFit/>
+          </a:bodyPr>
+          <a:lstStyle/>
+          <a:p>
+            <a:pPr algn="l">
+              <a:spcBef>
+                <a:spcPts val="0"/>
+              </a:spcBef>
+              <a:spcAft>
+                <a:spcPts val="0"/>
+              </a:spcAft>
+            </a:pPr>
+            <a:r>
+              <a:rPr sz="1200" b="0">
+                <a:solidFill>
+                  <a:srgbClr val="5B626D"/>
+                </a:solidFill>
+                <a:latin typeface="Calibri"/>
+              </a:rPr>
+              <a:t>Changes needed a developer</a:t>
+            </a:r>
+          </a:p>
+        </p:txBody>
+      </p:sp>
+      <p:sp>
+        <p:nvSpPr>
+          <p:cNvPr id="25" name="TextBox 24"/>
+          <p:cNvSpPr txBox="1"/>
+          <p:nvPr/>
+        </p:nvSpPr>
+        <p:spPr>
+          <a:xfrm>
+            <a:off x="6309360" y="3566160"/>
+            <a:ext cx="5212080" cy="512064"/>
+          </a:xfrm>
+          <a:prstGeom prst="rect">
+            <a:avLst/>
+          </a:prstGeom>
+          <a:noFill/>
+        </p:spPr>
+        <p:txBody>
+          <a:bodyPr wrap="square" anchor="ctr">
+            <a:spAutoFit/>
+          </a:bodyPr>
+          <a:lstStyle/>
+          <a:p>
+            <a:pPr algn="l">
+              <a:spcBef>
+                <a:spcPts val="0"/>
+              </a:spcBef>
+              <a:spcAft>
+                <a:spcPts val="0"/>
+              </a:spcAft>
+            </a:pPr>
+            <a:r>
+              <a:rPr sz="1200" b="1">
+                <a:solidFill>
+                  <a:srgbClr val="16335C"/>
+                </a:solidFill>
+                <a:latin typeface="Calibri"/>
+              </a:rPr>
+              <a:t>Team edits products &amp; pages themselves</a:t>
+            </a:r>
+          </a:p>
+        </p:txBody>
+      </p:sp>
+      <p:sp>
+        <p:nvSpPr>
+          <p:cNvPr id="26" name="Rectangle 25"/>
+          <p:cNvSpPr/>
+          <p:nvPr/>
+        </p:nvSpPr>
+        <p:spPr>
+          <a:xfrm>
+            <a:off x="548640" y="4114800"/>
+            <a:ext cx="5486400" cy="512064"/>
+          </a:xfrm>
+          <a:prstGeom prst="rect">
+            <a:avLst/>
+          </a:prstGeom>
+          <a:solidFill>
+            <a:srgbClr val="FFFFFF"/>
+          </a:solidFill>
+          <a:ln>
+            <a:noFill/>
+          </a:ln>
+          <a:effectLst/>
+        </p:spPr>
+        <p:style>
+          <a:lnRef idx="1">
+            <a:schemeClr val="accent1"/>
+          </a:lnRef>
+          <a:fillRef idx="3">
+            <a:schemeClr val="accent1"/>
+          </a:fillRef>
+          <a:effectRef idx="2">
+            <a:schemeClr val="accent1"/>
+          </a:effectRef>
+          <a:fontRef idx="minor">
+            <a:schemeClr val="lt1"/>
+          </a:fontRef>
+        </p:style>
+        <p:txBody>
+          <a:bodyPr rtlCol="0" anchor="ctr"/>
+          <a:lstStyle/>
+          <a:p>
+            <a:pPr algn="ctr"/>
+          </a:p>
+        </p:txBody>
+      </p:sp>
+      <p:sp>
+        <p:nvSpPr>
+          <p:cNvPr id="27" name="Rectangle 26"/>
+          <p:cNvSpPr/>
+          <p:nvPr/>
+        </p:nvSpPr>
+        <p:spPr>
+          <a:xfrm>
+            <a:off x="6126480" y="4114800"/>
+            <a:ext cx="5486400" cy="512064"/>
+          </a:xfrm>
+          <a:prstGeom prst="rect">
+            <a:avLst/>
+          </a:prstGeom>
+          <a:solidFill>
+            <a:srgbClr val="FFFFFF"/>
+          </a:solidFill>
+          <a:ln>
+            <a:noFill/>
+          </a:ln>
+          <a:effectLst/>
+        </p:spPr>
+        <p:style>
+          <a:lnRef idx="1">
+            <a:schemeClr val="accent1"/>
+          </a:lnRef>
+          <a:fillRef idx="3">
+            <a:schemeClr val="accent1"/>
+          </a:fillRef>
+          <a:effectRef idx="2">
+            <a:schemeClr val="accent1"/>
+          </a:effectRef>
+          <a:fontRef idx="minor">
+            <a:schemeClr val="lt1"/>
+          </a:fontRef>
+        </p:style>
+        <p:txBody>
+          <a:bodyPr rtlCol="0" anchor="ctr"/>
+          <a:lstStyle/>
+          <a:p>
+            <a:pPr algn="ctr"/>
+          </a:p>
+        </p:txBody>
+      </p:sp>
+      <p:sp>
+        <p:nvSpPr>
+          <p:cNvPr id="28" name="TextBox 27"/>
+          <p:cNvSpPr txBox="1"/>
+          <p:nvPr/>
+        </p:nvSpPr>
+        <p:spPr>
+          <a:xfrm>
+            <a:off x="731520" y="4114800"/>
+            <a:ext cx="5212080" cy="512064"/>
+          </a:xfrm>
+          <a:prstGeom prst="rect">
+            <a:avLst/>
+          </a:prstGeom>
+          <a:noFill/>
+        </p:spPr>
+        <p:txBody>
+          <a:bodyPr wrap="square" anchor="ctr">
+            <a:spAutoFit/>
+          </a:bodyPr>
+          <a:lstStyle/>
+          <a:p>
+            <a:pPr algn="l">
+              <a:spcBef>
+                <a:spcPts val="0"/>
+              </a:spcBef>
+              <a:spcAft>
+                <a:spcPts val="0"/>
+              </a:spcAft>
+            </a:pPr>
+            <a:r>
+              <a:rPr sz="1200" b="0">
+                <a:solidFill>
+                  <a:srgbClr val="5B626D"/>
+                </a:solidFill>
+                <a:latin typeface="Calibri"/>
+              </a:rPr>
+              <a:t>A brochure</a:t>
+            </a:r>
+          </a:p>
+        </p:txBody>
+      </p:sp>
+      <p:sp>
+        <p:nvSpPr>
+          <p:cNvPr id="29" name="TextBox 28"/>
+          <p:cNvSpPr txBox="1"/>
+          <p:nvPr/>
+        </p:nvSpPr>
+        <p:spPr>
+          <a:xfrm>
+            <a:off x="6309360" y="4114800"/>
+            <a:ext cx="5212080" cy="512064"/>
+          </a:xfrm>
+          <a:prstGeom prst="rect">
+            <a:avLst/>
+          </a:prstGeom>
+          <a:noFill/>
+        </p:spPr>
+        <p:txBody>
+          <a:bodyPr wrap="square" anchor="ctr">
+            <a:spAutoFit/>
+          </a:bodyPr>
+          <a:lstStyle/>
+          <a:p>
+            <a:pPr algn="l">
+              <a:spcBef>
+                <a:spcPts val="0"/>
+              </a:spcBef>
+              <a:spcAft>
+                <a:spcPts val="0"/>
+              </a:spcAft>
+            </a:pPr>
+            <a:r>
+              <a:rPr sz="1200" b="1">
+                <a:solidFill>
+                  <a:srgbClr val="16335C"/>
+                </a:solidFill>
+                <a:latin typeface="Calibri"/>
+              </a:rPr>
+              <a:t>Captures leads + builds its own SEO</a:t>
+            </a:r>
+          </a:p>
+        </p:txBody>
+      </p:sp>
+      <p:sp>
+        <p:nvSpPr>
+          <p:cNvPr id="30" name="Rectangle 29"/>
+          <p:cNvSpPr/>
+          <p:nvPr/>
+        </p:nvSpPr>
+        <p:spPr>
+          <a:xfrm>
+            <a:off x="548640" y="4663440"/>
+            <a:ext cx="5486400" cy="512064"/>
+          </a:xfrm>
+          <a:prstGeom prst="rect">
+            <a:avLst/>
+          </a:prstGeom>
+          <a:solidFill>
+            <a:srgbClr val="F4F6F8"/>
+          </a:solidFill>
+          <a:ln>
+            <a:noFill/>
+          </a:ln>
+          <a:effectLst/>
+        </p:spPr>
+        <p:style>
+          <a:lnRef idx="1">
+            <a:schemeClr val="accent1"/>
+          </a:lnRef>
+          <a:fillRef idx="3">
+            <a:schemeClr val="accent1"/>
+          </a:fillRef>
+          <a:effectRef idx="2">
+            <a:schemeClr val="accent1"/>
+          </a:effectRef>
+          <a:fontRef idx="minor">
+            <a:schemeClr val="lt1"/>
+          </a:fontRef>
+        </p:style>
+        <p:txBody>
+          <a:bodyPr rtlCol="0" anchor="ctr"/>
+          <a:lstStyle/>
+          <a:p>
+            <a:pPr algn="ctr"/>
+          </a:p>
+        </p:txBody>
+      </p:sp>
+      <p:sp>
+        <p:nvSpPr>
+          <p:cNvPr id="31" name="Rectangle 30"/>
+          <p:cNvSpPr/>
+          <p:nvPr/>
+        </p:nvSpPr>
+        <p:spPr>
+          <a:xfrm>
+            <a:off x="6126480" y="4663440"/>
+            <a:ext cx="5486400" cy="512064"/>
+          </a:xfrm>
+          <a:prstGeom prst="rect">
+            <a:avLst/>
+          </a:prstGeom>
+          <a:solidFill>
+            <a:srgbClr val="F4F6F8"/>
+          </a:solidFill>
+          <a:ln>
+            <a:noFill/>
+          </a:ln>
+          <a:effectLst/>
+        </p:spPr>
+        <p:style>
+          <a:lnRef idx="1">
+            <a:schemeClr val="accent1"/>
+          </a:lnRef>
+          <a:fillRef idx="3">
+            <a:schemeClr val="accent1"/>
+          </a:fillRef>
+          <a:effectRef idx="2">
+            <a:schemeClr val="accent1"/>
+          </a:effectRef>
+          <a:fontRef idx="minor">
+            <a:schemeClr val="lt1"/>
+          </a:fontRef>
+        </p:style>
+        <p:txBody>
+          <a:bodyPr rtlCol="0" anchor="ctr"/>
+          <a:lstStyle/>
+          <a:p>
+            <a:pPr algn="ctr"/>
+          </a:p>
+        </p:txBody>
+      </p:sp>
+      <p:sp>
+        <p:nvSpPr>
+          <p:cNvPr id="32" name="TextBox 31"/>
+          <p:cNvSpPr txBox="1"/>
+          <p:nvPr/>
+        </p:nvSpPr>
+        <p:spPr>
+          <a:xfrm>
+            <a:off x="731520" y="4663440"/>
+            <a:ext cx="5212080" cy="512064"/>
+          </a:xfrm>
+          <a:prstGeom prst="rect">
+            <a:avLst/>
+          </a:prstGeom>
+          <a:noFill/>
+        </p:spPr>
+        <p:txBody>
+          <a:bodyPr wrap="square" anchor="ctr">
+            <a:spAutoFit/>
+          </a:bodyPr>
+          <a:lstStyle/>
+          <a:p>
+            <a:pPr algn="l">
+              <a:spcBef>
+                <a:spcPts val="0"/>
+              </a:spcBef>
+              <a:spcAft>
+                <a:spcPts val="0"/>
+              </a:spcAft>
+            </a:pPr>
+            <a:r>
+              <a:rPr sz="1200" b="0">
+                <a:solidFill>
+                  <a:srgbClr val="5B626D"/>
+                </a:solidFill>
+                <a:latin typeface="Calibri"/>
+              </a:rPr>
+              <a:t>No BIM / specifier capture</a:t>
+            </a:r>
+          </a:p>
+        </p:txBody>
+      </p:sp>
+      <p:sp>
+        <p:nvSpPr>
+          <p:cNvPr id="33" name="TextBox 32"/>
+          <p:cNvSpPr txBox="1"/>
+          <p:nvPr/>
+        </p:nvSpPr>
+        <p:spPr>
+          <a:xfrm>
+            <a:off x="6309360" y="4663440"/>
+            <a:ext cx="5212080" cy="512064"/>
+          </a:xfrm>
+          <a:prstGeom prst="rect">
+            <a:avLst/>
+          </a:prstGeom>
+          <a:noFill/>
+        </p:spPr>
+        <p:txBody>
+          <a:bodyPr wrap="square" anchor="ctr">
+            <a:spAutoFit/>
+          </a:bodyPr>
+          <a:lstStyle/>
+          <a:p>
+            <a:pPr algn="l">
+              <a:spcBef>
+                <a:spcPts val="0"/>
+              </a:spcBef>
+              <a:spcAft>
+                <a:spcPts val="0"/>
+              </a:spcAft>
+            </a:pPr>
+            <a:r>
+              <a:rPr sz="1200" b="1">
+                <a:solidFill>
+                  <a:srgbClr val="16335C"/>
+                </a:solidFill>
+                <a:latin typeface="Calibri"/>
+              </a:rPr>
+              <a:t>"Download BIM file" sends marketing a warm lead</a:t>
+            </a:r>
+          </a:p>
+        </p:txBody>
+      </p:sp>
+      <p:sp>
+        <p:nvSpPr>
+          <p:cNvPr id="34" name="Rectangle 33"/>
+          <p:cNvSpPr/>
+          <p:nvPr/>
+        </p:nvSpPr>
+        <p:spPr>
+          <a:xfrm>
+            <a:off x="548640" y="5212080"/>
+            <a:ext cx="5486400" cy="512064"/>
+          </a:xfrm>
+          <a:prstGeom prst="rect">
+            <a:avLst/>
+          </a:prstGeom>
+          <a:solidFill>
+            <a:srgbClr val="FFFFFF"/>
+          </a:solidFill>
+          <a:ln>
+            <a:noFill/>
+          </a:ln>
+          <a:effectLst/>
+        </p:spPr>
+        <p:style>
+          <a:lnRef idx="1">
+            <a:schemeClr val="accent1"/>
+          </a:lnRef>
+          <a:fillRef idx="3">
+            <a:schemeClr val="accent1"/>
+          </a:fillRef>
+          <a:effectRef idx="2">
+            <a:schemeClr val="accent1"/>
+          </a:effectRef>
+          <a:fontRef idx="minor">
+            <a:schemeClr val="lt1"/>
+          </a:fontRef>
+        </p:style>
+        <p:txBody>
+          <a:bodyPr rtlCol="0" anchor="ctr"/>
+          <a:lstStyle/>
+          <a:p>
+            <a:pPr algn="ctr"/>
+          </a:p>
+        </p:txBody>
+      </p:sp>
+      <p:sp>
+        <p:nvSpPr>
+          <p:cNvPr id="35" name="Rectangle 34"/>
+          <p:cNvSpPr/>
+          <p:nvPr/>
+        </p:nvSpPr>
+        <p:spPr>
+          <a:xfrm>
+            <a:off x="6126480" y="5212080"/>
+            <a:ext cx="5486400" cy="512064"/>
+          </a:xfrm>
+          <a:prstGeom prst="rect">
+            <a:avLst/>
+          </a:prstGeom>
+          <a:solidFill>
+            <a:srgbClr val="FFFFFF"/>
+          </a:solidFill>
+          <a:ln>
+            <a:noFill/>
+          </a:ln>
+          <a:effectLst/>
+        </p:spPr>
+        <p:style>
+          <a:lnRef idx="1">
+            <a:schemeClr val="accent1"/>
+          </a:lnRef>
+          <a:fillRef idx="3">
+            <a:schemeClr val="accent1"/>
+          </a:fillRef>
+          <a:effectRef idx="2">
+            <a:schemeClr val="accent1"/>
+          </a:effectRef>
+          <a:fontRef idx="minor">
+            <a:schemeClr val="lt1"/>
+          </a:fontRef>
+        </p:style>
+        <p:txBody>
+          <a:bodyPr rtlCol="0" anchor="ctr"/>
+          <a:lstStyle/>
+          <a:p>
+            <a:pPr algn="ctr"/>
+          </a:p>
+        </p:txBody>
+      </p:sp>
+      <p:sp>
+        <p:nvSpPr>
+          <p:cNvPr id="36" name="TextBox 35"/>
+          <p:cNvSpPr txBox="1"/>
+          <p:nvPr/>
+        </p:nvSpPr>
+        <p:spPr>
+          <a:xfrm>
+            <a:off x="731520" y="5212080"/>
+            <a:ext cx="5212080" cy="512064"/>
+          </a:xfrm>
+          <a:prstGeom prst="rect">
+            <a:avLst/>
+          </a:prstGeom>
+          <a:noFill/>
+        </p:spPr>
+        <p:txBody>
+          <a:bodyPr wrap="square" anchor="ctr">
+            <a:spAutoFit/>
+          </a:bodyPr>
+          <a:lstStyle/>
+          <a:p>
+            <a:pPr algn="l">
+              <a:spcBef>
+                <a:spcPts val="0"/>
+              </a:spcBef>
+              <a:spcAft>
+                <a:spcPts val="0"/>
+              </a:spcAft>
+            </a:pPr>
+            <a:r>
+              <a:rPr sz="1200" b="0">
+                <a:solidFill>
+                  <a:srgbClr val="5B626D"/>
+                </a:solidFill>
+                <a:latin typeface="Calibri"/>
+              </a:rPr>
+              <a:t>Bespoke quotes = lots of back-and-forth</a:t>
+            </a:r>
+          </a:p>
+        </p:txBody>
+      </p:sp>
+      <p:sp>
+        <p:nvSpPr>
+          <p:cNvPr id="37" name="TextBox 36"/>
+          <p:cNvSpPr txBox="1"/>
+          <p:nvPr/>
+        </p:nvSpPr>
+        <p:spPr>
+          <a:xfrm>
+            <a:off x="6309360" y="5212080"/>
+            <a:ext cx="5212080" cy="512064"/>
+          </a:xfrm>
+          <a:prstGeom prst="rect">
+            <a:avLst/>
+          </a:prstGeom>
+          <a:noFill/>
+        </p:spPr>
+        <p:txBody>
+          <a:bodyPr wrap="square" anchor="ctr">
+            <a:spAutoFit/>
+          </a:bodyPr>
+          <a:lstStyle/>
+          <a:p>
+            <a:pPr algn="l">
+              <a:spcBef>
+                <a:spcPts val="0"/>
+              </a:spcBef>
+              <a:spcAft>
+                <a:spcPts val="0"/>
+              </a:spcAft>
+            </a:pPr>
+            <a:r>
+              <a:rPr sz="1200" b="1">
+                <a:solidFill>
+                  <a:srgbClr val="16335C"/>
+                </a:solidFill>
+                <a:latin typeface="Calibri"/>
+              </a:rPr>
+              <a:t>Flow+ Designer = ready-to-quote scheme</a:t>
+            </a:r>
+          </a:p>
+        </p:txBody>
+      </p:sp>
+      <p:sp>
+        <p:nvSpPr>
+          <p:cNvPr id="38" name="Rectangle 37"/>
+          <p:cNvSpPr/>
+          <p:nvPr/>
+        </p:nvSpPr>
+        <p:spPr>
+          <a:xfrm>
+            <a:off x="548640" y="5760720"/>
+            <a:ext cx="5486400" cy="512064"/>
+          </a:xfrm>
+          <a:prstGeom prst="rect">
+            <a:avLst/>
+          </a:prstGeom>
+          <a:solidFill>
+            <a:srgbClr val="F4F6F8"/>
+          </a:solidFill>
+          <a:ln>
+            <a:noFill/>
+          </a:ln>
+          <a:effectLst/>
+        </p:spPr>
+        <p:style>
+          <a:lnRef idx="1">
+            <a:schemeClr val="accent1"/>
+          </a:lnRef>
+          <a:fillRef idx="3">
+            <a:schemeClr val="accent1"/>
+          </a:fillRef>
+          <a:effectRef idx="2">
+            <a:schemeClr val="accent1"/>
+          </a:effectRef>
+          <a:fontRef idx="minor">
+            <a:schemeClr val="lt1"/>
+          </a:fontRef>
+        </p:style>
+        <p:txBody>
+          <a:bodyPr rtlCol="0" anchor="ctr"/>
+          <a:lstStyle/>
+          <a:p>
+            <a:pPr algn="ctr"/>
+          </a:p>
+        </p:txBody>
+      </p:sp>
+      <p:sp>
+        <p:nvSpPr>
+          <p:cNvPr id="39" name="Rectangle 38"/>
+          <p:cNvSpPr/>
+          <p:nvPr/>
+        </p:nvSpPr>
+        <p:spPr>
+          <a:xfrm>
+            <a:off x="6126480" y="5760720"/>
+            <a:ext cx="5486400" cy="512064"/>
+          </a:xfrm>
+          <a:prstGeom prst="rect">
+            <a:avLst/>
+          </a:prstGeom>
+          <a:solidFill>
+            <a:srgbClr val="F4F6F8"/>
+          </a:solidFill>
+          <a:ln>
+            <a:noFill/>
+          </a:ln>
+          <a:effectLst/>
+        </p:spPr>
+        <p:style>
+          <a:lnRef idx="1">
+            <a:schemeClr val="accent1"/>
+          </a:lnRef>
+          <a:fillRef idx="3">
+            <a:schemeClr val="accent1"/>
+          </a:fillRef>
+          <a:effectRef idx="2">
+            <a:schemeClr val="accent1"/>
+          </a:effectRef>
+          <a:fontRef idx="minor">
+            <a:schemeClr val="lt1"/>
+          </a:fontRef>
+        </p:style>
+        <p:txBody>
+          <a:bodyPr rtlCol="0" anchor="ctr"/>
+          <a:lstStyle/>
+          <a:p>
+            <a:pPr algn="ctr"/>
+          </a:p>
+        </p:txBody>
+      </p:sp>
+      <p:sp>
+        <p:nvSpPr>
+          <p:cNvPr id="40" name="TextBox 39"/>
+          <p:cNvSpPr txBox="1"/>
+          <p:nvPr/>
+        </p:nvSpPr>
+        <p:spPr>
+          <a:xfrm>
+            <a:off x="731520" y="5760720"/>
+            <a:ext cx="5212080" cy="512064"/>
+          </a:xfrm>
+          <a:prstGeom prst="rect">
+            <a:avLst/>
+          </a:prstGeom>
+          <a:noFill/>
+        </p:spPr>
+        <p:txBody>
+          <a:bodyPr wrap="square" anchor="ctr">
+            <a:spAutoFit/>
+          </a:bodyPr>
+          <a:lstStyle/>
+          <a:p>
+            <a:pPr algn="l">
+              <a:spcBef>
+                <a:spcPts val="0"/>
+              </a:spcBef>
+              <a:spcAft>
+                <a:spcPts val="0"/>
+              </a:spcAft>
+            </a:pPr>
+            <a:r>
+              <a:rPr sz="1200" b="0">
+                <a:solidFill>
+                  <a:srgbClr val="5B626D"/>
+                </a:solidFill>
+                <a:latin typeface="Calibri"/>
+              </a:rPr>
+              <a:t>Slower, page-builder overhead</a:t>
+            </a:r>
+          </a:p>
+        </p:txBody>
+      </p:sp>
+      <p:sp>
+        <p:nvSpPr>
+          <p:cNvPr id="41" name="TextBox 40"/>
+          <p:cNvSpPr txBox="1"/>
+          <p:nvPr/>
+        </p:nvSpPr>
+        <p:spPr>
+          <a:xfrm>
+            <a:off x="6309360" y="5760720"/>
+            <a:ext cx="5212080" cy="512064"/>
+          </a:xfrm>
+          <a:prstGeom prst="rect">
+            <a:avLst/>
+          </a:prstGeom>
+          <a:noFill/>
+        </p:spPr>
+        <p:txBody>
+          <a:bodyPr wrap="square" anchor="ctr">
+            <a:spAutoFit/>
+          </a:bodyPr>
+          <a:lstStyle/>
+          <a:p>
+            <a:pPr algn="l">
+              <a:spcBef>
+                <a:spcPts val="0"/>
+              </a:spcBef>
+              <a:spcAft>
+                <a:spcPts val="0"/>
+              </a:spcAft>
+            </a:pPr>
+            <a:r>
+              <a:rPr sz="1200" b="1">
+                <a:solidFill>
+                  <a:srgbClr val="16335C"/>
+                </a:solidFill>
+                <a:latin typeface="Calibri"/>
+              </a:rPr>
+              <a:t>Fast, modern, search-friendly</a:t>
+            </a:r>
+          </a:p>
+        </p:txBody>
+      </p:sp>
+      <p:sp>
+        <p:nvSpPr>
+          <p:cNvPr id="42" name="TextBox 41"/>
+          <p:cNvSpPr txBox="1"/>
+          <p:nvPr/>
+        </p:nvSpPr>
+        <p:spPr>
+          <a:xfrm>
+            <a:off x="548640" y="6400800"/>
+            <a:ext cx="7315200" cy="365760"/>
+          </a:xfrm>
+          <a:prstGeom prst="rect">
+            <a:avLst/>
+          </a:prstGeom>
+          <a:noFill/>
+        </p:spPr>
+        <p:txBody>
+          <a:bodyPr wrap="square" anchor="t">
+            <a:spAutoFit/>
+          </a:bodyPr>
+          <a:lstStyle/>
+          <a:p>
+            <a:pPr algn="l">
+              <a:spcBef>
+                <a:spcPts val="0"/>
+              </a:spcBef>
+              <a:spcAft>
+                <a:spcPts val="0"/>
+              </a:spcAft>
+            </a:pPr>
+            <a:r>
+              <a:rPr sz="1000" b="0">
+                <a:solidFill>
+                  <a:srgbClr val="5B626D"/>
+                </a:solidFill>
+                <a:latin typeface="Calibri"/>
+              </a:rPr>
+              <a:t>Ricoman — the new website</a:t>
+            </a:r>
+          </a:p>
+        </p:txBody>
+      </p:sp>
+      <p:sp>
+        <p:nvSpPr>
+          <p:cNvPr id="43" name="TextBox 42"/>
+          <p:cNvSpPr txBox="1"/>
+          <p:nvPr/>
+        </p:nvSpPr>
+        <p:spPr>
+          <a:xfrm>
+            <a:off x="10789920" y="6400800"/>
+            <a:ext cx="914400" cy="365760"/>
+          </a:xfrm>
+          <a:prstGeom prst="rect">
+            <a:avLst/>
+          </a:prstGeom>
+          <a:noFill/>
+        </p:spPr>
+        <p:txBody>
+          <a:bodyPr wrap="square" anchor="t">
+            <a:spAutoFit/>
+          </a:bodyPr>
+          <a:lstStyle/>
+          <a:p>
+            <a:pPr algn="r">
+              <a:spcBef>
+                <a:spcPts val="0"/>
+              </a:spcBef>
+              <a:spcAft>
+                <a:spcPts val="0"/>
+              </a:spcAft>
+            </a:pPr>
+            <a:r>
+              <a:rPr sz="1000" b="1">
+                <a:solidFill>
+                  <a:srgbClr val="5B626D"/>
+                </a:solidFill>
+                <a:latin typeface="Calibri"/>
+              </a:rPr>
+              <a:t>13</a:t>
+            </a:r>
+          </a:p>
+        </p:txBody>
+      </p:sp>
+    </p:spTree>
+  </p:cSld>
+  <p:clrMapOvr>
+    <a:masterClrMapping/>
+  </p:clrMapOvr>
+</p:sld>
+</file>
+
+<file path=ppt/slides/slide14.xml><?xml version="1.0" encoding="utf-8"?>
 <p:sld xmlns:a="http://schemas.openxmlformats.org/drawingml/2006/main" xmlns:p="http://schemas.openxmlformats.org/presentationml/2006/main" xmlns:r="http://schemas.openxmlformats.org/officeDocument/2006/relationships">
   <p:cSld>
     <p:spTree>

--- a/docs/Ricoman-New-Website.pptx
+++ b/docs/Ricoman-New-Website.pptx
@@ -19,6 +19,8 @@
     <p:sldId id="267" r:id="rId18"/>
     <p:sldId id="268" r:id="rId19"/>
     <p:sldId id="269" r:id="rId20"/>
+    <p:sldId id="270" r:id="rId21"/>
+    <p:sldId id="271" r:id="rId22"/>
   </p:sldIdLst>
   <p:sldSz cx="12191695" cy="6858000" type="screen4x3"/>
   <p:notesSz cx="6858000" cy="9144000"/>
@@ -3517,7 +3519,7 @@
                 </a:solidFill>
                 <a:latin typeface="Calibri"/>
               </a:rPr>
-              <a:t>Google PageSpeed — old site vs new</a:t>
+              <a:t>Google PageSpeed — homepage</a:t>
             </a:r>
           </a:p>
         </p:txBody>
@@ -5435,7 +5437,7 @@
                 </a:solidFill>
                 <a:latin typeface="Calibri"/>
               </a:rPr>
-              <a:t>Source: Google Lighthouse (the engine behind PageSpeed Insights), homepage, Jun 2026. Lab data; field scores vary by device/network.</a:t>
+              <a:t>Source: Google Lighthouse (the PageSpeed Insights engine), homepage, Jun 2026. Lab data; field scores vary by device/network.</a:t>
             </a:r>
           </a:p>
         </p:txBody>
@@ -5686,7 +5688,7 @@
                 </a:solidFill>
                 <a:latin typeface="Calibri"/>
               </a:rPr>
-              <a:t>What those PageSpeed numbers mean</a:t>
+              <a:t>Google PageSpeed — product page</a:t>
             </a:r>
           </a:p>
         </p:txBody>
@@ -5772,7 +5774,7 @@
                 </a:solidFill>
                 <a:latin typeface="Calibri"/>
               </a:rPr>
-              <a:t>In plain English — what each measure is, and what changed.</a:t>
+              <a:t>Same test on a product page (Aeroline) — the heaviest page type on the old site.</a:t>
             </a:r>
           </a:p>
         </p:txBody>
@@ -5786,7 +5788,7 @@
         <p:spPr>
           <a:xfrm>
             <a:off x="548640" y="1874519"/>
-            <a:ext cx="11064240" cy="713232"/>
+            <a:ext cx="5394960" cy="1783080"/>
           </a:xfrm>
           <a:prstGeom prst="rect">
             <a:avLst/>
@@ -5823,45 +5825,43 @@
       </p:sp>
       <p:sp>
         <p:nvSpPr>
-          <p:cNvPr id="8" name="Rectangle 7"/>
-          <p:cNvSpPr/>
-          <p:nvPr/>
-        </p:nvSpPr>
-        <p:spPr>
-          <a:xfrm>
-            <a:off x="548640" y="1874519"/>
-            <a:ext cx="91440" cy="713232"/>
-          </a:xfrm>
-          <a:prstGeom prst="rect">
-            <a:avLst/>
-          </a:prstGeom>
-          <a:solidFill>
-            <a:srgbClr val="1D4ED8"/>
-          </a:solidFill>
-          <a:ln>
-            <a:noFill/>
-          </a:ln>
-          <a:effectLst/>
-        </p:spPr>
-        <p:style>
-          <a:lnRef idx="1">
-            <a:schemeClr val="accent1"/>
-          </a:lnRef>
-          <a:fillRef idx="3">
-            <a:schemeClr val="accent1"/>
-          </a:fillRef>
-          <a:effectRef idx="2">
-            <a:schemeClr val="accent1"/>
-          </a:effectRef>
-          <a:fontRef idx="minor">
-            <a:schemeClr val="lt1"/>
-          </a:fontRef>
-        </p:style>
-        <p:txBody>
-          <a:bodyPr rtlCol="0" anchor="ctr"/>
-          <a:lstStyle/>
-          <a:p>
-            <a:pPr algn="ctr"/>
+          <p:cNvPr id="8" name="TextBox 7"/>
+          <p:cNvSpPr txBox="1"/>
+          <p:nvPr/>
+        </p:nvSpPr>
+        <p:spPr>
+          <a:xfrm>
+            <a:off x="548640" y="1965960"/>
+            <a:ext cx="5394960" cy="365760"/>
+          </a:xfrm>
+          <a:prstGeom prst="rect">
+            <a:avLst/>
+          </a:prstGeom>
+          <a:noFill/>
+        </p:spPr>
+        <p:txBody>
+          <a:bodyPr wrap="square" anchor="t">
+            <a:spAutoFit/>
+          </a:bodyPr>
+          <a:lstStyle/>
+          <a:p>
+            <a:pPr algn="ctr">
+              <a:spcBef>
+                <a:spcPts val="0"/>
+              </a:spcBef>
+              <a:spcAft>
+                <a:spcPts val="0"/>
+              </a:spcAft>
+            </a:pPr>
+            <a:r>
+              <a:rPr sz="1400" b="1">
+                <a:solidFill>
+                  <a:srgbClr val="0B0B0C"/>
+                </a:solidFill>
+                <a:latin typeface="Calibri"/>
+              </a:rPr>
+              <a:t>Mobile score</a:t>
+            </a:r>
           </a:p>
         </p:txBody>
       </p:sp>
@@ -5873,8 +5873,8 @@
         </p:nvSpPr>
         <p:spPr>
           <a:xfrm>
-            <a:off x="777240" y="1874519"/>
-            <a:ext cx="2743200" cy="713232"/>
+            <a:off x="914400" y="2468880"/>
+            <a:ext cx="1828800" cy="1005840"/>
           </a:xfrm>
           <a:prstGeom prst="rect">
             <a:avLst/>
@@ -5882,46 +5882,46 @@
           <a:noFill/>
         </p:spPr>
         <p:txBody>
-          <a:bodyPr wrap="square" anchor="ctr">
+          <a:bodyPr wrap="square" anchor="t">
             <a:spAutoFit/>
           </a:bodyPr>
           <a:lstStyle/>
           <a:p>
-            <a:pPr algn="l">
-              <a:spcBef>
-                <a:spcPts val="0"/>
-              </a:spcBef>
-              <a:spcAft>
-                <a:spcPts val="100"/>
-              </a:spcAft>
-            </a:pPr>
-            <a:r>
-              <a:rPr sz="1300" b="1">
-                <a:solidFill>
-                  <a:srgbClr val="0B0B0C"/>
-                </a:solidFill>
-                <a:latin typeface="Calibri"/>
-              </a:rPr>
-              <a:t>Score /100</a:t>
-            </a:r>
-          </a:p>
-          <a:p>
-            <a:pPr algn="l">
-              <a:spcBef>
-                <a:spcPts val="0"/>
-              </a:spcBef>
-              <a:spcAft>
-                <a:spcPts val="0"/>
+            <a:pPr algn="ctr">
+              <a:spcBef>
+                <a:spcPts val="0"/>
+              </a:spcBef>
+              <a:spcAft>
+                <a:spcPts val="200"/>
               </a:spcAft>
             </a:pPr>
             <a:r>
               <a:rPr sz="1200" b="1">
                 <a:solidFill>
-                  <a:srgbClr val="1A7F37"/>
-                </a:solidFill>
-                <a:latin typeface="Calibri"/>
-              </a:rPr>
-              <a:t>32 → 93 (mobile)</a:t>
+                  <a:srgbClr val="5B626D"/>
+                </a:solidFill>
+                <a:latin typeface="Calibri"/>
+              </a:rPr>
+              <a:t>OLD</a:t>
+            </a:r>
+          </a:p>
+          <a:p>
+            <a:pPr algn="ctr">
+              <a:spcBef>
+                <a:spcPts val="0"/>
+              </a:spcBef>
+              <a:spcAft>
+                <a:spcPts val="0"/>
+              </a:spcAft>
+            </a:pPr>
+            <a:r>
+              <a:rPr sz="4600" b="1">
+                <a:solidFill>
+                  <a:srgbClr val="B32D2E"/>
+                </a:solidFill>
+                <a:latin typeface="Calibri"/>
+              </a:rPr>
+              <a:t>35</a:t>
             </a:r>
           </a:p>
         </p:txBody>
@@ -5934,8 +5934,8 @@
         </p:nvSpPr>
         <p:spPr>
           <a:xfrm>
-            <a:off x="3657600" y="1874519"/>
-            <a:ext cx="7772400" cy="713232"/>
+            <a:off x="2788920" y="2697480"/>
+            <a:ext cx="914400" cy="731520"/>
           </a:xfrm>
           <a:prstGeom prst="rect">
             <a:avLst/>
@@ -5943,41 +5943,102 @@
           <a:noFill/>
         </p:spPr>
         <p:txBody>
-          <a:bodyPr wrap="square" anchor="ctr">
+          <a:bodyPr wrap="square" anchor="t">
             <a:spAutoFit/>
           </a:bodyPr>
           <a:lstStyle/>
           <a:p>
-            <a:pPr algn="l">
-              <a:spcBef>
-                <a:spcPts val="0"/>
-              </a:spcBef>
-              <a:spcAft>
-                <a:spcPts val="0"/>
-              </a:spcAft>
-            </a:pPr>
-            <a:r>
-              <a:rPr sz="1250" b="0">
-                <a:solidFill>
-                  <a:srgbClr val="16335C"/>
-                </a:solidFill>
-                <a:latin typeface="Calibri"/>
-              </a:rPr>
-              <a:t>A speed exam mark. 32 is a fail; 93 is a top grade. Google uses this mark to help decide search rankings.</a:t>
-            </a:r>
-          </a:p>
-        </p:txBody>
-      </p:sp>
-      <p:sp>
-        <p:nvSpPr>
-          <p:cNvPr id="11" name="Rectangle 10"/>
+            <a:pPr algn="ctr">
+              <a:spcBef>
+                <a:spcPts val="0"/>
+              </a:spcBef>
+              <a:spcAft>
+                <a:spcPts val="0"/>
+              </a:spcAft>
+            </a:pPr>
+            <a:r>
+              <a:rPr sz="3000" b="1">
+                <a:solidFill>
+                  <a:srgbClr val="1D4ED8"/>
+                </a:solidFill>
+                <a:latin typeface="Calibri"/>
+              </a:rPr>
+              <a:t>→</a:t>
+            </a:r>
+          </a:p>
+        </p:txBody>
+      </p:sp>
+      <p:sp>
+        <p:nvSpPr>
+          <p:cNvPr id="11" name="TextBox 10"/>
+          <p:cNvSpPr txBox="1"/>
+          <p:nvPr/>
+        </p:nvSpPr>
+        <p:spPr>
+          <a:xfrm>
+            <a:off x="3749040" y="2468880"/>
+            <a:ext cx="1828800" cy="1005840"/>
+          </a:xfrm>
+          <a:prstGeom prst="rect">
+            <a:avLst/>
+          </a:prstGeom>
+          <a:noFill/>
+        </p:spPr>
+        <p:txBody>
+          <a:bodyPr wrap="square" anchor="t">
+            <a:spAutoFit/>
+          </a:bodyPr>
+          <a:lstStyle/>
+          <a:p>
+            <a:pPr algn="ctr">
+              <a:spcBef>
+                <a:spcPts val="0"/>
+              </a:spcBef>
+              <a:spcAft>
+                <a:spcPts val="200"/>
+              </a:spcAft>
+            </a:pPr>
+            <a:r>
+              <a:rPr sz="1200" b="1">
+                <a:solidFill>
+                  <a:srgbClr val="5B626D"/>
+                </a:solidFill>
+                <a:latin typeface="Calibri"/>
+              </a:rPr>
+              <a:t>NEW</a:t>
+            </a:r>
+          </a:p>
+          <a:p>
+            <a:pPr algn="ctr">
+              <a:spcBef>
+                <a:spcPts val="0"/>
+              </a:spcBef>
+              <a:spcAft>
+                <a:spcPts val="0"/>
+              </a:spcAft>
+            </a:pPr>
+            <a:r>
+              <a:rPr sz="4600" b="1">
+                <a:solidFill>
+                  <a:srgbClr val="1A7F37"/>
+                </a:solidFill>
+                <a:latin typeface="Calibri"/>
+              </a:rPr>
+              <a:t>97</a:t>
+            </a:r>
+          </a:p>
+        </p:txBody>
+      </p:sp>
+      <p:sp>
+        <p:nvSpPr>
+          <p:cNvPr id="12" name="Rectangle 11"/>
           <p:cNvSpPr/>
           <p:nvPr/>
         </p:nvSpPr>
         <p:spPr>
           <a:xfrm>
-            <a:off x="548640" y="2651759"/>
-            <a:ext cx="11064240" cy="713232"/>
+            <a:off x="6217920" y="1874519"/>
+            <a:ext cx="5394960" cy="1783080"/>
           </a:xfrm>
           <a:prstGeom prst="rect">
             <a:avLst/>
@@ -6014,20 +6075,226 @@
       </p:sp>
       <p:sp>
         <p:nvSpPr>
-          <p:cNvPr id="12" name="Rectangle 11"/>
+          <p:cNvPr id="13" name="TextBox 12"/>
+          <p:cNvSpPr txBox="1"/>
+          <p:nvPr/>
+        </p:nvSpPr>
+        <p:spPr>
+          <a:xfrm>
+            <a:off x="6217920" y="1965960"/>
+            <a:ext cx="5394960" cy="365760"/>
+          </a:xfrm>
+          <a:prstGeom prst="rect">
+            <a:avLst/>
+          </a:prstGeom>
+          <a:noFill/>
+        </p:spPr>
+        <p:txBody>
+          <a:bodyPr wrap="square" anchor="t">
+            <a:spAutoFit/>
+          </a:bodyPr>
+          <a:lstStyle/>
+          <a:p>
+            <a:pPr algn="ctr">
+              <a:spcBef>
+                <a:spcPts val="0"/>
+              </a:spcBef>
+              <a:spcAft>
+                <a:spcPts val="0"/>
+              </a:spcAft>
+            </a:pPr>
+            <a:r>
+              <a:rPr sz="1400" b="1">
+                <a:solidFill>
+                  <a:srgbClr val="0B0B0C"/>
+                </a:solidFill>
+                <a:latin typeface="Calibri"/>
+              </a:rPr>
+              <a:t>Desktop score</a:t>
+            </a:r>
+          </a:p>
+        </p:txBody>
+      </p:sp>
+      <p:sp>
+        <p:nvSpPr>
+          <p:cNvPr id="14" name="TextBox 13"/>
+          <p:cNvSpPr txBox="1"/>
+          <p:nvPr/>
+        </p:nvSpPr>
+        <p:spPr>
+          <a:xfrm>
+            <a:off x="6583680" y="2468880"/>
+            <a:ext cx="1828800" cy="1005840"/>
+          </a:xfrm>
+          <a:prstGeom prst="rect">
+            <a:avLst/>
+          </a:prstGeom>
+          <a:noFill/>
+        </p:spPr>
+        <p:txBody>
+          <a:bodyPr wrap="square" anchor="t">
+            <a:spAutoFit/>
+          </a:bodyPr>
+          <a:lstStyle/>
+          <a:p>
+            <a:pPr algn="ctr">
+              <a:spcBef>
+                <a:spcPts val="0"/>
+              </a:spcBef>
+              <a:spcAft>
+                <a:spcPts val="200"/>
+              </a:spcAft>
+            </a:pPr>
+            <a:r>
+              <a:rPr sz="1200" b="1">
+                <a:solidFill>
+                  <a:srgbClr val="5B626D"/>
+                </a:solidFill>
+                <a:latin typeface="Calibri"/>
+              </a:rPr>
+              <a:t>OLD</a:t>
+            </a:r>
+          </a:p>
+          <a:p>
+            <a:pPr algn="ctr">
+              <a:spcBef>
+                <a:spcPts val="0"/>
+              </a:spcBef>
+              <a:spcAft>
+                <a:spcPts val="0"/>
+              </a:spcAft>
+            </a:pPr>
+            <a:r>
+              <a:rPr sz="4600" b="1">
+                <a:solidFill>
+                  <a:srgbClr val="996800"/>
+                </a:solidFill>
+                <a:latin typeface="Calibri"/>
+              </a:rPr>
+              <a:t>56</a:t>
+            </a:r>
+          </a:p>
+        </p:txBody>
+      </p:sp>
+      <p:sp>
+        <p:nvSpPr>
+          <p:cNvPr id="15" name="TextBox 14"/>
+          <p:cNvSpPr txBox="1"/>
+          <p:nvPr/>
+        </p:nvSpPr>
+        <p:spPr>
+          <a:xfrm>
+            <a:off x="8458200" y="2697480"/>
+            <a:ext cx="914400" cy="731520"/>
+          </a:xfrm>
+          <a:prstGeom prst="rect">
+            <a:avLst/>
+          </a:prstGeom>
+          <a:noFill/>
+        </p:spPr>
+        <p:txBody>
+          <a:bodyPr wrap="square" anchor="t">
+            <a:spAutoFit/>
+          </a:bodyPr>
+          <a:lstStyle/>
+          <a:p>
+            <a:pPr algn="ctr">
+              <a:spcBef>
+                <a:spcPts val="0"/>
+              </a:spcBef>
+              <a:spcAft>
+                <a:spcPts val="0"/>
+              </a:spcAft>
+            </a:pPr>
+            <a:r>
+              <a:rPr sz="3000" b="1">
+                <a:solidFill>
+                  <a:srgbClr val="1D4ED8"/>
+                </a:solidFill>
+                <a:latin typeface="Calibri"/>
+              </a:rPr>
+              <a:t>→</a:t>
+            </a:r>
+          </a:p>
+        </p:txBody>
+      </p:sp>
+      <p:sp>
+        <p:nvSpPr>
+          <p:cNvPr id="16" name="TextBox 15"/>
+          <p:cNvSpPr txBox="1"/>
+          <p:nvPr/>
+        </p:nvSpPr>
+        <p:spPr>
+          <a:xfrm>
+            <a:off x="9418320" y="2468880"/>
+            <a:ext cx="1828800" cy="1005840"/>
+          </a:xfrm>
+          <a:prstGeom prst="rect">
+            <a:avLst/>
+          </a:prstGeom>
+          <a:noFill/>
+        </p:spPr>
+        <p:txBody>
+          <a:bodyPr wrap="square" anchor="t">
+            <a:spAutoFit/>
+          </a:bodyPr>
+          <a:lstStyle/>
+          <a:p>
+            <a:pPr algn="ctr">
+              <a:spcBef>
+                <a:spcPts val="0"/>
+              </a:spcBef>
+              <a:spcAft>
+                <a:spcPts val="200"/>
+              </a:spcAft>
+            </a:pPr>
+            <a:r>
+              <a:rPr sz="1200" b="1">
+                <a:solidFill>
+                  <a:srgbClr val="5B626D"/>
+                </a:solidFill>
+                <a:latin typeface="Calibri"/>
+              </a:rPr>
+              <a:t>NEW</a:t>
+            </a:r>
+          </a:p>
+          <a:p>
+            <a:pPr algn="ctr">
+              <a:spcBef>
+                <a:spcPts val="0"/>
+              </a:spcBef>
+              <a:spcAft>
+                <a:spcPts val="0"/>
+              </a:spcAft>
+            </a:pPr>
+            <a:r>
+              <a:rPr sz="4600" b="1">
+                <a:solidFill>
+                  <a:srgbClr val="1A7F37"/>
+                </a:solidFill>
+                <a:latin typeface="Calibri"/>
+              </a:rPr>
+              <a:t>96</a:t>
+            </a:r>
+          </a:p>
+        </p:txBody>
+      </p:sp>
+      <p:sp>
+        <p:nvSpPr>
+          <p:cNvPr id="17" name="Rectangle 16"/>
           <p:cNvSpPr/>
           <p:nvPr/>
         </p:nvSpPr>
         <p:spPr>
           <a:xfrm>
-            <a:off x="548640" y="2651759"/>
-            <a:ext cx="91440" cy="713232"/>
+            <a:off x="548640" y="3886200"/>
+            <a:ext cx="6858000" cy="420624"/>
           </a:xfrm>
           <a:prstGeom prst="rect">
             <a:avLst/>
           </a:prstGeom>
           <a:solidFill>
-            <a:srgbClr val="1D4ED8"/>
+            <a:srgbClr val="0B0B0C"/>
           </a:solidFill>
           <a:ln>
             <a:noFill/>
@@ -6058,14 +6325,102 @@
       </p:sp>
       <p:sp>
         <p:nvSpPr>
-          <p:cNvPr id="13" name="TextBox 12"/>
+          <p:cNvPr id="18" name="Rectangle 17"/>
+          <p:cNvSpPr/>
+          <p:nvPr/>
+        </p:nvSpPr>
+        <p:spPr>
+          <a:xfrm>
+            <a:off x="7406640" y="3886200"/>
+            <a:ext cx="2103120" cy="420624"/>
+          </a:xfrm>
+          <a:prstGeom prst="rect">
+            <a:avLst/>
+          </a:prstGeom>
+          <a:solidFill>
+            <a:srgbClr val="0B0B0C"/>
+          </a:solidFill>
+          <a:ln>
+            <a:noFill/>
+          </a:ln>
+          <a:effectLst/>
+        </p:spPr>
+        <p:style>
+          <a:lnRef idx="1">
+            <a:schemeClr val="accent1"/>
+          </a:lnRef>
+          <a:fillRef idx="3">
+            <a:schemeClr val="accent1"/>
+          </a:fillRef>
+          <a:effectRef idx="2">
+            <a:schemeClr val="accent1"/>
+          </a:effectRef>
+          <a:fontRef idx="minor">
+            <a:schemeClr val="lt1"/>
+          </a:fontRef>
+        </p:style>
+        <p:txBody>
+          <a:bodyPr rtlCol="0" anchor="ctr"/>
+          <a:lstStyle/>
+          <a:p>
+            <a:pPr algn="ctr"/>
+          </a:p>
+        </p:txBody>
+      </p:sp>
+      <p:sp>
+        <p:nvSpPr>
+          <p:cNvPr id="19" name="Rectangle 18"/>
+          <p:cNvSpPr/>
+          <p:nvPr/>
+        </p:nvSpPr>
+        <p:spPr>
+          <a:xfrm>
+            <a:off x="9509760" y="3886200"/>
+            <a:ext cx="2103120" cy="420624"/>
+          </a:xfrm>
+          <a:prstGeom prst="rect">
+            <a:avLst/>
+          </a:prstGeom>
+          <a:solidFill>
+            <a:srgbClr val="0B0B0C"/>
+          </a:solidFill>
+          <a:ln>
+            <a:noFill/>
+          </a:ln>
+          <a:effectLst/>
+        </p:spPr>
+        <p:style>
+          <a:lnRef idx="1">
+            <a:schemeClr val="accent1"/>
+          </a:lnRef>
+          <a:fillRef idx="3">
+            <a:schemeClr val="accent1"/>
+          </a:fillRef>
+          <a:effectRef idx="2">
+            <a:schemeClr val="accent1"/>
+          </a:effectRef>
+          <a:fontRef idx="minor">
+            <a:schemeClr val="lt1"/>
+          </a:fontRef>
+        </p:style>
+        <p:txBody>
+          <a:bodyPr rtlCol="0" anchor="ctr"/>
+          <a:lstStyle/>
+          <a:p>
+            <a:pPr algn="ctr"/>
+          </a:p>
+        </p:txBody>
+      </p:sp>
+      <p:sp>
+        <p:nvSpPr>
+          <p:cNvPr id="20" name="TextBox 19"/>
           <p:cNvSpPr txBox="1"/>
           <p:nvPr/>
         </p:nvSpPr>
         <p:spPr>
           <a:xfrm>
-            <a:off x="777240" y="2651759"/>
-            <a:ext cx="2743200" cy="713232"/>
+            <a:off x="731520" y="3886200"/>
+            <a:ext cx="6583680" cy="420624"/>
           </a:xfrm>
           <a:prstGeom prst="rect">
             <a:avLst/>
@@ -6083,50 +6438,31 @@
                 <a:spcPts val="0"/>
               </a:spcBef>
               <a:spcAft>
-                <a:spcPts val="100"/>
-              </a:spcAft>
-            </a:pPr>
-            <a:r>
-              <a:rPr sz="1300" b="1">
-                <a:solidFill>
-                  <a:srgbClr val="0B0B0C"/>
-                </a:solidFill>
-                <a:latin typeface="Calibri"/>
-              </a:rPr>
-              <a:t>Main image appears</a:t>
-            </a:r>
-          </a:p>
-          <a:p>
-            <a:pPr algn="l">
-              <a:spcBef>
-                <a:spcPts val="0"/>
-              </a:spcBef>
-              <a:spcAft>
                 <a:spcPts val="0"/>
               </a:spcAft>
             </a:pPr>
             <a:r>
               <a:rPr sz="1200" b="1">
                 <a:solidFill>
-                  <a:srgbClr val="1A7F37"/>
-                </a:solidFill>
-                <a:latin typeface="Calibri"/>
-              </a:rPr>
-              <a:t>12.4s → 2.3s</a:t>
-            </a:r>
-          </a:p>
-        </p:txBody>
-      </p:sp>
-      <p:sp>
-        <p:nvSpPr>
-          <p:cNvPr id="14" name="TextBox 13"/>
+                  <a:srgbClr val="FFFFFF"/>
+                </a:solidFill>
+                <a:latin typeface="Calibri"/>
+              </a:rPr>
+              <a:t>Metric (mobile)</a:t>
+            </a:r>
+          </a:p>
+        </p:txBody>
+      </p:sp>
+      <p:sp>
+        <p:nvSpPr>
+          <p:cNvPr id="21" name="TextBox 20"/>
           <p:cNvSpPr txBox="1"/>
           <p:nvPr/>
         </p:nvSpPr>
         <p:spPr>
           <a:xfrm>
-            <a:off x="3657600" y="2651759"/>
-            <a:ext cx="7772400" cy="713232"/>
+            <a:off x="7589520" y="3886200"/>
+            <a:ext cx="1828800" cy="420624"/>
           </a:xfrm>
           <a:prstGeom prst="rect">
             <a:avLst/>
@@ -6148,27 +6484,327 @@
               </a:spcAft>
             </a:pPr>
             <a:r>
-              <a:rPr sz="1250" b="0">
-                <a:solidFill>
-                  <a:srgbClr val="16335C"/>
-                </a:solidFill>
-                <a:latin typeface="Calibri"/>
-              </a:rPr>
-              <a:t>How long before the main content shows on a phone. It took over 12 seconds; now about 2. Most people won't wait past 3.</a:t>
-            </a:r>
-          </a:p>
-        </p:txBody>
-      </p:sp>
-      <p:sp>
-        <p:nvSpPr>
-          <p:cNvPr id="15" name="Rectangle 14"/>
+              <a:rPr sz="1200" b="1">
+                <a:solidFill>
+                  <a:srgbClr val="FFFFFF"/>
+                </a:solidFill>
+                <a:latin typeface="Calibri"/>
+              </a:rPr>
+              <a:t>Old</a:t>
+            </a:r>
+          </a:p>
+        </p:txBody>
+      </p:sp>
+      <p:sp>
+        <p:nvSpPr>
+          <p:cNvPr id="22" name="TextBox 21"/>
+          <p:cNvSpPr txBox="1"/>
+          <p:nvPr/>
+        </p:nvSpPr>
+        <p:spPr>
+          <a:xfrm>
+            <a:off x="9692640" y="3886200"/>
+            <a:ext cx="1828800" cy="420624"/>
+          </a:xfrm>
+          <a:prstGeom prst="rect">
+            <a:avLst/>
+          </a:prstGeom>
+          <a:noFill/>
+        </p:spPr>
+        <p:txBody>
+          <a:bodyPr wrap="square" anchor="ctr">
+            <a:spAutoFit/>
+          </a:bodyPr>
+          <a:lstStyle/>
+          <a:p>
+            <a:pPr algn="l">
+              <a:spcBef>
+                <a:spcPts val="0"/>
+              </a:spcBef>
+              <a:spcAft>
+                <a:spcPts val="0"/>
+              </a:spcAft>
+            </a:pPr>
+            <a:r>
+              <a:rPr sz="1200" b="1">
+                <a:solidFill>
+                  <a:srgbClr val="FFFFFF"/>
+                </a:solidFill>
+                <a:latin typeface="Calibri"/>
+              </a:rPr>
+              <a:t>New</a:t>
+            </a:r>
+          </a:p>
+        </p:txBody>
+      </p:sp>
+      <p:sp>
+        <p:nvSpPr>
+          <p:cNvPr id="23" name="Rectangle 22"/>
           <p:cNvSpPr/>
           <p:nvPr/>
         </p:nvSpPr>
         <p:spPr>
           <a:xfrm>
-            <a:off x="548640" y="3428999"/>
-            <a:ext cx="11064240" cy="713232"/>
+            <a:off x="548640" y="4325112"/>
+            <a:ext cx="6858000" cy="420624"/>
+          </a:xfrm>
+          <a:prstGeom prst="rect">
+            <a:avLst/>
+          </a:prstGeom>
+          <a:solidFill>
+            <a:srgbClr val="FFFFFF"/>
+          </a:solidFill>
+          <a:ln>
+            <a:noFill/>
+          </a:ln>
+          <a:effectLst/>
+        </p:spPr>
+        <p:style>
+          <a:lnRef idx="1">
+            <a:schemeClr val="accent1"/>
+          </a:lnRef>
+          <a:fillRef idx="3">
+            <a:schemeClr val="accent1"/>
+          </a:fillRef>
+          <a:effectRef idx="2">
+            <a:schemeClr val="accent1"/>
+          </a:effectRef>
+          <a:fontRef idx="minor">
+            <a:schemeClr val="lt1"/>
+          </a:fontRef>
+        </p:style>
+        <p:txBody>
+          <a:bodyPr rtlCol="0" anchor="ctr"/>
+          <a:lstStyle/>
+          <a:p>
+            <a:pPr algn="ctr"/>
+          </a:p>
+        </p:txBody>
+      </p:sp>
+      <p:sp>
+        <p:nvSpPr>
+          <p:cNvPr id="24" name="Rectangle 23"/>
+          <p:cNvSpPr/>
+          <p:nvPr/>
+        </p:nvSpPr>
+        <p:spPr>
+          <a:xfrm>
+            <a:off x="7406640" y="4325112"/>
+            <a:ext cx="2103120" cy="420624"/>
+          </a:xfrm>
+          <a:prstGeom prst="rect">
+            <a:avLst/>
+          </a:prstGeom>
+          <a:solidFill>
+            <a:srgbClr val="FFFFFF"/>
+          </a:solidFill>
+          <a:ln>
+            <a:noFill/>
+          </a:ln>
+          <a:effectLst/>
+        </p:spPr>
+        <p:style>
+          <a:lnRef idx="1">
+            <a:schemeClr val="accent1"/>
+          </a:lnRef>
+          <a:fillRef idx="3">
+            <a:schemeClr val="accent1"/>
+          </a:fillRef>
+          <a:effectRef idx="2">
+            <a:schemeClr val="accent1"/>
+          </a:effectRef>
+          <a:fontRef idx="minor">
+            <a:schemeClr val="lt1"/>
+          </a:fontRef>
+        </p:style>
+        <p:txBody>
+          <a:bodyPr rtlCol="0" anchor="ctr"/>
+          <a:lstStyle/>
+          <a:p>
+            <a:pPr algn="ctr"/>
+          </a:p>
+        </p:txBody>
+      </p:sp>
+      <p:sp>
+        <p:nvSpPr>
+          <p:cNvPr id="25" name="Rectangle 24"/>
+          <p:cNvSpPr/>
+          <p:nvPr/>
+        </p:nvSpPr>
+        <p:spPr>
+          <a:xfrm>
+            <a:off x="9509760" y="4325112"/>
+            <a:ext cx="2103120" cy="420624"/>
+          </a:xfrm>
+          <a:prstGeom prst="rect">
+            <a:avLst/>
+          </a:prstGeom>
+          <a:solidFill>
+            <a:srgbClr val="FFFFFF"/>
+          </a:solidFill>
+          <a:ln>
+            <a:noFill/>
+          </a:ln>
+          <a:effectLst/>
+        </p:spPr>
+        <p:style>
+          <a:lnRef idx="1">
+            <a:schemeClr val="accent1"/>
+          </a:lnRef>
+          <a:fillRef idx="3">
+            <a:schemeClr val="accent1"/>
+          </a:fillRef>
+          <a:effectRef idx="2">
+            <a:schemeClr val="accent1"/>
+          </a:effectRef>
+          <a:fontRef idx="minor">
+            <a:schemeClr val="lt1"/>
+          </a:fontRef>
+        </p:style>
+        <p:txBody>
+          <a:bodyPr rtlCol="0" anchor="ctr"/>
+          <a:lstStyle/>
+          <a:p>
+            <a:pPr algn="ctr"/>
+          </a:p>
+        </p:txBody>
+      </p:sp>
+      <p:sp>
+        <p:nvSpPr>
+          <p:cNvPr id="26" name="TextBox 25"/>
+          <p:cNvSpPr txBox="1"/>
+          <p:nvPr/>
+        </p:nvSpPr>
+        <p:spPr>
+          <a:xfrm>
+            <a:off x="731520" y="4325112"/>
+            <a:ext cx="6583680" cy="420624"/>
+          </a:xfrm>
+          <a:prstGeom prst="rect">
+            <a:avLst/>
+          </a:prstGeom>
+          <a:noFill/>
+        </p:spPr>
+        <p:txBody>
+          <a:bodyPr wrap="square" anchor="ctr">
+            <a:spAutoFit/>
+          </a:bodyPr>
+          <a:lstStyle/>
+          <a:p>
+            <a:pPr algn="l">
+              <a:spcBef>
+                <a:spcPts val="0"/>
+              </a:spcBef>
+              <a:spcAft>
+                <a:spcPts val="0"/>
+              </a:spcAft>
+            </a:pPr>
+            <a:r>
+              <a:rPr sz="1200" b="0">
+                <a:solidFill>
+                  <a:srgbClr val="5B626D"/>
+                </a:solidFill>
+                <a:latin typeface="Calibri"/>
+              </a:rPr>
+              <a:t>Largest Contentful Paint</a:t>
+            </a:r>
+          </a:p>
+        </p:txBody>
+      </p:sp>
+      <p:sp>
+        <p:nvSpPr>
+          <p:cNvPr id="27" name="TextBox 26"/>
+          <p:cNvSpPr txBox="1"/>
+          <p:nvPr/>
+        </p:nvSpPr>
+        <p:spPr>
+          <a:xfrm>
+            <a:off x="7589520" y="4325112"/>
+            <a:ext cx="1828800" cy="420624"/>
+          </a:xfrm>
+          <a:prstGeom prst="rect">
+            <a:avLst/>
+          </a:prstGeom>
+          <a:noFill/>
+        </p:spPr>
+        <p:txBody>
+          <a:bodyPr wrap="square" anchor="ctr">
+            <a:spAutoFit/>
+          </a:bodyPr>
+          <a:lstStyle/>
+          <a:p>
+            <a:pPr algn="l">
+              <a:spcBef>
+                <a:spcPts val="0"/>
+              </a:spcBef>
+              <a:spcAft>
+                <a:spcPts val="0"/>
+              </a:spcAft>
+            </a:pPr>
+            <a:r>
+              <a:rPr sz="1200" b="0">
+                <a:solidFill>
+                  <a:srgbClr val="5B626D"/>
+                </a:solidFill>
+                <a:latin typeface="Calibri"/>
+              </a:rPr>
+              <a:t>6.1 s</a:t>
+            </a:r>
+          </a:p>
+        </p:txBody>
+      </p:sp>
+      <p:sp>
+        <p:nvSpPr>
+          <p:cNvPr id="28" name="TextBox 27"/>
+          <p:cNvSpPr txBox="1"/>
+          <p:nvPr/>
+        </p:nvSpPr>
+        <p:spPr>
+          <a:xfrm>
+            <a:off x="9692640" y="4325112"/>
+            <a:ext cx="1828800" cy="420624"/>
+          </a:xfrm>
+          <a:prstGeom prst="rect">
+            <a:avLst/>
+          </a:prstGeom>
+          <a:noFill/>
+        </p:spPr>
+        <p:txBody>
+          <a:bodyPr wrap="square" anchor="ctr">
+            <a:spAutoFit/>
+          </a:bodyPr>
+          <a:lstStyle/>
+          <a:p>
+            <a:pPr algn="l">
+              <a:spcBef>
+                <a:spcPts val="0"/>
+              </a:spcBef>
+              <a:spcAft>
+                <a:spcPts val="0"/>
+              </a:spcAft>
+            </a:pPr>
+            <a:r>
+              <a:rPr sz="1200" b="1">
+                <a:solidFill>
+                  <a:srgbClr val="1A7F37"/>
+                </a:solidFill>
+                <a:latin typeface="Calibri"/>
+              </a:rPr>
+              <a:t>1.9 s</a:t>
+            </a:r>
+          </a:p>
+        </p:txBody>
+      </p:sp>
+      <p:sp>
+        <p:nvSpPr>
+          <p:cNvPr id="29" name="Rectangle 28"/>
+          <p:cNvSpPr/>
+          <p:nvPr/>
+        </p:nvSpPr>
+        <p:spPr>
+          <a:xfrm>
+            <a:off x="548640" y="4764024"/>
+            <a:ext cx="6858000" cy="420624"/>
           </a:xfrm>
           <a:prstGeom prst="rect">
             <a:avLst/>
@@ -6205,161 +6841,14 @@
       </p:sp>
       <p:sp>
         <p:nvSpPr>
-          <p:cNvPr id="16" name="Rectangle 15"/>
+          <p:cNvPr id="30" name="Rectangle 29"/>
           <p:cNvSpPr/>
           <p:nvPr/>
         </p:nvSpPr>
         <p:spPr>
           <a:xfrm>
-            <a:off x="548640" y="3428999"/>
-            <a:ext cx="91440" cy="713232"/>
-          </a:xfrm>
-          <a:prstGeom prst="rect">
-            <a:avLst/>
-          </a:prstGeom>
-          <a:solidFill>
-            <a:srgbClr val="1D4ED8"/>
-          </a:solidFill>
-          <a:ln>
-            <a:noFill/>
-          </a:ln>
-          <a:effectLst/>
-        </p:spPr>
-        <p:style>
-          <a:lnRef idx="1">
-            <a:schemeClr val="accent1"/>
-          </a:lnRef>
-          <a:fillRef idx="3">
-            <a:schemeClr val="accent1"/>
-          </a:fillRef>
-          <a:effectRef idx="2">
-            <a:schemeClr val="accent1"/>
-          </a:effectRef>
-          <a:fontRef idx="minor">
-            <a:schemeClr val="lt1"/>
-          </a:fontRef>
-        </p:style>
-        <p:txBody>
-          <a:bodyPr rtlCol="0" anchor="ctr"/>
-          <a:lstStyle/>
-          <a:p>
-            <a:pPr algn="ctr"/>
-          </a:p>
-        </p:txBody>
-      </p:sp>
-      <p:sp>
-        <p:nvSpPr>
-          <p:cNvPr id="17" name="TextBox 16"/>
-          <p:cNvSpPr txBox="1"/>
-          <p:nvPr/>
-        </p:nvSpPr>
-        <p:spPr>
-          <a:xfrm>
-            <a:off x="777240" y="3428999"/>
-            <a:ext cx="2743200" cy="713232"/>
-          </a:xfrm>
-          <a:prstGeom prst="rect">
-            <a:avLst/>
-          </a:prstGeom>
-          <a:noFill/>
-        </p:spPr>
-        <p:txBody>
-          <a:bodyPr wrap="square" anchor="ctr">
-            <a:spAutoFit/>
-          </a:bodyPr>
-          <a:lstStyle/>
-          <a:p>
-            <a:pPr algn="l">
-              <a:spcBef>
-                <a:spcPts val="0"/>
-              </a:spcBef>
-              <a:spcAft>
-                <a:spcPts val="100"/>
-              </a:spcAft>
-            </a:pPr>
-            <a:r>
-              <a:rPr sz="1300" b="1">
-                <a:solidFill>
-                  <a:srgbClr val="0B0B0C"/>
-                </a:solidFill>
-                <a:latin typeface="Calibri"/>
-              </a:rPr>
-              <a:t>Page responds to taps</a:t>
-            </a:r>
-          </a:p>
-          <a:p>
-            <a:pPr algn="l">
-              <a:spcBef>
-                <a:spcPts val="0"/>
-              </a:spcBef>
-              <a:spcAft>
-                <a:spcPts val="0"/>
-              </a:spcAft>
-            </a:pPr>
-            <a:r>
-              <a:rPr sz="1200" b="1">
-                <a:solidFill>
-                  <a:srgbClr val="1A7F37"/>
-                </a:solidFill>
-                <a:latin typeface="Calibri"/>
-              </a:rPr>
-              <a:t>3.3s → instant</a:t>
-            </a:r>
-          </a:p>
-        </p:txBody>
-      </p:sp>
-      <p:sp>
-        <p:nvSpPr>
-          <p:cNvPr id="18" name="TextBox 17"/>
-          <p:cNvSpPr txBox="1"/>
-          <p:nvPr/>
-        </p:nvSpPr>
-        <p:spPr>
-          <a:xfrm>
-            <a:off x="3657600" y="3428999"/>
-            <a:ext cx="7772400" cy="713232"/>
-          </a:xfrm>
-          <a:prstGeom prst="rect">
-            <a:avLst/>
-          </a:prstGeom>
-          <a:noFill/>
-        </p:spPr>
-        <p:txBody>
-          <a:bodyPr wrap="square" anchor="ctr">
-            <a:spAutoFit/>
-          </a:bodyPr>
-          <a:lstStyle/>
-          <a:p>
-            <a:pPr algn="l">
-              <a:spcBef>
-                <a:spcPts val="0"/>
-              </a:spcBef>
-              <a:spcAft>
-                <a:spcPts val="0"/>
-              </a:spcAft>
-            </a:pPr>
-            <a:r>
-              <a:rPr sz="1250" b="0">
-                <a:solidFill>
-                  <a:srgbClr val="16335C"/>
-                </a:solidFill>
-                <a:latin typeface="Calibri"/>
-              </a:rPr>
-              <a:t>How long the page is frozen and ignores taps while loading. It used to lock up for ~3 seconds; now it reacts straight away.</a:t>
-            </a:r>
-          </a:p>
-        </p:txBody>
-      </p:sp>
-      <p:sp>
-        <p:nvSpPr>
-          <p:cNvPr id="19" name="Rectangle 18"/>
-          <p:cNvSpPr/>
-          <p:nvPr/>
-        </p:nvSpPr>
-        <p:spPr>
-          <a:xfrm>
-            <a:off x="548640" y="4206239"/>
-            <a:ext cx="11064240" cy="713232"/>
+            <a:off x="7406640" y="4764024"/>
+            <a:ext cx="2103120" cy="420624"/>
           </a:xfrm>
           <a:prstGeom prst="rect">
             <a:avLst/>
@@ -6396,161 +6885,14 @@
       </p:sp>
       <p:sp>
         <p:nvSpPr>
-          <p:cNvPr id="20" name="Rectangle 19"/>
+          <p:cNvPr id="31" name="Rectangle 30"/>
           <p:cNvSpPr/>
           <p:nvPr/>
         </p:nvSpPr>
         <p:spPr>
           <a:xfrm>
-            <a:off x="548640" y="4206239"/>
-            <a:ext cx="91440" cy="713232"/>
-          </a:xfrm>
-          <a:prstGeom prst="rect">
-            <a:avLst/>
-          </a:prstGeom>
-          <a:solidFill>
-            <a:srgbClr val="1D4ED8"/>
-          </a:solidFill>
-          <a:ln>
-            <a:noFill/>
-          </a:ln>
-          <a:effectLst/>
-        </p:spPr>
-        <p:style>
-          <a:lnRef idx="1">
-            <a:schemeClr val="accent1"/>
-          </a:lnRef>
-          <a:fillRef idx="3">
-            <a:schemeClr val="accent1"/>
-          </a:fillRef>
-          <a:effectRef idx="2">
-            <a:schemeClr val="accent1"/>
-          </a:effectRef>
-          <a:fontRef idx="minor">
-            <a:schemeClr val="lt1"/>
-          </a:fontRef>
-        </p:style>
-        <p:txBody>
-          <a:bodyPr rtlCol="0" anchor="ctr"/>
-          <a:lstStyle/>
-          <a:p>
-            <a:pPr algn="ctr"/>
-          </a:p>
-        </p:txBody>
-      </p:sp>
-      <p:sp>
-        <p:nvSpPr>
-          <p:cNvPr id="21" name="TextBox 20"/>
-          <p:cNvSpPr txBox="1"/>
-          <p:nvPr/>
-        </p:nvSpPr>
-        <p:spPr>
-          <a:xfrm>
-            <a:off x="777240" y="4206239"/>
-            <a:ext cx="2743200" cy="713232"/>
-          </a:xfrm>
-          <a:prstGeom prst="rect">
-            <a:avLst/>
-          </a:prstGeom>
-          <a:noFill/>
-        </p:spPr>
-        <p:txBody>
-          <a:bodyPr wrap="square" anchor="ctr">
-            <a:spAutoFit/>
-          </a:bodyPr>
-          <a:lstStyle/>
-          <a:p>
-            <a:pPr algn="l">
-              <a:spcBef>
-                <a:spcPts val="0"/>
-              </a:spcBef>
-              <a:spcAft>
-                <a:spcPts val="100"/>
-              </a:spcAft>
-            </a:pPr>
-            <a:r>
-              <a:rPr sz="1300" b="1">
-                <a:solidFill>
-                  <a:srgbClr val="0B0B0C"/>
-                </a:solidFill>
-                <a:latin typeface="Calibri"/>
-              </a:rPr>
-              <a:t>Page looks finished</a:t>
-            </a:r>
-          </a:p>
-          <a:p>
-            <a:pPr algn="l">
-              <a:spcBef>
-                <a:spcPts val="0"/>
-              </a:spcBef>
-              <a:spcAft>
-                <a:spcPts val="0"/>
-              </a:spcAft>
-            </a:pPr>
-            <a:r>
-              <a:rPr sz="1200" b="1">
-                <a:solidFill>
-                  <a:srgbClr val="1A7F37"/>
-                </a:solidFill>
-                <a:latin typeface="Calibri"/>
-              </a:rPr>
-              <a:t>12.1s → 5.6s</a:t>
-            </a:r>
-          </a:p>
-        </p:txBody>
-      </p:sp>
-      <p:sp>
-        <p:nvSpPr>
-          <p:cNvPr id="22" name="TextBox 21"/>
-          <p:cNvSpPr txBox="1"/>
-          <p:nvPr/>
-        </p:nvSpPr>
-        <p:spPr>
-          <a:xfrm>
-            <a:off x="3657600" y="4206239"/>
-            <a:ext cx="7772400" cy="713232"/>
-          </a:xfrm>
-          <a:prstGeom prst="rect">
-            <a:avLst/>
-          </a:prstGeom>
-          <a:noFill/>
-        </p:spPr>
-        <p:txBody>
-          <a:bodyPr wrap="square" anchor="ctr">
-            <a:spAutoFit/>
-          </a:bodyPr>
-          <a:lstStyle/>
-          <a:p>
-            <a:pPr algn="l">
-              <a:spcBef>
-                <a:spcPts val="0"/>
-              </a:spcBef>
-              <a:spcAft>
-                <a:spcPts val="0"/>
-              </a:spcAft>
-            </a:pPr>
-            <a:r>
-              <a:rPr sz="1250" b="0">
-                <a:solidFill>
-                  <a:srgbClr val="16335C"/>
-                </a:solidFill>
-                <a:latin typeface="Calibri"/>
-              </a:rPr>
-              <a:t>How quickly the page visually fills in and looks done — now less than half the time.</a:t>
-            </a:r>
-          </a:p>
-        </p:txBody>
-      </p:sp>
-      <p:sp>
-        <p:nvSpPr>
-          <p:cNvPr id="23" name="Rectangle 22"/>
-          <p:cNvSpPr/>
-          <p:nvPr/>
-        </p:nvSpPr>
-        <p:spPr>
-          <a:xfrm>
-            <a:off x="548640" y="4983479"/>
-            <a:ext cx="11064240" cy="713232"/>
+            <a:off x="9509760" y="4764024"/>
+            <a:ext cx="2103120" cy="420624"/>
           </a:xfrm>
           <a:prstGeom prst="rect">
             <a:avLst/>
@@ -6587,20 +6929,146 @@
       </p:sp>
       <p:sp>
         <p:nvSpPr>
-          <p:cNvPr id="24" name="Rectangle 23"/>
+          <p:cNvPr id="32" name="TextBox 31"/>
+          <p:cNvSpPr txBox="1"/>
+          <p:nvPr/>
+        </p:nvSpPr>
+        <p:spPr>
+          <a:xfrm>
+            <a:off x="731520" y="4764024"/>
+            <a:ext cx="6583680" cy="420624"/>
+          </a:xfrm>
+          <a:prstGeom prst="rect">
+            <a:avLst/>
+          </a:prstGeom>
+          <a:noFill/>
+        </p:spPr>
+        <p:txBody>
+          <a:bodyPr wrap="square" anchor="ctr">
+            <a:spAutoFit/>
+          </a:bodyPr>
+          <a:lstStyle/>
+          <a:p>
+            <a:pPr algn="l">
+              <a:spcBef>
+                <a:spcPts val="0"/>
+              </a:spcBef>
+              <a:spcAft>
+                <a:spcPts val="0"/>
+              </a:spcAft>
+            </a:pPr>
+            <a:r>
+              <a:rPr sz="1200" b="0">
+                <a:solidFill>
+                  <a:srgbClr val="5B626D"/>
+                </a:solidFill>
+                <a:latin typeface="Calibri"/>
+              </a:rPr>
+              <a:t>Total Blocking Time</a:t>
+            </a:r>
+          </a:p>
+        </p:txBody>
+      </p:sp>
+      <p:sp>
+        <p:nvSpPr>
+          <p:cNvPr id="33" name="TextBox 32"/>
+          <p:cNvSpPr txBox="1"/>
+          <p:nvPr/>
+        </p:nvSpPr>
+        <p:spPr>
+          <a:xfrm>
+            <a:off x="7589520" y="4764024"/>
+            <a:ext cx="1828800" cy="420624"/>
+          </a:xfrm>
+          <a:prstGeom prst="rect">
+            <a:avLst/>
+          </a:prstGeom>
+          <a:noFill/>
+        </p:spPr>
+        <p:txBody>
+          <a:bodyPr wrap="square" anchor="ctr">
+            <a:spAutoFit/>
+          </a:bodyPr>
+          <a:lstStyle/>
+          <a:p>
+            <a:pPr algn="l">
+              <a:spcBef>
+                <a:spcPts val="0"/>
+              </a:spcBef>
+              <a:spcAft>
+                <a:spcPts val="0"/>
+              </a:spcAft>
+            </a:pPr>
+            <a:r>
+              <a:rPr sz="1200" b="0">
+                <a:solidFill>
+                  <a:srgbClr val="5B626D"/>
+                </a:solidFill>
+                <a:latin typeface="Calibri"/>
+              </a:rPr>
+              <a:t>910 ms</a:t>
+            </a:r>
+          </a:p>
+        </p:txBody>
+      </p:sp>
+      <p:sp>
+        <p:nvSpPr>
+          <p:cNvPr id="34" name="TextBox 33"/>
+          <p:cNvSpPr txBox="1"/>
+          <p:nvPr/>
+        </p:nvSpPr>
+        <p:spPr>
+          <a:xfrm>
+            <a:off x="9692640" y="4764024"/>
+            <a:ext cx="1828800" cy="420624"/>
+          </a:xfrm>
+          <a:prstGeom prst="rect">
+            <a:avLst/>
+          </a:prstGeom>
+          <a:noFill/>
+        </p:spPr>
+        <p:txBody>
+          <a:bodyPr wrap="square" anchor="ctr">
+            <a:spAutoFit/>
+          </a:bodyPr>
+          <a:lstStyle/>
+          <a:p>
+            <a:pPr algn="l">
+              <a:spcBef>
+                <a:spcPts val="0"/>
+              </a:spcBef>
+              <a:spcAft>
+                <a:spcPts val="0"/>
+              </a:spcAft>
+            </a:pPr>
+            <a:r>
+              <a:rPr sz="1200" b="1">
+                <a:solidFill>
+                  <a:srgbClr val="1A7F37"/>
+                </a:solidFill>
+                <a:latin typeface="Calibri"/>
+              </a:rPr>
+              <a:t>30 ms</a:t>
+            </a:r>
+          </a:p>
+        </p:txBody>
+      </p:sp>
+      <p:sp>
+        <p:nvSpPr>
+          <p:cNvPr id="35" name="Rectangle 34"/>
           <p:cNvSpPr/>
           <p:nvPr/>
         </p:nvSpPr>
         <p:spPr>
           <a:xfrm>
-            <a:off x="548640" y="4983479"/>
-            <a:ext cx="91440" cy="713232"/>
+            <a:off x="548640" y="5202936"/>
+            <a:ext cx="6858000" cy="420624"/>
           </a:xfrm>
           <a:prstGeom prst="rect">
             <a:avLst/>
           </a:prstGeom>
           <a:solidFill>
-            <a:srgbClr val="1D4ED8"/>
+            <a:srgbClr val="FFFFFF"/>
           </a:solidFill>
           <a:ln>
             <a:noFill/>
@@ -6631,123 +7099,20 @@
       </p:sp>
       <p:sp>
         <p:nvSpPr>
-          <p:cNvPr id="25" name="TextBox 24"/>
-          <p:cNvSpPr txBox="1"/>
-          <p:nvPr/>
-        </p:nvSpPr>
-        <p:spPr>
-          <a:xfrm>
-            <a:off x="777240" y="4983479"/>
-            <a:ext cx="2743200" cy="713232"/>
-          </a:xfrm>
-          <a:prstGeom prst="rect">
-            <a:avLst/>
-          </a:prstGeom>
-          <a:noFill/>
-        </p:spPr>
-        <p:txBody>
-          <a:bodyPr wrap="square" anchor="ctr">
-            <a:spAutoFit/>
-          </a:bodyPr>
-          <a:lstStyle/>
-          <a:p>
-            <a:pPr algn="l">
-              <a:spcBef>
-                <a:spcPts val="0"/>
-              </a:spcBef>
-              <a:spcAft>
-                <a:spcPts val="100"/>
-              </a:spcAft>
-            </a:pPr>
-            <a:r>
-              <a:rPr sz="1300" b="1">
-                <a:solidFill>
-                  <a:srgbClr val="0B0B0C"/>
-                </a:solidFill>
-                <a:latin typeface="Calibri"/>
-              </a:rPr>
-              <a:t>You see something</a:t>
-            </a:r>
-          </a:p>
-          <a:p>
-            <a:pPr algn="l">
-              <a:spcBef>
-                <a:spcPts val="0"/>
-              </a:spcBef>
-              <a:spcAft>
-                <a:spcPts val="0"/>
-              </a:spcAft>
-            </a:pPr>
-            <a:r>
-              <a:rPr sz="1200" b="1">
-                <a:solidFill>
-                  <a:srgbClr val="1A7F37"/>
-                </a:solidFill>
-                <a:latin typeface="Calibri"/>
-              </a:rPr>
-              <a:t>2.8s → 1.2s</a:t>
-            </a:r>
-          </a:p>
-        </p:txBody>
-      </p:sp>
-      <p:sp>
-        <p:nvSpPr>
-          <p:cNvPr id="26" name="TextBox 25"/>
-          <p:cNvSpPr txBox="1"/>
-          <p:nvPr/>
-        </p:nvSpPr>
-        <p:spPr>
-          <a:xfrm>
-            <a:off x="3657600" y="4983479"/>
-            <a:ext cx="7772400" cy="713232"/>
-          </a:xfrm>
-          <a:prstGeom prst="rect">
-            <a:avLst/>
-          </a:prstGeom>
-          <a:noFill/>
-        </p:spPr>
-        <p:txBody>
-          <a:bodyPr wrap="square" anchor="ctr">
-            <a:spAutoFit/>
-          </a:bodyPr>
-          <a:lstStyle/>
-          <a:p>
-            <a:pPr algn="l">
-              <a:spcBef>
-                <a:spcPts val="0"/>
-              </a:spcBef>
-              <a:spcAft>
-                <a:spcPts val="0"/>
-              </a:spcAft>
-            </a:pPr>
-            <a:r>
-              <a:rPr sz="1250" b="0">
-                <a:solidFill>
-                  <a:srgbClr val="16335C"/>
-                </a:solidFill>
-                <a:latin typeface="Calibri"/>
-              </a:rPr>
-              <a:t>How soon anything at all appears on screen, so it doesn't feel blank.</a:t>
-            </a:r>
-          </a:p>
-        </p:txBody>
-      </p:sp>
-      <p:sp>
-        <p:nvSpPr>
-          <p:cNvPr id="27" name="Rectangle 26"/>
+          <p:cNvPr id="36" name="Rectangle 35"/>
           <p:cNvSpPr/>
           <p:nvPr/>
         </p:nvSpPr>
         <p:spPr>
           <a:xfrm>
-            <a:off x="548640" y="5897880"/>
-            <a:ext cx="11064240" cy="566928"/>
+            <a:off x="7406640" y="5202936"/>
+            <a:ext cx="2103120" cy="420624"/>
           </a:xfrm>
           <a:prstGeom prst="rect">
             <a:avLst/>
           </a:prstGeom>
           <a:solidFill>
-            <a:srgbClr val="16335C"/>
+            <a:srgbClr val="FFFFFF"/>
           </a:solidFill>
           <a:ln>
             <a:noFill/>
@@ -6778,14 +7143,58 @@
       </p:sp>
       <p:sp>
         <p:nvSpPr>
-          <p:cNvPr id="28" name="TextBox 27"/>
+          <p:cNvPr id="37" name="Rectangle 36"/>
+          <p:cNvSpPr/>
+          <p:nvPr/>
+        </p:nvSpPr>
+        <p:spPr>
+          <a:xfrm>
+            <a:off x="9509760" y="5202936"/>
+            <a:ext cx="2103120" cy="420624"/>
+          </a:xfrm>
+          <a:prstGeom prst="rect">
+            <a:avLst/>
+          </a:prstGeom>
+          <a:solidFill>
+            <a:srgbClr val="FFFFFF"/>
+          </a:solidFill>
+          <a:ln>
+            <a:noFill/>
+          </a:ln>
+          <a:effectLst/>
+        </p:spPr>
+        <p:style>
+          <a:lnRef idx="1">
+            <a:schemeClr val="accent1"/>
+          </a:lnRef>
+          <a:fillRef idx="3">
+            <a:schemeClr val="accent1"/>
+          </a:fillRef>
+          <a:effectRef idx="2">
+            <a:schemeClr val="accent1"/>
+          </a:effectRef>
+          <a:fontRef idx="minor">
+            <a:schemeClr val="lt1"/>
+          </a:fontRef>
+        </p:style>
+        <p:txBody>
+          <a:bodyPr rtlCol="0" anchor="ctr"/>
+          <a:lstStyle/>
+          <a:p>
+            <a:pPr algn="ctr"/>
+          </a:p>
+        </p:txBody>
+      </p:sp>
+      <p:sp>
+        <p:nvSpPr>
+          <p:cNvPr id="38" name="TextBox 37"/>
           <p:cNvSpPr txBox="1"/>
           <p:nvPr/>
         </p:nvSpPr>
         <p:spPr>
           <a:xfrm>
-            <a:off x="777240" y="5897880"/>
-            <a:ext cx="10607040" cy="566928"/>
+            <a:off x="731520" y="5202936"/>
+            <a:ext cx="6583680" cy="420624"/>
           </a:xfrm>
           <a:prstGeom prst="rect">
             <a:avLst/>
@@ -6807,27 +7216,369 @@
               </a:spcAft>
             </a:pPr>
             <a:r>
-              <a:rPr sz="1250" b="1">
-                <a:solidFill>
-                  <a:srgbClr val="FFFFFF"/>
-                </a:solidFill>
-                <a:latin typeface="Calibri"/>
-              </a:rPr>
-              <a:t>Bottom line: the old site was slow enough on phones to push visitors away; the new one loads fast and stays responsive — which means better Google rankings and more enquiries.</a:t>
-            </a:r>
-          </a:p>
-        </p:txBody>
-      </p:sp>
-      <p:sp>
-        <p:nvSpPr>
-          <p:cNvPr id="29" name="TextBox 28"/>
+              <a:rPr sz="1200" b="0">
+                <a:solidFill>
+                  <a:srgbClr val="5B626D"/>
+                </a:solidFill>
+                <a:latin typeface="Calibri"/>
+              </a:rPr>
+              <a:t>Speed Index</a:t>
+            </a:r>
+          </a:p>
+        </p:txBody>
+      </p:sp>
+      <p:sp>
+        <p:nvSpPr>
+          <p:cNvPr id="39" name="TextBox 38"/>
           <p:cNvSpPr txBox="1"/>
           <p:nvPr/>
         </p:nvSpPr>
         <p:spPr>
           <a:xfrm>
-            <a:off x="548640" y="6400800"/>
-            <a:ext cx="7315200" cy="365760"/>
+            <a:off x="7589520" y="5202936"/>
+            <a:ext cx="1828800" cy="420624"/>
+          </a:xfrm>
+          <a:prstGeom prst="rect">
+            <a:avLst/>
+          </a:prstGeom>
+          <a:noFill/>
+        </p:spPr>
+        <p:txBody>
+          <a:bodyPr wrap="square" anchor="ctr">
+            <a:spAutoFit/>
+          </a:bodyPr>
+          <a:lstStyle/>
+          <a:p>
+            <a:pPr algn="l">
+              <a:spcBef>
+                <a:spcPts val="0"/>
+              </a:spcBef>
+              <a:spcAft>
+                <a:spcPts val="0"/>
+              </a:spcAft>
+            </a:pPr>
+            <a:r>
+              <a:rPr sz="1200" b="0">
+                <a:solidFill>
+                  <a:srgbClr val="5B626D"/>
+                </a:solidFill>
+                <a:latin typeface="Calibri"/>
+              </a:rPr>
+              <a:t>5.1 s</a:t>
+            </a:r>
+          </a:p>
+        </p:txBody>
+      </p:sp>
+      <p:sp>
+        <p:nvSpPr>
+          <p:cNvPr id="40" name="TextBox 39"/>
+          <p:cNvSpPr txBox="1"/>
+          <p:nvPr/>
+        </p:nvSpPr>
+        <p:spPr>
+          <a:xfrm>
+            <a:off x="9692640" y="5202936"/>
+            <a:ext cx="1828800" cy="420624"/>
+          </a:xfrm>
+          <a:prstGeom prst="rect">
+            <a:avLst/>
+          </a:prstGeom>
+          <a:noFill/>
+        </p:spPr>
+        <p:txBody>
+          <a:bodyPr wrap="square" anchor="ctr">
+            <a:spAutoFit/>
+          </a:bodyPr>
+          <a:lstStyle/>
+          <a:p>
+            <a:pPr algn="l">
+              <a:spcBef>
+                <a:spcPts val="0"/>
+              </a:spcBef>
+              <a:spcAft>
+                <a:spcPts val="0"/>
+              </a:spcAft>
+            </a:pPr>
+            <a:r>
+              <a:rPr sz="1200" b="1">
+                <a:solidFill>
+                  <a:srgbClr val="1A7F37"/>
+                </a:solidFill>
+                <a:latin typeface="Calibri"/>
+              </a:rPr>
+              <a:t>4.4 s</a:t>
+            </a:r>
+          </a:p>
+        </p:txBody>
+      </p:sp>
+      <p:sp>
+        <p:nvSpPr>
+          <p:cNvPr id="41" name="Rectangle 40"/>
+          <p:cNvSpPr/>
+          <p:nvPr/>
+        </p:nvSpPr>
+        <p:spPr>
+          <a:xfrm>
+            <a:off x="548640" y="5641848"/>
+            <a:ext cx="6858000" cy="420624"/>
+          </a:xfrm>
+          <a:prstGeom prst="rect">
+            <a:avLst/>
+          </a:prstGeom>
+          <a:solidFill>
+            <a:srgbClr val="F4F6F8"/>
+          </a:solidFill>
+          <a:ln>
+            <a:noFill/>
+          </a:ln>
+          <a:effectLst/>
+        </p:spPr>
+        <p:style>
+          <a:lnRef idx="1">
+            <a:schemeClr val="accent1"/>
+          </a:lnRef>
+          <a:fillRef idx="3">
+            <a:schemeClr val="accent1"/>
+          </a:fillRef>
+          <a:effectRef idx="2">
+            <a:schemeClr val="accent1"/>
+          </a:effectRef>
+          <a:fontRef idx="minor">
+            <a:schemeClr val="lt1"/>
+          </a:fontRef>
+        </p:style>
+        <p:txBody>
+          <a:bodyPr rtlCol="0" anchor="ctr"/>
+          <a:lstStyle/>
+          <a:p>
+            <a:pPr algn="ctr"/>
+          </a:p>
+        </p:txBody>
+      </p:sp>
+      <p:sp>
+        <p:nvSpPr>
+          <p:cNvPr id="42" name="Rectangle 41"/>
+          <p:cNvSpPr/>
+          <p:nvPr/>
+        </p:nvSpPr>
+        <p:spPr>
+          <a:xfrm>
+            <a:off x="7406640" y="5641848"/>
+            <a:ext cx="2103120" cy="420624"/>
+          </a:xfrm>
+          <a:prstGeom prst="rect">
+            <a:avLst/>
+          </a:prstGeom>
+          <a:solidFill>
+            <a:srgbClr val="F4F6F8"/>
+          </a:solidFill>
+          <a:ln>
+            <a:noFill/>
+          </a:ln>
+          <a:effectLst/>
+        </p:spPr>
+        <p:style>
+          <a:lnRef idx="1">
+            <a:schemeClr val="accent1"/>
+          </a:lnRef>
+          <a:fillRef idx="3">
+            <a:schemeClr val="accent1"/>
+          </a:fillRef>
+          <a:effectRef idx="2">
+            <a:schemeClr val="accent1"/>
+          </a:effectRef>
+          <a:fontRef idx="minor">
+            <a:schemeClr val="lt1"/>
+          </a:fontRef>
+        </p:style>
+        <p:txBody>
+          <a:bodyPr rtlCol="0" anchor="ctr"/>
+          <a:lstStyle/>
+          <a:p>
+            <a:pPr algn="ctr"/>
+          </a:p>
+        </p:txBody>
+      </p:sp>
+      <p:sp>
+        <p:nvSpPr>
+          <p:cNvPr id="43" name="Rectangle 42"/>
+          <p:cNvSpPr/>
+          <p:nvPr/>
+        </p:nvSpPr>
+        <p:spPr>
+          <a:xfrm>
+            <a:off x="9509760" y="5641848"/>
+            <a:ext cx="2103120" cy="420624"/>
+          </a:xfrm>
+          <a:prstGeom prst="rect">
+            <a:avLst/>
+          </a:prstGeom>
+          <a:solidFill>
+            <a:srgbClr val="F4F6F8"/>
+          </a:solidFill>
+          <a:ln>
+            <a:noFill/>
+          </a:ln>
+          <a:effectLst/>
+        </p:spPr>
+        <p:style>
+          <a:lnRef idx="1">
+            <a:schemeClr val="accent1"/>
+          </a:lnRef>
+          <a:fillRef idx="3">
+            <a:schemeClr val="accent1"/>
+          </a:fillRef>
+          <a:effectRef idx="2">
+            <a:schemeClr val="accent1"/>
+          </a:effectRef>
+          <a:fontRef idx="minor">
+            <a:schemeClr val="lt1"/>
+          </a:fontRef>
+        </p:style>
+        <p:txBody>
+          <a:bodyPr rtlCol="0" anchor="ctr"/>
+          <a:lstStyle/>
+          <a:p>
+            <a:pPr algn="ctr"/>
+          </a:p>
+        </p:txBody>
+      </p:sp>
+      <p:sp>
+        <p:nvSpPr>
+          <p:cNvPr id="44" name="TextBox 43"/>
+          <p:cNvSpPr txBox="1"/>
+          <p:nvPr/>
+        </p:nvSpPr>
+        <p:spPr>
+          <a:xfrm>
+            <a:off x="731520" y="5641848"/>
+            <a:ext cx="6583680" cy="420624"/>
+          </a:xfrm>
+          <a:prstGeom prst="rect">
+            <a:avLst/>
+          </a:prstGeom>
+          <a:noFill/>
+        </p:spPr>
+        <p:txBody>
+          <a:bodyPr wrap="square" anchor="ctr">
+            <a:spAutoFit/>
+          </a:bodyPr>
+          <a:lstStyle/>
+          <a:p>
+            <a:pPr algn="l">
+              <a:spcBef>
+                <a:spcPts val="0"/>
+              </a:spcBef>
+              <a:spcAft>
+                <a:spcPts val="0"/>
+              </a:spcAft>
+            </a:pPr>
+            <a:r>
+              <a:rPr sz="1200" b="0">
+                <a:solidFill>
+                  <a:srgbClr val="5B626D"/>
+                </a:solidFill>
+                <a:latin typeface="Calibri"/>
+              </a:rPr>
+              <a:t>First Contentful Paint</a:t>
+            </a:r>
+          </a:p>
+        </p:txBody>
+      </p:sp>
+      <p:sp>
+        <p:nvSpPr>
+          <p:cNvPr id="45" name="TextBox 44"/>
+          <p:cNvSpPr txBox="1"/>
+          <p:nvPr/>
+        </p:nvSpPr>
+        <p:spPr>
+          <a:xfrm>
+            <a:off x="7589520" y="5641848"/>
+            <a:ext cx="1828800" cy="420624"/>
+          </a:xfrm>
+          <a:prstGeom prst="rect">
+            <a:avLst/>
+          </a:prstGeom>
+          <a:noFill/>
+        </p:spPr>
+        <p:txBody>
+          <a:bodyPr wrap="square" anchor="ctr">
+            <a:spAutoFit/>
+          </a:bodyPr>
+          <a:lstStyle/>
+          <a:p>
+            <a:pPr algn="l">
+              <a:spcBef>
+                <a:spcPts val="0"/>
+              </a:spcBef>
+              <a:spcAft>
+                <a:spcPts val="0"/>
+              </a:spcAft>
+            </a:pPr>
+            <a:r>
+              <a:rPr sz="1200" b="0">
+                <a:solidFill>
+                  <a:srgbClr val="5B626D"/>
+                </a:solidFill>
+                <a:latin typeface="Calibri"/>
+              </a:rPr>
+              <a:t>2.6 s</a:t>
+            </a:r>
+          </a:p>
+        </p:txBody>
+      </p:sp>
+      <p:sp>
+        <p:nvSpPr>
+          <p:cNvPr id="46" name="TextBox 45"/>
+          <p:cNvSpPr txBox="1"/>
+          <p:nvPr/>
+        </p:nvSpPr>
+        <p:spPr>
+          <a:xfrm>
+            <a:off x="9692640" y="5641848"/>
+            <a:ext cx="1828800" cy="420624"/>
+          </a:xfrm>
+          <a:prstGeom prst="rect">
+            <a:avLst/>
+          </a:prstGeom>
+          <a:noFill/>
+        </p:spPr>
+        <p:txBody>
+          <a:bodyPr wrap="square" anchor="ctr">
+            <a:spAutoFit/>
+          </a:bodyPr>
+          <a:lstStyle/>
+          <a:p>
+            <a:pPr algn="l">
+              <a:spcBef>
+                <a:spcPts val="0"/>
+              </a:spcBef>
+              <a:spcAft>
+                <a:spcPts val="0"/>
+              </a:spcAft>
+            </a:pPr>
+            <a:r>
+              <a:rPr sz="1200" b="1">
+                <a:solidFill>
+                  <a:srgbClr val="1A7F37"/>
+                </a:solidFill>
+                <a:latin typeface="Calibri"/>
+              </a:rPr>
+              <a:t>1.4 s</a:t>
+            </a:r>
+          </a:p>
+        </p:txBody>
+      </p:sp>
+      <p:sp>
+        <p:nvSpPr>
+          <p:cNvPr id="47" name="TextBox 46"/>
+          <p:cNvSpPr txBox="1"/>
+          <p:nvPr/>
+        </p:nvSpPr>
+        <p:spPr>
+          <a:xfrm>
+            <a:off x="548640" y="6355080"/>
+            <a:ext cx="10972800" cy="274320"/>
           </a:xfrm>
           <a:prstGeom prst="rect">
             <a:avLst/>
@@ -6849,6 +7600,48 @@
               </a:spcAft>
             </a:pPr>
             <a:r>
+              <a:rPr sz="900" b="0">
+                <a:solidFill>
+                  <a:srgbClr val="5B626D"/>
+                </a:solidFill>
+                <a:latin typeface="Calibri"/>
+              </a:rPr>
+              <a:t>Source: Google Lighthouse (the PageSpeed Insights engine), product page (Aeroline), Jun 2026. Lab data; field scores vary by device/network.</a:t>
+            </a:r>
+          </a:p>
+        </p:txBody>
+      </p:sp>
+      <p:sp>
+        <p:nvSpPr>
+          <p:cNvPr id="48" name="TextBox 47"/>
+          <p:cNvSpPr txBox="1"/>
+          <p:nvPr/>
+        </p:nvSpPr>
+        <p:spPr>
+          <a:xfrm>
+            <a:off x="548640" y="6400800"/>
+            <a:ext cx="7315200" cy="365760"/>
+          </a:xfrm>
+          <a:prstGeom prst="rect">
+            <a:avLst/>
+          </a:prstGeom>
+          <a:noFill/>
+        </p:spPr>
+        <p:txBody>
+          <a:bodyPr wrap="square" anchor="t">
+            <a:spAutoFit/>
+          </a:bodyPr>
+          <a:lstStyle/>
+          <a:p>
+            <a:pPr algn="l">
+              <a:spcBef>
+                <a:spcPts val="0"/>
+              </a:spcBef>
+              <a:spcAft>
+                <a:spcPts val="0"/>
+              </a:spcAft>
+            </a:pPr>
+            <a:r>
               <a:rPr sz="1000" b="0">
                 <a:solidFill>
                   <a:srgbClr val="5B626D"/>
@@ -6862,7 +7655,7 @@
       </p:sp>
       <p:sp>
         <p:nvSpPr>
-          <p:cNvPr id="30" name="TextBox 29"/>
+          <p:cNvPr id="49" name="TextBox 48"/>
           <p:cNvSpPr txBox="1"/>
           <p:nvPr/>
         </p:nvSpPr>
@@ -7045,7 +7838,7 @@
                 </a:solidFill>
                 <a:latin typeface="Calibri"/>
               </a:rPr>
-              <a:t>ROADMAP</a:t>
+              <a:t>MEASURED RESULTS</a:t>
             </a:r>
           </a:p>
           <a:p>
@@ -7064,7 +7857,7 @@
                 </a:solidFill>
                 <a:latin typeface="Calibri"/>
               </a:rPr>
-              <a:t>Where we are</a:t>
+              <a:t>PageSpeed at a glance — every page, far faster</a:t>
             </a:r>
           </a:p>
         </p:txBody>
@@ -7115,20 +7908,62 @@
       </p:sp>
       <p:sp>
         <p:nvSpPr>
-          <p:cNvPr id="6" name="Rectangle 5"/>
+          <p:cNvPr id="6" name="TextBox 5"/>
+          <p:cNvSpPr txBox="1"/>
+          <p:nvPr/>
+        </p:nvSpPr>
+        <p:spPr>
+          <a:xfrm>
+            <a:off x="548640" y="1371600"/>
+            <a:ext cx="11155680" cy="457200"/>
+          </a:xfrm>
+          <a:prstGeom prst="rect">
+            <a:avLst/>
+          </a:prstGeom>
+          <a:noFill/>
+        </p:spPr>
+        <p:txBody>
+          <a:bodyPr wrap="square" anchor="t">
+            <a:spAutoFit/>
+          </a:bodyPr>
+          <a:lstStyle/>
+          <a:p>
+            <a:pPr algn="l">
+              <a:spcBef>
+                <a:spcPts val="0"/>
+              </a:spcBef>
+              <a:spcAft>
+                <a:spcPts val="0"/>
+              </a:spcAft>
+            </a:pPr>
+            <a:r>
+              <a:rPr sz="1300" b="0">
+                <a:solidFill>
+                  <a:srgbClr val="5B626D"/>
+                </a:solidFill>
+                <a:latin typeface="Calibri"/>
+              </a:rPr>
+              <a:t>Google Lighthouse performance score (0–100), old site vs new, Jun 2026.</a:t>
+            </a:r>
+          </a:p>
+        </p:txBody>
+      </p:sp>
+      <p:sp>
+        <p:nvSpPr>
+          <p:cNvPr id="7" name="Rectangle 6"/>
           <p:cNvSpPr/>
           <p:nvPr/>
         </p:nvSpPr>
         <p:spPr>
           <a:xfrm>
-            <a:off x="548640" y="1645920"/>
-            <a:ext cx="685800" cy="777240"/>
+            <a:off x="548640" y="1965960"/>
+            <a:ext cx="3291840" cy="502920"/>
           </a:xfrm>
           <a:prstGeom prst="rect">
             <a:avLst/>
           </a:prstGeom>
           <a:solidFill>
-            <a:srgbClr val="1D4ED8"/>
+            <a:srgbClr val="0B0B0C"/>
           </a:solidFill>
           <a:ln>
             <a:noFill/>
@@ -7159,14 +7994,14 @@
       </p:sp>
       <p:sp>
         <p:nvSpPr>
-          <p:cNvPr id="7" name="TextBox 6"/>
+          <p:cNvPr id="8" name="TextBox 7"/>
           <p:cNvSpPr txBox="1"/>
           <p:nvPr/>
         </p:nvSpPr>
         <p:spPr>
           <a:xfrm>
-            <a:off x="548640" y="1645920"/>
-            <a:ext cx="685800" cy="777240"/>
+            <a:off x="548640" y="1965960"/>
+            <a:ext cx="3291840" cy="502920"/>
           </a:xfrm>
           <a:prstGeom prst="rect">
             <a:avLst/>
@@ -7188,27 +8023,199 @@
               </a:spcAft>
             </a:pPr>
             <a:r>
-              <a:rPr sz="2600" b="1">
+              <a:rPr sz="1300" b="1">
                 <a:solidFill>
                   <a:srgbClr val="FFFFFF"/>
                 </a:solidFill>
                 <a:latin typeface="Calibri"/>
               </a:rPr>
-              <a:t>1</a:t>
-            </a:r>
-          </a:p>
-        </p:txBody>
-      </p:sp>
-      <p:sp>
-        <p:nvSpPr>
-          <p:cNvPr id="8" name="Rectangle 7"/>
+              <a:t/>
+            </a:r>
+          </a:p>
+        </p:txBody>
+      </p:sp>
+      <p:sp>
+        <p:nvSpPr>
+          <p:cNvPr id="9" name="Rectangle 8"/>
           <p:cNvSpPr/>
           <p:nvPr/>
         </p:nvSpPr>
         <p:spPr>
           <a:xfrm>
-            <a:off x="1325880" y="1645920"/>
-            <a:ext cx="10287000" cy="777240"/>
+            <a:off x="4023360" y="1965960"/>
+            <a:ext cx="3611880" cy="502920"/>
+          </a:xfrm>
+          <a:prstGeom prst="rect">
+            <a:avLst/>
+          </a:prstGeom>
+          <a:solidFill>
+            <a:srgbClr val="0B0B0C"/>
+          </a:solidFill>
+          <a:ln>
+            <a:noFill/>
+          </a:ln>
+          <a:effectLst/>
+        </p:spPr>
+        <p:style>
+          <a:lnRef idx="1">
+            <a:schemeClr val="accent1"/>
+          </a:lnRef>
+          <a:fillRef idx="3">
+            <a:schemeClr val="accent1"/>
+          </a:fillRef>
+          <a:effectRef idx="2">
+            <a:schemeClr val="accent1"/>
+          </a:effectRef>
+          <a:fontRef idx="minor">
+            <a:schemeClr val="lt1"/>
+          </a:fontRef>
+        </p:style>
+        <p:txBody>
+          <a:bodyPr rtlCol="0" anchor="ctr"/>
+          <a:lstStyle/>
+          <a:p>
+            <a:pPr algn="ctr"/>
+          </a:p>
+        </p:txBody>
+      </p:sp>
+      <p:sp>
+        <p:nvSpPr>
+          <p:cNvPr id="10" name="TextBox 9"/>
+          <p:cNvSpPr txBox="1"/>
+          <p:nvPr/>
+        </p:nvSpPr>
+        <p:spPr>
+          <a:xfrm>
+            <a:off x="4023360" y="1965960"/>
+            <a:ext cx="3611880" cy="502920"/>
+          </a:xfrm>
+          <a:prstGeom prst="rect">
+            <a:avLst/>
+          </a:prstGeom>
+          <a:noFill/>
+        </p:spPr>
+        <p:txBody>
+          <a:bodyPr wrap="square" anchor="ctr">
+            <a:spAutoFit/>
+          </a:bodyPr>
+          <a:lstStyle/>
+          <a:p>
+            <a:pPr algn="ctr">
+              <a:spcBef>
+                <a:spcPts val="0"/>
+              </a:spcBef>
+              <a:spcAft>
+                <a:spcPts val="0"/>
+              </a:spcAft>
+            </a:pPr>
+            <a:r>
+              <a:rPr sz="1300" b="1">
+                <a:solidFill>
+                  <a:srgbClr val="FFFFFF"/>
+                </a:solidFill>
+                <a:latin typeface="Calibri"/>
+              </a:rPr>
+              <a:t>MOBILE  (old → new)</a:t>
+            </a:r>
+          </a:p>
+        </p:txBody>
+      </p:sp>
+      <p:sp>
+        <p:nvSpPr>
+          <p:cNvPr id="11" name="Rectangle 10"/>
+          <p:cNvSpPr/>
+          <p:nvPr/>
+        </p:nvSpPr>
+        <p:spPr>
+          <a:xfrm>
+            <a:off x="7818120" y="1965960"/>
+            <a:ext cx="3611880" cy="502920"/>
+          </a:xfrm>
+          <a:prstGeom prst="rect">
+            <a:avLst/>
+          </a:prstGeom>
+          <a:solidFill>
+            <a:srgbClr val="0B0B0C"/>
+          </a:solidFill>
+          <a:ln>
+            <a:noFill/>
+          </a:ln>
+          <a:effectLst/>
+        </p:spPr>
+        <p:style>
+          <a:lnRef idx="1">
+            <a:schemeClr val="accent1"/>
+          </a:lnRef>
+          <a:fillRef idx="3">
+            <a:schemeClr val="accent1"/>
+          </a:fillRef>
+          <a:effectRef idx="2">
+            <a:schemeClr val="accent1"/>
+          </a:effectRef>
+          <a:fontRef idx="minor">
+            <a:schemeClr val="lt1"/>
+          </a:fontRef>
+        </p:style>
+        <p:txBody>
+          <a:bodyPr rtlCol="0" anchor="ctr"/>
+          <a:lstStyle/>
+          <a:p>
+            <a:pPr algn="ctr"/>
+          </a:p>
+        </p:txBody>
+      </p:sp>
+      <p:sp>
+        <p:nvSpPr>
+          <p:cNvPr id="12" name="TextBox 11"/>
+          <p:cNvSpPr txBox="1"/>
+          <p:nvPr/>
+        </p:nvSpPr>
+        <p:spPr>
+          <a:xfrm>
+            <a:off x="7818120" y="1965960"/>
+            <a:ext cx="3611880" cy="502920"/>
+          </a:xfrm>
+          <a:prstGeom prst="rect">
+            <a:avLst/>
+          </a:prstGeom>
+          <a:noFill/>
+        </p:spPr>
+        <p:txBody>
+          <a:bodyPr wrap="square" anchor="ctr">
+            <a:spAutoFit/>
+          </a:bodyPr>
+          <a:lstStyle/>
+          <a:p>
+            <a:pPr algn="ctr">
+              <a:spcBef>
+                <a:spcPts val="0"/>
+              </a:spcBef>
+              <a:spcAft>
+                <a:spcPts val="0"/>
+              </a:spcAft>
+            </a:pPr>
+            <a:r>
+              <a:rPr sz="1300" b="1">
+                <a:solidFill>
+                  <a:srgbClr val="FFFFFF"/>
+                </a:solidFill>
+                <a:latin typeface="Calibri"/>
+              </a:rPr>
+              <a:t>DESKTOP  (old → new)</a:t>
+            </a:r>
+          </a:p>
+        </p:txBody>
+      </p:sp>
+      <p:sp>
+        <p:nvSpPr>
+          <p:cNvPr id="13" name="Rectangle 12"/>
+          <p:cNvSpPr/>
+          <p:nvPr/>
+        </p:nvSpPr>
+        <p:spPr>
+          <a:xfrm>
+            <a:off x="548640" y="2606040"/>
+            <a:ext cx="3291840" cy="1051560"/>
           </a:xfrm>
           <a:prstGeom prst="rect">
             <a:avLst/>
@@ -7245,14 +8252,14 @@
       </p:sp>
       <p:sp>
         <p:nvSpPr>
-          <p:cNvPr id="9" name="TextBox 8"/>
+          <p:cNvPr id="14" name="TextBox 13"/>
           <p:cNvSpPr txBox="1"/>
           <p:nvPr/>
         </p:nvSpPr>
         <p:spPr>
           <a:xfrm>
-            <a:off x="1554480" y="1719072"/>
-            <a:ext cx="9875520" cy="685800"/>
+            <a:off x="731520" y="2606040"/>
+            <a:ext cx="3017520" cy="1051560"/>
           </a:xfrm>
           <a:prstGeom prst="rect">
             <a:avLst/>
@@ -7270,136 +8277,31 @@
                 <a:spcPts val="0"/>
               </a:spcBef>
               <a:spcAft>
-                <a:spcPts val="200"/>
-              </a:spcAft>
-            </a:pPr>
-            <a:r>
-              <a:rPr sz="1600" b="1">
+                <a:spcPts val="0"/>
+              </a:spcAft>
+            </a:pPr>
+            <a:r>
+              <a:rPr sz="1700" b="1">
                 <a:solidFill>
                   <a:srgbClr val="0B0B0C"/>
                 </a:solidFill>
                 <a:latin typeface="Calibri"/>
               </a:rPr>
-              <a:t>Recreate ricoman.com exactly on the new platform</a:t>
-            </a:r>
-          </a:p>
-          <a:p>
-            <a:pPr algn="l">
-              <a:spcBef>
-                <a:spcPts val="0"/>
-              </a:spcBef>
-              <a:spcAft>
-                <a:spcPts val="0"/>
-              </a:spcAft>
-            </a:pPr>
-            <a:r>
-              <a:rPr sz="1250" b="0">
-                <a:solidFill>
-                  <a:srgbClr val="5B626D"/>
-                </a:solidFill>
-                <a:latin typeface="Calibri"/>
-              </a:rPr>
-              <a:t>In progress — confirming each page matches live</a:t>
-            </a:r>
-          </a:p>
-        </p:txBody>
-      </p:sp>
-      <p:sp>
-        <p:nvSpPr>
-          <p:cNvPr id="10" name="Rectangle 9"/>
+              <a:t>Homepage</a:t>
+            </a:r>
+          </a:p>
+        </p:txBody>
+      </p:sp>
+      <p:sp>
+        <p:nvSpPr>
+          <p:cNvPr id="15" name="Rectangle 14"/>
           <p:cNvSpPr/>
           <p:nvPr/>
         </p:nvSpPr>
         <p:spPr>
           <a:xfrm>
-            <a:off x="548640" y="2560320"/>
-            <a:ext cx="685800" cy="777240"/>
-          </a:xfrm>
-          <a:prstGeom prst="rect">
-            <a:avLst/>
-          </a:prstGeom>
-          <a:solidFill>
-            <a:srgbClr val="1D4ED8"/>
-          </a:solidFill>
-          <a:ln>
-            <a:noFill/>
-          </a:ln>
-          <a:effectLst/>
-        </p:spPr>
-        <p:style>
-          <a:lnRef idx="1">
-            <a:schemeClr val="accent1"/>
-          </a:lnRef>
-          <a:fillRef idx="3">
-            <a:schemeClr val="accent1"/>
-          </a:fillRef>
-          <a:effectRef idx="2">
-            <a:schemeClr val="accent1"/>
-          </a:effectRef>
-          <a:fontRef idx="minor">
-            <a:schemeClr val="lt1"/>
-          </a:fontRef>
-        </p:style>
-        <p:txBody>
-          <a:bodyPr rtlCol="0" anchor="ctr"/>
-          <a:lstStyle/>
-          <a:p>
-            <a:pPr algn="ctr"/>
-          </a:p>
-        </p:txBody>
-      </p:sp>
-      <p:sp>
-        <p:nvSpPr>
-          <p:cNvPr id="11" name="TextBox 10"/>
-          <p:cNvSpPr txBox="1"/>
-          <p:nvPr/>
-        </p:nvSpPr>
-        <p:spPr>
-          <a:xfrm>
-            <a:off x="548640" y="2560320"/>
-            <a:ext cx="685800" cy="777240"/>
-          </a:xfrm>
-          <a:prstGeom prst="rect">
-            <a:avLst/>
-          </a:prstGeom>
-          <a:noFill/>
-        </p:spPr>
-        <p:txBody>
-          <a:bodyPr wrap="square" anchor="ctr">
-            <a:spAutoFit/>
-          </a:bodyPr>
-          <a:lstStyle/>
-          <a:p>
-            <a:pPr algn="ctr">
-              <a:spcBef>
-                <a:spcPts val="0"/>
-              </a:spcBef>
-              <a:spcAft>
-                <a:spcPts val="0"/>
-              </a:spcAft>
-            </a:pPr>
-            <a:r>
-              <a:rPr sz="2600" b="1">
-                <a:solidFill>
-                  <a:srgbClr val="FFFFFF"/>
-                </a:solidFill>
-                <a:latin typeface="Calibri"/>
-              </a:rPr>
-              <a:t>2</a:t>
-            </a:r>
-          </a:p>
-        </p:txBody>
-      </p:sp>
-      <p:sp>
-        <p:nvSpPr>
-          <p:cNvPr id="12" name="Rectangle 11"/>
-          <p:cNvSpPr/>
-          <p:nvPr/>
-        </p:nvSpPr>
-        <p:spPr>
-          <a:xfrm>
-            <a:off x="1325880" y="2560320"/>
-            <a:ext cx="10287000" cy="777240"/>
+            <a:off x="4023360" y="2606040"/>
+            <a:ext cx="3611880" cy="1051560"/>
           </a:xfrm>
           <a:prstGeom prst="rect">
             <a:avLst/>
@@ -7436,14 +8338,14 @@
       </p:sp>
       <p:sp>
         <p:nvSpPr>
-          <p:cNvPr id="13" name="TextBox 12"/>
+          <p:cNvPr id="16" name="TextBox 15"/>
           <p:cNvSpPr txBox="1"/>
           <p:nvPr/>
         </p:nvSpPr>
         <p:spPr>
           <a:xfrm>
-            <a:off x="1554480" y="2633472"/>
-            <a:ext cx="9875520" cy="685800"/>
+            <a:off x="4297680" y="2606040"/>
+            <a:ext cx="1188720" cy="1051560"/>
           </a:xfrm>
           <a:prstGeom prst="rect">
             <a:avLst/>
@@ -7456,99 +8358,36 @@
           </a:bodyPr>
           <a:lstStyle/>
           <a:p>
-            <a:pPr algn="l">
-              <a:spcBef>
-                <a:spcPts val="0"/>
-              </a:spcBef>
-              <a:spcAft>
-                <a:spcPts val="200"/>
-              </a:spcAft>
-            </a:pPr>
-            <a:r>
-              <a:rPr sz="1600" b="1">
-                <a:solidFill>
-                  <a:srgbClr val="0B0B0C"/>
-                </a:solidFill>
-                <a:latin typeface="Calibri"/>
-              </a:rPr>
-              <a:t>Check &amp; enhance SEO</a:t>
-            </a:r>
-          </a:p>
-          <a:p>
-            <a:pPr algn="l">
-              <a:spcBef>
-                <a:spcPts val="0"/>
-              </a:spcBef>
-              <a:spcAft>
-                <a:spcPts val="0"/>
-              </a:spcAft>
-            </a:pPr>
-            <a:r>
-              <a:rPr sz="1250" b="0">
-                <a:solidFill>
-                  <a:srgbClr val="5B626D"/>
-                </a:solidFill>
-                <a:latin typeface="Calibri"/>
-              </a:rPr>
-              <a:t>Foundations + audit tooling built</a:t>
-            </a:r>
-          </a:p>
-        </p:txBody>
-      </p:sp>
-      <p:sp>
-        <p:nvSpPr>
-          <p:cNvPr id="14" name="Rectangle 13"/>
-          <p:cNvSpPr/>
-          <p:nvPr/>
-        </p:nvSpPr>
-        <p:spPr>
-          <a:xfrm>
-            <a:off x="548640" y="3474720"/>
-            <a:ext cx="685800" cy="777240"/>
-          </a:xfrm>
-          <a:prstGeom prst="rect">
-            <a:avLst/>
-          </a:prstGeom>
-          <a:solidFill>
-            <a:srgbClr val="5B626D"/>
-          </a:solidFill>
-          <a:ln>
-            <a:noFill/>
-          </a:ln>
-          <a:effectLst/>
-        </p:spPr>
-        <p:style>
-          <a:lnRef idx="1">
-            <a:schemeClr val="accent1"/>
-          </a:lnRef>
-          <a:fillRef idx="3">
-            <a:schemeClr val="accent1"/>
-          </a:fillRef>
-          <a:effectRef idx="2">
-            <a:schemeClr val="accent1"/>
-          </a:effectRef>
-          <a:fontRef idx="minor">
-            <a:schemeClr val="lt1"/>
-          </a:fontRef>
-        </p:style>
-        <p:txBody>
-          <a:bodyPr rtlCol="0" anchor="ctr"/>
-          <a:lstStyle/>
-          <a:p>
-            <a:pPr algn="ctr"/>
-          </a:p>
-        </p:txBody>
-      </p:sp>
-      <p:sp>
-        <p:nvSpPr>
-          <p:cNvPr id="15" name="TextBox 14"/>
+            <a:pPr algn="ctr">
+              <a:spcBef>
+                <a:spcPts val="0"/>
+              </a:spcBef>
+              <a:spcAft>
+                <a:spcPts val="0"/>
+              </a:spcAft>
+            </a:pPr>
+            <a:r>
+              <a:rPr sz="4000" b="1">
+                <a:solidFill>
+                  <a:srgbClr val="B32D2E"/>
+                </a:solidFill>
+                <a:latin typeface="Calibri"/>
+              </a:rPr>
+              <a:t>32</a:t>
+            </a:r>
+          </a:p>
+        </p:txBody>
+      </p:sp>
+      <p:sp>
+        <p:nvSpPr>
+          <p:cNvPr id="17" name="TextBox 16"/>
           <p:cNvSpPr txBox="1"/>
           <p:nvPr/>
         </p:nvSpPr>
         <p:spPr>
           <a:xfrm>
-            <a:off x="548640" y="3474720"/>
-            <a:ext cx="685800" cy="777240"/>
+            <a:off x="5349240" y="2606040"/>
+            <a:ext cx="914400" cy="1051560"/>
           </a:xfrm>
           <a:prstGeom prst="rect">
             <a:avLst/>
@@ -7572,25 +8411,67 @@
             <a:r>
               <a:rPr sz="2600" b="1">
                 <a:solidFill>
-                  <a:srgbClr val="FFFFFF"/>
-                </a:solidFill>
-                <a:latin typeface="Calibri"/>
-              </a:rPr>
-              <a:t>3</a:t>
-            </a:r>
-          </a:p>
-        </p:txBody>
-      </p:sp>
-      <p:sp>
-        <p:nvSpPr>
-          <p:cNvPr id="16" name="Rectangle 15"/>
+                  <a:srgbClr val="1D4ED8"/>
+                </a:solidFill>
+                <a:latin typeface="Calibri"/>
+              </a:rPr>
+              <a:t>→</a:t>
+            </a:r>
+          </a:p>
+        </p:txBody>
+      </p:sp>
+      <p:sp>
+        <p:nvSpPr>
+          <p:cNvPr id="18" name="TextBox 17"/>
+          <p:cNvSpPr txBox="1"/>
+          <p:nvPr/>
+        </p:nvSpPr>
+        <p:spPr>
+          <a:xfrm>
+            <a:off x="6309360" y="2606040"/>
+            <a:ext cx="1188720" cy="1051560"/>
+          </a:xfrm>
+          <a:prstGeom prst="rect">
+            <a:avLst/>
+          </a:prstGeom>
+          <a:noFill/>
+        </p:spPr>
+        <p:txBody>
+          <a:bodyPr wrap="square" anchor="ctr">
+            <a:spAutoFit/>
+          </a:bodyPr>
+          <a:lstStyle/>
+          <a:p>
+            <a:pPr algn="ctr">
+              <a:spcBef>
+                <a:spcPts val="0"/>
+              </a:spcBef>
+              <a:spcAft>
+                <a:spcPts val="0"/>
+              </a:spcAft>
+            </a:pPr>
+            <a:r>
+              <a:rPr sz="4000" b="1">
+                <a:solidFill>
+                  <a:srgbClr val="1A7F37"/>
+                </a:solidFill>
+                <a:latin typeface="Calibri"/>
+              </a:rPr>
+              <a:t>93</a:t>
+            </a:r>
+          </a:p>
+        </p:txBody>
+      </p:sp>
+      <p:sp>
+        <p:nvSpPr>
+          <p:cNvPr id="19" name="Rectangle 18"/>
           <p:cNvSpPr/>
           <p:nvPr/>
         </p:nvSpPr>
         <p:spPr>
           <a:xfrm>
-            <a:off x="1325880" y="3474720"/>
-            <a:ext cx="10287000" cy="777240"/>
+            <a:off x="7818120" y="2606040"/>
+            <a:ext cx="3611880" cy="1051560"/>
           </a:xfrm>
           <a:prstGeom prst="rect">
             <a:avLst/>
@@ -7627,14 +8508,14 @@
       </p:sp>
       <p:sp>
         <p:nvSpPr>
-          <p:cNvPr id="17" name="TextBox 16"/>
+          <p:cNvPr id="20" name="TextBox 19"/>
           <p:cNvSpPr txBox="1"/>
           <p:nvPr/>
         </p:nvSpPr>
         <p:spPr>
           <a:xfrm>
-            <a:off x="1554480" y="3547872"/>
-            <a:ext cx="9875520" cy="685800"/>
+            <a:off x="8092440" y="2606040"/>
+            <a:ext cx="1188720" cy="1051560"/>
           </a:xfrm>
           <a:prstGeom prst="rect">
             <a:avLst/>
@@ -7647,99 +8528,36 @@
           </a:bodyPr>
           <a:lstStyle/>
           <a:p>
-            <a:pPr algn="l">
-              <a:spcBef>
-                <a:spcPts val="0"/>
-              </a:spcBef>
-              <a:spcAft>
-                <a:spcPts val="200"/>
-              </a:spcAft>
-            </a:pPr>
-            <a:r>
-              <a:rPr sz="1600" b="1">
-                <a:solidFill>
-                  <a:srgbClr val="0B0B0C"/>
-                </a:solidFill>
-                <a:latin typeface="Calibri"/>
-              </a:rPr>
-              <a:t>Launch — migrate the new site to live</a:t>
-            </a:r>
-          </a:p>
-          <a:p>
-            <a:pPr algn="l">
-              <a:spcBef>
-                <a:spcPts val="0"/>
-              </a:spcBef>
-              <a:spcAft>
-                <a:spcPts val="0"/>
-              </a:spcAft>
-            </a:pPr>
-            <a:r>
-              <a:rPr sz="1250" b="0">
-                <a:solidFill>
-                  <a:srgbClr val="5B626D"/>
-                </a:solidFill>
-                <a:latin typeface="Calibri"/>
-              </a:rPr>
-              <a:t>Runbook prepared</a:t>
-            </a:r>
-          </a:p>
-        </p:txBody>
-      </p:sp>
-      <p:sp>
-        <p:nvSpPr>
-          <p:cNvPr id="18" name="Rectangle 17"/>
-          <p:cNvSpPr/>
-          <p:nvPr/>
-        </p:nvSpPr>
-        <p:spPr>
-          <a:xfrm>
-            <a:off x="548640" y="4389120"/>
-            <a:ext cx="685800" cy="777240"/>
-          </a:xfrm>
-          <a:prstGeom prst="rect">
-            <a:avLst/>
-          </a:prstGeom>
-          <a:solidFill>
-            <a:srgbClr val="1A7F37"/>
-          </a:solidFill>
-          <a:ln>
-            <a:noFill/>
-          </a:ln>
-          <a:effectLst/>
-        </p:spPr>
-        <p:style>
-          <a:lnRef idx="1">
-            <a:schemeClr val="accent1"/>
-          </a:lnRef>
-          <a:fillRef idx="3">
-            <a:schemeClr val="accent1"/>
-          </a:fillRef>
-          <a:effectRef idx="2">
-            <a:schemeClr val="accent1"/>
-          </a:effectRef>
-          <a:fontRef idx="minor">
-            <a:schemeClr val="lt1"/>
-          </a:fontRef>
-        </p:style>
-        <p:txBody>
-          <a:bodyPr rtlCol="0" anchor="ctr"/>
-          <a:lstStyle/>
-          <a:p>
-            <a:pPr algn="ctr"/>
-          </a:p>
-        </p:txBody>
-      </p:sp>
-      <p:sp>
-        <p:nvSpPr>
-          <p:cNvPr id="19" name="TextBox 18"/>
+            <a:pPr algn="ctr">
+              <a:spcBef>
+                <a:spcPts val="0"/>
+              </a:spcBef>
+              <a:spcAft>
+                <a:spcPts val="0"/>
+              </a:spcAft>
+            </a:pPr>
+            <a:r>
+              <a:rPr sz="4000" b="1">
+                <a:solidFill>
+                  <a:srgbClr val="996800"/>
+                </a:solidFill>
+                <a:latin typeface="Calibri"/>
+              </a:rPr>
+              <a:t>68</a:t>
+            </a:r>
+          </a:p>
+        </p:txBody>
+      </p:sp>
+      <p:sp>
+        <p:nvSpPr>
+          <p:cNvPr id="21" name="TextBox 20"/>
           <p:cNvSpPr txBox="1"/>
           <p:nvPr/>
         </p:nvSpPr>
         <p:spPr>
           <a:xfrm>
-            <a:off x="548640" y="4389120"/>
-            <a:ext cx="685800" cy="777240"/>
+            <a:off x="9144000" y="2606040"/>
+            <a:ext cx="914400" cy="1051560"/>
           </a:xfrm>
           <a:prstGeom prst="rect">
             <a:avLst/>
@@ -7763,25 +8581,67 @@
             <a:r>
               <a:rPr sz="2600" b="1">
                 <a:solidFill>
-                  <a:srgbClr val="FFFFFF"/>
-                </a:solidFill>
-                <a:latin typeface="Calibri"/>
-              </a:rPr>
-              <a:t>4</a:t>
-            </a:r>
-          </a:p>
-        </p:txBody>
-      </p:sp>
-      <p:sp>
-        <p:nvSpPr>
-          <p:cNvPr id="20" name="Rectangle 19"/>
+                  <a:srgbClr val="1D4ED8"/>
+                </a:solidFill>
+                <a:latin typeface="Calibri"/>
+              </a:rPr>
+              <a:t>→</a:t>
+            </a:r>
+          </a:p>
+        </p:txBody>
+      </p:sp>
+      <p:sp>
+        <p:nvSpPr>
+          <p:cNvPr id="22" name="TextBox 21"/>
+          <p:cNvSpPr txBox="1"/>
+          <p:nvPr/>
+        </p:nvSpPr>
+        <p:spPr>
+          <a:xfrm>
+            <a:off x="10104120" y="2606040"/>
+            <a:ext cx="1188720" cy="1051560"/>
+          </a:xfrm>
+          <a:prstGeom prst="rect">
+            <a:avLst/>
+          </a:prstGeom>
+          <a:noFill/>
+        </p:spPr>
+        <p:txBody>
+          <a:bodyPr wrap="square" anchor="ctr">
+            <a:spAutoFit/>
+          </a:bodyPr>
+          <a:lstStyle/>
+          <a:p>
+            <a:pPr algn="ctr">
+              <a:spcBef>
+                <a:spcPts val="0"/>
+              </a:spcBef>
+              <a:spcAft>
+                <a:spcPts val="0"/>
+              </a:spcAft>
+            </a:pPr>
+            <a:r>
+              <a:rPr sz="4000" b="1">
+                <a:solidFill>
+                  <a:srgbClr val="1A7F37"/>
+                </a:solidFill>
+                <a:latin typeface="Calibri"/>
+              </a:rPr>
+              <a:t>96</a:t>
+            </a:r>
+          </a:p>
+        </p:txBody>
+      </p:sp>
+      <p:sp>
+        <p:nvSpPr>
+          <p:cNvPr id="23" name="Rectangle 22"/>
           <p:cNvSpPr/>
           <p:nvPr/>
         </p:nvSpPr>
         <p:spPr>
           <a:xfrm>
-            <a:off x="1325880" y="4389120"/>
-            <a:ext cx="10287000" cy="777240"/>
+            <a:off x="548640" y="3794760"/>
+            <a:ext cx="3291840" cy="1051560"/>
           </a:xfrm>
           <a:prstGeom prst="rect">
             <a:avLst/>
@@ -7818,14 +8678,14 @@
       </p:sp>
       <p:sp>
         <p:nvSpPr>
-          <p:cNvPr id="21" name="TextBox 20"/>
+          <p:cNvPr id="24" name="TextBox 23"/>
           <p:cNvSpPr txBox="1"/>
           <p:nvPr/>
         </p:nvSpPr>
         <p:spPr>
           <a:xfrm>
-            <a:off x="1554480" y="4462272"/>
-            <a:ext cx="9875520" cy="685800"/>
+            <a:off x="731520" y="3794760"/>
+            <a:ext cx="3017520" cy="1051560"/>
           </a:xfrm>
           <a:prstGeom prst="rect">
             <a:avLst/>
@@ -7843,136 +8703,31 @@
                 <a:spcPts val="0"/>
               </a:spcBef>
               <a:spcAft>
-                <a:spcPts val="200"/>
-              </a:spcAft>
-            </a:pPr>
-            <a:r>
-              <a:rPr sz="1600" b="1">
+                <a:spcPts val="0"/>
+              </a:spcAft>
+            </a:pPr>
+            <a:r>
+              <a:rPr sz="1700" b="1">
                 <a:solidFill>
                   <a:srgbClr val="0B0B0C"/>
                 </a:solidFill>
                 <a:latin typeface="Calibri"/>
               </a:rPr>
-              <a:t>Feature &amp; enhanced pages</a:t>
-            </a:r>
-          </a:p>
-          <a:p>
-            <a:pPr algn="l">
-              <a:spcBef>
-                <a:spcPts val="0"/>
-              </a:spcBef>
-              <a:spcAft>
-                <a:spcPts val="0"/>
-              </a:spcAft>
-            </a:pPr>
-            <a:r>
-              <a:rPr sz="1250" b="0">
-                <a:solidFill>
-                  <a:srgbClr val="5B626D"/>
-                </a:solidFill>
-                <a:latin typeface="Calibri"/>
-              </a:rPr>
-              <a:t>Built (Casambi, Fire Safety, Trade, …)</a:t>
-            </a:r>
-          </a:p>
-        </p:txBody>
-      </p:sp>
-      <p:sp>
-        <p:nvSpPr>
-          <p:cNvPr id="22" name="Rectangle 21"/>
+              <a:t>Product page</a:t>
+            </a:r>
+          </a:p>
+        </p:txBody>
+      </p:sp>
+      <p:sp>
+        <p:nvSpPr>
+          <p:cNvPr id="25" name="Rectangle 24"/>
           <p:cNvSpPr/>
           <p:nvPr/>
         </p:nvSpPr>
         <p:spPr>
           <a:xfrm>
-            <a:off x="548640" y="5303520"/>
-            <a:ext cx="685800" cy="777240"/>
-          </a:xfrm>
-          <a:prstGeom prst="rect">
-            <a:avLst/>
-          </a:prstGeom>
-          <a:solidFill>
-            <a:srgbClr val="5B626D"/>
-          </a:solidFill>
-          <a:ln>
-            <a:noFill/>
-          </a:ln>
-          <a:effectLst/>
-        </p:spPr>
-        <p:style>
-          <a:lnRef idx="1">
-            <a:schemeClr val="accent1"/>
-          </a:lnRef>
-          <a:fillRef idx="3">
-            <a:schemeClr val="accent1"/>
-          </a:fillRef>
-          <a:effectRef idx="2">
-            <a:schemeClr val="accent1"/>
-          </a:effectRef>
-          <a:fontRef idx="minor">
-            <a:schemeClr val="lt1"/>
-          </a:fontRef>
-        </p:style>
-        <p:txBody>
-          <a:bodyPr rtlCol="0" anchor="ctr"/>
-          <a:lstStyle/>
-          <a:p>
-            <a:pPr algn="ctr"/>
-          </a:p>
-        </p:txBody>
-      </p:sp>
-      <p:sp>
-        <p:nvSpPr>
-          <p:cNvPr id="23" name="TextBox 22"/>
-          <p:cNvSpPr txBox="1"/>
-          <p:nvPr/>
-        </p:nvSpPr>
-        <p:spPr>
-          <a:xfrm>
-            <a:off x="548640" y="5303520"/>
-            <a:ext cx="685800" cy="777240"/>
-          </a:xfrm>
-          <a:prstGeom prst="rect">
-            <a:avLst/>
-          </a:prstGeom>
-          <a:noFill/>
-        </p:spPr>
-        <p:txBody>
-          <a:bodyPr wrap="square" anchor="ctr">
-            <a:spAutoFit/>
-          </a:bodyPr>
-          <a:lstStyle/>
-          <a:p>
-            <a:pPr algn="ctr">
-              <a:spcBef>
-                <a:spcPts val="0"/>
-              </a:spcBef>
-              <a:spcAft>
-                <a:spcPts val="0"/>
-              </a:spcAft>
-            </a:pPr>
-            <a:r>
-              <a:rPr sz="2600" b="1">
-                <a:solidFill>
-                  <a:srgbClr val="FFFFFF"/>
-                </a:solidFill>
-                <a:latin typeface="Calibri"/>
-              </a:rPr>
-              <a:t>5</a:t>
-            </a:r>
-          </a:p>
-        </p:txBody>
-      </p:sp>
-      <p:sp>
-        <p:nvSpPr>
-          <p:cNvPr id="24" name="Rectangle 23"/>
-          <p:cNvSpPr/>
-          <p:nvPr/>
-        </p:nvSpPr>
-        <p:spPr>
-          <a:xfrm>
-            <a:off x="1325880" y="5303520"/>
-            <a:ext cx="10287000" cy="777240"/>
+            <a:off x="4023360" y="3794760"/>
+            <a:ext cx="3611880" cy="1051560"/>
           </a:xfrm>
           <a:prstGeom prst="rect">
             <a:avLst/>
@@ -8009,14 +8764,14 @@
       </p:sp>
       <p:sp>
         <p:nvSpPr>
-          <p:cNvPr id="25" name="TextBox 24"/>
+          <p:cNvPr id="26" name="TextBox 25"/>
           <p:cNvSpPr txBox="1"/>
           <p:nvPr/>
         </p:nvSpPr>
         <p:spPr>
           <a:xfrm>
-            <a:off x="1554480" y="5376672"/>
-            <a:ext cx="9875520" cy="685800"/>
+            <a:off x="4297680" y="3794760"/>
+            <a:ext cx="1188720" cy="1051560"/>
           </a:xfrm>
           <a:prstGeom prst="rect">
             <a:avLst/>
@@ -8029,48 +8784,369 @@
           </a:bodyPr>
           <a:lstStyle/>
           <a:p>
+            <a:pPr algn="ctr">
+              <a:spcBef>
+                <a:spcPts val="0"/>
+              </a:spcBef>
+              <a:spcAft>
+                <a:spcPts val="0"/>
+              </a:spcAft>
+            </a:pPr>
+            <a:r>
+              <a:rPr sz="4000" b="1">
+                <a:solidFill>
+                  <a:srgbClr val="B32D2E"/>
+                </a:solidFill>
+                <a:latin typeface="Calibri"/>
+              </a:rPr>
+              <a:t>35</a:t>
+            </a:r>
+          </a:p>
+        </p:txBody>
+      </p:sp>
+      <p:sp>
+        <p:nvSpPr>
+          <p:cNvPr id="27" name="TextBox 26"/>
+          <p:cNvSpPr txBox="1"/>
+          <p:nvPr/>
+        </p:nvSpPr>
+        <p:spPr>
+          <a:xfrm>
+            <a:off x="5349240" y="3794760"/>
+            <a:ext cx="914400" cy="1051560"/>
+          </a:xfrm>
+          <a:prstGeom prst="rect">
+            <a:avLst/>
+          </a:prstGeom>
+          <a:noFill/>
+        </p:spPr>
+        <p:txBody>
+          <a:bodyPr wrap="square" anchor="ctr">
+            <a:spAutoFit/>
+          </a:bodyPr>
+          <a:lstStyle/>
+          <a:p>
+            <a:pPr algn="ctr">
+              <a:spcBef>
+                <a:spcPts val="0"/>
+              </a:spcBef>
+              <a:spcAft>
+                <a:spcPts val="0"/>
+              </a:spcAft>
+            </a:pPr>
+            <a:r>
+              <a:rPr sz="2600" b="1">
+                <a:solidFill>
+                  <a:srgbClr val="1D4ED8"/>
+                </a:solidFill>
+                <a:latin typeface="Calibri"/>
+              </a:rPr>
+              <a:t>→</a:t>
+            </a:r>
+          </a:p>
+        </p:txBody>
+      </p:sp>
+      <p:sp>
+        <p:nvSpPr>
+          <p:cNvPr id="28" name="TextBox 27"/>
+          <p:cNvSpPr txBox="1"/>
+          <p:nvPr/>
+        </p:nvSpPr>
+        <p:spPr>
+          <a:xfrm>
+            <a:off x="6309360" y="3794760"/>
+            <a:ext cx="1188720" cy="1051560"/>
+          </a:xfrm>
+          <a:prstGeom prst="rect">
+            <a:avLst/>
+          </a:prstGeom>
+          <a:noFill/>
+        </p:spPr>
+        <p:txBody>
+          <a:bodyPr wrap="square" anchor="ctr">
+            <a:spAutoFit/>
+          </a:bodyPr>
+          <a:lstStyle/>
+          <a:p>
+            <a:pPr algn="ctr">
+              <a:spcBef>
+                <a:spcPts val="0"/>
+              </a:spcBef>
+              <a:spcAft>
+                <a:spcPts val="0"/>
+              </a:spcAft>
+            </a:pPr>
+            <a:r>
+              <a:rPr sz="4000" b="1">
+                <a:solidFill>
+                  <a:srgbClr val="1A7F37"/>
+                </a:solidFill>
+                <a:latin typeface="Calibri"/>
+              </a:rPr>
+              <a:t>97</a:t>
+            </a:r>
+          </a:p>
+        </p:txBody>
+      </p:sp>
+      <p:sp>
+        <p:nvSpPr>
+          <p:cNvPr id="29" name="Rectangle 28"/>
+          <p:cNvSpPr/>
+          <p:nvPr/>
+        </p:nvSpPr>
+        <p:spPr>
+          <a:xfrm>
+            <a:off x="7818120" y="3794760"/>
+            <a:ext cx="3611880" cy="1051560"/>
+          </a:xfrm>
+          <a:prstGeom prst="rect">
+            <a:avLst/>
+          </a:prstGeom>
+          <a:solidFill>
+            <a:srgbClr val="F4F6F8"/>
+          </a:solidFill>
+          <a:ln>
+            <a:noFill/>
+          </a:ln>
+          <a:effectLst/>
+        </p:spPr>
+        <p:style>
+          <a:lnRef idx="1">
+            <a:schemeClr val="accent1"/>
+          </a:lnRef>
+          <a:fillRef idx="3">
+            <a:schemeClr val="accent1"/>
+          </a:fillRef>
+          <a:effectRef idx="2">
+            <a:schemeClr val="accent1"/>
+          </a:effectRef>
+          <a:fontRef idx="minor">
+            <a:schemeClr val="lt1"/>
+          </a:fontRef>
+        </p:style>
+        <p:txBody>
+          <a:bodyPr rtlCol="0" anchor="ctr"/>
+          <a:lstStyle/>
+          <a:p>
+            <a:pPr algn="ctr"/>
+          </a:p>
+        </p:txBody>
+      </p:sp>
+      <p:sp>
+        <p:nvSpPr>
+          <p:cNvPr id="30" name="TextBox 29"/>
+          <p:cNvSpPr txBox="1"/>
+          <p:nvPr/>
+        </p:nvSpPr>
+        <p:spPr>
+          <a:xfrm>
+            <a:off x="8092440" y="3794760"/>
+            <a:ext cx="1188720" cy="1051560"/>
+          </a:xfrm>
+          <a:prstGeom prst="rect">
+            <a:avLst/>
+          </a:prstGeom>
+          <a:noFill/>
+        </p:spPr>
+        <p:txBody>
+          <a:bodyPr wrap="square" anchor="ctr">
+            <a:spAutoFit/>
+          </a:bodyPr>
+          <a:lstStyle/>
+          <a:p>
+            <a:pPr algn="ctr">
+              <a:spcBef>
+                <a:spcPts val="0"/>
+              </a:spcBef>
+              <a:spcAft>
+                <a:spcPts val="0"/>
+              </a:spcAft>
+            </a:pPr>
+            <a:r>
+              <a:rPr sz="4000" b="1">
+                <a:solidFill>
+                  <a:srgbClr val="996800"/>
+                </a:solidFill>
+                <a:latin typeface="Calibri"/>
+              </a:rPr>
+              <a:t>56</a:t>
+            </a:r>
+          </a:p>
+        </p:txBody>
+      </p:sp>
+      <p:sp>
+        <p:nvSpPr>
+          <p:cNvPr id="31" name="TextBox 30"/>
+          <p:cNvSpPr txBox="1"/>
+          <p:nvPr/>
+        </p:nvSpPr>
+        <p:spPr>
+          <a:xfrm>
+            <a:off x="9144000" y="3794760"/>
+            <a:ext cx="914400" cy="1051560"/>
+          </a:xfrm>
+          <a:prstGeom prst="rect">
+            <a:avLst/>
+          </a:prstGeom>
+          <a:noFill/>
+        </p:spPr>
+        <p:txBody>
+          <a:bodyPr wrap="square" anchor="ctr">
+            <a:spAutoFit/>
+          </a:bodyPr>
+          <a:lstStyle/>
+          <a:p>
+            <a:pPr algn="ctr">
+              <a:spcBef>
+                <a:spcPts val="0"/>
+              </a:spcBef>
+              <a:spcAft>
+                <a:spcPts val="0"/>
+              </a:spcAft>
+            </a:pPr>
+            <a:r>
+              <a:rPr sz="2600" b="1">
+                <a:solidFill>
+                  <a:srgbClr val="1D4ED8"/>
+                </a:solidFill>
+                <a:latin typeface="Calibri"/>
+              </a:rPr>
+              <a:t>→</a:t>
+            </a:r>
+          </a:p>
+        </p:txBody>
+      </p:sp>
+      <p:sp>
+        <p:nvSpPr>
+          <p:cNvPr id="32" name="TextBox 31"/>
+          <p:cNvSpPr txBox="1"/>
+          <p:nvPr/>
+        </p:nvSpPr>
+        <p:spPr>
+          <a:xfrm>
+            <a:off x="10104120" y="3794760"/>
+            <a:ext cx="1188720" cy="1051560"/>
+          </a:xfrm>
+          <a:prstGeom prst="rect">
+            <a:avLst/>
+          </a:prstGeom>
+          <a:noFill/>
+        </p:spPr>
+        <p:txBody>
+          <a:bodyPr wrap="square" anchor="ctr">
+            <a:spAutoFit/>
+          </a:bodyPr>
+          <a:lstStyle/>
+          <a:p>
+            <a:pPr algn="ctr">
+              <a:spcBef>
+                <a:spcPts val="0"/>
+              </a:spcBef>
+              <a:spcAft>
+                <a:spcPts val="0"/>
+              </a:spcAft>
+            </a:pPr>
+            <a:r>
+              <a:rPr sz="4000" b="1">
+                <a:solidFill>
+                  <a:srgbClr val="1A7F37"/>
+                </a:solidFill>
+                <a:latin typeface="Calibri"/>
+              </a:rPr>
+              <a:t>96</a:t>
+            </a:r>
+          </a:p>
+        </p:txBody>
+      </p:sp>
+      <p:sp>
+        <p:nvSpPr>
+          <p:cNvPr id="33" name="Rectangle 32"/>
+          <p:cNvSpPr/>
+          <p:nvPr/>
+        </p:nvSpPr>
+        <p:spPr>
+          <a:xfrm>
+            <a:off x="548640" y="5166360"/>
+            <a:ext cx="10927080" cy="868680"/>
+          </a:xfrm>
+          <a:prstGeom prst="rect">
+            <a:avLst/>
+          </a:prstGeom>
+          <a:solidFill>
+            <a:srgbClr val="16335C"/>
+          </a:solidFill>
+          <a:ln>
+            <a:noFill/>
+          </a:ln>
+          <a:effectLst/>
+        </p:spPr>
+        <p:style>
+          <a:lnRef idx="1">
+            <a:schemeClr val="accent1"/>
+          </a:lnRef>
+          <a:fillRef idx="3">
+            <a:schemeClr val="accent1"/>
+          </a:fillRef>
+          <a:effectRef idx="2">
+            <a:schemeClr val="accent1"/>
+          </a:effectRef>
+          <a:fontRef idx="minor">
+            <a:schemeClr val="lt1"/>
+          </a:fontRef>
+        </p:style>
+        <p:txBody>
+          <a:bodyPr rtlCol="0" anchor="ctr"/>
+          <a:lstStyle/>
+          <a:p>
+            <a:pPr algn="ctr"/>
+          </a:p>
+        </p:txBody>
+      </p:sp>
+      <p:sp>
+        <p:nvSpPr>
+          <p:cNvPr id="34" name="TextBox 33"/>
+          <p:cNvSpPr txBox="1"/>
+          <p:nvPr/>
+        </p:nvSpPr>
+        <p:spPr>
+          <a:xfrm>
+            <a:off x="777240" y="5166360"/>
+            <a:ext cx="10515600" cy="868680"/>
+          </a:xfrm>
+          <a:prstGeom prst="rect">
+            <a:avLst/>
+          </a:prstGeom>
+          <a:noFill/>
+        </p:spPr>
+        <p:txBody>
+          <a:bodyPr wrap="square" anchor="ctr">
+            <a:spAutoFit/>
+          </a:bodyPr>
+          <a:lstStyle/>
+          <a:p>
             <a:pPr algn="l">
               <a:spcBef>
                 <a:spcPts val="0"/>
               </a:spcBef>
               <a:spcAft>
-                <a:spcPts val="200"/>
-              </a:spcAft>
-            </a:pPr>
-            <a:r>
-              <a:rPr sz="1600" b="1">
-                <a:solidFill>
-                  <a:srgbClr val="0B0B0C"/>
-                </a:solidFill>
-                <a:latin typeface="Calibri"/>
-              </a:rPr>
-              <a:t>Reconnect live product data</a:t>
-            </a:r>
-          </a:p>
-          <a:p>
-            <a:pPr algn="l">
-              <a:spcBef>
-                <a:spcPts val="0"/>
-              </a:spcBef>
-              <a:spcAft>
-                <a:spcPts val="0"/>
-              </a:spcAft>
-            </a:pPr>
-            <a:r>
-              <a:rPr sz="1250" b="0">
-                <a:solidFill>
-                  <a:srgbClr val="5B626D"/>
-                </a:solidFill>
-                <a:latin typeface="Calibri"/>
-              </a:rPr>
-              <a:t>Final step, switched on last</a:t>
-            </a:r>
-          </a:p>
-        </p:txBody>
-      </p:sp>
-      <p:sp>
-        <p:nvSpPr>
-          <p:cNvPr id="26" name="TextBox 25"/>
+                <a:spcPts val="0"/>
+              </a:spcAft>
+            </a:pPr>
+            <a:r>
+              <a:rPr sz="1400" b="1">
+                <a:solidFill>
+                  <a:srgbClr val="FFFFFF"/>
+                </a:solidFill>
+                <a:latin typeface="Calibri"/>
+              </a:rPr>
+              <a:t>Failing mobile scores in the 30s became low‑90s; desktop into the high‑90s — a faster experience for customers and a ranking signal Google rewards.</a:t>
+            </a:r>
+          </a:p>
+        </p:txBody>
+      </p:sp>
+      <p:sp>
+        <p:nvSpPr>
+          <p:cNvPr id="35" name="TextBox 34"/>
           <p:cNvSpPr txBox="1"/>
           <p:nvPr/>
         </p:nvSpPr>
@@ -8112,7 +9188,7 @@
       </p:sp>
       <p:sp>
         <p:nvSpPr>
-          <p:cNvPr id="27" name="TextBox 26"/>
+          <p:cNvPr id="36" name="TextBox 35"/>
           <p:cNvSpPr txBox="1"/>
           <p:nvPr/>
         </p:nvSpPr>
@@ -8295,7 +9371,7 @@
                 </a:solidFill>
                 <a:latin typeface="Calibri"/>
               </a:rPr>
-              <a:t>THE BOTTOM LINE</a:t>
+              <a:t>MEASURED RESULTS</a:t>
             </a:r>
           </a:p>
           <a:p>
@@ -8314,7 +9390,7 @@
                 </a:solidFill>
                 <a:latin typeface="Calibri"/>
               </a:rPr>
-              <a:t>Old site vs new site</a:t>
+              <a:t>What those PageSpeed numbers mean</a:t>
             </a:r>
           </a:p>
         </p:txBody>
@@ -8365,20 +9441,62 @@
       </p:sp>
       <p:sp>
         <p:nvSpPr>
-          <p:cNvPr id="6" name="Rectangle 5"/>
+          <p:cNvPr id="6" name="TextBox 5"/>
+          <p:cNvSpPr txBox="1"/>
+          <p:nvPr/>
+        </p:nvSpPr>
+        <p:spPr>
+          <a:xfrm>
+            <a:off x="548640" y="1371600"/>
+            <a:ext cx="11155680" cy="457200"/>
+          </a:xfrm>
+          <a:prstGeom prst="rect">
+            <a:avLst/>
+          </a:prstGeom>
+          <a:noFill/>
+        </p:spPr>
+        <p:txBody>
+          <a:bodyPr wrap="square" anchor="t">
+            <a:spAutoFit/>
+          </a:bodyPr>
+          <a:lstStyle/>
+          <a:p>
+            <a:pPr algn="l">
+              <a:spcBef>
+                <a:spcPts val="0"/>
+              </a:spcBef>
+              <a:spcAft>
+                <a:spcPts val="0"/>
+              </a:spcAft>
+            </a:pPr>
+            <a:r>
+              <a:rPr sz="1300" b="0">
+                <a:solidFill>
+                  <a:srgbClr val="5B626D"/>
+                </a:solidFill>
+                <a:latin typeface="Calibri"/>
+              </a:rPr>
+              <a:t>In plain English — what each measure is, and what changed.</a:t>
+            </a:r>
+          </a:p>
+        </p:txBody>
+      </p:sp>
+      <p:sp>
+        <p:nvSpPr>
+          <p:cNvPr id="7" name="Rectangle 6"/>
           <p:cNvSpPr/>
           <p:nvPr/>
         </p:nvSpPr>
         <p:spPr>
           <a:xfrm>
-            <a:off x="548640" y="1417320"/>
-            <a:ext cx="5486400" cy="457200"/>
+            <a:off x="548640" y="1874519"/>
+            <a:ext cx="11064240" cy="713232"/>
           </a:xfrm>
           <a:prstGeom prst="rect">
             <a:avLst/>
           </a:prstGeom>
           <a:solidFill>
-            <a:srgbClr val="0B0B0C"/>
+            <a:srgbClr val="F4F6F8"/>
           </a:solidFill>
           <a:ln>
             <a:noFill/>
@@ -8409,14 +9527,14 @@
       </p:sp>
       <p:sp>
         <p:nvSpPr>
-          <p:cNvPr id="7" name="Rectangle 6"/>
+          <p:cNvPr id="8" name="Rectangle 7"/>
           <p:cNvSpPr/>
           <p:nvPr/>
         </p:nvSpPr>
         <p:spPr>
           <a:xfrm>
-            <a:off x="6126480" y="1417320"/>
-            <a:ext cx="5486400" cy="457200"/>
+            <a:off x="548640" y="1874519"/>
+            <a:ext cx="91440" cy="713232"/>
           </a:xfrm>
           <a:prstGeom prst="rect">
             <a:avLst/>
@@ -8453,14 +9571,14 @@
       </p:sp>
       <p:sp>
         <p:nvSpPr>
-          <p:cNvPr id="8" name="TextBox 7"/>
+          <p:cNvPr id="9" name="TextBox 8"/>
           <p:cNvSpPr txBox="1"/>
           <p:nvPr/>
         </p:nvSpPr>
         <p:spPr>
           <a:xfrm>
-            <a:off x="731520" y="1417320"/>
-            <a:ext cx="5120640" cy="457200"/>
+            <a:off x="777240" y="1874519"/>
+            <a:ext cx="2743200" cy="713232"/>
           </a:xfrm>
           <a:prstGeom prst="rect">
             <a:avLst/>
@@ -8478,31 +9596,50 @@
                 <a:spcPts val="0"/>
               </a:spcBef>
               <a:spcAft>
-                <a:spcPts val="0"/>
+                <a:spcPts val="100"/>
               </a:spcAft>
             </a:pPr>
             <a:r>
               <a:rPr sz="1300" b="1">
                 <a:solidFill>
-                  <a:srgbClr val="FFFFFF"/>
-                </a:solidFill>
-                <a:latin typeface="Calibri"/>
-              </a:rPr>
-              <a:t>OLD SITE</a:t>
-            </a:r>
-          </a:p>
-        </p:txBody>
-      </p:sp>
-      <p:sp>
-        <p:nvSpPr>
-          <p:cNvPr id="9" name="TextBox 8"/>
+                  <a:srgbClr val="0B0B0C"/>
+                </a:solidFill>
+                <a:latin typeface="Calibri"/>
+              </a:rPr>
+              <a:t>Score /100</a:t>
+            </a:r>
+          </a:p>
+          <a:p>
+            <a:pPr algn="l">
+              <a:spcBef>
+                <a:spcPts val="0"/>
+              </a:spcBef>
+              <a:spcAft>
+                <a:spcPts val="0"/>
+              </a:spcAft>
+            </a:pPr>
+            <a:r>
+              <a:rPr sz="1200" b="1">
+                <a:solidFill>
+                  <a:srgbClr val="1A7F37"/>
+                </a:solidFill>
+                <a:latin typeface="Calibri"/>
+              </a:rPr>
+              <a:t>32 → 93 (mobile)</a:t>
+            </a:r>
+          </a:p>
+        </p:txBody>
+      </p:sp>
+      <p:sp>
+        <p:nvSpPr>
+          <p:cNvPr id="10" name="TextBox 9"/>
           <p:cNvSpPr txBox="1"/>
           <p:nvPr/>
         </p:nvSpPr>
         <p:spPr>
           <a:xfrm>
-            <a:off x="6309360" y="1417320"/>
-            <a:ext cx="5120640" cy="457200"/>
+            <a:off x="3657600" y="1874519"/>
+            <a:ext cx="7772400" cy="713232"/>
           </a:xfrm>
           <a:prstGeom prst="rect">
             <a:avLst/>
@@ -8524,58 +9661,14 @@
               </a:spcAft>
             </a:pPr>
             <a:r>
-              <a:rPr sz="1300" b="1">
-                <a:solidFill>
-                  <a:srgbClr val="FFFFFF"/>
-                </a:solidFill>
-                <a:latin typeface="Calibri"/>
-              </a:rPr>
-              <a:t>NEW SITE</a:t>
-            </a:r>
-          </a:p>
-        </p:txBody>
-      </p:sp>
-      <p:sp>
-        <p:nvSpPr>
-          <p:cNvPr id="10" name="Rectangle 9"/>
-          <p:cNvSpPr/>
-          <p:nvPr/>
-        </p:nvSpPr>
-        <p:spPr>
-          <a:xfrm>
-            <a:off x="548640" y="1920240"/>
-            <a:ext cx="5486400" cy="512064"/>
-          </a:xfrm>
-          <a:prstGeom prst="rect">
-            <a:avLst/>
-          </a:prstGeom>
-          <a:solidFill>
-            <a:srgbClr val="FFFFFF"/>
-          </a:solidFill>
-          <a:ln>
-            <a:noFill/>
-          </a:ln>
-          <a:effectLst/>
-        </p:spPr>
-        <p:style>
-          <a:lnRef idx="1">
-            <a:schemeClr val="accent1"/>
-          </a:lnRef>
-          <a:fillRef idx="3">
-            <a:schemeClr val="accent1"/>
-          </a:fillRef>
-          <a:effectRef idx="2">
-            <a:schemeClr val="accent1"/>
-          </a:effectRef>
-          <a:fontRef idx="minor">
-            <a:schemeClr val="lt1"/>
-          </a:fontRef>
-        </p:style>
-        <p:txBody>
-          <a:bodyPr rtlCol="0" anchor="ctr"/>
-          <a:lstStyle/>
-          <a:p>
-            <a:pPr algn="ctr"/>
+              <a:rPr sz="1250" b="0">
+                <a:solidFill>
+                  <a:srgbClr val="16335C"/>
+                </a:solidFill>
+                <a:latin typeface="Calibri"/>
+              </a:rPr>
+              <a:t>A speed exam mark. 32 is a fail; 93 is a top grade. Google uses this mark to help decide search rankings.</a:t>
+            </a:r>
           </a:p>
         </p:txBody>
       </p:sp>
@@ -8587,136 +9680,8 @@
         </p:nvSpPr>
         <p:spPr>
           <a:xfrm>
-            <a:off x="6126480" y="1920240"/>
-            <a:ext cx="5486400" cy="512064"/>
-          </a:xfrm>
-          <a:prstGeom prst="rect">
-            <a:avLst/>
-          </a:prstGeom>
-          <a:solidFill>
-            <a:srgbClr val="FFFFFF"/>
-          </a:solidFill>
-          <a:ln>
-            <a:noFill/>
-          </a:ln>
-          <a:effectLst/>
-        </p:spPr>
-        <p:style>
-          <a:lnRef idx="1">
-            <a:schemeClr val="accent1"/>
-          </a:lnRef>
-          <a:fillRef idx="3">
-            <a:schemeClr val="accent1"/>
-          </a:fillRef>
-          <a:effectRef idx="2">
-            <a:schemeClr val="accent1"/>
-          </a:effectRef>
-          <a:fontRef idx="minor">
-            <a:schemeClr val="lt1"/>
-          </a:fontRef>
-        </p:style>
-        <p:txBody>
-          <a:bodyPr rtlCol="0" anchor="ctr"/>
-          <a:lstStyle/>
-          <a:p>
-            <a:pPr algn="ctr"/>
-          </a:p>
-        </p:txBody>
-      </p:sp>
-      <p:sp>
-        <p:nvSpPr>
-          <p:cNvPr id="12" name="TextBox 11"/>
-          <p:cNvSpPr txBox="1"/>
-          <p:nvPr/>
-        </p:nvSpPr>
-        <p:spPr>
-          <a:xfrm>
-            <a:off x="731520" y="1920240"/>
-            <a:ext cx="5212080" cy="512064"/>
-          </a:xfrm>
-          <a:prstGeom prst="rect">
-            <a:avLst/>
-          </a:prstGeom>
-          <a:noFill/>
-        </p:spPr>
-        <p:txBody>
-          <a:bodyPr wrap="square" anchor="ctr">
-            <a:spAutoFit/>
-          </a:bodyPr>
-          <a:lstStyle/>
-          <a:p>
-            <a:pPr algn="l">
-              <a:spcBef>
-                <a:spcPts val="0"/>
-              </a:spcBef>
-              <a:spcAft>
-                <a:spcPts val="0"/>
-              </a:spcAft>
-            </a:pPr>
-            <a:r>
-              <a:rPr sz="1200" b="0">
-                <a:solidFill>
-                  <a:srgbClr val="5B626D"/>
-                </a:solidFill>
-                <a:latin typeface="Calibri"/>
-              </a:rPr>
-              <a:t>248 GB of bloat, 91% duplicate images</a:t>
-            </a:r>
-          </a:p>
-        </p:txBody>
-      </p:sp>
-      <p:sp>
-        <p:nvSpPr>
-          <p:cNvPr id="13" name="TextBox 12"/>
-          <p:cNvSpPr txBox="1"/>
-          <p:nvPr/>
-        </p:nvSpPr>
-        <p:spPr>
-          <a:xfrm>
-            <a:off x="6309360" y="1920240"/>
-            <a:ext cx="5212080" cy="512064"/>
-          </a:xfrm>
-          <a:prstGeom prst="rect">
-            <a:avLst/>
-          </a:prstGeom>
-          <a:noFill/>
-        </p:spPr>
-        <p:txBody>
-          <a:bodyPr wrap="square" anchor="ctr">
-            <a:spAutoFit/>
-          </a:bodyPr>
-          <a:lstStyle/>
-          <a:p>
-            <a:pPr algn="l">
-              <a:spcBef>
-                <a:spcPts val="0"/>
-              </a:spcBef>
-              <a:spcAft>
-                <a:spcPts val="0"/>
-              </a:spcAft>
-            </a:pPr>
-            <a:r>
-              <a:rPr sz="1200" b="1">
-                <a:solidFill>
-                  <a:srgbClr val="16335C"/>
-                </a:solidFill>
-                <a:latin typeface="Calibri"/>
-              </a:rPr>
-              <a:t>Cleaned up, lean media library</a:t>
-            </a:r>
-          </a:p>
-        </p:txBody>
-      </p:sp>
-      <p:sp>
-        <p:nvSpPr>
-          <p:cNvPr id="14" name="Rectangle 13"/>
-          <p:cNvSpPr/>
-          <p:nvPr/>
-        </p:nvSpPr>
-        <p:spPr>
-          <a:xfrm>
-            <a:off x="548640" y="2468880"/>
-            <a:ext cx="5486400" cy="512064"/>
+            <a:off x="548640" y="2651759"/>
+            <a:ext cx="11064240" cy="713232"/>
           </a:xfrm>
           <a:prstGeom prst="rect">
             <a:avLst/>
@@ -8753,14 +9718,161 @@
       </p:sp>
       <p:sp>
         <p:nvSpPr>
+          <p:cNvPr id="12" name="Rectangle 11"/>
+          <p:cNvSpPr/>
+          <p:nvPr/>
+        </p:nvSpPr>
+        <p:spPr>
+          <a:xfrm>
+            <a:off x="548640" y="2651759"/>
+            <a:ext cx="91440" cy="713232"/>
+          </a:xfrm>
+          <a:prstGeom prst="rect">
+            <a:avLst/>
+          </a:prstGeom>
+          <a:solidFill>
+            <a:srgbClr val="1D4ED8"/>
+          </a:solidFill>
+          <a:ln>
+            <a:noFill/>
+          </a:ln>
+          <a:effectLst/>
+        </p:spPr>
+        <p:style>
+          <a:lnRef idx="1">
+            <a:schemeClr val="accent1"/>
+          </a:lnRef>
+          <a:fillRef idx="3">
+            <a:schemeClr val="accent1"/>
+          </a:fillRef>
+          <a:effectRef idx="2">
+            <a:schemeClr val="accent1"/>
+          </a:effectRef>
+          <a:fontRef idx="minor">
+            <a:schemeClr val="lt1"/>
+          </a:fontRef>
+        </p:style>
+        <p:txBody>
+          <a:bodyPr rtlCol="0" anchor="ctr"/>
+          <a:lstStyle/>
+          <a:p>
+            <a:pPr algn="ctr"/>
+          </a:p>
+        </p:txBody>
+      </p:sp>
+      <p:sp>
+        <p:nvSpPr>
+          <p:cNvPr id="13" name="TextBox 12"/>
+          <p:cNvSpPr txBox="1"/>
+          <p:nvPr/>
+        </p:nvSpPr>
+        <p:spPr>
+          <a:xfrm>
+            <a:off x="777240" y="2651759"/>
+            <a:ext cx="2743200" cy="713232"/>
+          </a:xfrm>
+          <a:prstGeom prst="rect">
+            <a:avLst/>
+          </a:prstGeom>
+          <a:noFill/>
+        </p:spPr>
+        <p:txBody>
+          <a:bodyPr wrap="square" anchor="ctr">
+            <a:spAutoFit/>
+          </a:bodyPr>
+          <a:lstStyle/>
+          <a:p>
+            <a:pPr algn="l">
+              <a:spcBef>
+                <a:spcPts val="0"/>
+              </a:spcBef>
+              <a:spcAft>
+                <a:spcPts val="100"/>
+              </a:spcAft>
+            </a:pPr>
+            <a:r>
+              <a:rPr sz="1300" b="1">
+                <a:solidFill>
+                  <a:srgbClr val="0B0B0C"/>
+                </a:solidFill>
+                <a:latin typeface="Calibri"/>
+              </a:rPr>
+              <a:t>Main image appears</a:t>
+            </a:r>
+          </a:p>
+          <a:p>
+            <a:pPr algn="l">
+              <a:spcBef>
+                <a:spcPts val="0"/>
+              </a:spcBef>
+              <a:spcAft>
+                <a:spcPts val="0"/>
+              </a:spcAft>
+            </a:pPr>
+            <a:r>
+              <a:rPr sz="1200" b="1">
+                <a:solidFill>
+                  <a:srgbClr val="1A7F37"/>
+                </a:solidFill>
+                <a:latin typeface="Calibri"/>
+              </a:rPr>
+              <a:t>12.4s → 2.3s</a:t>
+            </a:r>
+          </a:p>
+        </p:txBody>
+      </p:sp>
+      <p:sp>
+        <p:nvSpPr>
+          <p:cNvPr id="14" name="TextBox 13"/>
+          <p:cNvSpPr txBox="1"/>
+          <p:nvPr/>
+        </p:nvSpPr>
+        <p:spPr>
+          <a:xfrm>
+            <a:off x="3657600" y="2651759"/>
+            <a:ext cx="7772400" cy="713232"/>
+          </a:xfrm>
+          <a:prstGeom prst="rect">
+            <a:avLst/>
+          </a:prstGeom>
+          <a:noFill/>
+        </p:spPr>
+        <p:txBody>
+          <a:bodyPr wrap="square" anchor="ctr">
+            <a:spAutoFit/>
+          </a:bodyPr>
+          <a:lstStyle/>
+          <a:p>
+            <a:pPr algn="l">
+              <a:spcBef>
+                <a:spcPts val="0"/>
+              </a:spcBef>
+              <a:spcAft>
+                <a:spcPts val="0"/>
+              </a:spcAft>
+            </a:pPr>
+            <a:r>
+              <a:rPr sz="1250" b="0">
+                <a:solidFill>
+                  <a:srgbClr val="16335C"/>
+                </a:solidFill>
+                <a:latin typeface="Calibri"/>
+              </a:rPr>
+              <a:t>How long before the main content shows on a phone. It took over 12 seconds; now about 2. Most people won't wait past 3.</a:t>
+            </a:r>
+          </a:p>
+        </p:txBody>
+      </p:sp>
+      <p:sp>
+        <p:nvSpPr>
           <p:cNvPr id="15" name="Rectangle 14"/>
           <p:cNvSpPr/>
           <p:nvPr/>
         </p:nvSpPr>
         <p:spPr>
           <a:xfrm>
-            <a:off x="6126480" y="2468880"/>
-            <a:ext cx="5486400" cy="512064"/>
+            <a:off x="548640" y="3428999"/>
+            <a:ext cx="11064240" cy="713232"/>
           </a:xfrm>
           <a:prstGeom prst="rect">
             <a:avLst/>
@@ -8797,104 +9909,20 @@
       </p:sp>
       <p:sp>
         <p:nvSpPr>
-          <p:cNvPr id="16" name="TextBox 15"/>
-          <p:cNvSpPr txBox="1"/>
-          <p:nvPr/>
-        </p:nvSpPr>
-        <p:spPr>
-          <a:xfrm>
-            <a:off x="731520" y="2468880"/>
-            <a:ext cx="5212080" cy="512064"/>
-          </a:xfrm>
-          <a:prstGeom prst="rect">
-            <a:avLst/>
-          </a:prstGeom>
-          <a:noFill/>
-        </p:spPr>
-        <p:txBody>
-          <a:bodyPr wrap="square" anchor="ctr">
-            <a:spAutoFit/>
-          </a:bodyPr>
-          <a:lstStyle/>
-          <a:p>
-            <a:pPr algn="l">
-              <a:spcBef>
-                <a:spcPts val="0"/>
-              </a:spcBef>
-              <a:spcAft>
-                <a:spcPts val="0"/>
-              </a:spcAft>
-            </a:pPr>
-            <a:r>
-              <a:rPr sz="1200" b="0">
-                <a:solidFill>
-                  <a:srgbClr val="5B626D"/>
-                </a:solidFill>
-                <a:latin typeface="Calibri"/>
-              </a:rPr>
-              <a:t>Backups failing since ~Oct 2025</a:t>
-            </a:r>
-          </a:p>
-        </p:txBody>
-      </p:sp>
-      <p:sp>
-        <p:nvSpPr>
-          <p:cNvPr id="17" name="TextBox 16"/>
-          <p:cNvSpPr txBox="1"/>
-          <p:nvPr/>
-        </p:nvSpPr>
-        <p:spPr>
-          <a:xfrm>
-            <a:off x="6309360" y="2468880"/>
-            <a:ext cx="5212080" cy="512064"/>
-          </a:xfrm>
-          <a:prstGeom prst="rect">
-            <a:avLst/>
-          </a:prstGeom>
-          <a:noFill/>
-        </p:spPr>
-        <p:txBody>
-          <a:bodyPr wrap="square" anchor="ctr">
-            <a:spAutoFit/>
-          </a:bodyPr>
-          <a:lstStyle/>
-          <a:p>
-            <a:pPr algn="l">
-              <a:spcBef>
-                <a:spcPts val="0"/>
-              </a:spcBef>
-              <a:spcAft>
-                <a:spcPts val="0"/>
-              </a:spcAft>
-            </a:pPr>
-            <a:r>
-              <a:rPr sz="1200" b="1">
-                <a:solidFill>
-                  <a:srgbClr val="16335C"/>
-                </a:solidFill>
-                <a:latin typeface="Calibri"/>
-              </a:rPr>
-              <a:t>Reliable, fast backups</a:t>
-            </a:r>
-          </a:p>
-        </p:txBody>
-      </p:sp>
-      <p:sp>
-        <p:nvSpPr>
-          <p:cNvPr id="18" name="Rectangle 17"/>
+          <p:cNvPr id="16" name="Rectangle 15"/>
           <p:cNvSpPr/>
           <p:nvPr/>
         </p:nvSpPr>
         <p:spPr>
           <a:xfrm>
-            <a:off x="548640" y="3017520"/>
-            <a:ext cx="5486400" cy="512064"/>
+            <a:off x="548640" y="3428999"/>
+            <a:ext cx="91440" cy="713232"/>
           </a:xfrm>
           <a:prstGeom prst="rect">
             <a:avLst/>
           </a:prstGeom>
           <a:solidFill>
-            <a:srgbClr val="FFFFFF"/>
+            <a:srgbClr val="1D4ED8"/>
           </a:solidFill>
           <a:ln>
             <a:noFill/>
@@ -8925,58 +9953,14 @@
       </p:sp>
       <p:sp>
         <p:nvSpPr>
-          <p:cNvPr id="19" name="Rectangle 18"/>
-          <p:cNvSpPr/>
-          <p:nvPr/>
-        </p:nvSpPr>
-        <p:spPr>
-          <a:xfrm>
-            <a:off x="6126480" y="3017520"/>
-            <a:ext cx="5486400" cy="512064"/>
-          </a:xfrm>
-          <a:prstGeom prst="rect">
-            <a:avLst/>
-          </a:prstGeom>
-          <a:solidFill>
-            <a:srgbClr val="FFFFFF"/>
-          </a:solidFill>
-          <a:ln>
-            <a:noFill/>
-          </a:ln>
-          <a:effectLst/>
-        </p:spPr>
-        <p:style>
-          <a:lnRef idx="1">
-            <a:schemeClr val="accent1"/>
-          </a:lnRef>
-          <a:fillRef idx="3">
-            <a:schemeClr val="accent1"/>
-          </a:fillRef>
-          <a:effectRef idx="2">
-            <a:schemeClr val="accent1"/>
-          </a:effectRef>
-          <a:fontRef idx="minor">
-            <a:schemeClr val="lt1"/>
-          </a:fontRef>
-        </p:style>
-        <p:txBody>
-          <a:bodyPr rtlCol="0" anchor="ctr"/>
-          <a:lstStyle/>
-          <a:p>
-            <a:pPr algn="ctr"/>
-          </a:p>
-        </p:txBody>
-      </p:sp>
-      <p:sp>
-        <p:nvSpPr>
-          <p:cNvPr id="20" name="TextBox 19"/>
+          <p:cNvPr id="17" name="TextBox 16"/>
           <p:cNvSpPr txBox="1"/>
           <p:nvPr/>
         </p:nvSpPr>
         <p:spPr>
           <a:xfrm>
-            <a:off x="731520" y="3017520"/>
-            <a:ext cx="5212080" cy="512064"/>
+            <a:off x="777240" y="3428999"/>
+            <a:ext cx="2743200" cy="713232"/>
           </a:xfrm>
           <a:prstGeom prst="rect">
             <a:avLst/>
@@ -8994,31 +9978,50 @@
                 <a:spcPts val="0"/>
               </a:spcBef>
               <a:spcAft>
-                <a:spcPts val="0"/>
-              </a:spcAft>
-            </a:pPr>
-            <a:r>
-              <a:rPr sz="1200" b="0">
-                <a:solidFill>
-                  <a:srgbClr val="5B626D"/>
-                </a:solidFill>
-                <a:latin typeface="Calibri"/>
-              </a:rPr>
-              <a:t>Higher, growing hosting cost</a:t>
-            </a:r>
-          </a:p>
-        </p:txBody>
-      </p:sp>
-      <p:sp>
-        <p:nvSpPr>
-          <p:cNvPr id="21" name="TextBox 20"/>
+                <a:spcPts val="100"/>
+              </a:spcAft>
+            </a:pPr>
+            <a:r>
+              <a:rPr sz="1300" b="1">
+                <a:solidFill>
+                  <a:srgbClr val="0B0B0C"/>
+                </a:solidFill>
+                <a:latin typeface="Calibri"/>
+              </a:rPr>
+              <a:t>Page responds to taps</a:t>
+            </a:r>
+          </a:p>
+          <a:p>
+            <a:pPr algn="l">
+              <a:spcBef>
+                <a:spcPts val="0"/>
+              </a:spcBef>
+              <a:spcAft>
+                <a:spcPts val="0"/>
+              </a:spcAft>
+            </a:pPr>
+            <a:r>
+              <a:rPr sz="1200" b="1">
+                <a:solidFill>
+                  <a:srgbClr val="1A7F37"/>
+                </a:solidFill>
+                <a:latin typeface="Calibri"/>
+              </a:rPr>
+              <a:t>3.3s → instant</a:t>
+            </a:r>
+          </a:p>
+        </p:txBody>
+      </p:sp>
+      <p:sp>
+        <p:nvSpPr>
+          <p:cNvPr id="18" name="TextBox 17"/>
           <p:cNvSpPr txBox="1"/>
           <p:nvPr/>
         </p:nvSpPr>
         <p:spPr>
           <a:xfrm>
-            <a:off x="6309360" y="3017520"/>
-            <a:ext cx="5212080" cy="512064"/>
+            <a:off x="3657600" y="3428999"/>
+            <a:ext cx="7772400" cy="713232"/>
           </a:xfrm>
           <a:prstGeom prst="rect">
             <a:avLst/>
@@ -9040,27 +10043,27 @@
               </a:spcAft>
             </a:pPr>
             <a:r>
-              <a:rPr sz="1200" b="1">
+              <a:rPr sz="1250" b="0">
                 <a:solidFill>
                   <a:srgbClr val="16335C"/>
                 </a:solidFill>
                 <a:latin typeface="Calibri"/>
               </a:rPr>
-              <a:t>Lower, predictable hosting cost</a:t>
-            </a:r>
-          </a:p>
-        </p:txBody>
-      </p:sp>
-      <p:sp>
-        <p:nvSpPr>
-          <p:cNvPr id="22" name="Rectangle 21"/>
+              <a:t>How long the page is frozen and ignores taps while loading. It used to lock up for ~3 seconds; now it reacts straight away.</a:t>
+            </a:r>
+          </a:p>
+        </p:txBody>
+      </p:sp>
+      <p:sp>
+        <p:nvSpPr>
+          <p:cNvPr id="19" name="Rectangle 18"/>
           <p:cNvSpPr/>
           <p:nvPr/>
         </p:nvSpPr>
         <p:spPr>
           <a:xfrm>
-            <a:off x="548640" y="3566160"/>
-            <a:ext cx="5486400" cy="512064"/>
+            <a:off x="548640" y="4206239"/>
+            <a:ext cx="11064240" cy="713232"/>
           </a:xfrm>
           <a:prstGeom prst="rect">
             <a:avLst/>
@@ -9097,14 +10100,161 @@
       </p:sp>
       <p:sp>
         <p:nvSpPr>
+          <p:cNvPr id="20" name="Rectangle 19"/>
+          <p:cNvSpPr/>
+          <p:nvPr/>
+        </p:nvSpPr>
+        <p:spPr>
+          <a:xfrm>
+            <a:off x="548640" y="4206239"/>
+            <a:ext cx="91440" cy="713232"/>
+          </a:xfrm>
+          <a:prstGeom prst="rect">
+            <a:avLst/>
+          </a:prstGeom>
+          <a:solidFill>
+            <a:srgbClr val="1D4ED8"/>
+          </a:solidFill>
+          <a:ln>
+            <a:noFill/>
+          </a:ln>
+          <a:effectLst/>
+        </p:spPr>
+        <p:style>
+          <a:lnRef idx="1">
+            <a:schemeClr val="accent1"/>
+          </a:lnRef>
+          <a:fillRef idx="3">
+            <a:schemeClr val="accent1"/>
+          </a:fillRef>
+          <a:effectRef idx="2">
+            <a:schemeClr val="accent1"/>
+          </a:effectRef>
+          <a:fontRef idx="minor">
+            <a:schemeClr val="lt1"/>
+          </a:fontRef>
+        </p:style>
+        <p:txBody>
+          <a:bodyPr rtlCol="0" anchor="ctr"/>
+          <a:lstStyle/>
+          <a:p>
+            <a:pPr algn="ctr"/>
+          </a:p>
+        </p:txBody>
+      </p:sp>
+      <p:sp>
+        <p:nvSpPr>
+          <p:cNvPr id="21" name="TextBox 20"/>
+          <p:cNvSpPr txBox="1"/>
+          <p:nvPr/>
+        </p:nvSpPr>
+        <p:spPr>
+          <a:xfrm>
+            <a:off x="777240" y="4206239"/>
+            <a:ext cx="2743200" cy="713232"/>
+          </a:xfrm>
+          <a:prstGeom prst="rect">
+            <a:avLst/>
+          </a:prstGeom>
+          <a:noFill/>
+        </p:spPr>
+        <p:txBody>
+          <a:bodyPr wrap="square" anchor="ctr">
+            <a:spAutoFit/>
+          </a:bodyPr>
+          <a:lstStyle/>
+          <a:p>
+            <a:pPr algn="l">
+              <a:spcBef>
+                <a:spcPts val="0"/>
+              </a:spcBef>
+              <a:spcAft>
+                <a:spcPts val="100"/>
+              </a:spcAft>
+            </a:pPr>
+            <a:r>
+              <a:rPr sz="1300" b="1">
+                <a:solidFill>
+                  <a:srgbClr val="0B0B0C"/>
+                </a:solidFill>
+                <a:latin typeface="Calibri"/>
+              </a:rPr>
+              <a:t>Page looks finished</a:t>
+            </a:r>
+          </a:p>
+          <a:p>
+            <a:pPr algn="l">
+              <a:spcBef>
+                <a:spcPts val="0"/>
+              </a:spcBef>
+              <a:spcAft>
+                <a:spcPts val="0"/>
+              </a:spcAft>
+            </a:pPr>
+            <a:r>
+              <a:rPr sz="1200" b="1">
+                <a:solidFill>
+                  <a:srgbClr val="1A7F37"/>
+                </a:solidFill>
+                <a:latin typeface="Calibri"/>
+              </a:rPr>
+              <a:t>12.1s → 5.6s</a:t>
+            </a:r>
+          </a:p>
+        </p:txBody>
+      </p:sp>
+      <p:sp>
+        <p:nvSpPr>
+          <p:cNvPr id="22" name="TextBox 21"/>
+          <p:cNvSpPr txBox="1"/>
+          <p:nvPr/>
+        </p:nvSpPr>
+        <p:spPr>
+          <a:xfrm>
+            <a:off x="3657600" y="4206239"/>
+            <a:ext cx="7772400" cy="713232"/>
+          </a:xfrm>
+          <a:prstGeom prst="rect">
+            <a:avLst/>
+          </a:prstGeom>
+          <a:noFill/>
+        </p:spPr>
+        <p:txBody>
+          <a:bodyPr wrap="square" anchor="ctr">
+            <a:spAutoFit/>
+          </a:bodyPr>
+          <a:lstStyle/>
+          <a:p>
+            <a:pPr algn="l">
+              <a:spcBef>
+                <a:spcPts val="0"/>
+              </a:spcBef>
+              <a:spcAft>
+                <a:spcPts val="0"/>
+              </a:spcAft>
+            </a:pPr>
+            <a:r>
+              <a:rPr sz="1250" b="0">
+                <a:solidFill>
+                  <a:srgbClr val="16335C"/>
+                </a:solidFill>
+                <a:latin typeface="Calibri"/>
+              </a:rPr>
+              <a:t>How quickly the page visually fills in and looks done — now less than half the time.</a:t>
+            </a:r>
+          </a:p>
+        </p:txBody>
+      </p:sp>
+      <p:sp>
+        <p:nvSpPr>
           <p:cNvPr id="23" name="Rectangle 22"/>
           <p:cNvSpPr/>
           <p:nvPr/>
         </p:nvSpPr>
         <p:spPr>
           <a:xfrm>
-            <a:off x="6126480" y="3566160"/>
-            <a:ext cx="5486400" cy="512064"/>
+            <a:off x="548640" y="4983479"/>
+            <a:ext cx="11064240" cy="713232"/>
           </a:xfrm>
           <a:prstGeom prst="rect">
             <a:avLst/>
@@ -9141,104 +10291,20 @@
       </p:sp>
       <p:sp>
         <p:nvSpPr>
-          <p:cNvPr id="24" name="TextBox 23"/>
-          <p:cNvSpPr txBox="1"/>
-          <p:nvPr/>
-        </p:nvSpPr>
-        <p:spPr>
-          <a:xfrm>
-            <a:off x="731520" y="3566160"/>
-            <a:ext cx="5212080" cy="512064"/>
-          </a:xfrm>
-          <a:prstGeom prst="rect">
-            <a:avLst/>
-          </a:prstGeom>
-          <a:noFill/>
-        </p:spPr>
-        <p:txBody>
-          <a:bodyPr wrap="square" anchor="ctr">
-            <a:spAutoFit/>
-          </a:bodyPr>
-          <a:lstStyle/>
-          <a:p>
-            <a:pPr algn="l">
-              <a:spcBef>
-                <a:spcPts val="0"/>
-              </a:spcBef>
-              <a:spcAft>
-                <a:spcPts val="0"/>
-              </a:spcAft>
-            </a:pPr>
-            <a:r>
-              <a:rPr sz="1200" b="0">
-                <a:solidFill>
-                  <a:srgbClr val="5B626D"/>
-                </a:solidFill>
-                <a:latin typeface="Calibri"/>
-              </a:rPr>
-              <a:t>Changes needed a developer</a:t>
-            </a:r>
-          </a:p>
-        </p:txBody>
-      </p:sp>
-      <p:sp>
-        <p:nvSpPr>
-          <p:cNvPr id="25" name="TextBox 24"/>
-          <p:cNvSpPr txBox="1"/>
-          <p:nvPr/>
-        </p:nvSpPr>
-        <p:spPr>
-          <a:xfrm>
-            <a:off x="6309360" y="3566160"/>
-            <a:ext cx="5212080" cy="512064"/>
-          </a:xfrm>
-          <a:prstGeom prst="rect">
-            <a:avLst/>
-          </a:prstGeom>
-          <a:noFill/>
-        </p:spPr>
-        <p:txBody>
-          <a:bodyPr wrap="square" anchor="ctr">
-            <a:spAutoFit/>
-          </a:bodyPr>
-          <a:lstStyle/>
-          <a:p>
-            <a:pPr algn="l">
-              <a:spcBef>
-                <a:spcPts val="0"/>
-              </a:spcBef>
-              <a:spcAft>
-                <a:spcPts val="0"/>
-              </a:spcAft>
-            </a:pPr>
-            <a:r>
-              <a:rPr sz="1200" b="1">
-                <a:solidFill>
-                  <a:srgbClr val="16335C"/>
-                </a:solidFill>
-                <a:latin typeface="Calibri"/>
-              </a:rPr>
-              <a:t>Team edits products &amp; pages themselves</a:t>
-            </a:r>
-          </a:p>
-        </p:txBody>
-      </p:sp>
-      <p:sp>
-        <p:nvSpPr>
-          <p:cNvPr id="26" name="Rectangle 25"/>
+          <p:cNvPr id="24" name="Rectangle 23"/>
           <p:cNvSpPr/>
           <p:nvPr/>
         </p:nvSpPr>
         <p:spPr>
           <a:xfrm>
-            <a:off x="548640" y="4114800"/>
-            <a:ext cx="5486400" cy="512064"/>
+            <a:off x="548640" y="4983479"/>
+            <a:ext cx="91440" cy="713232"/>
           </a:xfrm>
           <a:prstGeom prst="rect">
             <a:avLst/>
           </a:prstGeom>
           <a:solidFill>
-            <a:srgbClr val="FFFFFF"/>
+            <a:srgbClr val="1D4ED8"/>
           </a:solidFill>
           <a:ln>
             <a:noFill/>
@@ -9269,20 +10335,123 @@
       </p:sp>
       <p:sp>
         <p:nvSpPr>
+          <p:cNvPr id="25" name="TextBox 24"/>
+          <p:cNvSpPr txBox="1"/>
+          <p:nvPr/>
+        </p:nvSpPr>
+        <p:spPr>
+          <a:xfrm>
+            <a:off x="777240" y="4983479"/>
+            <a:ext cx="2743200" cy="713232"/>
+          </a:xfrm>
+          <a:prstGeom prst="rect">
+            <a:avLst/>
+          </a:prstGeom>
+          <a:noFill/>
+        </p:spPr>
+        <p:txBody>
+          <a:bodyPr wrap="square" anchor="ctr">
+            <a:spAutoFit/>
+          </a:bodyPr>
+          <a:lstStyle/>
+          <a:p>
+            <a:pPr algn="l">
+              <a:spcBef>
+                <a:spcPts val="0"/>
+              </a:spcBef>
+              <a:spcAft>
+                <a:spcPts val="100"/>
+              </a:spcAft>
+            </a:pPr>
+            <a:r>
+              <a:rPr sz="1300" b="1">
+                <a:solidFill>
+                  <a:srgbClr val="0B0B0C"/>
+                </a:solidFill>
+                <a:latin typeface="Calibri"/>
+              </a:rPr>
+              <a:t>You see something</a:t>
+            </a:r>
+          </a:p>
+          <a:p>
+            <a:pPr algn="l">
+              <a:spcBef>
+                <a:spcPts val="0"/>
+              </a:spcBef>
+              <a:spcAft>
+                <a:spcPts val="0"/>
+              </a:spcAft>
+            </a:pPr>
+            <a:r>
+              <a:rPr sz="1200" b="1">
+                <a:solidFill>
+                  <a:srgbClr val="1A7F37"/>
+                </a:solidFill>
+                <a:latin typeface="Calibri"/>
+              </a:rPr>
+              <a:t>2.8s → 1.2s</a:t>
+            </a:r>
+          </a:p>
+        </p:txBody>
+      </p:sp>
+      <p:sp>
+        <p:nvSpPr>
+          <p:cNvPr id="26" name="TextBox 25"/>
+          <p:cNvSpPr txBox="1"/>
+          <p:nvPr/>
+        </p:nvSpPr>
+        <p:spPr>
+          <a:xfrm>
+            <a:off x="3657600" y="4983479"/>
+            <a:ext cx="7772400" cy="713232"/>
+          </a:xfrm>
+          <a:prstGeom prst="rect">
+            <a:avLst/>
+          </a:prstGeom>
+          <a:noFill/>
+        </p:spPr>
+        <p:txBody>
+          <a:bodyPr wrap="square" anchor="ctr">
+            <a:spAutoFit/>
+          </a:bodyPr>
+          <a:lstStyle/>
+          <a:p>
+            <a:pPr algn="l">
+              <a:spcBef>
+                <a:spcPts val="0"/>
+              </a:spcBef>
+              <a:spcAft>
+                <a:spcPts val="0"/>
+              </a:spcAft>
+            </a:pPr>
+            <a:r>
+              <a:rPr sz="1250" b="0">
+                <a:solidFill>
+                  <a:srgbClr val="16335C"/>
+                </a:solidFill>
+                <a:latin typeface="Calibri"/>
+              </a:rPr>
+              <a:t>How soon anything at all appears on screen, so it doesn't feel blank.</a:t>
+            </a:r>
+          </a:p>
+        </p:txBody>
+      </p:sp>
+      <p:sp>
+        <p:nvSpPr>
           <p:cNvPr id="27" name="Rectangle 26"/>
           <p:cNvSpPr/>
           <p:nvPr/>
         </p:nvSpPr>
         <p:spPr>
           <a:xfrm>
-            <a:off x="6126480" y="4114800"/>
-            <a:ext cx="5486400" cy="512064"/>
+            <a:off x="548640" y="5897880"/>
+            <a:ext cx="11064240" cy="566928"/>
           </a:xfrm>
           <a:prstGeom prst="rect">
             <a:avLst/>
           </a:prstGeom>
           <a:solidFill>
-            <a:srgbClr val="FFFFFF"/>
+            <a:srgbClr val="16335C"/>
           </a:solidFill>
           <a:ln>
             <a:noFill/>
@@ -9319,8 +10488,8 @@
         </p:nvSpPr>
         <p:spPr>
           <a:xfrm>
-            <a:off x="731520" y="4114800"/>
-            <a:ext cx="5212080" cy="512064"/>
+            <a:off x="777240" y="5897880"/>
+            <a:ext cx="10607040" cy="566928"/>
           </a:xfrm>
           <a:prstGeom prst="rect">
             <a:avLst/>
@@ -9342,13 +10511,13 @@
               </a:spcAft>
             </a:pPr>
             <a:r>
-              <a:rPr sz="1200" b="0">
-                <a:solidFill>
-                  <a:srgbClr val="5B626D"/>
-                </a:solidFill>
-                <a:latin typeface="Calibri"/>
-              </a:rPr>
-              <a:t>A brochure</a:t>
+              <a:rPr sz="1250" b="1">
+                <a:solidFill>
+                  <a:srgbClr val="FFFFFF"/>
+                </a:solidFill>
+                <a:latin typeface="Calibri"/>
+              </a:rPr>
+              <a:t>Bottom line: the old site was slow enough on phones to push visitors away; the new one loads fast and stays responsive — which means better Google rankings and more enquiries.</a:t>
             </a:r>
           </a:p>
         </p:txBody>
@@ -9356,564 +10525,6 @@
       <p:sp>
         <p:nvSpPr>
           <p:cNvPr id="29" name="TextBox 28"/>
-          <p:cNvSpPr txBox="1"/>
-          <p:nvPr/>
-        </p:nvSpPr>
-        <p:spPr>
-          <a:xfrm>
-            <a:off x="6309360" y="4114800"/>
-            <a:ext cx="5212080" cy="512064"/>
-          </a:xfrm>
-          <a:prstGeom prst="rect">
-            <a:avLst/>
-          </a:prstGeom>
-          <a:noFill/>
-        </p:spPr>
-        <p:txBody>
-          <a:bodyPr wrap="square" anchor="ctr">
-            <a:spAutoFit/>
-          </a:bodyPr>
-          <a:lstStyle/>
-          <a:p>
-            <a:pPr algn="l">
-              <a:spcBef>
-                <a:spcPts val="0"/>
-              </a:spcBef>
-              <a:spcAft>
-                <a:spcPts val="0"/>
-              </a:spcAft>
-            </a:pPr>
-            <a:r>
-              <a:rPr sz="1200" b="1">
-                <a:solidFill>
-                  <a:srgbClr val="16335C"/>
-                </a:solidFill>
-                <a:latin typeface="Calibri"/>
-              </a:rPr>
-              <a:t>Captures leads + builds its own SEO</a:t>
-            </a:r>
-          </a:p>
-        </p:txBody>
-      </p:sp>
-      <p:sp>
-        <p:nvSpPr>
-          <p:cNvPr id="30" name="Rectangle 29"/>
-          <p:cNvSpPr/>
-          <p:nvPr/>
-        </p:nvSpPr>
-        <p:spPr>
-          <a:xfrm>
-            <a:off x="548640" y="4663440"/>
-            <a:ext cx="5486400" cy="512064"/>
-          </a:xfrm>
-          <a:prstGeom prst="rect">
-            <a:avLst/>
-          </a:prstGeom>
-          <a:solidFill>
-            <a:srgbClr val="F4F6F8"/>
-          </a:solidFill>
-          <a:ln>
-            <a:noFill/>
-          </a:ln>
-          <a:effectLst/>
-        </p:spPr>
-        <p:style>
-          <a:lnRef idx="1">
-            <a:schemeClr val="accent1"/>
-          </a:lnRef>
-          <a:fillRef idx="3">
-            <a:schemeClr val="accent1"/>
-          </a:fillRef>
-          <a:effectRef idx="2">
-            <a:schemeClr val="accent1"/>
-          </a:effectRef>
-          <a:fontRef idx="minor">
-            <a:schemeClr val="lt1"/>
-          </a:fontRef>
-        </p:style>
-        <p:txBody>
-          <a:bodyPr rtlCol="0" anchor="ctr"/>
-          <a:lstStyle/>
-          <a:p>
-            <a:pPr algn="ctr"/>
-          </a:p>
-        </p:txBody>
-      </p:sp>
-      <p:sp>
-        <p:nvSpPr>
-          <p:cNvPr id="31" name="Rectangle 30"/>
-          <p:cNvSpPr/>
-          <p:nvPr/>
-        </p:nvSpPr>
-        <p:spPr>
-          <a:xfrm>
-            <a:off x="6126480" y="4663440"/>
-            <a:ext cx="5486400" cy="512064"/>
-          </a:xfrm>
-          <a:prstGeom prst="rect">
-            <a:avLst/>
-          </a:prstGeom>
-          <a:solidFill>
-            <a:srgbClr val="F4F6F8"/>
-          </a:solidFill>
-          <a:ln>
-            <a:noFill/>
-          </a:ln>
-          <a:effectLst/>
-        </p:spPr>
-        <p:style>
-          <a:lnRef idx="1">
-            <a:schemeClr val="accent1"/>
-          </a:lnRef>
-          <a:fillRef idx="3">
-            <a:schemeClr val="accent1"/>
-          </a:fillRef>
-          <a:effectRef idx="2">
-            <a:schemeClr val="accent1"/>
-          </a:effectRef>
-          <a:fontRef idx="minor">
-            <a:schemeClr val="lt1"/>
-          </a:fontRef>
-        </p:style>
-        <p:txBody>
-          <a:bodyPr rtlCol="0" anchor="ctr"/>
-          <a:lstStyle/>
-          <a:p>
-            <a:pPr algn="ctr"/>
-          </a:p>
-        </p:txBody>
-      </p:sp>
-      <p:sp>
-        <p:nvSpPr>
-          <p:cNvPr id="32" name="TextBox 31"/>
-          <p:cNvSpPr txBox="1"/>
-          <p:nvPr/>
-        </p:nvSpPr>
-        <p:spPr>
-          <a:xfrm>
-            <a:off x="731520" y="4663440"/>
-            <a:ext cx="5212080" cy="512064"/>
-          </a:xfrm>
-          <a:prstGeom prst="rect">
-            <a:avLst/>
-          </a:prstGeom>
-          <a:noFill/>
-        </p:spPr>
-        <p:txBody>
-          <a:bodyPr wrap="square" anchor="ctr">
-            <a:spAutoFit/>
-          </a:bodyPr>
-          <a:lstStyle/>
-          <a:p>
-            <a:pPr algn="l">
-              <a:spcBef>
-                <a:spcPts val="0"/>
-              </a:spcBef>
-              <a:spcAft>
-                <a:spcPts val="0"/>
-              </a:spcAft>
-            </a:pPr>
-            <a:r>
-              <a:rPr sz="1200" b="0">
-                <a:solidFill>
-                  <a:srgbClr val="5B626D"/>
-                </a:solidFill>
-                <a:latin typeface="Calibri"/>
-              </a:rPr>
-              <a:t>No BIM / specifier capture</a:t>
-            </a:r>
-          </a:p>
-        </p:txBody>
-      </p:sp>
-      <p:sp>
-        <p:nvSpPr>
-          <p:cNvPr id="33" name="TextBox 32"/>
-          <p:cNvSpPr txBox="1"/>
-          <p:nvPr/>
-        </p:nvSpPr>
-        <p:spPr>
-          <a:xfrm>
-            <a:off x="6309360" y="4663440"/>
-            <a:ext cx="5212080" cy="512064"/>
-          </a:xfrm>
-          <a:prstGeom prst="rect">
-            <a:avLst/>
-          </a:prstGeom>
-          <a:noFill/>
-        </p:spPr>
-        <p:txBody>
-          <a:bodyPr wrap="square" anchor="ctr">
-            <a:spAutoFit/>
-          </a:bodyPr>
-          <a:lstStyle/>
-          <a:p>
-            <a:pPr algn="l">
-              <a:spcBef>
-                <a:spcPts val="0"/>
-              </a:spcBef>
-              <a:spcAft>
-                <a:spcPts val="0"/>
-              </a:spcAft>
-            </a:pPr>
-            <a:r>
-              <a:rPr sz="1200" b="1">
-                <a:solidFill>
-                  <a:srgbClr val="16335C"/>
-                </a:solidFill>
-                <a:latin typeface="Calibri"/>
-              </a:rPr>
-              <a:t>"Download BIM file" sends marketing a warm lead</a:t>
-            </a:r>
-          </a:p>
-        </p:txBody>
-      </p:sp>
-      <p:sp>
-        <p:nvSpPr>
-          <p:cNvPr id="34" name="Rectangle 33"/>
-          <p:cNvSpPr/>
-          <p:nvPr/>
-        </p:nvSpPr>
-        <p:spPr>
-          <a:xfrm>
-            <a:off x="548640" y="5212080"/>
-            <a:ext cx="5486400" cy="512064"/>
-          </a:xfrm>
-          <a:prstGeom prst="rect">
-            <a:avLst/>
-          </a:prstGeom>
-          <a:solidFill>
-            <a:srgbClr val="FFFFFF"/>
-          </a:solidFill>
-          <a:ln>
-            <a:noFill/>
-          </a:ln>
-          <a:effectLst/>
-        </p:spPr>
-        <p:style>
-          <a:lnRef idx="1">
-            <a:schemeClr val="accent1"/>
-          </a:lnRef>
-          <a:fillRef idx="3">
-            <a:schemeClr val="accent1"/>
-          </a:fillRef>
-          <a:effectRef idx="2">
-            <a:schemeClr val="accent1"/>
-          </a:effectRef>
-          <a:fontRef idx="minor">
-            <a:schemeClr val="lt1"/>
-          </a:fontRef>
-        </p:style>
-        <p:txBody>
-          <a:bodyPr rtlCol="0" anchor="ctr"/>
-          <a:lstStyle/>
-          <a:p>
-            <a:pPr algn="ctr"/>
-          </a:p>
-        </p:txBody>
-      </p:sp>
-      <p:sp>
-        <p:nvSpPr>
-          <p:cNvPr id="35" name="Rectangle 34"/>
-          <p:cNvSpPr/>
-          <p:nvPr/>
-        </p:nvSpPr>
-        <p:spPr>
-          <a:xfrm>
-            <a:off x="6126480" y="5212080"/>
-            <a:ext cx="5486400" cy="512064"/>
-          </a:xfrm>
-          <a:prstGeom prst="rect">
-            <a:avLst/>
-          </a:prstGeom>
-          <a:solidFill>
-            <a:srgbClr val="FFFFFF"/>
-          </a:solidFill>
-          <a:ln>
-            <a:noFill/>
-          </a:ln>
-          <a:effectLst/>
-        </p:spPr>
-        <p:style>
-          <a:lnRef idx="1">
-            <a:schemeClr val="accent1"/>
-          </a:lnRef>
-          <a:fillRef idx="3">
-            <a:schemeClr val="accent1"/>
-          </a:fillRef>
-          <a:effectRef idx="2">
-            <a:schemeClr val="accent1"/>
-          </a:effectRef>
-          <a:fontRef idx="minor">
-            <a:schemeClr val="lt1"/>
-          </a:fontRef>
-        </p:style>
-        <p:txBody>
-          <a:bodyPr rtlCol="0" anchor="ctr"/>
-          <a:lstStyle/>
-          <a:p>
-            <a:pPr algn="ctr"/>
-          </a:p>
-        </p:txBody>
-      </p:sp>
-      <p:sp>
-        <p:nvSpPr>
-          <p:cNvPr id="36" name="TextBox 35"/>
-          <p:cNvSpPr txBox="1"/>
-          <p:nvPr/>
-        </p:nvSpPr>
-        <p:spPr>
-          <a:xfrm>
-            <a:off x="731520" y="5212080"/>
-            <a:ext cx="5212080" cy="512064"/>
-          </a:xfrm>
-          <a:prstGeom prst="rect">
-            <a:avLst/>
-          </a:prstGeom>
-          <a:noFill/>
-        </p:spPr>
-        <p:txBody>
-          <a:bodyPr wrap="square" anchor="ctr">
-            <a:spAutoFit/>
-          </a:bodyPr>
-          <a:lstStyle/>
-          <a:p>
-            <a:pPr algn="l">
-              <a:spcBef>
-                <a:spcPts val="0"/>
-              </a:spcBef>
-              <a:spcAft>
-                <a:spcPts val="0"/>
-              </a:spcAft>
-            </a:pPr>
-            <a:r>
-              <a:rPr sz="1200" b="0">
-                <a:solidFill>
-                  <a:srgbClr val="5B626D"/>
-                </a:solidFill>
-                <a:latin typeface="Calibri"/>
-              </a:rPr>
-              <a:t>Bespoke quotes = lots of back-and-forth</a:t>
-            </a:r>
-          </a:p>
-        </p:txBody>
-      </p:sp>
-      <p:sp>
-        <p:nvSpPr>
-          <p:cNvPr id="37" name="TextBox 36"/>
-          <p:cNvSpPr txBox="1"/>
-          <p:nvPr/>
-        </p:nvSpPr>
-        <p:spPr>
-          <a:xfrm>
-            <a:off x="6309360" y="5212080"/>
-            <a:ext cx="5212080" cy="512064"/>
-          </a:xfrm>
-          <a:prstGeom prst="rect">
-            <a:avLst/>
-          </a:prstGeom>
-          <a:noFill/>
-        </p:spPr>
-        <p:txBody>
-          <a:bodyPr wrap="square" anchor="ctr">
-            <a:spAutoFit/>
-          </a:bodyPr>
-          <a:lstStyle/>
-          <a:p>
-            <a:pPr algn="l">
-              <a:spcBef>
-                <a:spcPts val="0"/>
-              </a:spcBef>
-              <a:spcAft>
-                <a:spcPts val="0"/>
-              </a:spcAft>
-            </a:pPr>
-            <a:r>
-              <a:rPr sz="1200" b="1">
-                <a:solidFill>
-                  <a:srgbClr val="16335C"/>
-                </a:solidFill>
-                <a:latin typeface="Calibri"/>
-              </a:rPr>
-              <a:t>Flow+ Designer = ready-to-quote scheme</a:t>
-            </a:r>
-          </a:p>
-        </p:txBody>
-      </p:sp>
-      <p:sp>
-        <p:nvSpPr>
-          <p:cNvPr id="38" name="Rectangle 37"/>
-          <p:cNvSpPr/>
-          <p:nvPr/>
-        </p:nvSpPr>
-        <p:spPr>
-          <a:xfrm>
-            <a:off x="548640" y="5760720"/>
-            <a:ext cx="5486400" cy="512064"/>
-          </a:xfrm>
-          <a:prstGeom prst="rect">
-            <a:avLst/>
-          </a:prstGeom>
-          <a:solidFill>
-            <a:srgbClr val="F4F6F8"/>
-          </a:solidFill>
-          <a:ln>
-            <a:noFill/>
-          </a:ln>
-          <a:effectLst/>
-        </p:spPr>
-        <p:style>
-          <a:lnRef idx="1">
-            <a:schemeClr val="accent1"/>
-          </a:lnRef>
-          <a:fillRef idx="3">
-            <a:schemeClr val="accent1"/>
-          </a:fillRef>
-          <a:effectRef idx="2">
-            <a:schemeClr val="accent1"/>
-          </a:effectRef>
-          <a:fontRef idx="minor">
-            <a:schemeClr val="lt1"/>
-          </a:fontRef>
-        </p:style>
-        <p:txBody>
-          <a:bodyPr rtlCol="0" anchor="ctr"/>
-          <a:lstStyle/>
-          <a:p>
-            <a:pPr algn="ctr"/>
-          </a:p>
-        </p:txBody>
-      </p:sp>
-      <p:sp>
-        <p:nvSpPr>
-          <p:cNvPr id="39" name="Rectangle 38"/>
-          <p:cNvSpPr/>
-          <p:nvPr/>
-        </p:nvSpPr>
-        <p:spPr>
-          <a:xfrm>
-            <a:off x="6126480" y="5760720"/>
-            <a:ext cx="5486400" cy="512064"/>
-          </a:xfrm>
-          <a:prstGeom prst="rect">
-            <a:avLst/>
-          </a:prstGeom>
-          <a:solidFill>
-            <a:srgbClr val="F4F6F8"/>
-          </a:solidFill>
-          <a:ln>
-            <a:noFill/>
-          </a:ln>
-          <a:effectLst/>
-        </p:spPr>
-        <p:style>
-          <a:lnRef idx="1">
-            <a:schemeClr val="accent1"/>
-          </a:lnRef>
-          <a:fillRef idx="3">
-            <a:schemeClr val="accent1"/>
-          </a:fillRef>
-          <a:effectRef idx="2">
-            <a:schemeClr val="accent1"/>
-          </a:effectRef>
-          <a:fontRef idx="minor">
-            <a:schemeClr val="lt1"/>
-          </a:fontRef>
-        </p:style>
-        <p:txBody>
-          <a:bodyPr rtlCol="0" anchor="ctr"/>
-          <a:lstStyle/>
-          <a:p>
-            <a:pPr algn="ctr"/>
-          </a:p>
-        </p:txBody>
-      </p:sp>
-      <p:sp>
-        <p:nvSpPr>
-          <p:cNvPr id="40" name="TextBox 39"/>
-          <p:cNvSpPr txBox="1"/>
-          <p:nvPr/>
-        </p:nvSpPr>
-        <p:spPr>
-          <a:xfrm>
-            <a:off x="731520" y="5760720"/>
-            <a:ext cx="5212080" cy="512064"/>
-          </a:xfrm>
-          <a:prstGeom prst="rect">
-            <a:avLst/>
-          </a:prstGeom>
-          <a:noFill/>
-        </p:spPr>
-        <p:txBody>
-          <a:bodyPr wrap="square" anchor="ctr">
-            <a:spAutoFit/>
-          </a:bodyPr>
-          <a:lstStyle/>
-          <a:p>
-            <a:pPr algn="l">
-              <a:spcBef>
-                <a:spcPts val="0"/>
-              </a:spcBef>
-              <a:spcAft>
-                <a:spcPts val="0"/>
-              </a:spcAft>
-            </a:pPr>
-            <a:r>
-              <a:rPr sz="1200" b="0">
-                <a:solidFill>
-                  <a:srgbClr val="5B626D"/>
-                </a:solidFill>
-                <a:latin typeface="Calibri"/>
-              </a:rPr>
-              <a:t>Slower, page-builder overhead</a:t>
-            </a:r>
-          </a:p>
-        </p:txBody>
-      </p:sp>
-      <p:sp>
-        <p:nvSpPr>
-          <p:cNvPr id="41" name="TextBox 40"/>
-          <p:cNvSpPr txBox="1"/>
-          <p:nvPr/>
-        </p:nvSpPr>
-        <p:spPr>
-          <a:xfrm>
-            <a:off x="6309360" y="5760720"/>
-            <a:ext cx="5212080" cy="512064"/>
-          </a:xfrm>
-          <a:prstGeom prst="rect">
-            <a:avLst/>
-          </a:prstGeom>
-          <a:noFill/>
-        </p:spPr>
-        <p:txBody>
-          <a:bodyPr wrap="square" anchor="ctr">
-            <a:spAutoFit/>
-          </a:bodyPr>
-          <a:lstStyle/>
-          <a:p>
-            <a:pPr algn="l">
-              <a:spcBef>
-                <a:spcPts val="0"/>
-              </a:spcBef>
-              <a:spcAft>
-                <a:spcPts val="0"/>
-              </a:spcAft>
-            </a:pPr>
-            <a:r>
-              <a:rPr sz="1200" b="1">
-                <a:solidFill>
-                  <a:srgbClr val="16335C"/>
-                </a:solidFill>
-                <a:latin typeface="Calibri"/>
-              </a:rPr>
-              <a:t>Fast, modern, search-friendly</a:t>
-            </a:r>
-          </a:p>
-        </p:txBody>
-      </p:sp>
-      <p:sp>
-        <p:nvSpPr>
-          <p:cNvPr id="42" name="TextBox 41"/>
           <p:cNvSpPr txBox="1"/>
           <p:nvPr/>
         </p:nvSpPr>
@@ -9955,7 +10566,7 @@
       </p:sp>
       <p:sp>
         <p:nvSpPr>
-          <p:cNvPr id="43" name="TextBox 42"/>
+          <p:cNvPr id="30" name="TextBox 29"/>
           <p:cNvSpPr txBox="1"/>
           <p:nvPr/>
         </p:nvSpPr>
@@ -10004,6 +10615,3099 @@
 </file>
 
 <file path=ppt/slides/slide14.xml><?xml version="1.0" encoding="utf-8"?>
+<p:sld xmlns:a="http://schemas.openxmlformats.org/drawingml/2006/main" xmlns:p="http://schemas.openxmlformats.org/presentationml/2006/main" xmlns:r="http://schemas.openxmlformats.org/officeDocument/2006/relationships">
+  <p:cSld>
+    <p:spTree>
+      <p:nvGrpSpPr>
+        <p:cNvPr id="1" name=""/>
+        <p:cNvGrpSpPr/>
+        <p:nvPr/>
+      </p:nvGrpSpPr>
+      <p:grpSpPr/>
+      <p:sp>
+        <p:nvSpPr>
+          <p:cNvPr id="2" name="Rectangle 1"/>
+          <p:cNvSpPr/>
+          <p:nvPr/>
+        </p:nvSpPr>
+        <p:spPr>
+          <a:xfrm>
+            <a:off x="0" y="0"/>
+            <a:ext cx="12191695" cy="1234440"/>
+          </a:xfrm>
+          <a:prstGeom prst="rect">
+            <a:avLst/>
+          </a:prstGeom>
+          <a:solidFill>
+            <a:srgbClr val="FFFFFF"/>
+          </a:solidFill>
+          <a:ln>
+            <a:noFill/>
+          </a:ln>
+          <a:effectLst/>
+        </p:spPr>
+        <p:style>
+          <a:lnRef idx="1">
+            <a:schemeClr val="accent1"/>
+          </a:lnRef>
+          <a:fillRef idx="3">
+            <a:schemeClr val="accent1"/>
+          </a:fillRef>
+          <a:effectRef idx="2">
+            <a:schemeClr val="accent1"/>
+          </a:effectRef>
+          <a:fontRef idx="minor">
+            <a:schemeClr val="lt1"/>
+          </a:fontRef>
+        </p:style>
+        <p:txBody>
+          <a:bodyPr rtlCol="0" anchor="ctr"/>
+          <a:lstStyle/>
+          <a:p>
+            <a:pPr algn="ctr"/>
+          </a:p>
+        </p:txBody>
+      </p:sp>
+      <p:sp>
+        <p:nvSpPr>
+          <p:cNvPr id="3" name="Rectangle 2"/>
+          <p:cNvSpPr/>
+          <p:nvPr/>
+        </p:nvSpPr>
+        <p:spPr>
+          <a:xfrm>
+            <a:off x="0" y="0"/>
+            <a:ext cx="201168" cy="1234440"/>
+          </a:xfrm>
+          <a:prstGeom prst="rect">
+            <a:avLst/>
+          </a:prstGeom>
+          <a:solidFill>
+            <a:srgbClr val="1D4ED8"/>
+          </a:solidFill>
+          <a:ln>
+            <a:noFill/>
+          </a:ln>
+          <a:effectLst/>
+        </p:spPr>
+        <p:style>
+          <a:lnRef idx="1">
+            <a:schemeClr val="accent1"/>
+          </a:lnRef>
+          <a:fillRef idx="3">
+            <a:schemeClr val="accent1"/>
+          </a:fillRef>
+          <a:effectRef idx="2">
+            <a:schemeClr val="accent1"/>
+          </a:effectRef>
+          <a:fontRef idx="minor">
+            <a:schemeClr val="lt1"/>
+          </a:fontRef>
+        </p:style>
+        <p:txBody>
+          <a:bodyPr rtlCol="0" anchor="ctr"/>
+          <a:lstStyle/>
+          <a:p>
+            <a:pPr algn="ctr"/>
+          </a:p>
+        </p:txBody>
+      </p:sp>
+      <p:sp>
+        <p:nvSpPr>
+          <p:cNvPr id="4" name="TextBox 3"/>
+          <p:cNvSpPr txBox="1"/>
+          <p:nvPr/>
+        </p:nvSpPr>
+        <p:spPr>
+          <a:xfrm>
+            <a:off x="548640" y="164592"/>
+            <a:ext cx="10972800" cy="1005840"/>
+          </a:xfrm>
+          <a:prstGeom prst="rect">
+            <a:avLst/>
+          </a:prstGeom>
+          <a:noFill/>
+        </p:spPr>
+        <p:txBody>
+          <a:bodyPr wrap="square" anchor="t">
+            <a:spAutoFit/>
+          </a:bodyPr>
+          <a:lstStyle/>
+          <a:p>
+            <a:pPr algn="l">
+              <a:spcBef>
+                <a:spcPts val="0"/>
+              </a:spcBef>
+              <a:spcAft>
+                <a:spcPts val="200"/>
+              </a:spcAft>
+            </a:pPr>
+            <a:r>
+              <a:rPr sz="1300" b="1">
+                <a:solidFill>
+                  <a:srgbClr val="1D4ED8"/>
+                </a:solidFill>
+                <a:latin typeface="Calibri"/>
+              </a:rPr>
+              <a:t>ROADMAP</a:t>
+            </a:r>
+          </a:p>
+          <a:p>
+            <a:pPr algn="l">
+              <a:spcBef>
+                <a:spcPts val="0"/>
+              </a:spcBef>
+              <a:spcAft>
+                <a:spcPts val="0"/>
+              </a:spcAft>
+            </a:pPr>
+            <a:r>
+              <a:rPr sz="2800" b="1">
+                <a:solidFill>
+                  <a:srgbClr val="0B0B0C"/>
+                </a:solidFill>
+                <a:latin typeface="Calibri"/>
+              </a:rPr>
+              <a:t>Where we are</a:t>
+            </a:r>
+          </a:p>
+        </p:txBody>
+      </p:sp>
+      <p:sp>
+        <p:nvSpPr>
+          <p:cNvPr id="5" name="Rectangle 4"/>
+          <p:cNvSpPr/>
+          <p:nvPr/>
+        </p:nvSpPr>
+        <p:spPr>
+          <a:xfrm>
+            <a:off x="548640" y="1097280"/>
+            <a:ext cx="11064240" cy="25400"/>
+          </a:xfrm>
+          <a:prstGeom prst="rect">
+            <a:avLst/>
+          </a:prstGeom>
+          <a:solidFill>
+            <a:srgbClr val="F4F6F8"/>
+          </a:solidFill>
+          <a:ln>
+            <a:noFill/>
+          </a:ln>
+          <a:effectLst/>
+        </p:spPr>
+        <p:style>
+          <a:lnRef idx="1">
+            <a:schemeClr val="accent1"/>
+          </a:lnRef>
+          <a:fillRef idx="3">
+            <a:schemeClr val="accent1"/>
+          </a:fillRef>
+          <a:effectRef idx="2">
+            <a:schemeClr val="accent1"/>
+          </a:effectRef>
+          <a:fontRef idx="minor">
+            <a:schemeClr val="lt1"/>
+          </a:fontRef>
+        </p:style>
+        <p:txBody>
+          <a:bodyPr rtlCol="0" anchor="ctr"/>
+          <a:lstStyle/>
+          <a:p>
+            <a:pPr algn="ctr"/>
+          </a:p>
+        </p:txBody>
+      </p:sp>
+      <p:sp>
+        <p:nvSpPr>
+          <p:cNvPr id="6" name="Rectangle 5"/>
+          <p:cNvSpPr/>
+          <p:nvPr/>
+        </p:nvSpPr>
+        <p:spPr>
+          <a:xfrm>
+            <a:off x="548640" y="1645920"/>
+            <a:ext cx="685800" cy="777240"/>
+          </a:xfrm>
+          <a:prstGeom prst="rect">
+            <a:avLst/>
+          </a:prstGeom>
+          <a:solidFill>
+            <a:srgbClr val="1D4ED8"/>
+          </a:solidFill>
+          <a:ln>
+            <a:noFill/>
+          </a:ln>
+          <a:effectLst/>
+        </p:spPr>
+        <p:style>
+          <a:lnRef idx="1">
+            <a:schemeClr val="accent1"/>
+          </a:lnRef>
+          <a:fillRef idx="3">
+            <a:schemeClr val="accent1"/>
+          </a:fillRef>
+          <a:effectRef idx="2">
+            <a:schemeClr val="accent1"/>
+          </a:effectRef>
+          <a:fontRef idx="minor">
+            <a:schemeClr val="lt1"/>
+          </a:fontRef>
+        </p:style>
+        <p:txBody>
+          <a:bodyPr rtlCol="0" anchor="ctr"/>
+          <a:lstStyle/>
+          <a:p>
+            <a:pPr algn="ctr"/>
+          </a:p>
+        </p:txBody>
+      </p:sp>
+      <p:sp>
+        <p:nvSpPr>
+          <p:cNvPr id="7" name="TextBox 6"/>
+          <p:cNvSpPr txBox="1"/>
+          <p:nvPr/>
+        </p:nvSpPr>
+        <p:spPr>
+          <a:xfrm>
+            <a:off x="548640" y="1645920"/>
+            <a:ext cx="685800" cy="777240"/>
+          </a:xfrm>
+          <a:prstGeom prst="rect">
+            <a:avLst/>
+          </a:prstGeom>
+          <a:noFill/>
+        </p:spPr>
+        <p:txBody>
+          <a:bodyPr wrap="square" anchor="ctr">
+            <a:spAutoFit/>
+          </a:bodyPr>
+          <a:lstStyle/>
+          <a:p>
+            <a:pPr algn="ctr">
+              <a:spcBef>
+                <a:spcPts val="0"/>
+              </a:spcBef>
+              <a:spcAft>
+                <a:spcPts val="0"/>
+              </a:spcAft>
+            </a:pPr>
+            <a:r>
+              <a:rPr sz="2600" b="1">
+                <a:solidFill>
+                  <a:srgbClr val="FFFFFF"/>
+                </a:solidFill>
+                <a:latin typeface="Calibri"/>
+              </a:rPr>
+              <a:t>1</a:t>
+            </a:r>
+          </a:p>
+        </p:txBody>
+      </p:sp>
+      <p:sp>
+        <p:nvSpPr>
+          <p:cNvPr id="8" name="Rectangle 7"/>
+          <p:cNvSpPr/>
+          <p:nvPr/>
+        </p:nvSpPr>
+        <p:spPr>
+          <a:xfrm>
+            <a:off x="1325880" y="1645920"/>
+            <a:ext cx="10287000" cy="777240"/>
+          </a:xfrm>
+          <a:prstGeom prst="rect">
+            <a:avLst/>
+          </a:prstGeom>
+          <a:solidFill>
+            <a:srgbClr val="F4F6F8"/>
+          </a:solidFill>
+          <a:ln>
+            <a:noFill/>
+          </a:ln>
+          <a:effectLst/>
+        </p:spPr>
+        <p:style>
+          <a:lnRef idx="1">
+            <a:schemeClr val="accent1"/>
+          </a:lnRef>
+          <a:fillRef idx="3">
+            <a:schemeClr val="accent1"/>
+          </a:fillRef>
+          <a:effectRef idx="2">
+            <a:schemeClr val="accent1"/>
+          </a:effectRef>
+          <a:fontRef idx="minor">
+            <a:schemeClr val="lt1"/>
+          </a:fontRef>
+        </p:style>
+        <p:txBody>
+          <a:bodyPr rtlCol="0" anchor="ctr"/>
+          <a:lstStyle/>
+          <a:p>
+            <a:pPr algn="ctr"/>
+          </a:p>
+        </p:txBody>
+      </p:sp>
+      <p:sp>
+        <p:nvSpPr>
+          <p:cNvPr id="9" name="TextBox 8"/>
+          <p:cNvSpPr txBox="1"/>
+          <p:nvPr/>
+        </p:nvSpPr>
+        <p:spPr>
+          <a:xfrm>
+            <a:off x="1554480" y="1719072"/>
+            <a:ext cx="9875520" cy="685800"/>
+          </a:xfrm>
+          <a:prstGeom prst="rect">
+            <a:avLst/>
+          </a:prstGeom>
+          <a:noFill/>
+        </p:spPr>
+        <p:txBody>
+          <a:bodyPr wrap="square" anchor="ctr">
+            <a:spAutoFit/>
+          </a:bodyPr>
+          <a:lstStyle/>
+          <a:p>
+            <a:pPr algn="l">
+              <a:spcBef>
+                <a:spcPts val="0"/>
+              </a:spcBef>
+              <a:spcAft>
+                <a:spcPts val="200"/>
+              </a:spcAft>
+            </a:pPr>
+            <a:r>
+              <a:rPr sz="1600" b="1">
+                <a:solidFill>
+                  <a:srgbClr val="0B0B0C"/>
+                </a:solidFill>
+                <a:latin typeface="Calibri"/>
+              </a:rPr>
+              <a:t>Recreate ricoman.com exactly on the new platform</a:t>
+            </a:r>
+          </a:p>
+          <a:p>
+            <a:pPr algn="l">
+              <a:spcBef>
+                <a:spcPts val="0"/>
+              </a:spcBef>
+              <a:spcAft>
+                <a:spcPts val="0"/>
+              </a:spcAft>
+            </a:pPr>
+            <a:r>
+              <a:rPr sz="1250" b="0">
+                <a:solidFill>
+                  <a:srgbClr val="5B626D"/>
+                </a:solidFill>
+                <a:latin typeface="Calibri"/>
+              </a:rPr>
+              <a:t>In progress — confirming each page matches live</a:t>
+            </a:r>
+          </a:p>
+        </p:txBody>
+      </p:sp>
+      <p:sp>
+        <p:nvSpPr>
+          <p:cNvPr id="10" name="Rectangle 9"/>
+          <p:cNvSpPr/>
+          <p:nvPr/>
+        </p:nvSpPr>
+        <p:spPr>
+          <a:xfrm>
+            <a:off x="548640" y="2560320"/>
+            <a:ext cx="685800" cy="777240"/>
+          </a:xfrm>
+          <a:prstGeom prst="rect">
+            <a:avLst/>
+          </a:prstGeom>
+          <a:solidFill>
+            <a:srgbClr val="1D4ED8"/>
+          </a:solidFill>
+          <a:ln>
+            <a:noFill/>
+          </a:ln>
+          <a:effectLst/>
+        </p:spPr>
+        <p:style>
+          <a:lnRef idx="1">
+            <a:schemeClr val="accent1"/>
+          </a:lnRef>
+          <a:fillRef idx="3">
+            <a:schemeClr val="accent1"/>
+          </a:fillRef>
+          <a:effectRef idx="2">
+            <a:schemeClr val="accent1"/>
+          </a:effectRef>
+          <a:fontRef idx="minor">
+            <a:schemeClr val="lt1"/>
+          </a:fontRef>
+        </p:style>
+        <p:txBody>
+          <a:bodyPr rtlCol="0" anchor="ctr"/>
+          <a:lstStyle/>
+          <a:p>
+            <a:pPr algn="ctr"/>
+          </a:p>
+        </p:txBody>
+      </p:sp>
+      <p:sp>
+        <p:nvSpPr>
+          <p:cNvPr id="11" name="TextBox 10"/>
+          <p:cNvSpPr txBox="1"/>
+          <p:nvPr/>
+        </p:nvSpPr>
+        <p:spPr>
+          <a:xfrm>
+            <a:off x="548640" y="2560320"/>
+            <a:ext cx="685800" cy="777240"/>
+          </a:xfrm>
+          <a:prstGeom prst="rect">
+            <a:avLst/>
+          </a:prstGeom>
+          <a:noFill/>
+        </p:spPr>
+        <p:txBody>
+          <a:bodyPr wrap="square" anchor="ctr">
+            <a:spAutoFit/>
+          </a:bodyPr>
+          <a:lstStyle/>
+          <a:p>
+            <a:pPr algn="ctr">
+              <a:spcBef>
+                <a:spcPts val="0"/>
+              </a:spcBef>
+              <a:spcAft>
+                <a:spcPts val="0"/>
+              </a:spcAft>
+            </a:pPr>
+            <a:r>
+              <a:rPr sz="2600" b="1">
+                <a:solidFill>
+                  <a:srgbClr val="FFFFFF"/>
+                </a:solidFill>
+                <a:latin typeface="Calibri"/>
+              </a:rPr>
+              <a:t>2</a:t>
+            </a:r>
+          </a:p>
+        </p:txBody>
+      </p:sp>
+      <p:sp>
+        <p:nvSpPr>
+          <p:cNvPr id="12" name="Rectangle 11"/>
+          <p:cNvSpPr/>
+          <p:nvPr/>
+        </p:nvSpPr>
+        <p:spPr>
+          <a:xfrm>
+            <a:off x="1325880" y="2560320"/>
+            <a:ext cx="10287000" cy="777240"/>
+          </a:xfrm>
+          <a:prstGeom prst="rect">
+            <a:avLst/>
+          </a:prstGeom>
+          <a:solidFill>
+            <a:srgbClr val="F4F6F8"/>
+          </a:solidFill>
+          <a:ln>
+            <a:noFill/>
+          </a:ln>
+          <a:effectLst/>
+        </p:spPr>
+        <p:style>
+          <a:lnRef idx="1">
+            <a:schemeClr val="accent1"/>
+          </a:lnRef>
+          <a:fillRef idx="3">
+            <a:schemeClr val="accent1"/>
+          </a:fillRef>
+          <a:effectRef idx="2">
+            <a:schemeClr val="accent1"/>
+          </a:effectRef>
+          <a:fontRef idx="minor">
+            <a:schemeClr val="lt1"/>
+          </a:fontRef>
+        </p:style>
+        <p:txBody>
+          <a:bodyPr rtlCol="0" anchor="ctr"/>
+          <a:lstStyle/>
+          <a:p>
+            <a:pPr algn="ctr"/>
+          </a:p>
+        </p:txBody>
+      </p:sp>
+      <p:sp>
+        <p:nvSpPr>
+          <p:cNvPr id="13" name="TextBox 12"/>
+          <p:cNvSpPr txBox="1"/>
+          <p:nvPr/>
+        </p:nvSpPr>
+        <p:spPr>
+          <a:xfrm>
+            <a:off x="1554480" y="2633472"/>
+            <a:ext cx="9875520" cy="685800"/>
+          </a:xfrm>
+          <a:prstGeom prst="rect">
+            <a:avLst/>
+          </a:prstGeom>
+          <a:noFill/>
+        </p:spPr>
+        <p:txBody>
+          <a:bodyPr wrap="square" anchor="ctr">
+            <a:spAutoFit/>
+          </a:bodyPr>
+          <a:lstStyle/>
+          <a:p>
+            <a:pPr algn="l">
+              <a:spcBef>
+                <a:spcPts val="0"/>
+              </a:spcBef>
+              <a:spcAft>
+                <a:spcPts val="200"/>
+              </a:spcAft>
+            </a:pPr>
+            <a:r>
+              <a:rPr sz="1600" b="1">
+                <a:solidFill>
+                  <a:srgbClr val="0B0B0C"/>
+                </a:solidFill>
+                <a:latin typeface="Calibri"/>
+              </a:rPr>
+              <a:t>Check &amp; enhance SEO</a:t>
+            </a:r>
+          </a:p>
+          <a:p>
+            <a:pPr algn="l">
+              <a:spcBef>
+                <a:spcPts val="0"/>
+              </a:spcBef>
+              <a:spcAft>
+                <a:spcPts val="0"/>
+              </a:spcAft>
+            </a:pPr>
+            <a:r>
+              <a:rPr sz="1250" b="0">
+                <a:solidFill>
+                  <a:srgbClr val="5B626D"/>
+                </a:solidFill>
+                <a:latin typeface="Calibri"/>
+              </a:rPr>
+              <a:t>Foundations + audit tooling built</a:t>
+            </a:r>
+          </a:p>
+        </p:txBody>
+      </p:sp>
+      <p:sp>
+        <p:nvSpPr>
+          <p:cNvPr id="14" name="Rectangle 13"/>
+          <p:cNvSpPr/>
+          <p:nvPr/>
+        </p:nvSpPr>
+        <p:spPr>
+          <a:xfrm>
+            <a:off x="548640" y="3474720"/>
+            <a:ext cx="685800" cy="777240"/>
+          </a:xfrm>
+          <a:prstGeom prst="rect">
+            <a:avLst/>
+          </a:prstGeom>
+          <a:solidFill>
+            <a:srgbClr val="5B626D"/>
+          </a:solidFill>
+          <a:ln>
+            <a:noFill/>
+          </a:ln>
+          <a:effectLst/>
+        </p:spPr>
+        <p:style>
+          <a:lnRef idx="1">
+            <a:schemeClr val="accent1"/>
+          </a:lnRef>
+          <a:fillRef idx="3">
+            <a:schemeClr val="accent1"/>
+          </a:fillRef>
+          <a:effectRef idx="2">
+            <a:schemeClr val="accent1"/>
+          </a:effectRef>
+          <a:fontRef idx="minor">
+            <a:schemeClr val="lt1"/>
+          </a:fontRef>
+        </p:style>
+        <p:txBody>
+          <a:bodyPr rtlCol="0" anchor="ctr"/>
+          <a:lstStyle/>
+          <a:p>
+            <a:pPr algn="ctr"/>
+          </a:p>
+        </p:txBody>
+      </p:sp>
+      <p:sp>
+        <p:nvSpPr>
+          <p:cNvPr id="15" name="TextBox 14"/>
+          <p:cNvSpPr txBox="1"/>
+          <p:nvPr/>
+        </p:nvSpPr>
+        <p:spPr>
+          <a:xfrm>
+            <a:off x="548640" y="3474720"/>
+            <a:ext cx="685800" cy="777240"/>
+          </a:xfrm>
+          <a:prstGeom prst="rect">
+            <a:avLst/>
+          </a:prstGeom>
+          <a:noFill/>
+        </p:spPr>
+        <p:txBody>
+          <a:bodyPr wrap="square" anchor="ctr">
+            <a:spAutoFit/>
+          </a:bodyPr>
+          <a:lstStyle/>
+          <a:p>
+            <a:pPr algn="ctr">
+              <a:spcBef>
+                <a:spcPts val="0"/>
+              </a:spcBef>
+              <a:spcAft>
+                <a:spcPts val="0"/>
+              </a:spcAft>
+            </a:pPr>
+            <a:r>
+              <a:rPr sz="2600" b="1">
+                <a:solidFill>
+                  <a:srgbClr val="FFFFFF"/>
+                </a:solidFill>
+                <a:latin typeface="Calibri"/>
+              </a:rPr>
+              <a:t>3</a:t>
+            </a:r>
+          </a:p>
+        </p:txBody>
+      </p:sp>
+      <p:sp>
+        <p:nvSpPr>
+          <p:cNvPr id="16" name="Rectangle 15"/>
+          <p:cNvSpPr/>
+          <p:nvPr/>
+        </p:nvSpPr>
+        <p:spPr>
+          <a:xfrm>
+            <a:off x="1325880" y="3474720"/>
+            <a:ext cx="10287000" cy="777240"/>
+          </a:xfrm>
+          <a:prstGeom prst="rect">
+            <a:avLst/>
+          </a:prstGeom>
+          <a:solidFill>
+            <a:srgbClr val="F4F6F8"/>
+          </a:solidFill>
+          <a:ln>
+            <a:noFill/>
+          </a:ln>
+          <a:effectLst/>
+        </p:spPr>
+        <p:style>
+          <a:lnRef idx="1">
+            <a:schemeClr val="accent1"/>
+          </a:lnRef>
+          <a:fillRef idx="3">
+            <a:schemeClr val="accent1"/>
+          </a:fillRef>
+          <a:effectRef idx="2">
+            <a:schemeClr val="accent1"/>
+          </a:effectRef>
+          <a:fontRef idx="minor">
+            <a:schemeClr val="lt1"/>
+          </a:fontRef>
+        </p:style>
+        <p:txBody>
+          <a:bodyPr rtlCol="0" anchor="ctr"/>
+          <a:lstStyle/>
+          <a:p>
+            <a:pPr algn="ctr"/>
+          </a:p>
+        </p:txBody>
+      </p:sp>
+      <p:sp>
+        <p:nvSpPr>
+          <p:cNvPr id="17" name="TextBox 16"/>
+          <p:cNvSpPr txBox="1"/>
+          <p:nvPr/>
+        </p:nvSpPr>
+        <p:spPr>
+          <a:xfrm>
+            <a:off x="1554480" y="3547872"/>
+            <a:ext cx="9875520" cy="685800"/>
+          </a:xfrm>
+          <a:prstGeom prst="rect">
+            <a:avLst/>
+          </a:prstGeom>
+          <a:noFill/>
+        </p:spPr>
+        <p:txBody>
+          <a:bodyPr wrap="square" anchor="ctr">
+            <a:spAutoFit/>
+          </a:bodyPr>
+          <a:lstStyle/>
+          <a:p>
+            <a:pPr algn="l">
+              <a:spcBef>
+                <a:spcPts val="0"/>
+              </a:spcBef>
+              <a:spcAft>
+                <a:spcPts val="200"/>
+              </a:spcAft>
+            </a:pPr>
+            <a:r>
+              <a:rPr sz="1600" b="1">
+                <a:solidFill>
+                  <a:srgbClr val="0B0B0C"/>
+                </a:solidFill>
+                <a:latin typeface="Calibri"/>
+              </a:rPr>
+              <a:t>Launch — migrate the new site to live</a:t>
+            </a:r>
+          </a:p>
+          <a:p>
+            <a:pPr algn="l">
+              <a:spcBef>
+                <a:spcPts val="0"/>
+              </a:spcBef>
+              <a:spcAft>
+                <a:spcPts val="0"/>
+              </a:spcAft>
+            </a:pPr>
+            <a:r>
+              <a:rPr sz="1250" b="0">
+                <a:solidFill>
+                  <a:srgbClr val="5B626D"/>
+                </a:solidFill>
+                <a:latin typeface="Calibri"/>
+              </a:rPr>
+              <a:t>Runbook prepared</a:t>
+            </a:r>
+          </a:p>
+        </p:txBody>
+      </p:sp>
+      <p:sp>
+        <p:nvSpPr>
+          <p:cNvPr id="18" name="Rectangle 17"/>
+          <p:cNvSpPr/>
+          <p:nvPr/>
+        </p:nvSpPr>
+        <p:spPr>
+          <a:xfrm>
+            <a:off x="548640" y="4389120"/>
+            <a:ext cx="685800" cy="777240"/>
+          </a:xfrm>
+          <a:prstGeom prst="rect">
+            <a:avLst/>
+          </a:prstGeom>
+          <a:solidFill>
+            <a:srgbClr val="1A7F37"/>
+          </a:solidFill>
+          <a:ln>
+            <a:noFill/>
+          </a:ln>
+          <a:effectLst/>
+        </p:spPr>
+        <p:style>
+          <a:lnRef idx="1">
+            <a:schemeClr val="accent1"/>
+          </a:lnRef>
+          <a:fillRef idx="3">
+            <a:schemeClr val="accent1"/>
+          </a:fillRef>
+          <a:effectRef idx="2">
+            <a:schemeClr val="accent1"/>
+          </a:effectRef>
+          <a:fontRef idx="minor">
+            <a:schemeClr val="lt1"/>
+          </a:fontRef>
+        </p:style>
+        <p:txBody>
+          <a:bodyPr rtlCol="0" anchor="ctr"/>
+          <a:lstStyle/>
+          <a:p>
+            <a:pPr algn="ctr"/>
+          </a:p>
+        </p:txBody>
+      </p:sp>
+      <p:sp>
+        <p:nvSpPr>
+          <p:cNvPr id="19" name="TextBox 18"/>
+          <p:cNvSpPr txBox="1"/>
+          <p:nvPr/>
+        </p:nvSpPr>
+        <p:spPr>
+          <a:xfrm>
+            <a:off x="548640" y="4389120"/>
+            <a:ext cx="685800" cy="777240"/>
+          </a:xfrm>
+          <a:prstGeom prst="rect">
+            <a:avLst/>
+          </a:prstGeom>
+          <a:noFill/>
+        </p:spPr>
+        <p:txBody>
+          <a:bodyPr wrap="square" anchor="ctr">
+            <a:spAutoFit/>
+          </a:bodyPr>
+          <a:lstStyle/>
+          <a:p>
+            <a:pPr algn="ctr">
+              <a:spcBef>
+                <a:spcPts val="0"/>
+              </a:spcBef>
+              <a:spcAft>
+                <a:spcPts val="0"/>
+              </a:spcAft>
+            </a:pPr>
+            <a:r>
+              <a:rPr sz="2600" b="1">
+                <a:solidFill>
+                  <a:srgbClr val="FFFFFF"/>
+                </a:solidFill>
+                <a:latin typeface="Calibri"/>
+              </a:rPr>
+              <a:t>4</a:t>
+            </a:r>
+          </a:p>
+        </p:txBody>
+      </p:sp>
+      <p:sp>
+        <p:nvSpPr>
+          <p:cNvPr id="20" name="Rectangle 19"/>
+          <p:cNvSpPr/>
+          <p:nvPr/>
+        </p:nvSpPr>
+        <p:spPr>
+          <a:xfrm>
+            <a:off x="1325880" y="4389120"/>
+            <a:ext cx="10287000" cy="777240"/>
+          </a:xfrm>
+          <a:prstGeom prst="rect">
+            <a:avLst/>
+          </a:prstGeom>
+          <a:solidFill>
+            <a:srgbClr val="F4F6F8"/>
+          </a:solidFill>
+          <a:ln>
+            <a:noFill/>
+          </a:ln>
+          <a:effectLst/>
+        </p:spPr>
+        <p:style>
+          <a:lnRef idx="1">
+            <a:schemeClr val="accent1"/>
+          </a:lnRef>
+          <a:fillRef idx="3">
+            <a:schemeClr val="accent1"/>
+          </a:fillRef>
+          <a:effectRef idx="2">
+            <a:schemeClr val="accent1"/>
+          </a:effectRef>
+          <a:fontRef idx="minor">
+            <a:schemeClr val="lt1"/>
+          </a:fontRef>
+        </p:style>
+        <p:txBody>
+          <a:bodyPr rtlCol="0" anchor="ctr"/>
+          <a:lstStyle/>
+          <a:p>
+            <a:pPr algn="ctr"/>
+          </a:p>
+        </p:txBody>
+      </p:sp>
+      <p:sp>
+        <p:nvSpPr>
+          <p:cNvPr id="21" name="TextBox 20"/>
+          <p:cNvSpPr txBox="1"/>
+          <p:nvPr/>
+        </p:nvSpPr>
+        <p:spPr>
+          <a:xfrm>
+            <a:off x="1554480" y="4462272"/>
+            <a:ext cx="9875520" cy="685800"/>
+          </a:xfrm>
+          <a:prstGeom prst="rect">
+            <a:avLst/>
+          </a:prstGeom>
+          <a:noFill/>
+        </p:spPr>
+        <p:txBody>
+          <a:bodyPr wrap="square" anchor="ctr">
+            <a:spAutoFit/>
+          </a:bodyPr>
+          <a:lstStyle/>
+          <a:p>
+            <a:pPr algn="l">
+              <a:spcBef>
+                <a:spcPts val="0"/>
+              </a:spcBef>
+              <a:spcAft>
+                <a:spcPts val="200"/>
+              </a:spcAft>
+            </a:pPr>
+            <a:r>
+              <a:rPr sz="1600" b="1">
+                <a:solidFill>
+                  <a:srgbClr val="0B0B0C"/>
+                </a:solidFill>
+                <a:latin typeface="Calibri"/>
+              </a:rPr>
+              <a:t>Feature &amp; enhanced pages</a:t>
+            </a:r>
+          </a:p>
+          <a:p>
+            <a:pPr algn="l">
+              <a:spcBef>
+                <a:spcPts val="0"/>
+              </a:spcBef>
+              <a:spcAft>
+                <a:spcPts val="0"/>
+              </a:spcAft>
+            </a:pPr>
+            <a:r>
+              <a:rPr sz="1250" b="0">
+                <a:solidFill>
+                  <a:srgbClr val="5B626D"/>
+                </a:solidFill>
+                <a:latin typeface="Calibri"/>
+              </a:rPr>
+              <a:t>Built (Casambi, Fire Safety, Trade, …)</a:t>
+            </a:r>
+          </a:p>
+        </p:txBody>
+      </p:sp>
+      <p:sp>
+        <p:nvSpPr>
+          <p:cNvPr id="22" name="Rectangle 21"/>
+          <p:cNvSpPr/>
+          <p:nvPr/>
+        </p:nvSpPr>
+        <p:spPr>
+          <a:xfrm>
+            <a:off x="548640" y="5303520"/>
+            <a:ext cx="685800" cy="777240"/>
+          </a:xfrm>
+          <a:prstGeom prst="rect">
+            <a:avLst/>
+          </a:prstGeom>
+          <a:solidFill>
+            <a:srgbClr val="5B626D"/>
+          </a:solidFill>
+          <a:ln>
+            <a:noFill/>
+          </a:ln>
+          <a:effectLst/>
+        </p:spPr>
+        <p:style>
+          <a:lnRef idx="1">
+            <a:schemeClr val="accent1"/>
+          </a:lnRef>
+          <a:fillRef idx="3">
+            <a:schemeClr val="accent1"/>
+          </a:fillRef>
+          <a:effectRef idx="2">
+            <a:schemeClr val="accent1"/>
+          </a:effectRef>
+          <a:fontRef idx="minor">
+            <a:schemeClr val="lt1"/>
+          </a:fontRef>
+        </p:style>
+        <p:txBody>
+          <a:bodyPr rtlCol="0" anchor="ctr"/>
+          <a:lstStyle/>
+          <a:p>
+            <a:pPr algn="ctr"/>
+          </a:p>
+        </p:txBody>
+      </p:sp>
+      <p:sp>
+        <p:nvSpPr>
+          <p:cNvPr id="23" name="TextBox 22"/>
+          <p:cNvSpPr txBox="1"/>
+          <p:nvPr/>
+        </p:nvSpPr>
+        <p:spPr>
+          <a:xfrm>
+            <a:off x="548640" y="5303520"/>
+            <a:ext cx="685800" cy="777240"/>
+          </a:xfrm>
+          <a:prstGeom prst="rect">
+            <a:avLst/>
+          </a:prstGeom>
+          <a:noFill/>
+        </p:spPr>
+        <p:txBody>
+          <a:bodyPr wrap="square" anchor="ctr">
+            <a:spAutoFit/>
+          </a:bodyPr>
+          <a:lstStyle/>
+          <a:p>
+            <a:pPr algn="ctr">
+              <a:spcBef>
+                <a:spcPts val="0"/>
+              </a:spcBef>
+              <a:spcAft>
+                <a:spcPts val="0"/>
+              </a:spcAft>
+            </a:pPr>
+            <a:r>
+              <a:rPr sz="2600" b="1">
+                <a:solidFill>
+                  <a:srgbClr val="FFFFFF"/>
+                </a:solidFill>
+                <a:latin typeface="Calibri"/>
+              </a:rPr>
+              <a:t>5</a:t>
+            </a:r>
+          </a:p>
+        </p:txBody>
+      </p:sp>
+      <p:sp>
+        <p:nvSpPr>
+          <p:cNvPr id="24" name="Rectangle 23"/>
+          <p:cNvSpPr/>
+          <p:nvPr/>
+        </p:nvSpPr>
+        <p:spPr>
+          <a:xfrm>
+            <a:off x="1325880" y="5303520"/>
+            <a:ext cx="10287000" cy="777240"/>
+          </a:xfrm>
+          <a:prstGeom prst="rect">
+            <a:avLst/>
+          </a:prstGeom>
+          <a:solidFill>
+            <a:srgbClr val="F4F6F8"/>
+          </a:solidFill>
+          <a:ln>
+            <a:noFill/>
+          </a:ln>
+          <a:effectLst/>
+        </p:spPr>
+        <p:style>
+          <a:lnRef idx="1">
+            <a:schemeClr val="accent1"/>
+          </a:lnRef>
+          <a:fillRef idx="3">
+            <a:schemeClr val="accent1"/>
+          </a:fillRef>
+          <a:effectRef idx="2">
+            <a:schemeClr val="accent1"/>
+          </a:effectRef>
+          <a:fontRef idx="minor">
+            <a:schemeClr val="lt1"/>
+          </a:fontRef>
+        </p:style>
+        <p:txBody>
+          <a:bodyPr rtlCol="0" anchor="ctr"/>
+          <a:lstStyle/>
+          <a:p>
+            <a:pPr algn="ctr"/>
+          </a:p>
+        </p:txBody>
+      </p:sp>
+      <p:sp>
+        <p:nvSpPr>
+          <p:cNvPr id="25" name="TextBox 24"/>
+          <p:cNvSpPr txBox="1"/>
+          <p:nvPr/>
+        </p:nvSpPr>
+        <p:spPr>
+          <a:xfrm>
+            <a:off x="1554480" y="5376672"/>
+            <a:ext cx="9875520" cy="685800"/>
+          </a:xfrm>
+          <a:prstGeom prst="rect">
+            <a:avLst/>
+          </a:prstGeom>
+          <a:noFill/>
+        </p:spPr>
+        <p:txBody>
+          <a:bodyPr wrap="square" anchor="ctr">
+            <a:spAutoFit/>
+          </a:bodyPr>
+          <a:lstStyle/>
+          <a:p>
+            <a:pPr algn="l">
+              <a:spcBef>
+                <a:spcPts val="0"/>
+              </a:spcBef>
+              <a:spcAft>
+                <a:spcPts val="200"/>
+              </a:spcAft>
+            </a:pPr>
+            <a:r>
+              <a:rPr sz="1600" b="1">
+                <a:solidFill>
+                  <a:srgbClr val="0B0B0C"/>
+                </a:solidFill>
+                <a:latin typeface="Calibri"/>
+              </a:rPr>
+              <a:t>Reconnect live product data</a:t>
+            </a:r>
+          </a:p>
+          <a:p>
+            <a:pPr algn="l">
+              <a:spcBef>
+                <a:spcPts val="0"/>
+              </a:spcBef>
+              <a:spcAft>
+                <a:spcPts val="0"/>
+              </a:spcAft>
+            </a:pPr>
+            <a:r>
+              <a:rPr sz="1250" b="0">
+                <a:solidFill>
+                  <a:srgbClr val="5B626D"/>
+                </a:solidFill>
+                <a:latin typeface="Calibri"/>
+              </a:rPr>
+              <a:t>Final step, switched on last</a:t>
+            </a:r>
+          </a:p>
+        </p:txBody>
+      </p:sp>
+      <p:sp>
+        <p:nvSpPr>
+          <p:cNvPr id="26" name="TextBox 25"/>
+          <p:cNvSpPr txBox="1"/>
+          <p:nvPr/>
+        </p:nvSpPr>
+        <p:spPr>
+          <a:xfrm>
+            <a:off x="548640" y="6400800"/>
+            <a:ext cx="7315200" cy="365760"/>
+          </a:xfrm>
+          <a:prstGeom prst="rect">
+            <a:avLst/>
+          </a:prstGeom>
+          <a:noFill/>
+        </p:spPr>
+        <p:txBody>
+          <a:bodyPr wrap="square" anchor="t">
+            <a:spAutoFit/>
+          </a:bodyPr>
+          <a:lstStyle/>
+          <a:p>
+            <a:pPr algn="l">
+              <a:spcBef>
+                <a:spcPts val="0"/>
+              </a:spcBef>
+              <a:spcAft>
+                <a:spcPts val="0"/>
+              </a:spcAft>
+            </a:pPr>
+            <a:r>
+              <a:rPr sz="1000" b="0">
+                <a:solidFill>
+                  <a:srgbClr val="5B626D"/>
+                </a:solidFill>
+                <a:latin typeface="Calibri"/>
+              </a:rPr>
+              <a:t>Ricoman — the new website</a:t>
+            </a:r>
+          </a:p>
+        </p:txBody>
+      </p:sp>
+      <p:sp>
+        <p:nvSpPr>
+          <p:cNvPr id="27" name="TextBox 26"/>
+          <p:cNvSpPr txBox="1"/>
+          <p:nvPr/>
+        </p:nvSpPr>
+        <p:spPr>
+          <a:xfrm>
+            <a:off x="10789920" y="6400800"/>
+            <a:ext cx="914400" cy="365760"/>
+          </a:xfrm>
+          <a:prstGeom prst="rect">
+            <a:avLst/>
+          </a:prstGeom>
+          <a:noFill/>
+        </p:spPr>
+        <p:txBody>
+          <a:bodyPr wrap="square" anchor="t">
+            <a:spAutoFit/>
+          </a:bodyPr>
+          <a:lstStyle/>
+          <a:p>
+            <a:pPr algn="r">
+              <a:spcBef>
+                <a:spcPts val="0"/>
+              </a:spcBef>
+              <a:spcAft>
+                <a:spcPts val="0"/>
+              </a:spcAft>
+            </a:pPr>
+            <a:r>
+              <a:rPr sz="1000" b="1">
+                <a:solidFill>
+                  <a:srgbClr val="5B626D"/>
+                </a:solidFill>
+                <a:latin typeface="Calibri"/>
+              </a:rPr>
+              <a:t>14</a:t>
+            </a:r>
+          </a:p>
+        </p:txBody>
+      </p:sp>
+    </p:spTree>
+  </p:cSld>
+  <p:clrMapOvr>
+    <a:masterClrMapping/>
+  </p:clrMapOvr>
+</p:sld>
+</file>
+
+<file path=ppt/slides/slide15.xml><?xml version="1.0" encoding="utf-8"?>
+<p:sld xmlns:a="http://schemas.openxmlformats.org/drawingml/2006/main" xmlns:p="http://schemas.openxmlformats.org/presentationml/2006/main" xmlns:r="http://schemas.openxmlformats.org/officeDocument/2006/relationships">
+  <p:cSld>
+    <p:spTree>
+      <p:nvGrpSpPr>
+        <p:cNvPr id="1" name=""/>
+        <p:cNvGrpSpPr/>
+        <p:nvPr/>
+      </p:nvGrpSpPr>
+      <p:grpSpPr/>
+      <p:sp>
+        <p:nvSpPr>
+          <p:cNvPr id="2" name="Rectangle 1"/>
+          <p:cNvSpPr/>
+          <p:nvPr/>
+        </p:nvSpPr>
+        <p:spPr>
+          <a:xfrm>
+            <a:off x="0" y="0"/>
+            <a:ext cx="12191695" cy="1234440"/>
+          </a:xfrm>
+          <a:prstGeom prst="rect">
+            <a:avLst/>
+          </a:prstGeom>
+          <a:solidFill>
+            <a:srgbClr val="FFFFFF"/>
+          </a:solidFill>
+          <a:ln>
+            <a:noFill/>
+          </a:ln>
+          <a:effectLst/>
+        </p:spPr>
+        <p:style>
+          <a:lnRef idx="1">
+            <a:schemeClr val="accent1"/>
+          </a:lnRef>
+          <a:fillRef idx="3">
+            <a:schemeClr val="accent1"/>
+          </a:fillRef>
+          <a:effectRef idx="2">
+            <a:schemeClr val="accent1"/>
+          </a:effectRef>
+          <a:fontRef idx="minor">
+            <a:schemeClr val="lt1"/>
+          </a:fontRef>
+        </p:style>
+        <p:txBody>
+          <a:bodyPr rtlCol="0" anchor="ctr"/>
+          <a:lstStyle/>
+          <a:p>
+            <a:pPr algn="ctr"/>
+          </a:p>
+        </p:txBody>
+      </p:sp>
+      <p:sp>
+        <p:nvSpPr>
+          <p:cNvPr id="3" name="Rectangle 2"/>
+          <p:cNvSpPr/>
+          <p:nvPr/>
+        </p:nvSpPr>
+        <p:spPr>
+          <a:xfrm>
+            <a:off x="0" y="0"/>
+            <a:ext cx="201168" cy="1234440"/>
+          </a:xfrm>
+          <a:prstGeom prst="rect">
+            <a:avLst/>
+          </a:prstGeom>
+          <a:solidFill>
+            <a:srgbClr val="1D4ED8"/>
+          </a:solidFill>
+          <a:ln>
+            <a:noFill/>
+          </a:ln>
+          <a:effectLst/>
+        </p:spPr>
+        <p:style>
+          <a:lnRef idx="1">
+            <a:schemeClr val="accent1"/>
+          </a:lnRef>
+          <a:fillRef idx="3">
+            <a:schemeClr val="accent1"/>
+          </a:fillRef>
+          <a:effectRef idx="2">
+            <a:schemeClr val="accent1"/>
+          </a:effectRef>
+          <a:fontRef idx="minor">
+            <a:schemeClr val="lt1"/>
+          </a:fontRef>
+        </p:style>
+        <p:txBody>
+          <a:bodyPr rtlCol="0" anchor="ctr"/>
+          <a:lstStyle/>
+          <a:p>
+            <a:pPr algn="ctr"/>
+          </a:p>
+        </p:txBody>
+      </p:sp>
+      <p:sp>
+        <p:nvSpPr>
+          <p:cNvPr id="4" name="TextBox 3"/>
+          <p:cNvSpPr txBox="1"/>
+          <p:nvPr/>
+        </p:nvSpPr>
+        <p:spPr>
+          <a:xfrm>
+            <a:off x="548640" y="164592"/>
+            <a:ext cx="10972800" cy="1005840"/>
+          </a:xfrm>
+          <a:prstGeom prst="rect">
+            <a:avLst/>
+          </a:prstGeom>
+          <a:noFill/>
+        </p:spPr>
+        <p:txBody>
+          <a:bodyPr wrap="square" anchor="t">
+            <a:spAutoFit/>
+          </a:bodyPr>
+          <a:lstStyle/>
+          <a:p>
+            <a:pPr algn="l">
+              <a:spcBef>
+                <a:spcPts val="0"/>
+              </a:spcBef>
+              <a:spcAft>
+                <a:spcPts val="200"/>
+              </a:spcAft>
+            </a:pPr>
+            <a:r>
+              <a:rPr sz="1300" b="1">
+                <a:solidFill>
+                  <a:srgbClr val="1D4ED8"/>
+                </a:solidFill>
+                <a:latin typeface="Calibri"/>
+              </a:rPr>
+              <a:t>THE BOTTOM LINE</a:t>
+            </a:r>
+          </a:p>
+          <a:p>
+            <a:pPr algn="l">
+              <a:spcBef>
+                <a:spcPts val="0"/>
+              </a:spcBef>
+              <a:spcAft>
+                <a:spcPts val="0"/>
+              </a:spcAft>
+            </a:pPr>
+            <a:r>
+              <a:rPr sz="2800" b="1">
+                <a:solidFill>
+                  <a:srgbClr val="0B0B0C"/>
+                </a:solidFill>
+                <a:latin typeface="Calibri"/>
+              </a:rPr>
+              <a:t>Old site vs new site</a:t>
+            </a:r>
+          </a:p>
+        </p:txBody>
+      </p:sp>
+      <p:sp>
+        <p:nvSpPr>
+          <p:cNvPr id="5" name="Rectangle 4"/>
+          <p:cNvSpPr/>
+          <p:nvPr/>
+        </p:nvSpPr>
+        <p:spPr>
+          <a:xfrm>
+            <a:off x="548640" y="1097280"/>
+            <a:ext cx="11064240" cy="25400"/>
+          </a:xfrm>
+          <a:prstGeom prst="rect">
+            <a:avLst/>
+          </a:prstGeom>
+          <a:solidFill>
+            <a:srgbClr val="F4F6F8"/>
+          </a:solidFill>
+          <a:ln>
+            <a:noFill/>
+          </a:ln>
+          <a:effectLst/>
+        </p:spPr>
+        <p:style>
+          <a:lnRef idx="1">
+            <a:schemeClr val="accent1"/>
+          </a:lnRef>
+          <a:fillRef idx="3">
+            <a:schemeClr val="accent1"/>
+          </a:fillRef>
+          <a:effectRef idx="2">
+            <a:schemeClr val="accent1"/>
+          </a:effectRef>
+          <a:fontRef idx="minor">
+            <a:schemeClr val="lt1"/>
+          </a:fontRef>
+        </p:style>
+        <p:txBody>
+          <a:bodyPr rtlCol="0" anchor="ctr"/>
+          <a:lstStyle/>
+          <a:p>
+            <a:pPr algn="ctr"/>
+          </a:p>
+        </p:txBody>
+      </p:sp>
+      <p:sp>
+        <p:nvSpPr>
+          <p:cNvPr id="6" name="Rectangle 5"/>
+          <p:cNvSpPr/>
+          <p:nvPr/>
+        </p:nvSpPr>
+        <p:spPr>
+          <a:xfrm>
+            <a:off x="548640" y="1417320"/>
+            <a:ext cx="5486400" cy="457200"/>
+          </a:xfrm>
+          <a:prstGeom prst="rect">
+            <a:avLst/>
+          </a:prstGeom>
+          <a:solidFill>
+            <a:srgbClr val="0B0B0C"/>
+          </a:solidFill>
+          <a:ln>
+            <a:noFill/>
+          </a:ln>
+          <a:effectLst/>
+        </p:spPr>
+        <p:style>
+          <a:lnRef idx="1">
+            <a:schemeClr val="accent1"/>
+          </a:lnRef>
+          <a:fillRef idx="3">
+            <a:schemeClr val="accent1"/>
+          </a:fillRef>
+          <a:effectRef idx="2">
+            <a:schemeClr val="accent1"/>
+          </a:effectRef>
+          <a:fontRef idx="minor">
+            <a:schemeClr val="lt1"/>
+          </a:fontRef>
+        </p:style>
+        <p:txBody>
+          <a:bodyPr rtlCol="0" anchor="ctr"/>
+          <a:lstStyle/>
+          <a:p>
+            <a:pPr algn="ctr"/>
+          </a:p>
+        </p:txBody>
+      </p:sp>
+      <p:sp>
+        <p:nvSpPr>
+          <p:cNvPr id="7" name="Rectangle 6"/>
+          <p:cNvSpPr/>
+          <p:nvPr/>
+        </p:nvSpPr>
+        <p:spPr>
+          <a:xfrm>
+            <a:off x="6126480" y="1417320"/>
+            <a:ext cx="5486400" cy="457200"/>
+          </a:xfrm>
+          <a:prstGeom prst="rect">
+            <a:avLst/>
+          </a:prstGeom>
+          <a:solidFill>
+            <a:srgbClr val="1D4ED8"/>
+          </a:solidFill>
+          <a:ln>
+            <a:noFill/>
+          </a:ln>
+          <a:effectLst/>
+        </p:spPr>
+        <p:style>
+          <a:lnRef idx="1">
+            <a:schemeClr val="accent1"/>
+          </a:lnRef>
+          <a:fillRef idx="3">
+            <a:schemeClr val="accent1"/>
+          </a:fillRef>
+          <a:effectRef idx="2">
+            <a:schemeClr val="accent1"/>
+          </a:effectRef>
+          <a:fontRef idx="minor">
+            <a:schemeClr val="lt1"/>
+          </a:fontRef>
+        </p:style>
+        <p:txBody>
+          <a:bodyPr rtlCol="0" anchor="ctr"/>
+          <a:lstStyle/>
+          <a:p>
+            <a:pPr algn="ctr"/>
+          </a:p>
+        </p:txBody>
+      </p:sp>
+      <p:sp>
+        <p:nvSpPr>
+          <p:cNvPr id="8" name="TextBox 7"/>
+          <p:cNvSpPr txBox="1"/>
+          <p:nvPr/>
+        </p:nvSpPr>
+        <p:spPr>
+          <a:xfrm>
+            <a:off x="731520" y="1417320"/>
+            <a:ext cx="5120640" cy="457200"/>
+          </a:xfrm>
+          <a:prstGeom prst="rect">
+            <a:avLst/>
+          </a:prstGeom>
+          <a:noFill/>
+        </p:spPr>
+        <p:txBody>
+          <a:bodyPr wrap="square" anchor="ctr">
+            <a:spAutoFit/>
+          </a:bodyPr>
+          <a:lstStyle/>
+          <a:p>
+            <a:pPr algn="l">
+              <a:spcBef>
+                <a:spcPts val="0"/>
+              </a:spcBef>
+              <a:spcAft>
+                <a:spcPts val="0"/>
+              </a:spcAft>
+            </a:pPr>
+            <a:r>
+              <a:rPr sz="1300" b="1">
+                <a:solidFill>
+                  <a:srgbClr val="FFFFFF"/>
+                </a:solidFill>
+                <a:latin typeface="Calibri"/>
+              </a:rPr>
+              <a:t>OLD SITE</a:t>
+            </a:r>
+          </a:p>
+        </p:txBody>
+      </p:sp>
+      <p:sp>
+        <p:nvSpPr>
+          <p:cNvPr id="9" name="TextBox 8"/>
+          <p:cNvSpPr txBox="1"/>
+          <p:nvPr/>
+        </p:nvSpPr>
+        <p:spPr>
+          <a:xfrm>
+            <a:off x="6309360" y="1417320"/>
+            <a:ext cx="5120640" cy="457200"/>
+          </a:xfrm>
+          <a:prstGeom prst="rect">
+            <a:avLst/>
+          </a:prstGeom>
+          <a:noFill/>
+        </p:spPr>
+        <p:txBody>
+          <a:bodyPr wrap="square" anchor="ctr">
+            <a:spAutoFit/>
+          </a:bodyPr>
+          <a:lstStyle/>
+          <a:p>
+            <a:pPr algn="l">
+              <a:spcBef>
+                <a:spcPts val="0"/>
+              </a:spcBef>
+              <a:spcAft>
+                <a:spcPts val="0"/>
+              </a:spcAft>
+            </a:pPr>
+            <a:r>
+              <a:rPr sz="1300" b="1">
+                <a:solidFill>
+                  <a:srgbClr val="FFFFFF"/>
+                </a:solidFill>
+                <a:latin typeface="Calibri"/>
+              </a:rPr>
+              <a:t>NEW SITE</a:t>
+            </a:r>
+          </a:p>
+        </p:txBody>
+      </p:sp>
+      <p:sp>
+        <p:nvSpPr>
+          <p:cNvPr id="10" name="Rectangle 9"/>
+          <p:cNvSpPr/>
+          <p:nvPr/>
+        </p:nvSpPr>
+        <p:spPr>
+          <a:xfrm>
+            <a:off x="548640" y="1920240"/>
+            <a:ext cx="5486400" cy="512064"/>
+          </a:xfrm>
+          <a:prstGeom prst="rect">
+            <a:avLst/>
+          </a:prstGeom>
+          <a:solidFill>
+            <a:srgbClr val="FFFFFF"/>
+          </a:solidFill>
+          <a:ln>
+            <a:noFill/>
+          </a:ln>
+          <a:effectLst/>
+        </p:spPr>
+        <p:style>
+          <a:lnRef idx="1">
+            <a:schemeClr val="accent1"/>
+          </a:lnRef>
+          <a:fillRef idx="3">
+            <a:schemeClr val="accent1"/>
+          </a:fillRef>
+          <a:effectRef idx="2">
+            <a:schemeClr val="accent1"/>
+          </a:effectRef>
+          <a:fontRef idx="minor">
+            <a:schemeClr val="lt1"/>
+          </a:fontRef>
+        </p:style>
+        <p:txBody>
+          <a:bodyPr rtlCol="0" anchor="ctr"/>
+          <a:lstStyle/>
+          <a:p>
+            <a:pPr algn="ctr"/>
+          </a:p>
+        </p:txBody>
+      </p:sp>
+      <p:sp>
+        <p:nvSpPr>
+          <p:cNvPr id="11" name="Rectangle 10"/>
+          <p:cNvSpPr/>
+          <p:nvPr/>
+        </p:nvSpPr>
+        <p:spPr>
+          <a:xfrm>
+            <a:off x="6126480" y="1920240"/>
+            <a:ext cx="5486400" cy="512064"/>
+          </a:xfrm>
+          <a:prstGeom prst="rect">
+            <a:avLst/>
+          </a:prstGeom>
+          <a:solidFill>
+            <a:srgbClr val="FFFFFF"/>
+          </a:solidFill>
+          <a:ln>
+            <a:noFill/>
+          </a:ln>
+          <a:effectLst/>
+        </p:spPr>
+        <p:style>
+          <a:lnRef idx="1">
+            <a:schemeClr val="accent1"/>
+          </a:lnRef>
+          <a:fillRef idx="3">
+            <a:schemeClr val="accent1"/>
+          </a:fillRef>
+          <a:effectRef idx="2">
+            <a:schemeClr val="accent1"/>
+          </a:effectRef>
+          <a:fontRef idx="minor">
+            <a:schemeClr val="lt1"/>
+          </a:fontRef>
+        </p:style>
+        <p:txBody>
+          <a:bodyPr rtlCol="0" anchor="ctr"/>
+          <a:lstStyle/>
+          <a:p>
+            <a:pPr algn="ctr"/>
+          </a:p>
+        </p:txBody>
+      </p:sp>
+      <p:sp>
+        <p:nvSpPr>
+          <p:cNvPr id="12" name="TextBox 11"/>
+          <p:cNvSpPr txBox="1"/>
+          <p:nvPr/>
+        </p:nvSpPr>
+        <p:spPr>
+          <a:xfrm>
+            <a:off x="731520" y="1920240"/>
+            <a:ext cx="5212080" cy="512064"/>
+          </a:xfrm>
+          <a:prstGeom prst="rect">
+            <a:avLst/>
+          </a:prstGeom>
+          <a:noFill/>
+        </p:spPr>
+        <p:txBody>
+          <a:bodyPr wrap="square" anchor="ctr">
+            <a:spAutoFit/>
+          </a:bodyPr>
+          <a:lstStyle/>
+          <a:p>
+            <a:pPr algn="l">
+              <a:spcBef>
+                <a:spcPts val="0"/>
+              </a:spcBef>
+              <a:spcAft>
+                <a:spcPts val="0"/>
+              </a:spcAft>
+            </a:pPr>
+            <a:r>
+              <a:rPr sz="1200" b="0">
+                <a:solidFill>
+                  <a:srgbClr val="5B626D"/>
+                </a:solidFill>
+                <a:latin typeface="Calibri"/>
+              </a:rPr>
+              <a:t>248 GB of bloat, 91% duplicate images</a:t>
+            </a:r>
+          </a:p>
+        </p:txBody>
+      </p:sp>
+      <p:sp>
+        <p:nvSpPr>
+          <p:cNvPr id="13" name="TextBox 12"/>
+          <p:cNvSpPr txBox="1"/>
+          <p:nvPr/>
+        </p:nvSpPr>
+        <p:spPr>
+          <a:xfrm>
+            <a:off x="6309360" y="1920240"/>
+            <a:ext cx="5212080" cy="512064"/>
+          </a:xfrm>
+          <a:prstGeom prst="rect">
+            <a:avLst/>
+          </a:prstGeom>
+          <a:noFill/>
+        </p:spPr>
+        <p:txBody>
+          <a:bodyPr wrap="square" anchor="ctr">
+            <a:spAutoFit/>
+          </a:bodyPr>
+          <a:lstStyle/>
+          <a:p>
+            <a:pPr algn="l">
+              <a:spcBef>
+                <a:spcPts val="0"/>
+              </a:spcBef>
+              <a:spcAft>
+                <a:spcPts val="0"/>
+              </a:spcAft>
+            </a:pPr>
+            <a:r>
+              <a:rPr sz="1200" b="1">
+                <a:solidFill>
+                  <a:srgbClr val="16335C"/>
+                </a:solidFill>
+                <a:latin typeface="Calibri"/>
+              </a:rPr>
+              <a:t>Cleaned up, lean media library</a:t>
+            </a:r>
+          </a:p>
+        </p:txBody>
+      </p:sp>
+      <p:sp>
+        <p:nvSpPr>
+          <p:cNvPr id="14" name="Rectangle 13"/>
+          <p:cNvSpPr/>
+          <p:nvPr/>
+        </p:nvSpPr>
+        <p:spPr>
+          <a:xfrm>
+            <a:off x="548640" y="2468880"/>
+            <a:ext cx="5486400" cy="512064"/>
+          </a:xfrm>
+          <a:prstGeom prst="rect">
+            <a:avLst/>
+          </a:prstGeom>
+          <a:solidFill>
+            <a:srgbClr val="F4F6F8"/>
+          </a:solidFill>
+          <a:ln>
+            <a:noFill/>
+          </a:ln>
+          <a:effectLst/>
+        </p:spPr>
+        <p:style>
+          <a:lnRef idx="1">
+            <a:schemeClr val="accent1"/>
+          </a:lnRef>
+          <a:fillRef idx="3">
+            <a:schemeClr val="accent1"/>
+          </a:fillRef>
+          <a:effectRef idx="2">
+            <a:schemeClr val="accent1"/>
+          </a:effectRef>
+          <a:fontRef idx="minor">
+            <a:schemeClr val="lt1"/>
+          </a:fontRef>
+        </p:style>
+        <p:txBody>
+          <a:bodyPr rtlCol="0" anchor="ctr"/>
+          <a:lstStyle/>
+          <a:p>
+            <a:pPr algn="ctr"/>
+          </a:p>
+        </p:txBody>
+      </p:sp>
+      <p:sp>
+        <p:nvSpPr>
+          <p:cNvPr id="15" name="Rectangle 14"/>
+          <p:cNvSpPr/>
+          <p:nvPr/>
+        </p:nvSpPr>
+        <p:spPr>
+          <a:xfrm>
+            <a:off x="6126480" y="2468880"/>
+            <a:ext cx="5486400" cy="512064"/>
+          </a:xfrm>
+          <a:prstGeom prst="rect">
+            <a:avLst/>
+          </a:prstGeom>
+          <a:solidFill>
+            <a:srgbClr val="F4F6F8"/>
+          </a:solidFill>
+          <a:ln>
+            <a:noFill/>
+          </a:ln>
+          <a:effectLst/>
+        </p:spPr>
+        <p:style>
+          <a:lnRef idx="1">
+            <a:schemeClr val="accent1"/>
+          </a:lnRef>
+          <a:fillRef idx="3">
+            <a:schemeClr val="accent1"/>
+          </a:fillRef>
+          <a:effectRef idx="2">
+            <a:schemeClr val="accent1"/>
+          </a:effectRef>
+          <a:fontRef idx="minor">
+            <a:schemeClr val="lt1"/>
+          </a:fontRef>
+        </p:style>
+        <p:txBody>
+          <a:bodyPr rtlCol="0" anchor="ctr"/>
+          <a:lstStyle/>
+          <a:p>
+            <a:pPr algn="ctr"/>
+          </a:p>
+        </p:txBody>
+      </p:sp>
+      <p:sp>
+        <p:nvSpPr>
+          <p:cNvPr id="16" name="TextBox 15"/>
+          <p:cNvSpPr txBox="1"/>
+          <p:nvPr/>
+        </p:nvSpPr>
+        <p:spPr>
+          <a:xfrm>
+            <a:off x="731520" y="2468880"/>
+            <a:ext cx="5212080" cy="512064"/>
+          </a:xfrm>
+          <a:prstGeom prst="rect">
+            <a:avLst/>
+          </a:prstGeom>
+          <a:noFill/>
+        </p:spPr>
+        <p:txBody>
+          <a:bodyPr wrap="square" anchor="ctr">
+            <a:spAutoFit/>
+          </a:bodyPr>
+          <a:lstStyle/>
+          <a:p>
+            <a:pPr algn="l">
+              <a:spcBef>
+                <a:spcPts val="0"/>
+              </a:spcBef>
+              <a:spcAft>
+                <a:spcPts val="0"/>
+              </a:spcAft>
+            </a:pPr>
+            <a:r>
+              <a:rPr sz="1200" b="0">
+                <a:solidFill>
+                  <a:srgbClr val="5B626D"/>
+                </a:solidFill>
+                <a:latin typeface="Calibri"/>
+              </a:rPr>
+              <a:t>Backups failing since ~Oct 2025</a:t>
+            </a:r>
+          </a:p>
+        </p:txBody>
+      </p:sp>
+      <p:sp>
+        <p:nvSpPr>
+          <p:cNvPr id="17" name="TextBox 16"/>
+          <p:cNvSpPr txBox="1"/>
+          <p:nvPr/>
+        </p:nvSpPr>
+        <p:spPr>
+          <a:xfrm>
+            <a:off x="6309360" y="2468880"/>
+            <a:ext cx="5212080" cy="512064"/>
+          </a:xfrm>
+          <a:prstGeom prst="rect">
+            <a:avLst/>
+          </a:prstGeom>
+          <a:noFill/>
+        </p:spPr>
+        <p:txBody>
+          <a:bodyPr wrap="square" anchor="ctr">
+            <a:spAutoFit/>
+          </a:bodyPr>
+          <a:lstStyle/>
+          <a:p>
+            <a:pPr algn="l">
+              <a:spcBef>
+                <a:spcPts val="0"/>
+              </a:spcBef>
+              <a:spcAft>
+                <a:spcPts val="0"/>
+              </a:spcAft>
+            </a:pPr>
+            <a:r>
+              <a:rPr sz="1200" b="1">
+                <a:solidFill>
+                  <a:srgbClr val="16335C"/>
+                </a:solidFill>
+                <a:latin typeface="Calibri"/>
+              </a:rPr>
+              <a:t>Reliable, fast backups</a:t>
+            </a:r>
+          </a:p>
+        </p:txBody>
+      </p:sp>
+      <p:sp>
+        <p:nvSpPr>
+          <p:cNvPr id="18" name="Rectangle 17"/>
+          <p:cNvSpPr/>
+          <p:nvPr/>
+        </p:nvSpPr>
+        <p:spPr>
+          <a:xfrm>
+            <a:off x="548640" y="3017520"/>
+            <a:ext cx="5486400" cy="512064"/>
+          </a:xfrm>
+          <a:prstGeom prst="rect">
+            <a:avLst/>
+          </a:prstGeom>
+          <a:solidFill>
+            <a:srgbClr val="FFFFFF"/>
+          </a:solidFill>
+          <a:ln>
+            <a:noFill/>
+          </a:ln>
+          <a:effectLst/>
+        </p:spPr>
+        <p:style>
+          <a:lnRef idx="1">
+            <a:schemeClr val="accent1"/>
+          </a:lnRef>
+          <a:fillRef idx="3">
+            <a:schemeClr val="accent1"/>
+          </a:fillRef>
+          <a:effectRef idx="2">
+            <a:schemeClr val="accent1"/>
+          </a:effectRef>
+          <a:fontRef idx="minor">
+            <a:schemeClr val="lt1"/>
+          </a:fontRef>
+        </p:style>
+        <p:txBody>
+          <a:bodyPr rtlCol="0" anchor="ctr"/>
+          <a:lstStyle/>
+          <a:p>
+            <a:pPr algn="ctr"/>
+          </a:p>
+        </p:txBody>
+      </p:sp>
+      <p:sp>
+        <p:nvSpPr>
+          <p:cNvPr id="19" name="Rectangle 18"/>
+          <p:cNvSpPr/>
+          <p:nvPr/>
+        </p:nvSpPr>
+        <p:spPr>
+          <a:xfrm>
+            <a:off x="6126480" y="3017520"/>
+            <a:ext cx="5486400" cy="512064"/>
+          </a:xfrm>
+          <a:prstGeom prst="rect">
+            <a:avLst/>
+          </a:prstGeom>
+          <a:solidFill>
+            <a:srgbClr val="FFFFFF"/>
+          </a:solidFill>
+          <a:ln>
+            <a:noFill/>
+          </a:ln>
+          <a:effectLst/>
+        </p:spPr>
+        <p:style>
+          <a:lnRef idx="1">
+            <a:schemeClr val="accent1"/>
+          </a:lnRef>
+          <a:fillRef idx="3">
+            <a:schemeClr val="accent1"/>
+          </a:fillRef>
+          <a:effectRef idx="2">
+            <a:schemeClr val="accent1"/>
+          </a:effectRef>
+          <a:fontRef idx="minor">
+            <a:schemeClr val="lt1"/>
+          </a:fontRef>
+        </p:style>
+        <p:txBody>
+          <a:bodyPr rtlCol="0" anchor="ctr"/>
+          <a:lstStyle/>
+          <a:p>
+            <a:pPr algn="ctr"/>
+          </a:p>
+        </p:txBody>
+      </p:sp>
+      <p:sp>
+        <p:nvSpPr>
+          <p:cNvPr id="20" name="TextBox 19"/>
+          <p:cNvSpPr txBox="1"/>
+          <p:nvPr/>
+        </p:nvSpPr>
+        <p:spPr>
+          <a:xfrm>
+            <a:off x="731520" y="3017520"/>
+            <a:ext cx="5212080" cy="512064"/>
+          </a:xfrm>
+          <a:prstGeom prst="rect">
+            <a:avLst/>
+          </a:prstGeom>
+          <a:noFill/>
+        </p:spPr>
+        <p:txBody>
+          <a:bodyPr wrap="square" anchor="ctr">
+            <a:spAutoFit/>
+          </a:bodyPr>
+          <a:lstStyle/>
+          <a:p>
+            <a:pPr algn="l">
+              <a:spcBef>
+                <a:spcPts val="0"/>
+              </a:spcBef>
+              <a:spcAft>
+                <a:spcPts val="0"/>
+              </a:spcAft>
+            </a:pPr>
+            <a:r>
+              <a:rPr sz="1200" b="0">
+                <a:solidFill>
+                  <a:srgbClr val="5B626D"/>
+                </a:solidFill>
+                <a:latin typeface="Calibri"/>
+              </a:rPr>
+              <a:t>Higher, growing hosting cost</a:t>
+            </a:r>
+          </a:p>
+        </p:txBody>
+      </p:sp>
+      <p:sp>
+        <p:nvSpPr>
+          <p:cNvPr id="21" name="TextBox 20"/>
+          <p:cNvSpPr txBox="1"/>
+          <p:nvPr/>
+        </p:nvSpPr>
+        <p:spPr>
+          <a:xfrm>
+            <a:off x="6309360" y="3017520"/>
+            <a:ext cx="5212080" cy="512064"/>
+          </a:xfrm>
+          <a:prstGeom prst="rect">
+            <a:avLst/>
+          </a:prstGeom>
+          <a:noFill/>
+        </p:spPr>
+        <p:txBody>
+          <a:bodyPr wrap="square" anchor="ctr">
+            <a:spAutoFit/>
+          </a:bodyPr>
+          <a:lstStyle/>
+          <a:p>
+            <a:pPr algn="l">
+              <a:spcBef>
+                <a:spcPts val="0"/>
+              </a:spcBef>
+              <a:spcAft>
+                <a:spcPts val="0"/>
+              </a:spcAft>
+            </a:pPr>
+            <a:r>
+              <a:rPr sz="1200" b="1">
+                <a:solidFill>
+                  <a:srgbClr val="16335C"/>
+                </a:solidFill>
+                <a:latin typeface="Calibri"/>
+              </a:rPr>
+              <a:t>Lower, predictable hosting cost</a:t>
+            </a:r>
+          </a:p>
+        </p:txBody>
+      </p:sp>
+      <p:sp>
+        <p:nvSpPr>
+          <p:cNvPr id="22" name="Rectangle 21"/>
+          <p:cNvSpPr/>
+          <p:nvPr/>
+        </p:nvSpPr>
+        <p:spPr>
+          <a:xfrm>
+            <a:off x="548640" y="3566160"/>
+            <a:ext cx="5486400" cy="512064"/>
+          </a:xfrm>
+          <a:prstGeom prst="rect">
+            <a:avLst/>
+          </a:prstGeom>
+          <a:solidFill>
+            <a:srgbClr val="F4F6F8"/>
+          </a:solidFill>
+          <a:ln>
+            <a:noFill/>
+          </a:ln>
+          <a:effectLst/>
+        </p:spPr>
+        <p:style>
+          <a:lnRef idx="1">
+            <a:schemeClr val="accent1"/>
+          </a:lnRef>
+          <a:fillRef idx="3">
+            <a:schemeClr val="accent1"/>
+          </a:fillRef>
+          <a:effectRef idx="2">
+            <a:schemeClr val="accent1"/>
+          </a:effectRef>
+          <a:fontRef idx="minor">
+            <a:schemeClr val="lt1"/>
+          </a:fontRef>
+        </p:style>
+        <p:txBody>
+          <a:bodyPr rtlCol="0" anchor="ctr"/>
+          <a:lstStyle/>
+          <a:p>
+            <a:pPr algn="ctr"/>
+          </a:p>
+        </p:txBody>
+      </p:sp>
+      <p:sp>
+        <p:nvSpPr>
+          <p:cNvPr id="23" name="Rectangle 22"/>
+          <p:cNvSpPr/>
+          <p:nvPr/>
+        </p:nvSpPr>
+        <p:spPr>
+          <a:xfrm>
+            <a:off x="6126480" y="3566160"/>
+            <a:ext cx="5486400" cy="512064"/>
+          </a:xfrm>
+          <a:prstGeom prst="rect">
+            <a:avLst/>
+          </a:prstGeom>
+          <a:solidFill>
+            <a:srgbClr val="F4F6F8"/>
+          </a:solidFill>
+          <a:ln>
+            <a:noFill/>
+          </a:ln>
+          <a:effectLst/>
+        </p:spPr>
+        <p:style>
+          <a:lnRef idx="1">
+            <a:schemeClr val="accent1"/>
+          </a:lnRef>
+          <a:fillRef idx="3">
+            <a:schemeClr val="accent1"/>
+          </a:fillRef>
+          <a:effectRef idx="2">
+            <a:schemeClr val="accent1"/>
+          </a:effectRef>
+          <a:fontRef idx="minor">
+            <a:schemeClr val="lt1"/>
+          </a:fontRef>
+        </p:style>
+        <p:txBody>
+          <a:bodyPr rtlCol="0" anchor="ctr"/>
+          <a:lstStyle/>
+          <a:p>
+            <a:pPr algn="ctr"/>
+          </a:p>
+        </p:txBody>
+      </p:sp>
+      <p:sp>
+        <p:nvSpPr>
+          <p:cNvPr id="24" name="TextBox 23"/>
+          <p:cNvSpPr txBox="1"/>
+          <p:nvPr/>
+        </p:nvSpPr>
+        <p:spPr>
+          <a:xfrm>
+            <a:off x="731520" y="3566160"/>
+            <a:ext cx="5212080" cy="512064"/>
+          </a:xfrm>
+          <a:prstGeom prst="rect">
+            <a:avLst/>
+          </a:prstGeom>
+          <a:noFill/>
+        </p:spPr>
+        <p:txBody>
+          <a:bodyPr wrap="square" anchor="ctr">
+            <a:spAutoFit/>
+          </a:bodyPr>
+          <a:lstStyle/>
+          <a:p>
+            <a:pPr algn="l">
+              <a:spcBef>
+                <a:spcPts val="0"/>
+              </a:spcBef>
+              <a:spcAft>
+                <a:spcPts val="0"/>
+              </a:spcAft>
+            </a:pPr>
+            <a:r>
+              <a:rPr sz="1200" b="0">
+                <a:solidFill>
+                  <a:srgbClr val="5B626D"/>
+                </a:solidFill>
+                <a:latin typeface="Calibri"/>
+              </a:rPr>
+              <a:t>Changes needed a developer</a:t>
+            </a:r>
+          </a:p>
+        </p:txBody>
+      </p:sp>
+      <p:sp>
+        <p:nvSpPr>
+          <p:cNvPr id="25" name="TextBox 24"/>
+          <p:cNvSpPr txBox="1"/>
+          <p:nvPr/>
+        </p:nvSpPr>
+        <p:spPr>
+          <a:xfrm>
+            <a:off x="6309360" y="3566160"/>
+            <a:ext cx="5212080" cy="512064"/>
+          </a:xfrm>
+          <a:prstGeom prst="rect">
+            <a:avLst/>
+          </a:prstGeom>
+          <a:noFill/>
+        </p:spPr>
+        <p:txBody>
+          <a:bodyPr wrap="square" anchor="ctr">
+            <a:spAutoFit/>
+          </a:bodyPr>
+          <a:lstStyle/>
+          <a:p>
+            <a:pPr algn="l">
+              <a:spcBef>
+                <a:spcPts val="0"/>
+              </a:spcBef>
+              <a:spcAft>
+                <a:spcPts val="0"/>
+              </a:spcAft>
+            </a:pPr>
+            <a:r>
+              <a:rPr sz="1200" b="1">
+                <a:solidFill>
+                  <a:srgbClr val="16335C"/>
+                </a:solidFill>
+                <a:latin typeface="Calibri"/>
+              </a:rPr>
+              <a:t>Team edits products &amp; pages themselves</a:t>
+            </a:r>
+          </a:p>
+        </p:txBody>
+      </p:sp>
+      <p:sp>
+        <p:nvSpPr>
+          <p:cNvPr id="26" name="Rectangle 25"/>
+          <p:cNvSpPr/>
+          <p:nvPr/>
+        </p:nvSpPr>
+        <p:spPr>
+          <a:xfrm>
+            <a:off x="548640" y="4114800"/>
+            <a:ext cx="5486400" cy="512064"/>
+          </a:xfrm>
+          <a:prstGeom prst="rect">
+            <a:avLst/>
+          </a:prstGeom>
+          <a:solidFill>
+            <a:srgbClr val="FFFFFF"/>
+          </a:solidFill>
+          <a:ln>
+            <a:noFill/>
+          </a:ln>
+          <a:effectLst/>
+        </p:spPr>
+        <p:style>
+          <a:lnRef idx="1">
+            <a:schemeClr val="accent1"/>
+          </a:lnRef>
+          <a:fillRef idx="3">
+            <a:schemeClr val="accent1"/>
+          </a:fillRef>
+          <a:effectRef idx="2">
+            <a:schemeClr val="accent1"/>
+          </a:effectRef>
+          <a:fontRef idx="minor">
+            <a:schemeClr val="lt1"/>
+          </a:fontRef>
+        </p:style>
+        <p:txBody>
+          <a:bodyPr rtlCol="0" anchor="ctr"/>
+          <a:lstStyle/>
+          <a:p>
+            <a:pPr algn="ctr"/>
+          </a:p>
+        </p:txBody>
+      </p:sp>
+      <p:sp>
+        <p:nvSpPr>
+          <p:cNvPr id="27" name="Rectangle 26"/>
+          <p:cNvSpPr/>
+          <p:nvPr/>
+        </p:nvSpPr>
+        <p:spPr>
+          <a:xfrm>
+            <a:off x="6126480" y="4114800"/>
+            <a:ext cx="5486400" cy="512064"/>
+          </a:xfrm>
+          <a:prstGeom prst="rect">
+            <a:avLst/>
+          </a:prstGeom>
+          <a:solidFill>
+            <a:srgbClr val="FFFFFF"/>
+          </a:solidFill>
+          <a:ln>
+            <a:noFill/>
+          </a:ln>
+          <a:effectLst/>
+        </p:spPr>
+        <p:style>
+          <a:lnRef idx="1">
+            <a:schemeClr val="accent1"/>
+          </a:lnRef>
+          <a:fillRef idx="3">
+            <a:schemeClr val="accent1"/>
+          </a:fillRef>
+          <a:effectRef idx="2">
+            <a:schemeClr val="accent1"/>
+          </a:effectRef>
+          <a:fontRef idx="minor">
+            <a:schemeClr val="lt1"/>
+          </a:fontRef>
+        </p:style>
+        <p:txBody>
+          <a:bodyPr rtlCol="0" anchor="ctr"/>
+          <a:lstStyle/>
+          <a:p>
+            <a:pPr algn="ctr"/>
+          </a:p>
+        </p:txBody>
+      </p:sp>
+      <p:sp>
+        <p:nvSpPr>
+          <p:cNvPr id="28" name="TextBox 27"/>
+          <p:cNvSpPr txBox="1"/>
+          <p:nvPr/>
+        </p:nvSpPr>
+        <p:spPr>
+          <a:xfrm>
+            <a:off x="731520" y="4114800"/>
+            <a:ext cx="5212080" cy="512064"/>
+          </a:xfrm>
+          <a:prstGeom prst="rect">
+            <a:avLst/>
+          </a:prstGeom>
+          <a:noFill/>
+        </p:spPr>
+        <p:txBody>
+          <a:bodyPr wrap="square" anchor="ctr">
+            <a:spAutoFit/>
+          </a:bodyPr>
+          <a:lstStyle/>
+          <a:p>
+            <a:pPr algn="l">
+              <a:spcBef>
+                <a:spcPts val="0"/>
+              </a:spcBef>
+              <a:spcAft>
+                <a:spcPts val="0"/>
+              </a:spcAft>
+            </a:pPr>
+            <a:r>
+              <a:rPr sz="1200" b="0">
+                <a:solidFill>
+                  <a:srgbClr val="5B626D"/>
+                </a:solidFill>
+                <a:latin typeface="Calibri"/>
+              </a:rPr>
+              <a:t>A brochure</a:t>
+            </a:r>
+          </a:p>
+        </p:txBody>
+      </p:sp>
+      <p:sp>
+        <p:nvSpPr>
+          <p:cNvPr id="29" name="TextBox 28"/>
+          <p:cNvSpPr txBox="1"/>
+          <p:nvPr/>
+        </p:nvSpPr>
+        <p:spPr>
+          <a:xfrm>
+            <a:off x="6309360" y="4114800"/>
+            <a:ext cx="5212080" cy="512064"/>
+          </a:xfrm>
+          <a:prstGeom prst="rect">
+            <a:avLst/>
+          </a:prstGeom>
+          <a:noFill/>
+        </p:spPr>
+        <p:txBody>
+          <a:bodyPr wrap="square" anchor="ctr">
+            <a:spAutoFit/>
+          </a:bodyPr>
+          <a:lstStyle/>
+          <a:p>
+            <a:pPr algn="l">
+              <a:spcBef>
+                <a:spcPts val="0"/>
+              </a:spcBef>
+              <a:spcAft>
+                <a:spcPts val="0"/>
+              </a:spcAft>
+            </a:pPr>
+            <a:r>
+              <a:rPr sz="1200" b="1">
+                <a:solidFill>
+                  <a:srgbClr val="16335C"/>
+                </a:solidFill>
+                <a:latin typeface="Calibri"/>
+              </a:rPr>
+              <a:t>Captures leads + builds its own SEO</a:t>
+            </a:r>
+          </a:p>
+        </p:txBody>
+      </p:sp>
+      <p:sp>
+        <p:nvSpPr>
+          <p:cNvPr id="30" name="Rectangle 29"/>
+          <p:cNvSpPr/>
+          <p:nvPr/>
+        </p:nvSpPr>
+        <p:spPr>
+          <a:xfrm>
+            <a:off x="548640" y="4663440"/>
+            <a:ext cx="5486400" cy="512064"/>
+          </a:xfrm>
+          <a:prstGeom prst="rect">
+            <a:avLst/>
+          </a:prstGeom>
+          <a:solidFill>
+            <a:srgbClr val="F4F6F8"/>
+          </a:solidFill>
+          <a:ln>
+            <a:noFill/>
+          </a:ln>
+          <a:effectLst/>
+        </p:spPr>
+        <p:style>
+          <a:lnRef idx="1">
+            <a:schemeClr val="accent1"/>
+          </a:lnRef>
+          <a:fillRef idx="3">
+            <a:schemeClr val="accent1"/>
+          </a:fillRef>
+          <a:effectRef idx="2">
+            <a:schemeClr val="accent1"/>
+          </a:effectRef>
+          <a:fontRef idx="minor">
+            <a:schemeClr val="lt1"/>
+          </a:fontRef>
+        </p:style>
+        <p:txBody>
+          <a:bodyPr rtlCol="0" anchor="ctr"/>
+          <a:lstStyle/>
+          <a:p>
+            <a:pPr algn="ctr"/>
+          </a:p>
+        </p:txBody>
+      </p:sp>
+      <p:sp>
+        <p:nvSpPr>
+          <p:cNvPr id="31" name="Rectangle 30"/>
+          <p:cNvSpPr/>
+          <p:nvPr/>
+        </p:nvSpPr>
+        <p:spPr>
+          <a:xfrm>
+            <a:off x="6126480" y="4663440"/>
+            <a:ext cx="5486400" cy="512064"/>
+          </a:xfrm>
+          <a:prstGeom prst="rect">
+            <a:avLst/>
+          </a:prstGeom>
+          <a:solidFill>
+            <a:srgbClr val="F4F6F8"/>
+          </a:solidFill>
+          <a:ln>
+            <a:noFill/>
+          </a:ln>
+          <a:effectLst/>
+        </p:spPr>
+        <p:style>
+          <a:lnRef idx="1">
+            <a:schemeClr val="accent1"/>
+          </a:lnRef>
+          <a:fillRef idx="3">
+            <a:schemeClr val="accent1"/>
+          </a:fillRef>
+          <a:effectRef idx="2">
+            <a:schemeClr val="accent1"/>
+          </a:effectRef>
+          <a:fontRef idx="minor">
+            <a:schemeClr val="lt1"/>
+          </a:fontRef>
+        </p:style>
+        <p:txBody>
+          <a:bodyPr rtlCol="0" anchor="ctr"/>
+          <a:lstStyle/>
+          <a:p>
+            <a:pPr algn="ctr"/>
+          </a:p>
+        </p:txBody>
+      </p:sp>
+      <p:sp>
+        <p:nvSpPr>
+          <p:cNvPr id="32" name="TextBox 31"/>
+          <p:cNvSpPr txBox="1"/>
+          <p:nvPr/>
+        </p:nvSpPr>
+        <p:spPr>
+          <a:xfrm>
+            <a:off x="731520" y="4663440"/>
+            <a:ext cx="5212080" cy="512064"/>
+          </a:xfrm>
+          <a:prstGeom prst="rect">
+            <a:avLst/>
+          </a:prstGeom>
+          <a:noFill/>
+        </p:spPr>
+        <p:txBody>
+          <a:bodyPr wrap="square" anchor="ctr">
+            <a:spAutoFit/>
+          </a:bodyPr>
+          <a:lstStyle/>
+          <a:p>
+            <a:pPr algn="l">
+              <a:spcBef>
+                <a:spcPts val="0"/>
+              </a:spcBef>
+              <a:spcAft>
+                <a:spcPts val="0"/>
+              </a:spcAft>
+            </a:pPr>
+            <a:r>
+              <a:rPr sz="1200" b="0">
+                <a:solidFill>
+                  <a:srgbClr val="5B626D"/>
+                </a:solidFill>
+                <a:latin typeface="Calibri"/>
+              </a:rPr>
+              <a:t>No BIM / specifier capture</a:t>
+            </a:r>
+          </a:p>
+        </p:txBody>
+      </p:sp>
+      <p:sp>
+        <p:nvSpPr>
+          <p:cNvPr id="33" name="TextBox 32"/>
+          <p:cNvSpPr txBox="1"/>
+          <p:nvPr/>
+        </p:nvSpPr>
+        <p:spPr>
+          <a:xfrm>
+            <a:off x="6309360" y="4663440"/>
+            <a:ext cx="5212080" cy="512064"/>
+          </a:xfrm>
+          <a:prstGeom prst="rect">
+            <a:avLst/>
+          </a:prstGeom>
+          <a:noFill/>
+        </p:spPr>
+        <p:txBody>
+          <a:bodyPr wrap="square" anchor="ctr">
+            <a:spAutoFit/>
+          </a:bodyPr>
+          <a:lstStyle/>
+          <a:p>
+            <a:pPr algn="l">
+              <a:spcBef>
+                <a:spcPts val="0"/>
+              </a:spcBef>
+              <a:spcAft>
+                <a:spcPts val="0"/>
+              </a:spcAft>
+            </a:pPr>
+            <a:r>
+              <a:rPr sz="1200" b="1">
+                <a:solidFill>
+                  <a:srgbClr val="16335C"/>
+                </a:solidFill>
+                <a:latin typeface="Calibri"/>
+              </a:rPr>
+              <a:t>"Download BIM file" sends marketing a warm lead</a:t>
+            </a:r>
+          </a:p>
+        </p:txBody>
+      </p:sp>
+      <p:sp>
+        <p:nvSpPr>
+          <p:cNvPr id="34" name="Rectangle 33"/>
+          <p:cNvSpPr/>
+          <p:nvPr/>
+        </p:nvSpPr>
+        <p:spPr>
+          <a:xfrm>
+            <a:off x="548640" y="5212080"/>
+            <a:ext cx="5486400" cy="512064"/>
+          </a:xfrm>
+          <a:prstGeom prst="rect">
+            <a:avLst/>
+          </a:prstGeom>
+          <a:solidFill>
+            <a:srgbClr val="FFFFFF"/>
+          </a:solidFill>
+          <a:ln>
+            <a:noFill/>
+          </a:ln>
+          <a:effectLst/>
+        </p:spPr>
+        <p:style>
+          <a:lnRef idx="1">
+            <a:schemeClr val="accent1"/>
+          </a:lnRef>
+          <a:fillRef idx="3">
+            <a:schemeClr val="accent1"/>
+          </a:fillRef>
+          <a:effectRef idx="2">
+            <a:schemeClr val="accent1"/>
+          </a:effectRef>
+          <a:fontRef idx="minor">
+            <a:schemeClr val="lt1"/>
+          </a:fontRef>
+        </p:style>
+        <p:txBody>
+          <a:bodyPr rtlCol="0" anchor="ctr"/>
+          <a:lstStyle/>
+          <a:p>
+            <a:pPr algn="ctr"/>
+          </a:p>
+        </p:txBody>
+      </p:sp>
+      <p:sp>
+        <p:nvSpPr>
+          <p:cNvPr id="35" name="Rectangle 34"/>
+          <p:cNvSpPr/>
+          <p:nvPr/>
+        </p:nvSpPr>
+        <p:spPr>
+          <a:xfrm>
+            <a:off x="6126480" y="5212080"/>
+            <a:ext cx="5486400" cy="512064"/>
+          </a:xfrm>
+          <a:prstGeom prst="rect">
+            <a:avLst/>
+          </a:prstGeom>
+          <a:solidFill>
+            <a:srgbClr val="FFFFFF"/>
+          </a:solidFill>
+          <a:ln>
+            <a:noFill/>
+          </a:ln>
+          <a:effectLst/>
+        </p:spPr>
+        <p:style>
+          <a:lnRef idx="1">
+            <a:schemeClr val="accent1"/>
+          </a:lnRef>
+          <a:fillRef idx="3">
+            <a:schemeClr val="accent1"/>
+          </a:fillRef>
+          <a:effectRef idx="2">
+            <a:schemeClr val="accent1"/>
+          </a:effectRef>
+          <a:fontRef idx="minor">
+            <a:schemeClr val="lt1"/>
+          </a:fontRef>
+        </p:style>
+        <p:txBody>
+          <a:bodyPr rtlCol="0" anchor="ctr"/>
+          <a:lstStyle/>
+          <a:p>
+            <a:pPr algn="ctr"/>
+          </a:p>
+        </p:txBody>
+      </p:sp>
+      <p:sp>
+        <p:nvSpPr>
+          <p:cNvPr id="36" name="TextBox 35"/>
+          <p:cNvSpPr txBox="1"/>
+          <p:nvPr/>
+        </p:nvSpPr>
+        <p:spPr>
+          <a:xfrm>
+            <a:off x="731520" y="5212080"/>
+            <a:ext cx="5212080" cy="512064"/>
+          </a:xfrm>
+          <a:prstGeom prst="rect">
+            <a:avLst/>
+          </a:prstGeom>
+          <a:noFill/>
+        </p:spPr>
+        <p:txBody>
+          <a:bodyPr wrap="square" anchor="ctr">
+            <a:spAutoFit/>
+          </a:bodyPr>
+          <a:lstStyle/>
+          <a:p>
+            <a:pPr algn="l">
+              <a:spcBef>
+                <a:spcPts val="0"/>
+              </a:spcBef>
+              <a:spcAft>
+                <a:spcPts val="0"/>
+              </a:spcAft>
+            </a:pPr>
+            <a:r>
+              <a:rPr sz="1200" b="0">
+                <a:solidFill>
+                  <a:srgbClr val="5B626D"/>
+                </a:solidFill>
+                <a:latin typeface="Calibri"/>
+              </a:rPr>
+              <a:t>Bespoke quotes = lots of back-and-forth</a:t>
+            </a:r>
+          </a:p>
+        </p:txBody>
+      </p:sp>
+      <p:sp>
+        <p:nvSpPr>
+          <p:cNvPr id="37" name="TextBox 36"/>
+          <p:cNvSpPr txBox="1"/>
+          <p:nvPr/>
+        </p:nvSpPr>
+        <p:spPr>
+          <a:xfrm>
+            <a:off x="6309360" y="5212080"/>
+            <a:ext cx="5212080" cy="512064"/>
+          </a:xfrm>
+          <a:prstGeom prst="rect">
+            <a:avLst/>
+          </a:prstGeom>
+          <a:noFill/>
+        </p:spPr>
+        <p:txBody>
+          <a:bodyPr wrap="square" anchor="ctr">
+            <a:spAutoFit/>
+          </a:bodyPr>
+          <a:lstStyle/>
+          <a:p>
+            <a:pPr algn="l">
+              <a:spcBef>
+                <a:spcPts val="0"/>
+              </a:spcBef>
+              <a:spcAft>
+                <a:spcPts val="0"/>
+              </a:spcAft>
+            </a:pPr>
+            <a:r>
+              <a:rPr sz="1200" b="1">
+                <a:solidFill>
+                  <a:srgbClr val="16335C"/>
+                </a:solidFill>
+                <a:latin typeface="Calibri"/>
+              </a:rPr>
+              <a:t>Flow+ Designer = ready-to-quote scheme</a:t>
+            </a:r>
+          </a:p>
+        </p:txBody>
+      </p:sp>
+      <p:sp>
+        <p:nvSpPr>
+          <p:cNvPr id="38" name="Rectangle 37"/>
+          <p:cNvSpPr/>
+          <p:nvPr/>
+        </p:nvSpPr>
+        <p:spPr>
+          <a:xfrm>
+            <a:off x="548640" y="5760720"/>
+            <a:ext cx="5486400" cy="512064"/>
+          </a:xfrm>
+          <a:prstGeom prst="rect">
+            <a:avLst/>
+          </a:prstGeom>
+          <a:solidFill>
+            <a:srgbClr val="F4F6F8"/>
+          </a:solidFill>
+          <a:ln>
+            <a:noFill/>
+          </a:ln>
+          <a:effectLst/>
+        </p:spPr>
+        <p:style>
+          <a:lnRef idx="1">
+            <a:schemeClr val="accent1"/>
+          </a:lnRef>
+          <a:fillRef idx="3">
+            <a:schemeClr val="accent1"/>
+          </a:fillRef>
+          <a:effectRef idx="2">
+            <a:schemeClr val="accent1"/>
+          </a:effectRef>
+          <a:fontRef idx="minor">
+            <a:schemeClr val="lt1"/>
+          </a:fontRef>
+        </p:style>
+        <p:txBody>
+          <a:bodyPr rtlCol="0" anchor="ctr"/>
+          <a:lstStyle/>
+          <a:p>
+            <a:pPr algn="ctr"/>
+          </a:p>
+        </p:txBody>
+      </p:sp>
+      <p:sp>
+        <p:nvSpPr>
+          <p:cNvPr id="39" name="Rectangle 38"/>
+          <p:cNvSpPr/>
+          <p:nvPr/>
+        </p:nvSpPr>
+        <p:spPr>
+          <a:xfrm>
+            <a:off x="6126480" y="5760720"/>
+            <a:ext cx="5486400" cy="512064"/>
+          </a:xfrm>
+          <a:prstGeom prst="rect">
+            <a:avLst/>
+          </a:prstGeom>
+          <a:solidFill>
+            <a:srgbClr val="F4F6F8"/>
+          </a:solidFill>
+          <a:ln>
+            <a:noFill/>
+          </a:ln>
+          <a:effectLst/>
+        </p:spPr>
+        <p:style>
+          <a:lnRef idx="1">
+            <a:schemeClr val="accent1"/>
+          </a:lnRef>
+          <a:fillRef idx="3">
+            <a:schemeClr val="accent1"/>
+          </a:fillRef>
+          <a:effectRef idx="2">
+            <a:schemeClr val="accent1"/>
+          </a:effectRef>
+          <a:fontRef idx="minor">
+            <a:schemeClr val="lt1"/>
+          </a:fontRef>
+        </p:style>
+        <p:txBody>
+          <a:bodyPr rtlCol="0" anchor="ctr"/>
+          <a:lstStyle/>
+          <a:p>
+            <a:pPr algn="ctr"/>
+          </a:p>
+        </p:txBody>
+      </p:sp>
+      <p:sp>
+        <p:nvSpPr>
+          <p:cNvPr id="40" name="TextBox 39"/>
+          <p:cNvSpPr txBox="1"/>
+          <p:nvPr/>
+        </p:nvSpPr>
+        <p:spPr>
+          <a:xfrm>
+            <a:off x="731520" y="5760720"/>
+            <a:ext cx="5212080" cy="512064"/>
+          </a:xfrm>
+          <a:prstGeom prst="rect">
+            <a:avLst/>
+          </a:prstGeom>
+          <a:noFill/>
+        </p:spPr>
+        <p:txBody>
+          <a:bodyPr wrap="square" anchor="ctr">
+            <a:spAutoFit/>
+          </a:bodyPr>
+          <a:lstStyle/>
+          <a:p>
+            <a:pPr algn="l">
+              <a:spcBef>
+                <a:spcPts val="0"/>
+              </a:spcBef>
+              <a:spcAft>
+                <a:spcPts val="0"/>
+              </a:spcAft>
+            </a:pPr>
+            <a:r>
+              <a:rPr sz="1200" b="0">
+                <a:solidFill>
+                  <a:srgbClr val="5B626D"/>
+                </a:solidFill>
+                <a:latin typeface="Calibri"/>
+              </a:rPr>
+              <a:t>Slower, page-builder overhead</a:t>
+            </a:r>
+          </a:p>
+        </p:txBody>
+      </p:sp>
+      <p:sp>
+        <p:nvSpPr>
+          <p:cNvPr id="41" name="TextBox 40"/>
+          <p:cNvSpPr txBox="1"/>
+          <p:nvPr/>
+        </p:nvSpPr>
+        <p:spPr>
+          <a:xfrm>
+            <a:off x="6309360" y="5760720"/>
+            <a:ext cx="5212080" cy="512064"/>
+          </a:xfrm>
+          <a:prstGeom prst="rect">
+            <a:avLst/>
+          </a:prstGeom>
+          <a:noFill/>
+        </p:spPr>
+        <p:txBody>
+          <a:bodyPr wrap="square" anchor="ctr">
+            <a:spAutoFit/>
+          </a:bodyPr>
+          <a:lstStyle/>
+          <a:p>
+            <a:pPr algn="l">
+              <a:spcBef>
+                <a:spcPts val="0"/>
+              </a:spcBef>
+              <a:spcAft>
+                <a:spcPts val="0"/>
+              </a:spcAft>
+            </a:pPr>
+            <a:r>
+              <a:rPr sz="1200" b="1">
+                <a:solidFill>
+                  <a:srgbClr val="16335C"/>
+                </a:solidFill>
+                <a:latin typeface="Calibri"/>
+              </a:rPr>
+              <a:t>Fast, modern, search-friendly</a:t>
+            </a:r>
+          </a:p>
+        </p:txBody>
+      </p:sp>
+      <p:sp>
+        <p:nvSpPr>
+          <p:cNvPr id="42" name="TextBox 41"/>
+          <p:cNvSpPr txBox="1"/>
+          <p:nvPr/>
+        </p:nvSpPr>
+        <p:spPr>
+          <a:xfrm>
+            <a:off x="548640" y="6400800"/>
+            <a:ext cx="7315200" cy="365760"/>
+          </a:xfrm>
+          <a:prstGeom prst="rect">
+            <a:avLst/>
+          </a:prstGeom>
+          <a:noFill/>
+        </p:spPr>
+        <p:txBody>
+          <a:bodyPr wrap="square" anchor="t">
+            <a:spAutoFit/>
+          </a:bodyPr>
+          <a:lstStyle/>
+          <a:p>
+            <a:pPr algn="l">
+              <a:spcBef>
+                <a:spcPts val="0"/>
+              </a:spcBef>
+              <a:spcAft>
+                <a:spcPts val="0"/>
+              </a:spcAft>
+            </a:pPr>
+            <a:r>
+              <a:rPr sz="1000" b="0">
+                <a:solidFill>
+                  <a:srgbClr val="5B626D"/>
+                </a:solidFill>
+                <a:latin typeface="Calibri"/>
+              </a:rPr>
+              <a:t>Ricoman — the new website</a:t>
+            </a:r>
+          </a:p>
+        </p:txBody>
+      </p:sp>
+      <p:sp>
+        <p:nvSpPr>
+          <p:cNvPr id="43" name="TextBox 42"/>
+          <p:cNvSpPr txBox="1"/>
+          <p:nvPr/>
+        </p:nvSpPr>
+        <p:spPr>
+          <a:xfrm>
+            <a:off x="10789920" y="6400800"/>
+            <a:ext cx="914400" cy="365760"/>
+          </a:xfrm>
+          <a:prstGeom prst="rect">
+            <a:avLst/>
+          </a:prstGeom>
+          <a:noFill/>
+        </p:spPr>
+        <p:txBody>
+          <a:bodyPr wrap="square" anchor="t">
+            <a:spAutoFit/>
+          </a:bodyPr>
+          <a:lstStyle/>
+          <a:p>
+            <a:pPr algn="r">
+              <a:spcBef>
+                <a:spcPts val="0"/>
+              </a:spcBef>
+              <a:spcAft>
+                <a:spcPts val="0"/>
+              </a:spcAft>
+            </a:pPr>
+            <a:r>
+              <a:rPr sz="1000" b="1">
+                <a:solidFill>
+                  <a:srgbClr val="5B626D"/>
+                </a:solidFill>
+                <a:latin typeface="Calibri"/>
+              </a:rPr>
+              <a:t>15</a:t>
+            </a:r>
+          </a:p>
+        </p:txBody>
+      </p:sp>
+    </p:spTree>
+  </p:cSld>
+  <p:clrMapOvr>
+    <a:masterClrMapping/>
+  </p:clrMapOvr>
+</p:sld>
+</file>
+
+<file path=ppt/slides/slide16.xml><?xml version="1.0" encoding="utf-8"?>
 <p:sld xmlns:a="http://schemas.openxmlformats.org/drawingml/2006/main" xmlns:p="http://schemas.openxmlformats.org/presentationml/2006/main" xmlns:r="http://schemas.openxmlformats.org/officeDocument/2006/relationships">
   <p:cSld>
     <p:spTree>
